--- a/static/ppts/G6_Sci_T1_Lab_Safety.pptx
+++ b/static/ppts/G6_Sci_T1_Lab_Safety.pptx
@@ -10,10 +10,9 @@
     <p:sldId id="258" r:id="rId4"/>
     <p:sldId id="259" r:id="rId5"/>
     <p:sldId id="260" r:id="rId6"/>
-    <p:sldId id="261" r:id="rId7"/>
   </p:sldIdLst>
   <p:notesMasterIdLst>
-    <p:notesMasterId r:id="rId8"/>
+    <p:notesMasterId r:id="rId7"/>
   </p:notesMasterIdLst>
   <p:sldSz cx="9144000" cy="5143500"/>
   <p:notesSz cx="5143500" cy="9144000"/>
@@ -901,94 +900,6 @@
 </p:notes>
 </file>
 
-<file path=ppt/notesSlides/notesSlide6.xml><?xml version="1.0" encoding="utf-8"?>
-<p:notes xmlns:a="http://schemas.openxmlformats.org/drawingml/2006/main" xmlns:r="http://schemas.openxmlformats.org/officeDocument/2006/relationships" xmlns:p="http://schemas.openxmlformats.org/presentationml/2006/main">
-  <p:cSld>
-    <p:spTree>
-      <p:nvGrpSpPr>
-        <p:cNvPr id="1" name=""/>
-        <p:cNvGrpSpPr/>
-        <p:nvPr/>
-      </p:nvGrpSpPr>
-      <p:grpSpPr>
-        <a:xfrm>
-          <a:off x="0" y="0"/>
-          <a:ext cx="0" cy="0"/>
-          <a:chOff x="0" y="0"/>
-          <a:chExt cx="0" cy="0"/>
-        </a:xfrm>
-      </p:grpSpPr>
-      <p:sp>
-        <p:nvSpPr>
-          <p:cNvPr id="2" name="Slide Image Placeholder 1"/>
-          <p:cNvSpPr>
-            <a:spLocks noGrp="1" noRot="1" noChangeAspect="1"/>
-          </p:cNvSpPr>
-          <p:nvPr>
-            <p:ph type="sldImg"/>
-          </p:nvPr>
-        </p:nvSpPr>
-        <p:spPr/>
-      </p:sp>
-      <p:sp>
-        <p:nvSpPr>
-          <p:cNvPr id="3" name="Notes Placeholder 2"/>
-          <p:cNvSpPr>
-            <a:spLocks noGrp="1"/>
-          </p:cNvSpPr>
-          <p:nvPr>
-            <p:ph type="body" idx="1"/>
-          </p:nvPr>
-        </p:nvSpPr>
-        <p:spPr/>
-        <p:txBody>
-          <a:bodyPr/>
-          <a:lstStyle/>
-          <a:p>
-            <a:r>
-              <a:rPr lang="en-US" dirty="0"/>
-              <a:t/>
-            </a:r>
-            <a:endParaRPr lang="en-US" dirty="0"/>
-          </a:p>
-        </p:txBody>
-      </p:sp>
-      <p:sp>
-        <p:nvSpPr>
-          <p:cNvPr id="4" name="Slide Number Placeholder 3"/>
-          <p:cNvSpPr>
-            <a:spLocks noGrp="1"/>
-          </p:cNvSpPr>
-          <p:nvPr>
-            <p:ph type="sldNum" sz="quarter" idx="10"/>
-          </p:nvPr>
-        </p:nvSpPr>
-        <p:spPr/>
-        <p:txBody>
-          <a:bodyPr/>
-          <a:lstStyle/>
-          <a:p>
-            <a:fld id="{F7021451-1387-4CA6-816F-3879F97B5CBC}" type="slidenum">
-              <a:rPr lang="en-US"/>
-              <a:t>6</a:t>
-            </a:fld>
-            <a:endParaRPr lang="en-US"/>
-          </a:p>
-        </p:txBody>
-      </p:sp>
-    </p:spTree>
-    <p:extLst>
-      <p:ext uri="{BB962C8B-B14F-4D97-AF65-F5344CB8AC3E}">
-        <p14:creationId xmlns:p14="http://schemas.microsoft.com/office/powerpoint/2010/main" val="1024086991"/>
-      </p:ext>
-    </p:extLst>
-  </p:cSld>
-  <p:clrMapOvr>
-    <a:masterClrMapping/>
-  </p:clrMapOvr>
-</p:notes>
-</file>
-
 <file path=ppt/slideLayouts/slideLayout1.xml><?xml version="1.0" encoding="utf-8"?>
 <p:sldLayout xmlns:a="http://schemas.openxmlformats.org/drawingml/2006/main" xmlns:r="http://schemas.openxmlformats.org/officeDocument/2006/relationships" xmlns:p="http://schemas.openxmlformats.org/presentationml/2006/main" preserve="1">
   <p:cSld name="DEFAULT">
@@ -1302,7 +1213,7 @@
     <p:bg>
       <p:bgPr>
         <a:solidFill>
-          <a:srgbClr val="1A7A6F"/>
+          <a:srgbClr val="1B2A4A"/>
         </a:solidFill>
       </p:bgPr>
     </p:bg>
@@ -1322,14 +1233,34 @@
       </p:grpSpPr>
       <p:sp>
         <p:nvSpPr>
-          <p:cNvPr id="2" name="Text 0"/>
-          <p:cNvSpPr/>
-          <p:nvPr/>
-        </p:nvSpPr>
-        <p:spPr>
-          <a:xfrm>
-            <a:off x="731520" y="1371600"/>
-            <a:ext cx="7680960" cy="1371600"/>
+          <p:cNvPr id="2" name="Shape 0"/>
+          <p:cNvSpPr/>
+          <p:nvPr/>
+        </p:nvSpPr>
+        <p:spPr>
+          <a:xfrm>
+            <a:off x="0" y="0"/>
+            <a:ext cx="109728" cy="5143500"/>
+          </a:xfrm>
+          <a:prstGeom prst="rect">
+            <a:avLst/>
+          </a:prstGeom>
+          <a:solidFill>
+            <a:srgbClr val="2A9D8F"/>
+          </a:solidFill>
+          <a:ln/>
+        </p:spPr>
+      </p:sp>
+      <p:sp>
+        <p:nvSpPr>
+          <p:cNvPr id="3" name="Text 1"/>
+          <p:cNvSpPr/>
+          <p:nvPr/>
+        </p:nvSpPr>
+        <p:spPr>
+          <a:xfrm>
+            <a:off x="731520" y="1280160"/>
+            <a:ext cx="7772400" cy="1371600"/>
           </a:xfrm>
           <a:prstGeom prst="rect">
             <a:avLst/>
@@ -1345,30 +1276,69 @@
               <a:buNone/>
             </a:pPr>
             <a:r>
-              <a:rPr lang="en-US" sz="4000" b="1" dirty="0">
+              <a:rPr lang="en-US" sz="3600" b="1" dirty="0">
                 <a:solidFill>
                   <a:srgbClr val="FFFFFF"/>
+                </a:solidFill>
+                <a:latin typeface="Georgia" pitchFamily="34" charset="0"/>
+                <a:ea typeface="Georgia" pitchFamily="34" charset="-122"/>
+                <a:cs typeface="Georgia" pitchFamily="34" charset="-120"/>
+              </a:rPr>
+              <a:t>Lab Safety</a:t>
+            </a:r>
+            <a:endParaRPr lang="en-US" sz="3600" dirty="0"/>
+          </a:p>
+        </p:txBody>
+      </p:sp>
+      <p:sp>
+        <p:nvSpPr>
+          <p:cNvPr id="4" name="Text 2"/>
+          <p:cNvSpPr/>
+          <p:nvPr/>
+        </p:nvSpPr>
+        <p:spPr>
+          <a:xfrm>
+            <a:off x="731520" y="2743200"/>
+            <a:ext cx="7772400" cy="548640"/>
+          </a:xfrm>
+          <a:prstGeom prst="rect">
+            <a:avLst/>
+          </a:prstGeom>
+          <a:noFill/>
+          <a:ln/>
+        </p:spPr>
+        <p:txBody>
+          <a:bodyPr wrap="square" rtlCol="0" anchor="ctr"/>
+          <a:lstStyle/>
+          <a:p>
+            <a:pPr indent="0" marL="0">
+              <a:buNone/>
+            </a:pPr>
+            <a:r>
+              <a:rPr lang="en-US" sz="1600" dirty="0">
+                <a:solidFill>
+                  <a:srgbClr val="9B9690"/>
                 </a:solidFill>
                 <a:latin typeface="Calibri" pitchFamily="34" charset="0"/>
                 <a:ea typeface="Calibri" pitchFamily="34" charset="-122"/>
                 <a:cs typeface="Calibri" pitchFamily="34" charset="-120"/>
               </a:rPr>
-              <a:t>Lab Safety</a:t>
-            </a:r>
-            <a:endParaRPr lang="en-US" sz="4000" dirty="0"/>
-          </a:p>
-        </p:txBody>
-      </p:sp>
-      <p:sp>
-        <p:nvSpPr>
-          <p:cNvPr id="3" name="Text 1"/>
-          <p:cNvSpPr/>
-          <p:nvPr/>
-        </p:nvSpPr>
-        <p:spPr>
-          <a:xfrm>
-            <a:off x="731520" y="2926080"/>
-            <a:ext cx="7680960" cy="548640"/>
+              <a:t>G6 Science · Scientific Skills</a:t>
+            </a:r>
+            <a:endParaRPr lang="en-US" sz="1600" dirty="0"/>
+          </a:p>
+        </p:txBody>
+      </p:sp>
+      <p:sp>
+        <p:nvSpPr>
+          <p:cNvPr id="5" name="Text 3"/>
+          <p:cNvSpPr/>
+          <p:nvPr/>
+        </p:nvSpPr>
+        <p:spPr>
+          <a:xfrm>
+            <a:off x="731520" y="4389120"/>
+            <a:ext cx="7772400" cy="457200"/>
           </a:xfrm>
           <a:prstGeom prst="rect">
             <a:avLst/>
@@ -1384,17 +1354,17 @@
               <a:buNone/>
             </a:pPr>
             <a:r>
-              <a:rPr lang="en-US" sz="1600" i="1" dirty="0">
-                <a:solidFill>
-                  <a:srgbClr val="FFFFFF"/>
+              <a:rPr lang="en-US" sz="1000" dirty="0">
+                <a:solidFill>
+                  <a:srgbClr val="6B6660"/>
                 </a:solidFill>
                 <a:latin typeface="Calibri" pitchFamily="34" charset="0"/>
                 <a:ea typeface="Calibri" pitchFamily="34" charset="-122"/>
                 <a:cs typeface="Calibri" pitchFamily="34" charset="-120"/>
               </a:rPr>
-              <a:t>Grade 6 Science · Mr Zocchi</a:t>
-            </a:r>
-            <a:endParaRPr lang="en-US" sz="1600" dirty="0"/>
+              <a:t>Mr Zocchi · mrzocchi.com</a:t>
+            </a:r>
+            <a:endParaRPr lang="en-US" sz="1000" dirty="0"/>
           </a:p>
         </p:txBody>
       </p:sp>
@@ -1409,6 +1379,13 @@
 <file path=ppt/slides/slide2.xml><?xml version="1.0" encoding="utf-8"?>
 <p:sld xmlns:a="http://schemas.openxmlformats.org/drawingml/2006/main" xmlns:r="http://schemas.openxmlformats.org/officeDocument/2006/relationships" xmlns:p="http://schemas.openxmlformats.org/presentationml/2006/main">
   <p:cSld name="Slide 2">
+    <p:bg>
+      <p:bgPr>
+        <a:solidFill>
+          <a:srgbClr val="FFFFFF"/>
+        </a:solidFill>
+      </p:bgPr>
+    </p:bg>
     <p:spTree>
       <p:nvGrpSpPr>
         <p:cNvPr id="1" name=""/>
@@ -1432,13 +1409,13 @@
         <p:spPr>
           <a:xfrm>
             <a:off x="0" y="0"/>
-            <a:ext cx="9144000" cy="548640"/>
-          </a:xfrm>
-          <a:prstGeom prst="rect">
-            <a:avLst/>
-          </a:prstGeom>
-          <a:solidFill>
-            <a:srgbClr val="1A7A6F"/>
+            <a:ext cx="9144000" cy="54864"/>
+          </a:xfrm>
+          <a:prstGeom prst="rect">
+            <a:avLst/>
+          </a:prstGeom>
+          <a:solidFill>
+            <a:srgbClr val="2A9D8F"/>
           </a:solidFill>
           <a:ln/>
         </p:spPr>
@@ -1451,8 +1428,8 @@
         </p:nvSpPr>
         <p:spPr>
           <a:xfrm>
-            <a:off x="457200" y="45720"/>
-            <a:ext cx="8229600" cy="457200"/>
+            <a:off x="548640" y="274320"/>
+            <a:ext cx="8046720" cy="640080"/>
           </a:xfrm>
           <a:prstGeom prst="rect">
             <a:avLst/>
@@ -1461,125 +1438,186 @@
           <a:ln/>
         </p:spPr>
         <p:txBody>
-          <a:bodyPr wrap="square" rtlCol="0" anchor="ctr"/>
+          <a:bodyPr wrap="square" lIns="0" tIns="0" rIns="0" bIns="0" rtlCol="0" anchor="ctr"/>
           <a:lstStyle/>
           <a:p>
             <a:pPr indent="0" marL="0">
               <a:buNone/>
             </a:pPr>
             <a:r>
-              <a:rPr lang="en-US" sz="1800" b="1" dirty="0">
-                <a:solidFill>
-                  <a:srgbClr val="FFFFFF"/>
+              <a:rPr lang="en-US" sz="2600" b="1" dirty="0">
+                <a:solidFill>
+                  <a:srgbClr val="1B2A4A"/>
+                </a:solidFill>
+                <a:latin typeface="Georgia" pitchFamily="34" charset="0"/>
+                <a:ea typeface="Georgia" pitchFamily="34" charset="-122"/>
+                <a:cs typeface="Georgia" pitchFamily="34" charset="-120"/>
+              </a:rPr>
+              <a:t>Why Lab Safety Matters</a:t>
+            </a:r>
+            <a:endParaRPr lang="en-US" sz="2600" dirty="0"/>
+          </a:p>
+        </p:txBody>
+      </p:sp>
+      <p:sp>
+        <p:nvSpPr>
+          <p:cNvPr id="4" name="Text 2"/>
+          <p:cNvSpPr/>
+          <p:nvPr/>
+        </p:nvSpPr>
+        <p:spPr>
+          <a:xfrm>
+            <a:off x="548640" y="1097280"/>
+            <a:ext cx="8046720" cy="3474720"/>
+          </a:xfrm>
+          <a:prstGeom prst="rect">
+            <a:avLst/>
+          </a:prstGeom>
+          <a:noFill/>
+          <a:ln/>
+        </p:spPr>
+        <p:txBody>
+          <a:bodyPr wrap="square" rtlCol="0" anchor="t"/>
+          <a:lstStyle/>
+          <a:p>
+            <a:pPr marL="342900" indent="-342900">
+              <a:spcAft>
+                <a:spcPts val="800"/>
+              </a:spcAft>
+              <a:buSzPct val="100000"/>
+              <a:buChar char="•"/>
+            </a:pPr>
+            <a:r>
+              <a:rPr lang="en-US" sz="1500" dirty="0">
+                <a:solidFill>
+                  <a:srgbClr val="3D3A36"/>
                 </a:solidFill>
                 <a:latin typeface="Calibri" pitchFamily="34" charset="0"/>
                 <a:ea typeface="Calibri" pitchFamily="34" charset="-122"/>
                 <a:cs typeface="Calibri" pitchFamily="34" charset="-120"/>
               </a:rPr>
-              <a:t>Lab safety rules</a:t>
-            </a:r>
-            <a:endParaRPr lang="en-US" sz="1800" dirty="0"/>
-          </a:p>
-        </p:txBody>
-      </p:sp>
-      <p:sp>
-        <p:nvSpPr>
-          <p:cNvPr id="4" name="Text 2"/>
-          <p:cNvSpPr/>
-          <p:nvPr/>
-        </p:nvSpPr>
-        <p:spPr>
-          <a:xfrm>
-            <a:off x="731520" y="1097280"/>
-            <a:ext cx="7680960" cy="3200400"/>
-          </a:xfrm>
-          <a:prstGeom prst="rect">
-            <a:avLst/>
-          </a:prstGeom>
-          <a:noFill/>
-          <a:ln/>
-        </p:spPr>
-        <p:txBody>
-          <a:bodyPr wrap="square" rtlCol="0" anchor="ctr"/>
-          <a:lstStyle/>
-          <a:p>
-            <a:pPr indent="0" marL="0">
-              <a:buNone/>
-            </a:pPr>
-            <a:r>
-              <a:rPr lang="en-US" sz="1600" dirty="0">
-                <a:solidFill>
-                  <a:srgbClr val="363636"/>
+              <a:t>Science labs contain chemicals, heat, and glass that can cause injury</a:t>
+            </a:r>
+            <a:endParaRPr lang="en-US" sz="1500" dirty="0"/>
+          </a:p>
+          <a:p>
+            <a:pPr marL="342900" indent="-342900">
+              <a:spcAft>
+                <a:spcPts val="800"/>
+              </a:spcAft>
+              <a:buSzPct val="100000"/>
+              <a:buChar char="•"/>
+            </a:pPr>
+            <a:r>
+              <a:rPr lang="en-US" sz="1500" dirty="0">
+                <a:solidFill>
+                  <a:srgbClr val="3D3A36"/>
                 </a:solidFill>
                 <a:latin typeface="Calibri" pitchFamily="34" charset="0"/>
                 <a:ea typeface="Calibri" pitchFamily="34" charset="-122"/>
                 <a:cs typeface="Calibri" pitchFamily="34" charset="-120"/>
               </a:rPr>
-              <a:t>Content for: Lab safety rules</a:t>
-            </a:r>
-            <a:endParaRPr lang="en-US" sz="1600" dirty="0"/>
-          </a:p>
-          <a:p>
-            <a:pPr indent="0" marL="0">
-              <a:buNone/>
-            </a:pPr>
-            <a:endParaRPr lang="en-US" sz="1600" dirty="0"/>
-          </a:p>
-          <a:p>
-            <a:pPr indent="0" marL="0">
-              <a:buNone/>
-            </a:pPr>
-            <a:r>
-              <a:rPr lang="en-US" sz="1600" dirty="0">
-                <a:solidFill>
-                  <a:srgbClr val="363636"/>
+              <a:t>Following safety rules protects you AND your classmates</a:t>
+            </a:r>
+            <a:endParaRPr lang="en-US" sz="1500" dirty="0"/>
+          </a:p>
+          <a:p>
+            <a:pPr marL="342900" indent="-342900">
+              <a:spcAft>
+                <a:spcPts val="800"/>
+              </a:spcAft>
+              <a:buSzPct val="100000"/>
+              <a:buChar char="•"/>
+            </a:pPr>
+            <a:r>
+              <a:rPr lang="en-US" sz="1500" dirty="0">
+                <a:solidFill>
+                  <a:srgbClr val="3D3A36"/>
                 </a:solidFill>
                 <a:latin typeface="Calibri" pitchFamily="34" charset="0"/>
                 <a:ea typeface="Calibri" pitchFamily="34" charset="-122"/>
                 <a:cs typeface="Calibri" pitchFamily="34" charset="-120"/>
               </a:rPr>
-              <a:t>Key points will be covered in class.</a:t>
-            </a:r>
-            <a:endParaRPr lang="en-US" sz="1600" dirty="0"/>
-          </a:p>
-        </p:txBody>
-      </p:sp>
-      <p:sp>
-        <p:nvSpPr>
-          <p:cNvPr id="5" name="Text 3"/>
-          <p:cNvSpPr/>
-          <p:nvPr/>
-        </p:nvSpPr>
-        <p:spPr>
-          <a:xfrm>
-            <a:off x="7772400" y="4663440"/>
-            <a:ext cx="1097280" cy="365760"/>
-          </a:xfrm>
-          <a:prstGeom prst="rect">
-            <a:avLst/>
-          </a:prstGeom>
-          <a:noFill/>
-          <a:ln/>
-        </p:spPr>
-        <p:txBody>
-          <a:bodyPr wrap="square" rtlCol="0" anchor="ctr"/>
-          <a:lstStyle/>
-          <a:p>
-            <a:pPr algn="r" indent="0" marL="0">
-              <a:buNone/>
-            </a:pPr>
-            <a:r>
-              <a:rPr lang="en-US" sz="1000" dirty="0">
-                <a:solidFill>
-                  <a:srgbClr val="999999"/>
+              <a:t>Good scientists always think about safety BEFORE starting an experiment</a:t>
+            </a:r>
+            <a:endParaRPr lang="en-US" sz="1500" dirty="0"/>
+          </a:p>
+          <a:p>
+            <a:pPr marL="342900" indent="-342900">
+              <a:spcAft>
+                <a:spcPts val="800"/>
+              </a:spcAft>
+              <a:buSzPct val="100000"/>
+              <a:buChar char="•"/>
+            </a:pPr>
+            <a:r>
+              <a:rPr lang="en-US" sz="1500" dirty="0">
+                <a:solidFill>
+                  <a:srgbClr val="3D3A36"/>
                 </a:solidFill>
                 <a:latin typeface="Calibri" pitchFamily="34" charset="0"/>
                 <a:ea typeface="Calibri" pitchFamily="34" charset="-122"/>
                 <a:cs typeface="Calibri" pitchFamily="34" charset="-120"/>
               </a:rPr>
-              <a:t>2 / 6</a:t>
-            </a:r>
-            <a:endParaRPr lang="en-US" sz="1000" dirty="0"/>
+              <a:t>Every school lab has specific rules — learn yours</a:t>
+            </a:r>
+            <a:endParaRPr lang="en-US" sz="1500" dirty="0"/>
+          </a:p>
+        </p:txBody>
+      </p:sp>
+      <p:sp>
+        <p:nvSpPr>
+          <p:cNvPr id="5" name="Shape 3"/>
+          <p:cNvSpPr/>
+          <p:nvPr/>
+        </p:nvSpPr>
+        <p:spPr>
+          <a:xfrm>
+            <a:off x="548640" y="4754880"/>
+            <a:ext cx="8046720" cy="9144"/>
+          </a:xfrm>
+          <a:prstGeom prst="rect">
+            <a:avLst/>
+          </a:prstGeom>
+          <a:solidFill>
+            <a:srgbClr val="F3F1EE"/>
+          </a:solidFill>
+          <a:ln/>
+        </p:spPr>
+      </p:sp>
+      <p:sp>
+        <p:nvSpPr>
+          <p:cNvPr id="6" name="Text 4"/>
+          <p:cNvSpPr/>
+          <p:nvPr/>
+        </p:nvSpPr>
+        <p:spPr>
+          <a:xfrm>
+            <a:off x="548640" y="4800600"/>
+            <a:ext cx="3657600" cy="274320"/>
+          </a:xfrm>
+          <a:prstGeom prst="rect">
+            <a:avLst/>
+          </a:prstGeom>
+          <a:noFill/>
+          <a:ln/>
+        </p:spPr>
+        <p:txBody>
+          <a:bodyPr wrap="square" rtlCol="0" anchor="ctr"/>
+          <a:lstStyle/>
+          <a:p>
+            <a:pPr indent="0" marL="0">
+              <a:buNone/>
+            </a:pPr>
+            <a:r>
+              <a:rPr lang="en-US" sz="800" dirty="0">
+                <a:solidFill>
+                  <a:srgbClr val="9B9690"/>
+                </a:solidFill>
+              </a:rPr>
+              <a:t>mrzocchi.com</a:t>
+            </a:r>
+            <a:endParaRPr lang="en-US" sz="800" dirty="0"/>
           </a:p>
         </p:txBody>
       </p:sp>
@@ -1594,6 +1632,13 @@
 <file path=ppt/slides/slide3.xml><?xml version="1.0" encoding="utf-8"?>
 <p:sld xmlns:a="http://schemas.openxmlformats.org/drawingml/2006/main" xmlns:r="http://schemas.openxmlformats.org/officeDocument/2006/relationships" xmlns:p="http://schemas.openxmlformats.org/presentationml/2006/main">
   <p:cSld name="Slide 3">
+    <p:bg>
+      <p:bgPr>
+        <a:solidFill>
+          <a:srgbClr val="FFFFFF"/>
+        </a:solidFill>
+      </p:bgPr>
+    </p:bg>
     <p:spTree>
       <p:nvGrpSpPr>
         <p:cNvPr id="1" name=""/>
@@ -1617,13 +1662,13 @@
         <p:spPr>
           <a:xfrm>
             <a:off x="0" y="0"/>
-            <a:ext cx="9144000" cy="548640"/>
-          </a:xfrm>
-          <a:prstGeom prst="rect">
-            <a:avLst/>
-          </a:prstGeom>
-          <a:solidFill>
-            <a:srgbClr val="1A7A6F"/>
+            <a:ext cx="9144000" cy="54864"/>
+          </a:xfrm>
+          <a:prstGeom prst="rect">
+            <a:avLst/>
+          </a:prstGeom>
+          <a:solidFill>
+            <a:srgbClr val="2A9D8F"/>
           </a:solidFill>
           <a:ln/>
         </p:spPr>
@@ -1636,8 +1681,8 @@
         </p:nvSpPr>
         <p:spPr>
           <a:xfrm>
-            <a:off x="457200" y="45720"/>
-            <a:ext cx="8229600" cy="457200"/>
+            <a:off x="548640" y="274320"/>
+            <a:ext cx="8046720" cy="640080"/>
           </a:xfrm>
           <a:prstGeom prst="rect">
             <a:avLst/>
@@ -1646,125 +1691,404 @@
           <a:ln/>
         </p:spPr>
         <p:txBody>
-          <a:bodyPr wrap="square" rtlCol="0" anchor="ctr"/>
+          <a:bodyPr wrap="square" lIns="0" tIns="0" rIns="0" bIns="0" rtlCol="0" anchor="ctr"/>
           <a:lstStyle/>
           <a:p>
             <a:pPr indent="0" marL="0">
               <a:buNone/>
             </a:pPr>
             <a:r>
-              <a:rPr lang="en-US" sz="1800" b="1" dirty="0">
-                <a:solidFill>
-                  <a:srgbClr val="FFFFFF"/>
+              <a:rPr lang="en-US" sz="2600" b="1" dirty="0">
+                <a:solidFill>
+                  <a:srgbClr val="1B2A4A"/>
+                </a:solidFill>
+                <a:latin typeface="Georgia" pitchFamily="34" charset="0"/>
+                <a:ea typeface="Georgia" pitchFamily="34" charset="-122"/>
+                <a:cs typeface="Georgia" pitchFamily="34" charset="-120"/>
+              </a:rPr>
+              <a:t>Lab Equipment Rules</a:t>
+            </a:r>
+            <a:endParaRPr lang="en-US" sz="2600" dirty="0"/>
+          </a:p>
+        </p:txBody>
+      </p:sp>
+      <p:sp>
+        <p:nvSpPr>
+          <p:cNvPr id="4" name="Shape 2"/>
+          <p:cNvSpPr/>
+          <p:nvPr/>
+        </p:nvSpPr>
+        <p:spPr>
+          <a:xfrm>
+            <a:off x="457200" y="1097280"/>
+            <a:ext cx="3840480" cy="3474720"/>
+          </a:xfrm>
+          <a:prstGeom prst="rect">
+            <a:avLst/>
+          </a:prstGeom>
+          <a:solidFill>
+            <a:srgbClr val="F3F1EE"/>
+          </a:solidFill>
+          <a:ln/>
+          <a:effectLst>
+            <a:outerShdw sx="100000" sy="100000" kx="0" ky="0" algn="bl" rotWithShape="0" blurRad="50800" dist="25400" dir="8100000">
+              <a:srgbClr val="000000">
+                <a:alpha val="10000"/>
+              </a:srgbClr>
+            </a:outerShdw>
+          </a:effectLst>
+        </p:spPr>
+      </p:sp>
+      <p:sp>
+        <p:nvSpPr>
+          <p:cNvPr id="5" name="Text 3"/>
+          <p:cNvSpPr/>
+          <p:nvPr/>
+        </p:nvSpPr>
+        <p:spPr>
+          <a:xfrm>
+            <a:off x="640080" y="1234440"/>
+            <a:ext cx="3474720" cy="411480"/>
+          </a:xfrm>
+          <a:prstGeom prst="rect">
+            <a:avLst/>
+          </a:prstGeom>
+          <a:noFill/>
+          <a:ln/>
+        </p:spPr>
+        <p:txBody>
+          <a:bodyPr wrap="square" rtlCol="0" anchor="ctr"/>
+          <a:lstStyle/>
+          <a:p>
+            <a:pPr indent="0" marL="0">
+              <a:buNone/>
+            </a:pPr>
+            <a:r>
+              <a:rPr lang="en-US" sz="1600" b="1" dirty="0">
+                <a:solidFill>
+                  <a:srgbClr val="1B2A4A"/>
+                </a:solidFill>
+                <a:latin typeface="Georgia" pitchFamily="34" charset="0"/>
+                <a:ea typeface="Georgia" pitchFamily="34" charset="-122"/>
+                <a:cs typeface="Georgia" pitchFamily="34" charset="-120"/>
+              </a:rPr>
+              <a:t>DO</a:t>
+            </a:r>
+            <a:endParaRPr lang="en-US" sz="1600" dirty="0"/>
+          </a:p>
+        </p:txBody>
+      </p:sp>
+      <p:sp>
+        <p:nvSpPr>
+          <p:cNvPr id="6" name="Text 4"/>
+          <p:cNvSpPr/>
+          <p:nvPr/>
+        </p:nvSpPr>
+        <p:spPr>
+          <a:xfrm>
+            <a:off x="640080" y="1737360"/>
+            <a:ext cx="3474720" cy="2651760"/>
+          </a:xfrm>
+          <a:prstGeom prst="rect">
+            <a:avLst/>
+          </a:prstGeom>
+          <a:noFill/>
+          <a:ln/>
+        </p:spPr>
+        <p:txBody>
+          <a:bodyPr wrap="square" rtlCol="0" anchor="t"/>
+          <a:lstStyle/>
+          <a:p>
+            <a:pPr marL="342900" indent="-342900">
+              <a:spcAft>
+                <a:spcPts val="600"/>
+              </a:spcAft>
+              <a:buSzPct val="100000"/>
+              <a:buChar char="•"/>
+            </a:pPr>
+            <a:r>
+              <a:rPr lang="en-US" sz="1300" dirty="0">
+                <a:solidFill>
+                  <a:srgbClr val="3D3A36"/>
                 </a:solidFill>
                 <a:latin typeface="Calibri" pitchFamily="34" charset="0"/>
                 <a:ea typeface="Calibri" pitchFamily="34" charset="-122"/>
                 <a:cs typeface="Calibri" pitchFamily="34" charset="-120"/>
               </a:rPr>
-              <a:t>Equipment names</a:t>
-            </a:r>
-            <a:endParaRPr lang="en-US" sz="1800" dirty="0"/>
-          </a:p>
-        </p:txBody>
-      </p:sp>
-      <p:sp>
-        <p:nvSpPr>
-          <p:cNvPr id="4" name="Text 2"/>
-          <p:cNvSpPr/>
-          <p:nvPr/>
-        </p:nvSpPr>
-        <p:spPr>
-          <a:xfrm>
-            <a:off x="731520" y="1097280"/>
-            <a:ext cx="7680960" cy="3200400"/>
-          </a:xfrm>
-          <a:prstGeom prst="rect">
-            <a:avLst/>
-          </a:prstGeom>
-          <a:noFill/>
-          <a:ln/>
-        </p:spPr>
-        <p:txBody>
-          <a:bodyPr wrap="square" rtlCol="0" anchor="ctr"/>
-          <a:lstStyle/>
-          <a:p>
-            <a:pPr indent="0" marL="0">
-              <a:buNone/>
-            </a:pPr>
-            <a:r>
-              <a:rPr lang="en-US" sz="1600" dirty="0">
-                <a:solidFill>
-                  <a:srgbClr val="363636"/>
+              <a:t>Wear safety goggles when using chemicals</a:t>
+            </a:r>
+            <a:endParaRPr lang="en-US" sz="1300" dirty="0"/>
+          </a:p>
+          <a:p>
+            <a:pPr marL="342900" indent="-342900">
+              <a:spcAft>
+                <a:spcPts val="600"/>
+              </a:spcAft>
+              <a:buSzPct val="100000"/>
+              <a:buChar char="•"/>
+            </a:pPr>
+            <a:r>
+              <a:rPr lang="en-US" sz="1300" dirty="0">
+                <a:solidFill>
+                  <a:srgbClr val="3D3A36"/>
                 </a:solidFill>
                 <a:latin typeface="Calibri" pitchFamily="34" charset="0"/>
                 <a:ea typeface="Calibri" pitchFamily="34" charset="-122"/>
                 <a:cs typeface="Calibri" pitchFamily="34" charset="-120"/>
               </a:rPr>
-              <a:t>Content for: Equipment names</a:t>
-            </a:r>
-            <a:endParaRPr lang="en-US" sz="1600" dirty="0"/>
-          </a:p>
-          <a:p>
-            <a:pPr indent="0" marL="0">
-              <a:buNone/>
-            </a:pPr>
-            <a:endParaRPr lang="en-US" sz="1600" dirty="0"/>
-          </a:p>
-          <a:p>
-            <a:pPr indent="0" marL="0">
-              <a:buNone/>
-            </a:pPr>
-            <a:r>
-              <a:rPr lang="en-US" sz="1600" dirty="0">
-                <a:solidFill>
-                  <a:srgbClr val="363636"/>
+              <a:t>Tie back long hair</a:t>
+            </a:r>
+            <a:endParaRPr lang="en-US" sz="1300" dirty="0"/>
+          </a:p>
+          <a:p>
+            <a:pPr marL="342900" indent="-342900">
+              <a:spcAft>
+                <a:spcPts val="600"/>
+              </a:spcAft>
+              <a:buSzPct val="100000"/>
+              <a:buChar char="•"/>
+            </a:pPr>
+            <a:r>
+              <a:rPr lang="en-US" sz="1300" dirty="0">
+                <a:solidFill>
+                  <a:srgbClr val="3D3A36"/>
                 </a:solidFill>
                 <a:latin typeface="Calibri" pitchFamily="34" charset="0"/>
                 <a:ea typeface="Calibri" pitchFamily="34" charset="-122"/>
                 <a:cs typeface="Calibri" pitchFamily="34" charset="-120"/>
               </a:rPr>
-              <a:t>Key points will be covered in class.</a:t>
-            </a:r>
-            <a:endParaRPr lang="en-US" sz="1600" dirty="0"/>
-          </a:p>
-        </p:txBody>
-      </p:sp>
-      <p:sp>
-        <p:nvSpPr>
-          <p:cNvPr id="5" name="Text 3"/>
-          <p:cNvSpPr/>
-          <p:nvPr/>
-        </p:nvSpPr>
-        <p:spPr>
-          <a:xfrm>
-            <a:off x="7772400" y="4663440"/>
-            <a:ext cx="1097280" cy="365760"/>
-          </a:xfrm>
-          <a:prstGeom prst="rect">
-            <a:avLst/>
-          </a:prstGeom>
-          <a:noFill/>
-          <a:ln/>
-        </p:spPr>
-        <p:txBody>
-          <a:bodyPr wrap="square" rtlCol="0" anchor="ctr"/>
-          <a:lstStyle/>
-          <a:p>
-            <a:pPr algn="r" indent="0" marL="0">
-              <a:buNone/>
-            </a:pPr>
-            <a:r>
-              <a:rPr lang="en-US" sz="1000" dirty="0">
-                <a:solidFill>
-                  <a:srgbClr val="999999"/>
+              <a:t>Report broken glass immediately</a:t>
+            </a:r>
+            <a:endParaRPr lang="en-US" sz="1300" dirty="0"/>
+          </a:p>
+          <a:p>
+            <a:pPr marL="342900" indent="-342900">
+              <a:spcAft>
+                <a:spcPts val="600"/>
+              </a:spcAft>
+              <a:buSzPct val="100000"/>
+              <a:buChar char="•"/>
+            </a:pPr>
+            <a:r>
+              <a:rPr lang="en-US" sz="1300" dirty="0">
+                <a:solidFill>
+                  <a:srgbClr val="3D3A36"/>
                 </a:solidFill>
                 <a:latin typeface="Calibri" pitchFamily="34" charset="0"/>
                 <a:ea typeface="Calibri" pitchFamily="34" charset="-122"/>
                 <a:cs typeface="Calibri" pitchFamily="34" charset="-120"/>
               </a:rPr>
-              <a:t>3 / 6</a:t>
-            </a:r>
-            <a:endParaRPr lang="en-US" sz="1000" dirty="0"/>
+              <a:t>Wash hands after experiments</a:t>
+            </a:r>
+            <a:endParaRPr lang="en-US" sz="1300" dirty="0"/>
+          </a:p>
+        </p:txBody>
+      </p:sp>
+      <p:sp>
+        <p:nvSpPr>
+          <p:cNvPr id="7" name="Shape 5"/>
+          <p:cNvSpPr/>
+          <p:nvPr/>
+        </p:nvSpPr>
+        <p:spPr>
+          <a:xfrm>
+            <a:off x="4846320" y="1097280"/>
+            <a:ext cx="3840480" cy="3474720"/>
+          </a:xfrm>
+          <a:prstGeom prst="rect">
+            <a:avLst/>
+          </a:prstGeom>
+          <a:solidFill>
+            <a:srgbClr val="F3F1EE"/>
+          </a:solidFill>
+          <a:ln/>
+          <a:effectLst>
+            <a:outerShdw sx="100000" sy="100000" kx="0" ky="0" algn="bl" rotWithShape="0" blurRad="50800" dist="25400" dir="8100000">
+              <a:srgbClr val="000000">
+                <a:alpha val="10000"/>
+              </a:srgbClr>
+            </a:outerShdw>
+          </a:effectLst>
+        </p:spPr>
+      </p:sp>
+      <p:sp>
+        <p:nvSpPr>
+          <p:cNvPr id="8" name="Text 6"/>
+          <p:cNvSpPr/>
+          <p:nvPr/>
+        </p:nvSpPr>
+        <p:spPr>
+          <a:xfrm>
+            <a:off x="5029200" y="1234440"/>
+            <a:ext cx="3474720" cy="411480"/>
+          </a:xfrm>
+          <a:prstGeom prst="rect">
+            <a:avLst/>
+          </a:prstGeom>
+          <a:noFill/>
+          <a:ln/>
+        </p:spPr>
+        <p:txBody>
+          <a:bodyPr wrap="square" rtlCol="0" anchor="ctr"/>
+          <a:lstStyle/>
+          <a:p>
+            <a:pPr indent="0" marL="0">
+              <a:buNone/>
+            </a:pPr>
+            <a:r>
+              <a:rPr lang="en-US" sz="1600" b="1" dirty="0">
+                <a:solidFill>
+                  <a:srgbClr val="1B2A4A"/>
+                </a:solidFill>
+                <a:latin typeface="Georgia" pitchFamily="34" charset="0"/>
+                <a:ea typeface="Georgia" pitchFamily="34" charset="-122"/>
+                <a:cs typeface="Georgia" pitchFamily="34" charset="-120"/>
+              </a:rPr>
+              <a:t>DON'T</a:t>
+            </a:r>
+            <a:endParaRPr lang="en-US" sz="1600" dirty="0"/>
+          </a:p>
+        </p:txBody>
+      </p:sp>
+      <p:sp>
+        <p:nvSpPr>
+          <p:cNvPr id="9" name="Text 7"/>
+          <p:cNvSpPr/>
+          <p:nvPr/>
+        </p:nvSpPr>
+        <p:spPr>
+          <a:xfrm>
+            <a:off x="5029200" y="1737360"/>
+            <a:ext cx="3474720" cy="2651760"/>
+          </a:xfrm>
+          <a:prstGeom prst="rect">
+            <a:avLst/>
+          </a:prstGeom>
+          <a:noFill/>
+          <a:ln/>
+        </p:spPr>
+        <p:txBody>
+          <a:bodyPr wrap="square" rtlCol="0" anchor="t"/>
+          <a:lstStyle/>
+          <a:p>
+            <a:pPr marL="342900" indent="-342900">
+              <a:spcAft>
+                <a:spcPts val="600"/>
+              </a:spcAft>
+              <a:buSzPct val="100000"/>
+              <a:buChar char="•"/>
+            </a:pPr>
+            <a:r>
+              <a:rPr lang="en-US" sz="1300" dirty="0">
+                <a:solidFill>
+                  <a:srgbClr val="3D3A36"/>
+                </a:solidFill>
+                <a:latin typeface="Calibri" pitchFamily="34" charset="0"/>
+                <a:ea typeface="Calibri" pitchFamily="34" charset="-122"/>
+                <a:cs typeface="Calibri" pitchFamily="34" charset="-120"/>
+              </a:rPr>
+              <a:t>Eat or drink in the lab</a:t>
+            </a:r>
+            <a:endParaRPr lang="en-US" sz="1300" dirty="0"/>
+          </a:p>
+          <a:p>
+            <a:pPr marL="342900" indent="-342900">
+              <a:spcAft>
+                <a:spcPts val="600"/>
+              </a:spcAft>
+              <a:buSzPct val="100000"/>
+              <a:buChar char="•"/>
+            </a:pPr>
+            <a:r>
+              <a:rPr lang="en-US" sz="1300" dirty="0">
+                <a:solidFill>
+                  <a:srgbClr val="3D3A36"/>
+                </a:solidFill>
+                <a:latin typeface="Calibri" pitchFamily="34" charset="0"/>
+                <a:ea typeface="Calibri" pitchFamily="34" charset="-122"/>
+                <a:cs typeface="Calibri" pitchFamily="34" charset="-120"/>
+              </a:rPr>
+              <a:t>Run or push near equipment</a:t>
+            </a:r>
+            <a:endParaRPr lang="en-US" sz="1300" dirty="0"/>
+          </a:p>
+          <a:p>
+            <a:pPr marL="342900" indent="-342900">
+              <a:spcAft>
+                <a:spcPts val="600"/>
+              </a:spcAft>
+              <a:buSzPct val="100000"/>
+              <a:buChar char="•"/>
+            </a:pPr>
+            <a:r>
+              <a:rPr lang="en-US" sz="1300" dirty="0">
+                <a:solidFill>
+                  <a:srgbClr val="3D3A36"/>
+                </a:solidFill>
+                <a:latin typeface="Calibri" pitchFamily="34" charset="0"/>
+                <a:ea typeface="Calibri" pitchFamily="34" charset="-122"/>
+                <a:cs typeface="Calibri" pitchFamily="34" charset="-120"/>
+              </a:rPr>
+              <a:t>Touch chemicals with bare hands</a:t>
+            </a:r>
+            <a:endParaRPr lang="en-US" sz="1300" dirty="0"/>
+          </a:p>
+          <a:p>
+            <a:pPr marL="342900" indent="-342900">
+              <a:spcAft>
+                <a:spcPts val="600"/>
+              </a:spcAft>
+              <a:buSzPct val="100000"/>
+              <a:buChar char="•"/>
+            </a:pPr>
+            <a:r>
+              <a:rPr lang="en-US" sz="1300" dirty="0">
+                <a:solidFill>
+                  <a:srgbClr val="3D3A36"/>
+                </a:solidFill>
+                <a:latin typeface="Calibri" pitchFamily="34" charset="0"/>
+                <a:ea typeface="Calibri" pitchFamily="34" charset="-122"/>
+                <a:cs typeface="Calibri" pitchFamily="34" charset="-120"/>
+              </a:rPr>
+              <a:t>Point test tubes at anyone</a:t>
+            </a:r>
+            <a:endParaRPr lang="en-US" sz="1300" dirty="0"/>
+          </a:p>
+        </p:txBody>
+      </p:sp>
+      <p:sp>
+        <p:nvSpPr>
+          <p:cNvPr id="10" name="Text 8"/>
+          <p:cNvSpPr/>
+          <p:nvPr/>
+        </p:nvSpPr>
+        <p:spPr>
+          <a:xfrm>
+            <a:off x="548640" y="4800600"/>
+            <a:ext cx="3657600" cy="274320"/>
+          </a:xfrm>
+          <a:prstGeom prst="rect">
+            <a:avLst/>
+          </a:prstGeom>
+          <a:noFill/>
+          <a:ln/>
+        </p:spPr>
+        <p:txBody>
+          <a:bodyPr wrap="square" rtlCol="0" anchor="ctr"/>
+          <a:lstStyle/>
+          <a:p>
+            <a:pPr indent="0" marL="0">
+              <a:buNone/>
+            </a:pPr>
+            <a:r>
+              <a:rPr lang="en-US" sz="800" dirty="0">
+                <a:solidFill>
+                  <a:srgbClr val="9B9690"/>
+                </a:solidFill>
+              </a:rPr>
+              <a:t>mrzocchi.com</a:t>
+            </a:r>
+            <a:endParaRPr lang="en-US" sz="800" dirty="0"/>
           </a:p>
         </p:txBody>
       </p:sp>
@@ -1779,6 +2103,13 @@
 <file path=ppt/slides/slide4.xml><?xml version="1.0" encoding="utf-8"?>
 <p:sld xmlns:a="http://schemas.openxmlformats.org/drawingml/2006/main" xmlns:r="http://schemas.openxmlformats.org/officeDocument/2006/relationships" xmlns:p="http://schemas.openxmlformats.org/presentationml/2006/main">
   <p:cSld name="Slide 4">
+    <p:bg>
+      <p:bgPr>
+        <a:solidFill>
+          <a:srgbClr val="FAF8F5"/>
+        </a:solidFill>
+      </p:bgPr>
+    </p:bg>
     <p:spTree>
       <p:nvGrpSpPr>
         <p:cNvPr id="1" name=""/>
@@ -1802,13 +2133,13 @@
         <p:spPr>
           <a:xfrm>
             <a:off x="0" y="0"/>
-            <a:ext cx="9144000" cy="548640"/>
-          </a:xfrm>
-          <a:prstGeom prst="rect">
-            <a:avLst/>
-          </a:prstGeom>
-          <a:solidFill>
-            <a:srgbClr val="1A7A6F"/>
+            <a:ext cx="9144000" cy="54864"/>
+          </a:xfrm>
+          <a:prstGeom prst="rect">
+            <a:avLst/>
+          </a:prstGeom>
+          <a:solidFill>
+            <a:srgbClr val="2A9D8F"/>
           </a:solidFill>
           <a:ln/>
         </p:spPr>
@@ -1821,8 +2152,8 @@
         </p:nvSpPr>
         <p:spPr>
           <a:xfrm>
-            <a:off x="457200" y="45720"/>
-            <a:ext cx="8229600" cy="457200"/>
+            <a:off x="548640" y="274320"/>
+            <a:ext cx="8046720" cy="640080"/>
           </a:xfrm>
           <a:prstGeom prst="rect">
             <a:avLst/>
@@ -1831,37 +2162,84 @@
           <a:ln/>
         </p:spPr>
         <p:txBody>
-          <a:bodyPr wrap="square" rtlCol="0" anchor="ctr"/>
+          <a:bodyPr wrap="square" lIns="0" tIns="0" rIns="0" bIns="0" rtlCol="0" anchor="ctr"/>
           <a:lstStyle/>
           <a:p>
             <a:pPr indent="0" marL="0">
               <a:buNone/>
             </a:pPr>
             <a:r>
-              <a:rPr lang="en-US" sz="1800" b="1" dirty="0">
-                <a:solidFill>
-                  <a:srgbClr val="FFFFFF"/>
-                </a:solidFill>
-                <a:latin typeface="Calibri" pitchFamily="34" charset="0"/>
-                <a:ea typeface="Calibri" pitchFamily="34" charset="-122"/>
-                <a:cs typeface="Calibri" pitchFamily="34" charset="-120"/>
-              </a:rPr>
-              <a:t>Hazard symbols</a:t>
-            </a:r>
-            <a:endParaRPr lang="en-US" sz="1800" dirty="0"/>
-          </a:p>
-        </p:txBody>
-      </p:sp>
-      <p:sp>
-        <p:nvSpPr>
-          <p:cNvPr id="4" name="Text 2"/>
-          <p:cNvSpPr/>
-          <p:nvPr/>
-        </p:nvSpPr>
-        <p:spPr>
-          <a:xfrm>
-            <a:off x="731520" y="1097280"/>
-            <a:ext cx="7680960" cy="3200400"/>
+              <a:rPr lang="en-US" sz="2600" b="1" dirty="0">
+                <a:solidFill>
+                  <a:srgbClr val="1B2A4A"/>
+                </a:solidFill>
+                <a:latin typeface="Georgia" pitchFamily="34" charset="0"/>
+                <a:ea typeface="Georgia" pitchFamily="34" charset="-122"/>
+                <a:cs typeface="Georgia" pitchFamily="34" charset="-120"/>
+              </a:rPr>
+              <a:t>Key Safety Terms</a:t>
+            </a:r>
+            <a:endParaRPr lang="en-US" sz="2600" dirty="0"/>
+          </a:p>
+        </p:txBody>
+      </p:sp>
+      <p:sp>
+        <p:nvSpPr>
+          <p:cNvPr id="4" name="Shape 2"/>
+          <p:cNvSpPr/>
+          <p:nvPr/>
+        </p:nvSpPr>
+        <p:spPr>
+          <a:xfrm>
+            <a:off x="548640" y="1097280"/>
+            <a:ext cx="3749040" cy="594360"/>
+          </a:xfrm>
+          <a:prstGeom prst="rect">
+            <a:avLst/>
+          </a:prstGeom>
+          <a:solidFill>
+            <a:srgbClr val="FFFFFF"/>
+          </a:solidFill>
+          <a:ln/>
+          <a:effectLst>
+            <a:outerShdw sx="100000" sy="100000" kx="0" ky="0" algn="bl" rotWithShape="0" blurRad="50800" dist="25400" dir="8100000">
+              <a:srgbClr val="000000">
+                <a:alpha val="10000"/>
+              </a:srgbClr>
+            </a:outerShdw>
+          </a:effectLst>
+        </p:spPr>
+      </p:sp>
+      <p:sp>
+        <p:nvSpPr>
+          <p:cNvPr id="5" name="Shape 3"/>
+          <p:cNvSpPr/>
+          <p:nvPr/>
+        </p:nvSpPr>
+        <p:spPr>
+          <a:xfrm>
+            <a:off x="548640" y="1097280"/>
+            <a:ext cx="54864" cy="594360"/>
+          </a:xfrm>
+          <a:prstGeom prst="rect">
+            <a:avLst/>
+          </a:prstGeom>
+          <a:solidFill>
+            <a:srgbClr val="2A9D8F"/>
+          </a:solidFill>
+          <a:ln/>
+        </p:spPr>
+      </p:sp>
+      <p:sp>
+        <p:nvSpPr>
+          <p:cNvPr id="6" name="Text 4"/>
+          <p:cNvSpPr/>
+          <p:nvPr/>
+        </p:nvSpPr>
+        <p:spPr>
+          <a:xfrm>
+            <a:off x="685800" y="1143000"/>
+            <a:ext cx="3520440" cy="502920"/>
           </a:xfrm>
           <a:prstGeom prst="rect">
             <a:avLst/>
@@ -1877,53 +2255,185 @@
               <a:buNone/>
             </a:pPr>
             <a:r>
-              <a:rPr lang="en-US" sz="1600" dirty="0">
-                <a:solidFill>
-                  <a:srgbClr val="363636"/>
-                </a:solidFill>
-                <a:latin typeface="Calibri" pitchFamily="34" charset="0"/>
-                <a:ea typeface="Calibri" pitchFamily="34" charset="-122"/>
-                <a:cs typeface="Calibri" pitchFamily="34" charset="-120"/>
-              </a:rPr>
-              <a:t>Content for: Hazard symbols</a:t>
-            </a:r>
-            <a:endParaRPr lang="en-US" sz="1600" dirty="0"/>
+              <a:rPr lang="en-US" sz="1200" b="1" dirty="0">
+                <a:solidFill>
+                  <a:srgbClr val="1B2A4A"/>
+                </a:solidFill>
+              </a:rPr>
+              <a:t>Hazard</a:t>
+            </a:r>
+            <a:endParaRPr lang="en-US" sz="1200" dirty="0"/>
           </a:p>
           <a:p>
             <a:pPr indent="0" marL="0">
               <a:buNone/>
             </a:pPr>
-            <a:endParaRPr lang="en-US" sz="1600" dirty="0"/>
-          </a:p>
+            <a:r>
+              <a:rPr lang="en-US" sz="1000" dirty="0">
+                <a:solidFill>
+                  <a:srgbClr val="6B6660"/>
+                </a:solidFill>
+              </a:rPr>
+              <a:t>Something that could cause harm</a:t>
+            </a:r>
+            <a:endParaRPr lang="en-US" sz="1200" dirty="0"/>
+          </a:p>
+        </p:txBody>
+      </p:sp>
+      <p:sp>
+        <p:nvSpPr>
+          <p:cNvPr id="7" name="Shape 5"/>
+          <p:cNvSpPr/>
+          <p:nvPr/>
+        </p:nvSpPr>
+        <p:spPr>
+          <a:xfrm>
+            <a:off x="4480560" y="1097280"/>
+            <a:ext cx="3749040" cy="594360"/>
+          </a:xfrm>
+          <a:prstGeom prst="rect">
+            <a:avLst/>
+          </a:prstGeom>
+          <a:solidFill>
+            <a:srgbClr val="FFFFFF"/>
+          </a:solidFill>
+          <a:ln/>
+          <a:effectLst>
+            <a:outerShdw sx="100000" sy="100000" kx="0" ky="0" algn="bl" rotWithShape="0" blurRad="50800" dist="25400" dir="8100000">
+              <a:srgbClr val="000000">
+                <a:alpha val="10000"/>
+              </a:srgbClr>
+            </a:outerShdw>
+          </a:effectLst>
+        </p:spPr>
+      </p:sp>
+      <p:sp>
+        <p:nvSpPr>
+          <p:cNvPr id="8" name="Shape 6"/>
+          <p:cNvSpPr/>
+          <p:nvPr/>
+        </p:nvSpPr>
+        <p:spPr>
+          <a:xfrm>
+            <a:off x="4480560" y="1097280"/>
+            <a:ext cx="54864" cy="594360"/>
+          </a:xfrm>
+          <a:prstGeom prst="rect">
+            <a:avLst/>
+          </a:prstGeom>
+          <a:solidFill>
+            <a:srgbClr val="2A9D8F"/>
+          </a:solidFill>
+          <a:ln/>
+        </p:spPr>
+      </p:sp>
+      <p:sp>
+        <p:nvSpPr>
+          <p:cNvPr id="9" name="Text 7"/>
+          <p:cNvSpPr/>
+          <p:nvPr/>
+        </p:nvSpPr>
+        <p:spPr>
+          <a:xfrm>
+            <a:off x="4617720" y="1143000"/>
+            <a:ext cx="3520440" cy="502920"/>
+          </a:xfrm>
+          <a:prstGeom prst="rect">
+            <a:avLst/>
+          </a:prstGeom>
+          <a:noFill/>
+          <a:ln/>
+        </p:spPr>
+        <p:txBody>
+          <a:bodyPr wrap="square" rtlCol="0" anchor="ctr"/>
+          <a:lstStyle/>
           <a:p>
             <a:pPr indent="0" marL="0">
               <a:buNone/>
             </a:pPr>
             <a:r>
-              <a:rPr lang="en-US" sz="1600" dirty="0">
-                <a:solidFill>
-                  <a:srgbClr val="363636"/>
-                </a:solidFill>
-                <a:latin typeface="Calibri" pitchFamily="34" charset="0"/>
-                <a:ea typeface="Calibri" pitchFamily="34" charset="-122"/>
-                <a:cs typeface="Calibri" pitchFamily="34" charset="-120"/>
-              </a:rPr>
-              <a:t>Key points will be covered in class.</a:t>
-            </a:r>
-            <a:endParaRPr lang="en-US" sz="1600" dirty="0"/>
-          </a:p>
-        </p:txBody>
-      </p:sp>
-      <p:sp>
-        <p:nvSpPr>
-          <p:cNvPr id="5" name="Text 3"/>
-          <p:cNvSpPr/>
-          <p:nvPr/>
-        </p:nvSpPr>
-        <p:spPr>
-          <a:xfrm>
-            <a:off x="7772400" y="4663440"/>
-            <a:ext cx="1097280" cy="365760"/>
+              <a:rPr lang="en-US" sz="1200" b="1" dirty="0">
+                <a:solidFill>
+                  <a:srgbClr val="1B2A4A"/>
+                </a:solidFill>
+              </a:rPr>
+              <a:t>Risk</a:t>
+            </a:r>
+            <a:endParaRPr lang="en-US" sz="1200" dirty="0"/>
+          </a:p>
+          <a:p>
+            <a:pPr indent="0" marL="0">
+              <a:buNone/>
+            </a:pPr>
+            <a:r>
+              <a:rPr lang="en-US" sz="1000" dirty="0">
+                <a:solidFill>
+                  <a:srgbClr val="6B6660"/>
+                </a:solidFill>
+              </a:rPr>
+              <a:t>The chance that a hazard causes harm</a:t>
+            </a:r>
+            <a:endParaRPr lang="en-US" sz="1200" dirty="0"/>
+          </a:p>
+        </p:txBody>
+      </p:sp>
+      <p:sp>
+        <p:nvSpPr>
+          <p:cNvPr id="10" name="Shape 8"/>
+          <p:cNvSpPr/>
+          <p:nvPr/>
+        </p:nvSpPr>
+        <p:spPr>
+          <a:xfrm>
+            <a:off x="548640" y="1828800"/>
+            <a:ext cx="3749040" cy="594360"/>
+          </a:xfrm>
+          <a:prstGeom prst="rect">
+            <a:avLst/>
+          </a:prstGeom>
+          <a:solidFill>
+            <a:srgbClr val="FFFFFF"/>
+          </a:solidFill>
+          <a:ln/>
+          <a:effectLst>
+            <a:outerShdw sx="100000" sy="100000" kx="0" ky="0" algn="bl" rotWithShape="0" blurRad="50800" dist="25400" dir="8100000">
+              <a:srgbClr val="000000">
+                <a:alpha val="10000"/>
+              </a:srgbClr>
+            </a:outerShdw>
+          </a:effectLst>
+        </p:spPr>
+      </p:sp>
+      <p:sp>
+        <p:nvSpPr>
+          <p:cNvPr id="11" name="Shape 9"/>
+          <p:cNvSpPr/>
+          <p:nvPr/>
+        </p:nvSpPr>
+        <p:spPr>
+          <a:xfrm>
+            <a:off x="548640" y="1828800"/>
+            <a:ext cx="54864" cy="594360"/>
+          </a:xfrm>
+          <a:prstGeom prst="rect">
+            <a:avLst/>
+          </a:prstGeom>
+          <a:solidFill>
+            <a:srgbClr val="2A9D8F"/>
+          </a:solidFill>
+          <a:ln/>
+        </p:spPr>
+      </p:sp>
+      <p:sp>
+        <p:nvSpPr>
+          <p:cNvPr id="12" name="Text 10"/>
+          <p:cNvSpPr/>
+          <p:nvPr/>
+        </p:nvSpPr>
+        <p:spPr>
+          <a:xfrm>
+            <a:off x="685800" y="1874520"/>
+            <a:ext cx="3520440" cy="502920"/>
           </a:xfrm>
           <a:prstGeom prst="rect">
             <a:avLst/>
@@ -1935,21 +2445,553 @@
           <a:bodyPr wrap="square" rtlCol="0" anchor="ctr"/>
           <a:lstStyle/>
           <a:p>
-            <a:pPr algn="r" indent="0" marL="0">
+            <a:pPr indent="0" marL="0">
               <a:buNone/>
             </a:pPr>
             <a:r>
+              <a:rPr lang="en-US" sz="1200" b="1" dirty="0">
+                <a:solidFill>
+                  <a:srgbClr val="1B2A4A"/>
+                </a:solidFill>
+              </a:rPr>
+              <a:t>PPE</a:t>
+            </a:r>
+            <a:endParaRPr lang="en-US" sz="1200" dirty="0"/>
+          </a:p>
+          <a:p>
+            <a:pPr indent="0" marL="0">
+              <a:buNone/>
+            </a:pPr>
+            <a:r>
               <a:rPr lang="en-US" sz="1000" dirty="0">
                 <a:solidFill>
-                  <a:srgbClr val="999999"/>
-                </a:solidFill>
-                <a:latin typeface="Calibri" pitchFamily="34" charset="0"/>
-                <a:ea typeface="Calibri" pitchFamily="34" charset="-122"/>
-                <a:cs typeface="Calibri" pitchFamily="34" charset="-120"/>
-              </a:rPr>
-              <a:t>4 / 6</a:t>
-            </a:r>
-            <a:endParaRPr lang="en-US" sz="1000" dirty="0"/>
+                  <a:srgbClr val="6B6660"/>
+                </a:solidFill>
+              </a:rPr>
+              <a:t>Personal Protective Equipment (goggles, gloves, coat)</a:t>
+            </a:r>
+            <a:endParaRPr lang="en-US" sz="1200" dirty="0"/>
+          </a:p>
+        </p:txBody>
+      </p:sp>
+      <p:sp>
+        <p:nvSpPr>
+          <p:cNvPr id="13" name="Shape 11"/>
+          <p:cNvSpPr/>
+          <p:nvPr/>
+        </p:nvSpPr>
+        <p:spPr>
+          <a:xfrm>
+            <a:off x="4480560" y="1828800"/>
+            <a:ext cx="3749040" cy="594360"/>
+          </a:xfrm>
+          <a:prstGeom prst="rect">
+            <a:avLst/>
+          </a:prstGeom>
+          <a:solidFill>
+            <a:srgbClr val="FFFFFF"/>
+          </a:solidFill>
+          <a:ln/>
+          <a:effectLst>
+            <a:outerShdw sx="100000" sy="100000" kx="0" ky="0" algn="bl" rotWithShape="0" blurRad="50800" dist="25400" dir="8100000">
+              <a:srgbClr val="000000">
+                <a:alpha val="10000"/>
+              </a:srgbClr>
+            </a:outerShdw>
+          </a:effectLst>
+        </p:spPr>
+      </p:sp>
+      <p:sp>
+        <p:nvSpPr>
+          <p:cNvPr id="14" name="Shape 12"/>
+          <p:cNvSpPr/>
+          <p:nvPr/>
+        </p:nvSpPr>
+        <p:spPr>
+          <a:xfrm>
+            <a:off x="4480560" y="1828800"/>
+            <a:ext cx="54864" cy="594360"/>
+          </a:xfrm>
+          <a:prstGeom prst="rect">
+            <a:avLst/>
+          </a:prstGeom>
+          <a:solidFill>
+            <a:srgbClr val="2A9D8F"/>
+          </a:solidFill>
+          <a:ln/>
+        </p:spPr>
+      </p:sp>
+      <p:sp>
+        <p:nvSpPr>
+          <p:cNvPr id="15" name="Text 13"/>
+          <p:cNvSpPr/>
+          <p:nvPr/>
+        </p:nvSpPr>
+        <p:spPr>
+          <a:xfrm>
+            <a:off x="4617720" y="1874520"/>
+            <a:ext cx="3520440" cy="502920"/>
+          </a:xfrm>
+          <a:prstGeom prst="rect">
+            <a:avLst/>
+          </a:prstGeom>
+          <a:noFill/>
+          <a:ln/>
+        </p:spPr>
+        <p:txBody>
+          <a:bodyPr wrap="square" rtlCol="0" anchor="ctr"/>
+          <a:lstStyle/>
+          <a:p>
+            <a:pPr indent="0" marL="0">
+              <a:buNone/>
+            </a:pPr>
+            <a:r>
+              <a:rPr lang="en-US" sz="1200" b="1" dirty="0">
+                <a:solidFill>
+                  <a:srgbClr val="1B2A4A"/>
+                </a:solidFill>
+              </a:rPr>
+              <a:t>MSDS</a:t>
+            </a:r>
+            <a:endParaRPr lang="en-US" sz="1200" dirty="0"/>
+          </a:p>
+          <a:p>
+            <a:pPr indent="0" marL="0">
+              <a:buNone/>
+            </a:pPr>
+            <a:r>
+              <a:rPr lang="en-US" sz="1000" dirty="0">
+                <a:solidFill>
+                  <a:srgbClr val="6B6660"/>
+                </a:solidFill>
+              </a:rPr>
+              <a:t>Safety data sheet for chemicals</a:t>
+            </a:r>
+            <a:endParaRPr lang="en-US" sz="1200" dirty="0"/>
+          </a:p>
+        </p:txBody>
+      </p:sp>
+      <p:sp>
+        <p:nvSpPr>
+          <p:cNvPr id="16" name="Shape 14"/>
+          <p:cNvSpPr/>
+          <p:nvPr/>
+        </p:nvSpPr>
+        <p:spPr>
+          <a:xfrm>
+            <a:off x="548640" y="2560320"/>
+            <a:ext cx="3749040" cy="594360"/>
+          </a:xfrm>
+          <a:prstGeom prst="rect">
+            <a:avLst/>
+          </a:prstGeom>
+          <a:solidFill>
+            <a:srgbClr val="FFFFFF"/>
+          </a:solidFill>
+          <a:ln/>
+          <a:effectLst>
+            <a:outerShdw sx="100000" sy="100000" kx="0" ky="0" algn="bl" rotWithShape="0" blurRad="50800" dist="25400" dir="8100000">
+              <a:srgbClr val="000000">
+                <a:alpha val="10000"/>
+              </a:srgbClr>
+            </a:outerShdw>
+          </a:effectLst>
+        </p:spPr>
+      </p:sp>
+      <p:sp>
+        <p:nvSpPr>
+          <p:cNvPr id="17" name="Shape 15"/>
+          <p:cNvSpPr/>
+          <p:nvPr/>
+        </p:nvSpPr>
+        <p:spPr>
+          <a:xfrm>
+            <a:off x="548640" y="2560320"/>
+            <a:ext cx="54864" cy="594360"/>
+          </a:xfrm>
+          <a:prstGeom prst="rect">
+            <a:avLst/>
+          </a:prstGeom>
+          <a:solidFill>
+            <a:srgbClr val="2A9D8F"/>
+          </a:solidFill>
+          <a:ln/>
+        </p:spPr>
+      </p:sp>
+      <p:sp>
+        <p:nvSpPr>
+          <p:cNvPr id="18" name="Text 16"/>
+          <p:cNvSpPr/>
+          <p:nvPr/>
+        </p:nvSpPr>
+        <p:spPr>
+          <a:xfrm>
+            <a:off x="685800" y="2606040"/>
+            <a:ext cx="3520440" cy="502920"/>
+          </a:xfrm>
+          <a:prstGeom prst="rect">
+            <a:avLst/>
+          </a:prstGeom>
+          <a:noFill/>
+          <a:ln/>
+        </p:spPr>
+        <p:txBody>
+          <a:bodyPr wrap="square" rtlCol="0" anchor="ctr"/>
+          <a:lstStyle/>
+          <a:p>
+            <a:pPr indent="0" marL="0">
+              <a:buNone/>
+            </a:pPr>
+            <a:r>
+              <a:rPr lang="en-US" sz="1200" b="1" dirty="0">
+                <a:solidFill>
+                  <a:srgbClr val="1B2A4A"/>
+                </a:solidFill>
+              </a:rPr>
+              <a:t>Flammable</a:t>
+            </a:r>
+            <a:endParaRPr lang="en-US" sz="1200" dirty="0"/>
+          </a:p>
+          <a:p>
+            <a:pPr indent="0" marL="0">
+              <a:buNone/>
+            </a:pPr>
+            <a:r>
+              <a:rPr lang="en-US" sz="1000" dirty="0">
+                <a:solidFill>
+                  <a:srgbClr val="6B6660"/>
+                </a:solidFill>
+              </a:rPr>
+              <a:t>Can catch fire easily</a:t>
+            </a:r>
+            <a:endParaRPr lang="en-US" sz="1200" dirty="0"/>
+          </a:p>
+        </p:txBody>
+      </p:sp>
+      <p:sp>
+        <p:nvSpPr>
+          <p:cNvPr id="19" name="Shape 17"/>
+          <p:cNvSpPr/>
+          <p:nvPr/>
+        </p:nvSpPr>
+        <p:spPr>
+          <a:xfrm>
+            <a:off x="4480560" y="2560320"/>
+            <a:ext cx="3749040" cy="594360"/>
+          </a:xfrm>
+          <a:prstGeom prst="rect">
+            <a:avLst/>
+          </a:prstGeom>
+          <a:solidFill>
+            <a:srgbClr val="FFFFFF"/>
+          </a:solidFill>
+          <a:ln/>
+          <a:effectLst>
+            <a:outerShdw sx="100000" sy="100000" kx="0" ky="0" algn="bl" rotWithShape="0" blurRad="50800" dist="25400" dir="8100000">
+              <a:srgbClr val="000000">
+                <a:alpha val="10000"/>
+              </a:srgbClr>
+            </a:outerShdw>
+          </a:effectLst>
+        </p:spPr>
+      </p:sp>
+      <p:sp>
+        <p:nvSpPr>
+          <p:cNvPr id="20" name="Shape 18"/>
+          <p:cNvSpPr/>
+          <p:nvPr/>
+        </p:nvSpPr>
+        <p:spPr>
+          <a:xfrm>
+            <a:off x="4480560" y="2560320"/>
+            <a:ext cx="54864" cy="594360"/>
+          </a:xfrm>
+          <a:prstGeom prst="rect">
+            <a:avLst/>
+          </a:prstGeom>
+          <a:solidFill>
+            <a:srgbClr val="2A9D8F"/>
+          </a:solidFill>
+          <a:ln/>
+        </p:spPr>
+      </p:sp>
+      <p:sp>
+        <p:nvSpPr>
+          <p:cNvPr id="21" name="Text 19"/>
+          <p:cNvSpPr/>
+          <p:nvPr/>
+        </p:nvSpPr>
+        <p:spPr>
+          <a:xfrm>
+            <a:off x="4617720" y="2606040"/>
+            <a:ext cx="3520440" cy="502920"/>
+          </a:xfrm>
+          <a:prstGeom prst="rect">
+            <a:avLst/>
+          </a:prstGeom>
+          <a:noFill/>
+          <a:ln/>
+        </p:spPr>
+        <p:txBody>
+          <a:bodyPr wrap="square" rtlCol="0" anchor="ctr"/>
+          <a:lstStyle/>
+          <a:p>
+            <a:pPr indent="0" marL="0">
+              <a:buNone/>
+            </a:pPr>
+            <a:r>
+              <a:rPr lang="en-US" sz="1200" b="1" dirty="0">
+                <a:solidFill>
+                  <a:srgbClr val="1B2A4A"/>
+                </a:solidFill>
+              </a:rPr>
+              <a:t>Corrosive</a:t>
+            </a:r>
+            <a:endParaRPr lang="en-US" sz="1200" dirty="0"/>
+          </a:p>
+          <a:p>
+            <a:pPr indent="0" marL="0">
+              <a:buNone/>
+            </a:pPr>
+            <a:r>
+              <a:rPr lang="en-US" sz="1000" dirty="0">
+                <a:solidFill>
+                  <a:srgbClr val="6B6660"/>
+                </a:solidFill>
+              </a:rPr>
+              <a:t>Can burn/damage skin or materials</a:t>
+            </a:r>
+            <a:endParaRPr lang="en-US" sz="1200" dirty="0"/>
+          </a:p>
+        </p:txBody>
+      </p:sp>
+      <p:sp>
+        <p:nvSpPr>
+          <p:cNvPr id="22" name="Shape 20"/>
+          <p:cNvSpPr/>
+          <p:nvPr/>
+        </p:nvSpPr>
+        <p:spPr>
+          <a:xfrm>
+            <a:off x="548640" y="3291840"/>
+            <a:ext cx="3749040" cy="594360"/>
+          </a:xfrm>
+          <a:prstGeom prst="rect">
+            <a:avLst/>
+          </a:prstGeom>
+          <a:solidFill>
+            <a:srgbClr val="FFFFFF"/>
+          </a:solidFill>
+          <a:ln/>
+          <a:effectLst>
+            <a:outerShdw sx="100000" sy="100000" kx="0" ky="0" algn="bl" rotWithShape="0" blurRad="50800" dist="25400" dir="8100000">
+              <a:srgbClr val="000000">
+                <a:alpha val="10000"/>
+              </a:srgbClr>
+            </a:outerShdw>
+          </a:effectLst>
+        </p:spPr>
+      </p:sp>
+      <p:sp>
+        <p:nvSpPr>
+          <p:cNvPr id="23" name="Shape 21"/>
+          <p:cNvSpPr/>
+          <p:nvPr/>
+        </p:nvSpPr>
+        <p:spPr>
+          <a:xfrm>
+            <a:off x="548640" y="3291840"/>
+            <a:ext cx="54864" cy="594360"/>
+          </a:xfrm>
+          <a:prstGeom prst="rect">
+            <a:avLst/>
+          </a:prstGeom>
+          <a:solidFill>
+            <a:srgbClr val="2A9D8F"/>
+          </a:solidFill>
+          <a:ln/>
+        </p:spPr>
+      </p:sp>
+      <p:sp>
+        <p:nvSpPr>
+          <p:cNvPr id="24" name="Text 22"/>
+          <p:cNvSpPr/>
+          <p:nvPr/>
+        </p:nvSpPr>
+        <p:spPr>
+          <a:xfrm>
+            <a:off x="685800" y="3337560"/>
+            <a:ext cx="3520440" cy="502920"/>
+          </a:xfrm>
+          <a:prstGeom prst="rect">
+            <a:avLst/>
+          </a:prstGeom>
+          <a:noFill/>
+          <a:ln/>
+        </p:spPr>
+        <p:txBody>
+          <a:bodyPr wrap="square" rtlCol="0" anchor="ctr"/>
+          <a:lstStyle/>
+          <a:p>
+            <a:pPr indent="0" marL="0">
+              <a:buNone/>
+            </a:pPr>
+            <a:r>
+              <a:rPr lang="en-US" sz="1200" b="1" dirty="0">
+                <a:solidFill>
+                  <a:srgbClr val="1B2A4A"/>
+                </a:solidFill>
+              </a:rPr>
+              <a:t>Toxic</a:t>
+            </a:r>
+            <a:endParaRPr lang="en-US" sz="1200" dirty="0"/>
+          </a:p>
+          <a:p>
+            <a:pPr indent="0" marL="0">
+              <a:buNone/>
+            </a:pPr>
+            <a:r>
+              <a:rPr lang="en-US" sz="1000" dirty="0">
+                <a:solidFill>
+                  <a:srgbClr val="6B6660"/>
+                </a:solidFill>
+              </a:rPr>
+              <a:t>Poisonous if inhaled, touched, or swallowed</a:t>
+            </a:r>
+            <a:endParaRPr lang="en-US" sz="1200" dirty="0"/>
+          </a:p>
+        </p:txBody>
+      </p:sp>
+      <p:sp>
+        <p:nvSpPr>
+          <p:cNvPr id="25" name="Shape 23"/>
+          <p:cNvSpPr/>
+          <p:nvPr/>
+        </p:nvSpPr>
+        <p:spPr>
+          <a:xfrm>
+            <a:off x="4480560" y="3291840"/>
+            <a:ext cx="3749040" cy="594360"/>
+          </a:xfrm>
+          <a:prstGeom prst="rect">
+            <a:avLst/>
+          </a:prstGeom>
+          <a:solidFill>
+            <a:srgbClr val="FFFFFF"/>
+          </a:solidFill>
+          <a:ln/>
+          <a:effectLst>
+            <a:outerShdw sx="100000" sy="100000" kx="0" ky="0" algn="bl" rotWithShape="0" blurRad="50800" dist="25400" dir="8100000">
+              <a:srgbClr val="000000">
+                <a:alpha val="10000"/>
+              </a:srgbClr>
+            </a:outerShdw>
+          </a:effectLst>
+        </p:spPr>
+      </p:sp>
+      <p:sp>
+        <p:nvSpPr>
+          <p:cNvPr id="26" name="Shape 24"/>
+          <p:cNvSpPr/>
+          <p:nvPr/>
+        </p:nvSpPr>
+        <p:spPr>
+          <a:xfrm>
+            <a:off x="4480560" y="3291840"/>
+            <a:ext cx="54864" cy="594360"/>
+          </a:xfrm>
+          <a:prstGeom prst="rect">
+            <a:avLst/>
+          </a:prstGeom>
+          <a:solidFill>
+            <a:srgbClr val="2A9D8F"/>
+          </a:solidFill>
+          <a:ln/>
+        </p:spPr>
+      </p:sp>
+      <p:sp>
+        <p:nvSpPr>
+          <p:cNvPr id="27" name="Text 25"/>
+          <p:cNvSpPr/>
+          <p:nvPr/>
+        </p:nvSpPr>
+        <p:spPr>
+          <a:xfrm>
+            <a:off x="4617720" y="3337560"/>
+            <a:ext cx="3520440" cy="502920"/>
+          </a:xfrm>
+          <a:prstGeom prst="rect">
+            <a:avLst/>
+          </a:prstGeom>
+          <a:noFill/>
+          <a:ln/>
+        </p:spPr>
+        <p:txBody>
+          <a:bodyPr wrap="square" rtlCol="0" anchor="ctr"/>
+          <a:lstStyle/>
+          <a:p>
+            <a:pPr indent="0" marL="0">
+              <a:buNone/>
+            </a:pPr>
+            <a:r>
+              <a:rPr lang="en-US" sz="1200" b="1" dirty="0">
+                <a:solidFill>
+                  <a:srgbClr val="1B2A4A"/>
+                </a:solidFill>
+              </a:rPr>
+              <a:t>Irritant</a:t>
+            </a:r>
+            <a:endParaRPr lang="en-US" sz="1200" dirty="0"/>
+          </a:p>
+          <a:p>
+            <a:pPr indent="0" marL="0">
+              <a:buNone/>
+            </a:pPr>
+            <a:r>
+              <a:rPr lang="en-US" sz="1000" dirty="0">
+                <a:solidFill>
+                  <a:srgbClr val="6B6660"/>
+                </a:solidFill>
+              </a:rPr>
+              <a:t>Can cause redness or itching</a:t>
+            </a:r>
+            <a:endParaRPr lang="en-US" sz="1200" dirty="0"/>
+          </a:p>
+        </p:txBody>
+      </p:sp>
+      <p:sp>
+        <p:nvSpPr>
+          <p:cNvPr id="28" name="Text 26"/>
+          <p:cNvSpPr/>
+          <p:nvPr/>
+        </p:nvSpPr>
+        <p:spPr>
+          <a:xfrm>
+            <a:off x="548640" y="4800600"/>
+            <a:ext cx="3657600" cy="274320"/>
+          </a:xfrm>
+          <a:prstGeom prst="rect">
+            <a:avLst/>
+          </a:prstGeom>
+          <a:noFill/>
+          <a:ln/>
+        </p:spPr>
+        <p:txBody>
+          <a:bodyPr wrap="square" rtlCol="0" anchor="ctr"/>
+          <a:lstStyle/>
+          <a:p>
+            <a:pPr indent="0" marL="0">
+              <a:buNone/>
+            </a:pPr>
+            <a:r>
+              <a:rPr lang="en-US" sz="800" dirty="0">
+                <a:solidFill>
+                  <a:srgbClr val="9B9690"/>
+                </a:solidFill>
+              </a:rPr>
+              <a:t>mrzocchi.com</a:t>
+            </a:r>
+            <a:endParaRPr lang="en-US" sz="800" dirty="0"/>
           </a:p>
         </p:txBody>
       </p:sp>
@@ -1964,6 +3006,13 @@
 <file path=ppt/slides/slide5.xml><?xml version="1.0" encoding="utf-8"?>
 <p:sld xmlns:a="http://schemas.openxmlformats.org/drawingml/2006/main" xmlns:r="http://schemas.openxmlformats.org/officeDocument/2006/relationships" xmlns:p="http://schemas.openxmlformats.org/presentationml/2006/main">
   <p:cSld name="Slide 5">
+    <p:bg>
+      <p:bgPr>
+        <a:solidFill>
+          <a:srgbClr val="1B2A4A"/>
+        </a:solidFill>
+      </p:bgPr>
+    </p:bg>
     <p:spTree>
       <p:nvGrpSpPr>
         <p:cNvPr id="1" name=""/>
@@ -1987,13 +3036,13 @@
         <p:spPr>
           <a:xfrm>
             <a:off x="0" y="0"/>
-            <a:ext cx="9144000" cy="548640"/>
-          </a:xfrm>
-          <a:prstGeom prst="rect">
-            <a:avLst/>
-          </a:prstGeom>
-          <a:solidFill>
-            <a:srgbClr val="1A7A6F"/>
+            <a:ext cx="9144000" cy="54864"/>
+          </a:xfrm>
+          <a:prstGeom prst="rect">
+            <a:avLst/>
+          </a:prstGeom>
+          <a:solidFill>
+            <a:srgbClr val="2A9D8F"/>
           </a:solidFill>
           <a:ln/>
         </p:spPr>
@@ -2006,8 +3055,8 @@
         </p:nvSpPr>
         <p:spPr>
           <a:xfrm>
-            <a:off x="457200" y="45720"/>
-            <a:ext cx="8229600" cy="457200"/>
+            <a:off x="548640" y="457200"/>
+            <a:ext cx="8046720" cy="640080"/>
           </a:xfrm>
           <a:prstGeom prst="rect">
             <a:avLst/>
@@ -2023,176 +3072,136 @@
               <a:buNone/>
             </a:pPr>
             <a:r>
-              <a:rPr lang="en-US" sz="1800" b="1" dirty="0">
+              <a:rPr lang="en-US" sz="2800" b="1" dirty="0">
                 <a:solidFill>
                   <a:srgbClr val="FFFFFF"/>
+                </a:solidFill>
+                <a:latin typeface="Georgia" pitchFamily="34" charset="0"/>
+                <a:ea typeface="Georgia" pitchFamily="34" charset="-122"/>
+                <a:cs typeface="Georgia" pitchFamily="34" charset="-120"/>
+              </a:rPr>
+              <a:t>Key Takeaways</a:t>
+            </a:r>
+            <a:endParaRPr lang="en-US" sz="2800" dirty="0"/>
+          </a:p>
+        </p:txBody>
+      </p:sp>
+      <p:sp>
+        <p:nvSpPr>
+          <p:cNvPr id="4" name="Text 2"/>
+          <p:cNvSpPr/>
+          <p:nvPr/>
+        </p:nvSpPr>
+        <p:spPr>
+          <a:xfrm>
+            <a:off x="731520" y="1371600"/>
+            <a:ext cx="7680960" cy="3200400"/>
+          </a:xfrm>
+          <a:prstGeom prst="rect">
+            <a:avLst/>
+          </a:prstGeom>
+          <a:noFill/>
+          <a:ln/>
+        </p:spPr>
+        <p:txBody>
+          <a:bodyPr wrap="square" rtlCol="0" anchor="t"/>
+          <a:lstStyle/>
+          <a:p>
+            <a:pPr marL="342900" indent="-342900">
+              <a:spcAft>
+                <a:spcPts val="1000"/>
+              </a:spcAft>
+              <a:buSzPct val="100000"/>
+              <a:buChar char="•"/>
+            </a:pPr>
+            <a:r>
+              <a:rPr lang="en-US" sz="1600" dirty="0">
+                <a:solidFill>
+                  <a:srgbClr val="CADCFC"/>
                 </a:solidFill>
                 <a:latin typeface="Calibri" pitchFamily="34" charset="0"/>
                 <a:ea typeface="Calibri" pitchFamily="34" charset="-122"/>
                 <a:cs typeface="Calibri" pitchFamily="34" charset="-120"/>
               </a:rPr>
-              <a:t>Emergency procedures</a:t>
-            </a:r>
-            <a:endParaRPr lang="en-US" sz="1800" dirty="0"/>
-          </a:p>
-        </p:txBody>
-      </p:sp>
-      <p:sp>
-        <p:nvSpPr>
-          <p:cNvPr id="4" name="Text 2"/>
-          <p:cNvSpPr/>
-          <p:nvPr/>
-        </p:nvSpPr>
-        <p:spPr>
-          <a:xfrm>
-            <a:off x="731520" y="1097280"/>
-            <a:ext cx="7680960" cy="3200400"/>
-          </a:xfrm>
-          <a:prstGeom prst="rect">
-            <a:avLst/>
-          </a:prstGeom>
-          <a:noFill/>
-          <a:ln/>
-        </p:spPr>
-        <p:txBody>
-          <a:bodyPr wrap="square" rtlCol="0" anchor="ctr"/>
-          <a:lstStyle/>
-          <a:p>
-            <a:pPr indent="0" marL="0">
-              <a:buNone/>
+              <a:t>Always wear PPE when instructed</a:t>
+            </a:r>
+            <a:endParaRPr lang="en-US" sz="1600" dirty="0"/>
+          </a:p>
+          <a:p>
+            <a:pPr marL="342900" indent="-342900">
+              <a:spcAft>
+                <a:spcPts val="1000"/>
+              </a:spcAft>
+              <a:buSzPct val="100000"/>
+              <a:buChar char="•"/>
             </a:pPr>
             <a:r>
               <a:rPr lang="en-US" sz="1600" dirty="0">
                 <a:solidFill>
-                  <a:srgbClr val="363636"/>
+                  <a:srgbClr val="CADCFC"/>
                 </a:solidFill>
                 <a:latin typeface="Calibri" pitchFamily="34" charset="0"/>
                 <a:ea typeface="Calibri" pitchFamily="34" charset="-122"/>
                 <a:cs typeface="Calibri" pitchFamily="34" charset="-120"/>
               </a:rPr>
-              <a:t>Content for: Emergency procedures</a:t>
+              <a:t>Know where safety equipment is (fire extinguisher, eye wash, first aid)</a:t>
             </a:r>
             <a:endParaRPr lang="en-US" sz="1600" dirty="0"/>
           </a:p>
           <a:p>
-            <a:pPr indent="0" marL="0">
-              <a:buNone/>
-            </a:pPr>
-            <a:endParaRPr lang="en-US" sz="1600" dirty="0"/>
-          </a:p>
-          <a:p>
-            <a:pPr indent="0" marL="0">
-              <a:buNone/>
+            <a:pPr marL="342900" indent="-342900">
+              <a:spcAft>
+                <a:spcPts val="1000"/>
+              </a:spcAft>
+              <a:buSzPct val="100000"/>
+              <a:buChar char="•"/>
             </a:pPr>
             <a:r>
               <a:rPr lang="en-US" sz="1600" dirty="0">
                 <a:solidFill>
-                  <a:srgbClr val="363636"/>
+                  <a:srgbClr val="CADCFC"/>
                 </a:solidFill>
                 <a:latin typeface="Calibri" pitchFamily="34" charset="0"/>
                 <a:ea typeface="Calibri" pitchFamily="34" charset="-122"/>
                 <a:cs typeface="Calibri" pitchFamily="34" charset="-120"/>
               </a:rPr>
-              <a:t>Key points will be covered in class.</a:t>
+              <a:t>Read instructions COMPLETELY before starting</a:t>
             </a:r>
             <a:endParaRPr lang="en-US" sz="1600" dirty="0"/>
           </a:p>
-        </p:txBody>
-      </p:sp>
-      <p:sp>
-        <p:nvSpPr>
-          <p:cNvPr id="5" name="Text 3"/>
-          <p:cNvSpPr/>
-          <p:nvPr/>
-        </p:nvSpPr>
-        <p:spPr>
-          <a:xfrm>
-            <a:off x="7772400" y="4663440"/>
-            <a:ext cx="1097280" cy="365760"/>
-          </a:xfrm>
-          <a:prstGeom prst="rect">
-            <a:avLst/>
-          </a:prstGeom>
-          <a:noFill/>
-          <a:ln/>
-        </p:spPr>
-        <p:txBody>
-          <a:bodyPr wrap="square" rtlCol="0" anchor="ctr"/>
-          <a:lstStyle/>
-          <a:p>
-            <a:pPr algn="r" indent="0" marL="0">
-              <a:buNone/>
-            </a:pPr>
-            <a:r>
-              <a:rPr lang="en-US" sz="1000" dirty="0">
-                <a:solidFill>
-                  <a:srgbClr val="999999"/>
+          <a:p>
+            <a:pPr marL="342900" indent="-342900">
+              <a:spcAft>
+                <a:spcPts val="1000"/>
+              </a:spcAft>
+              <a:buSzPct val="100000"/>
+              <a:buChar char="•"/>
+            </a:pPr>
+            <a:r>
+              <a:rPr lang="en-US" sz="1600" dirty="0">
+                <a:solidFill>
+                  <a:srgbClr val="CADCFC"/>
                 </a:solidFill>
                 <a:latin typeface="Calibri" pitchFamily="34" charset="0"/>
                 <a:ea typeface="Calibri" pitchFamily="34" charset="-122"/>
                 <a:cs typeface="Calibri" pitchFamily="34" charset="-120"/>
               </a:rPr>
-              <a:t>5 / 6</a:t>
-            </a:r>
-            <a:endParaRPr lang="en-US" sz="1000" dirty="0"/>
-          </a:p>
-        </p:txBody>
-      </p:sp>
-    </p:spTree>
-  </p:cSld>
-  <p:clrMapOvr>
-    <a:masterClrMapping/>
-  </p:clrMapOvr>
-</p:sld>
-</file>
-
-<file path=ppt/slides/slide6.xml><?xml version="1.0" encoding="utf-8"?>
-<p:sld xmlns:a="http://schemas.openxmlformats.org/drawingml/2006/main" xmlns:r="http://schemas.openxmlformats.org/officeDocument/2006/relationships" xmlns:p="http://schemas.openxmlformats.org/presentationml/2006/main">
-  <p:cSld name="Slide 6">
-    <p:spTree>
-      <p:nvGrpSpPr>
-        <p:cNvPr id="1" name=""/>
-        <p:cNvGrpSpPr/>
-        <p:nvPr/>
-      </p:nvGrpSpPr>
-      <p:grpSpPr>
-        <a:xfrm>
-          <a:off x="0" y="0"/>
-          <a:ext cx="0" cy="0"/>
-          <a:chOff x="0" y="0"/>
-          <a:chExt cx="0" cy="0"/>
-        </a:xfrm>
-      </p:grpSpPr>
-      <p:sp>
-        <p:nvSpPr>
-          <p:cNvPr id="2" name="Shape 0"/>
-          <p:cNvSpPr/>
-          <p:nvPr/>
-        </p:nvSpPr>
-        <p:spPr>
-          <a:xfrm>
-            <a:off x="0" y="0"/>
-            <a:ext cx="9144000" cy="548640"/>
-          </a:xfrm>
-          <a:prstGeom prst="rect">
-            <a:avLst/>
-          </a:prstGeom>
-          <a:solidFill>
-            <a:srgbClr val="1A7A6F"/>
-          </a:solidFill>
-          <a:ln/>
-        </p:spPr>
-      </p:sp>
-      <p:sp>
-        <p:nvSpPr>
-          <p:cNvPr id="3" name="Text 1"/>
-          <p:cNvSpPr/>
-          <p:nvPr/>
-        </p:nvSpPr>
-        <p:spPr>
-          <a:xfrm>
-            <a:off x="457200" y="45720"/>
-            <a:ext cx="8229600" cy="457200"/>
+              <a:t>Report ALL accidents to your teacher immediately</a:t>
+            </a:r>
+            <a:endParaRPr lang="en-US" sz="1600" dirty="0"/>
+          </a:p>
+        </p:txBody>
+      </p:sp>
+      <p:sp>
+        <p:nvSpPr>
+          <p:cNvPr id="5" name="Text 3"/>
+          <p:cNvSpPr/>
+          <p:nvPr/>
+        </p:nvSpPr>
+        <p:spPr>
+          <a:xfrm>
+            <a:off x="548640" y="4572000"/>
+            <a:ext cx="3657600" cy="274320"/>
           </a:xfrm>
           <a:prstGeom prst="rect">
             <a:avLst/>
@@ -2208,116 +3217,12 @@
               <a:buNone/>
             </a:pPr>
             <a:r>
-              <a:rPr lang="en-US" sz="1800" b="1" dirty="0">
-                <a:solidFill>
-                  <a:srgbClr val="FFFFFF"/>
-                </a:solidFill>
-                <a:latin typeface="Calibri" pitchFamily="34" charset="0"/>
-                <a:ea typeface="Calibri" pitchFamily="34" charset="-122"/>
-                <a:cs typeface="Calibri" pitchFamily="34" charset="-120"/>
-              </a:rPr>
-              <a:t>Lab report structure</a:t>
-            </a:r>
-            <a:endParaRPr lang="en-US" sz="1800" dirty="0"/>
-          </a:p>
-        </p:txBody>
-      </p:sp>
-      <p:sp>
-        <p:nvSpPr>
-          <p:cNvPr id="4" name="Text 2"/>
-          <p:cNvSpPr/>
-          <p:nvPr/>
-        </p:nvSpPr>
-        <p:spPr>
-          <a:xfrm>
-            <a:off x="731520" y="1097280"/>
-            <a:ext cx="7680960" cy="3200400"/>
-          </a:xfrm>
-          <a:prstGeom prst="rect">
-            <a:avLst/>
-          </a:prstGeom>
-          <a:noFill/>
-          <a:ln/>
-        </p:spPr>
-        <p:txBody>
-          <a:bodyPr wrap="square" rtlCol="0" anchor="ctr"/>
-          <a:lstStyle/>
-          <a:p>
-            <a:pPr indent="0" marL="0">
-              <a:buNone/>
-            </a:pPr>
-            <a:r>
-              <a:rPr lang="en-US" sz="1600" dirty="0">
-                <a:solidFill>
-                  <a:srgbClr val="363636"/>
-                </a:solidFill>
-                <a:latin typeface="Calibri" pitchFamily="34" charset="0"/>
-                <a:ea typeface="Calibri" pitchFamily="34" charset="-122"/>
-                <a:cs typeface="Calibri" pitchFamily="34" charset="-120"/>
-              </a:rPr>
-              <a:t>Content for: Lab report structure</a:t>
-            </a:r>
-            <a:endParaRPr lang="en-US" sz="1600" dirty="0"/>
-          </a:p>
-          <a:p>
-            <a:pPr indent="0" marL="0">
-              <a:buNone/>
-            </a:pPr>
-            <a:endParaRPr lang="en-US" sz="1600" dirty="0"/>
-          </a:p>
-          <a:p>
-            <a:pPr indent="0" marL="0">
-              <a:buNone/>
-            </a:pPr>
-            <a:r>
-              <a:rPr lang="en-US" sz="1600" dirty="0">
-                <a:solidFill>
-                  <a:srgbClr val="363636"/>
-                </a:solidFill>
-                <a:latin typeface="Calibri" pitchFamily="34" charset="0"/>
-                <a:ea typeface="Calibri" pitchFamily="34" charset="-122"/>
-                <a:cs typeface="Calibri" pitchFamily="34" charset="-120"/>
-              </a:rPr>
-              <a:t>Key points will be covered in class.</a:t>
-            </a:r>
-            <a:endParaRPr lang="en-US" sz="1600" dirty="0"/>
-          </a:p>
-        </p:txBody>
-      </p:sp>
-      <p:sp>
-        <p:nvSpPr>
-          <p:cNvPr id="5" name="Text 3"/>
-          <p:cNvSpPr/>
-          <p:nvPr/>
-        </p:nvSpPr>
-        <p:spPr>
-          <a:xfrm>
-            <a:off x="7772400" y="4663440"/>
-            <a:ext cx="1097280" cy="365760"/>
-          </a:xfrm>
-          <a:prstGeom prst="rect">
-            <a:avLst/>
-          </a:prstGeom>
-          <a:noFill/>
-          <a:ln/>
-        </p:spPr>
-        <p:txBody>
-          <a:bodyPr wrap="square" rtlCol="0" anchor="ctr"/>
-          <a:lstStyle/>
-          <a:p>
-            <a:pPr algn="r" indent="0" marL="0">
-              <a:buNone/>
-            </a:pPr>
-            <a:r>
               <a:rPr lang="en-US" sz="1000" dirty="0">
                 <a:solidFill>
-                  <a:srgbClr val="999999"/>
-                </a:solidFill>
-                <a:latin typeface="Calibri" pitchFamily="34" charset="0"/>
-                <a:ea typeface="Calibri" pitchFamily="34" charset="-122"/>
-                <a:cs typeface="Calibri" pitchFamily="34" charset="-120"/>
-              </a:rPr>
-              <a:t>6 / 6</a:t>
+                  <a:srgbClr val="6B6660"/>
+                </a:solidFill>
+              </a:rPr>
+              <a:t>mrzocchi.com</a:t>
             </a:r>
             <a:endParaRPr lang="en-US" sz="1000" dirty="0"/>
           </a:p>

--- a/static/ppts/G6_Sci_T1_Lab_Safety.pptx
+++ b/static/ppts/G6_Sci_T1_Lab_Safety.pptx
@@ -10,9 +10,10 @@
     <p:sldId id="258" r:id="rId4"/>
     <p:sldId id="259" r:id="rId5"/>
     <p:sldId id="260" r:id="rId6"/>
+    <p:sldId id="261" r:id="rId7"/>
   </p:sldIdLst>
   <p:notesMasterIdLst>
-    <p:notesMasterId r:id="rId7"/>
+    <p:notesMasterId r:id="rId8"/>
   </p:notesMasterIdLst>
   <p:sldSz cx="9144000" cy="5143500"/>
   <p:notesSz cx="5143500" cy="9144000"/>
@@ -900,6 +901,94 @@
 </p:notes>
 </file>
 
+<file path=ppt/notesSlides/notesSlide6.xml><?xml version="1.0" encoding="utf-8"?>
+<p:notes xmlns:a="http://schemas.openxmlformats.org/drawingml/2006/main" xmlns:r="http://schemas.openxmlformats.org/officeDocument/2006/relationships" xmlns:p="http://schemas.openxmlformats.org/presentationml/2006/main">
+  <p:cSld>
+    <p:spTree>
+      <p:nvGrpSpPr>
+        <p:cNvPr id="1" name=""/>
+        <p:cNvGrpSpPr/>
+        <p:nvPr/>
+      </p:nvGrpSpPr>
+      <p:grpSpPr>
+        <a:xfrm>
+          <a:off x="0" y="0"/>
+          <a:ext cx="0" cy="0"/>
+          <a:chOff x="0" y="0"/>
+          <a:chExt cx="0" cy="0"/>
+        </a:xfrm>
+      </p:grpSpPr>
+      <p:sp>
+        <p:nvSpPr>
+          <p:cNvPr id="2" name="Slide Image Placeholder 1"/>
+          <p:cNvSpPr>
+            <a:spLocks noGrp="1" noRot="1" noChangeAspect="1"/>
+          </p:cNvSpPr>
+          <p:nvPr>
+            <p:ph type="sldImg"/>
+          </p:nvPr>
+        </p:nvSpPr>
+        <p:spPr/>
+      </p:sp>
+      <p:sp>
+        <p:nvSpPr>
+          <p:cNvPr id="3" name="Notes Placeholder 2"/>
+          <p:cNvSpPr>
+            <a:spLocks noGrp="1"/>
+          </p:cNvSpPr>
+          <p:nvPr>
+            <p:ph type="body" idx="1"/>
+          </p:nvPr>
+        </p:nvSpPr>
+        <p:spPr/>
+        <p:txBody>
+          <a:bodyPr/>
+          <a:lstStyle/>
+          <a:p>
+            <a:r>
+              <a:rPr lang="en-US" dirty="0"/>
+              <a:t/>
+            </a:r>
+            <a:endParaRPr lang="en-US" dirty="0"/>
+          </a:p>
+        </p:txBody>
+      </p:sp>
+      <p:sp>
+        <p:nvSpPr>
+          <p:cNvPr id="4" name="Slide Number Placeholder 3"/>
+          <p:cNvSpPr>
+            <a:spLocks noGrp="1"/>
+          </p:cNvSpPr>
+          <p:nvPr>
+            <p:ph type="sldNum" sz="quarter" idx="10"/>
+          </p:nvPr>
+        </p:nvSpPr>
+        <p:spPr/>
+        <p:txBody>
+          <a:bodyPr/>
+          <a:lstStyle/>
+          <a:p>
+            <a:fld id="{F7021451-1387-4CA6-816F-3879F97B5CBC}" type="slidenum">
+              <a:rPr lang="en-US"/>
+              <a:t>6</a:t>
+            </a:fld>
+            <a:endParaRPr lang="en-US"/>
+          </a:p>
+        </p:txBody>
+      </p:sp>
+    </p:spTree>
+    <p:extLst>
+      <p:ext uri="{BB962C8B-B14F-4D97-AF65-F5344CB8AC3E}">
+        <p14:creationId xmlns:p14="http://schemas.microsoft.com/office/powerpoint/2010/main" val="1024086991"/>
+      </p:ext>
+    </p:extLst>
+  </p:cSld>
+  <p:clrMapOvr>
+    <a:masterClrMapping/>
+  </p:clrMapOvr>
+</p:notes>
+</file>
+
 <file path=ppt/slideLayouts/slideLayout1.xml><?xml version="1.0" encoding="utf-8"?>
 <p:sldLayout xmlns:a="http://schemas.openxmlformats.org/drawingml/2006/main" xmlns:r="http://schemas.openxmlformats.org/officeDocument/2006/relationships" xmlns:p="http://schemas.openxmlformats.org/presentationml/2006/main" preserve="1">
   <p:cSld name="DEFAULT">
@@ -1259,7 +1348,7 @@
         </p:nvSpPr>
         <p:spPr>
           <a:xfrm>
-            <a:off x="731520" y="1280160"/>
+            <a:off x="731520" y="1097280"/>
             <a:ext cx="7772400" cy="1371600"/>
           </a:xfrm>
           <a:prstGeom prst="rect">
@@ -1276,7 +1365,7 @@
               <a:buNone/>
             </a:pPr>
             <a:r>
-              <a:rPr lang="en-US" sz="3600" b="1" dirty="0">
+              <a:rPr lang="en-US" sz="4000" b="1" dirty="0">
                 <a:solidFill>
                   <a:srgbClr val="FFFFFF"/>
                 </a:solidFill>
@@ -1286,7 +1375,7 @@
               </a:rPr>
               <a:t>Lab Safety</a:t>
             </a:r>
-            <a:endParaRPr lang="en-US" sz="3600" dirty="0"/>
+            <a:endParaRPr lang="en-US" sz="4000" dirty="0"/>
           </a:p>
         </p:txBody>
       </p:sp>
@@ -1298,7 +1387,7 @@
         </p:nvSpPr>
         <p:spPr>
           <a:xfrm>
-            <a:off x="731520" y="2743200"/>
+            <a:off x="731520" y="2560320"/>
             <a:ext cx="7772400" cy="548640"/>
           </a:xfrm>
           <a:prstGeom prst="rect">
@@ -1317,13 +1406,13 @@
             <a:r>
               <a:rPr lang="en-US" sz="1600" dirty="0">
                 <a:solidFill>
-                  <a:srgbClr val="9B9690"/>
+                  <a:srgbClr val="E9C46A"/>
                 </a:solidFill>
                 <a:latin typeface="Calibri" pitchFamily="34" charset="0"/>
                 <a:ea typeface="Calibri" pitchFamily="34" charset="-122"/>
                 <a:cs typeface="Calibri" pitchFamily="34" charset="-120"/>
               </a:rPr>
-              <a:t>G6 Science · Scientific Skills</a:t>
+              <a:t>Grade 6 Science · Mr Zocchi</a:t>
             </a:r>
             <a:endParaRPr lang="en-US" sz="1600" dirty="0"/>
           </a:p>
@@ -1331,14 +1420,36 @@
       </p:sp>
       <p:sp>
         <p:nvSpPr>
-          <p:cNvPr id="5" name="Text 3"/>
-          <p:cNvSpPr/>
-          <p:nvPr/>
-        </p:nvSpPr>
-        <p:spPr>
-          <a:xfrm>
-            <a:off x="731520" y="4389120"/>
-            <a:ext cx="7772400" cy="457200"/>
+          <p:cNvPr id="5" name="Shape 3"/>
+          <p:cNvSpPr/>
+          <p:nvPr/>
+        </p:nvSpPr>
+        <p:spPr>
+          <a:xfrm>
+            <a:off x="731520" y="3474720"/>
+            <a:ext cx="2011680" cy="411480"/>
+          </a:xfrm>
+          <a:prstGeom prst="roundRect">
+            <a:avLst>
+              <a:gd name="adj" fmla="val 17778"/>
+            </a:avLst>
+          </a:prstGeom>
+          <a:solidFill>
+            <a:srgbClr val="2A9D8F"/>
+          </a:solidFill>
+          <a:ln/>
+        </p:spPr>
+      </p:sp>
+      <p:sp>
+        <p:nvSpPr>
+          <p:cNvPr id="6" name="Text 4"/>
+          <p:cNvSpPr/>
+          <p:nvPr/>
+        </p:nvSpPr>
+        <p:spPr>
+          <a:xfrm>
+            <a:off x="731520" y="3474720"/>
+            <a:ext cx="2011680" cy="411480"/>
           </a:xfrm>
           <a:prstGeom prst="rect">
             <a:avLst/>
@@ -1350,21 +1461,21 @@
           <a:bodyPr wrap="square" rtlCol="0" anchor="ctr"/>
           <a:lstStyle/>
           <a:p>
-            <a:pPr indent="0" marL="0">
+            <a:pPr algn="ctr" indent="0" marL="0">
               <a:buNone/>
             </a:pPr>
             <a:r>
-              <a:rPr lang="en-US" sz="1000" dirty="0">
-                <a:solidFill>
-                  <a:srgbClr val="6B6660"/>
+              <a:rPr lang="en-US" sz="1200" b="1" dirty="0">
+                <a:solidFill>
+                  <a:srgbClr val="FFFFFF"/>
                 </a:solidFill>
                 <a:latin typeface="Calibri" pitchFamily="34" charset="0"/>
                 <a:ea typeface="Calibri" pitchFamily="34" charset="-122"/>
                 <a:cs typeface="Calibri" pitchFamily="34" charset="-120"/>
               </a:rPr>
-              <a:t>Mr Zocchi · mrzocchi.com</a:t>
-            </a:r>
-            <a:endParaRPr lang="en-US" sz="1000" dirty="0"/>
+              <a:t>Term 1 · Scientific Skills</a:t>
+            </a:r>
+            <a:endParaRPr lang="en-US" sz="1200" dirty="0"/>
           </a:p>
         </p:txBody>
       </p:sp>
@@ -1382,7 +1493,7 @@
     <p:bg>
       <p:bgPr>
         <a:solidFill>
-          <a:srgbClr val="FFFFFF"/>
+          <a:srgbClr val="FAF8F5"/>
         </a:solidFill>
       </p:bgPr>
     </p:bg>
@@ -1428,8 +1539,8 @@
         </p:nvSpPr>
         <p:spPr>
           <a:xfrm>
-            <a:off x="548640" y="274320"/>
-            <a:ext cx="8046720" cy="640080"/>
+            <a:off x="7772400" y="4709160"/>
+            <a:ext cx="1097280" cy="320040"/>
           </a:xfrm>
           <a:prstGeom prst="rect">
             <a:avLst/>
@@ -1438,14 +1549,105 @@
           <a:ln/>
         </p:spPr>
         <p:txBody>
-          <a:bodyPr wrap="square" lIns="0" tIns="0" rIns="0" bIns="0" rtlCol="0" anchor="ctr"/>
+          <a:bodyPr wrap="square" rtlCol="0" anchor="ctr"/>
+          <a:lstStyle/>
+          <a:p>
+            <a:pPr algn="r" indent="0" marL="0">
+              <a:buNone/>
+            </a:pPr>
+            <a:r>
+              <a:rPr lang="en-US" sz="900" dirty="0">
+                <a:solidFill>
+                  <a:srgbClr val="6B6660"/>
+                </a:solidFill>
+                <a:latin typeface="Calibri" pitchFamily="34" charset="0"/>
+                <a:ea typeface="Calibri" pitchFamily="34" charset="-122"/>
+                <a:cs typeface="Calibri" pitchFamily="34" charset="-120"/>
+              </a:rPr>
+              <a:t>2 / 6</a:t>
+            </a:r>
+            <a:endParaRPr lang="en-US" sz="900" dirty="0"/>
+          </a:p>
+        </p:txBody>
+      </p:sp>
+      <p:sp>
+        <p:nvSpPr>
+          <p:cNvPr id="4" name="Shape 2"/>
+          <p:cNvSpPr/>
+          <p:nvPr/>
+        </p:nvSpPr>
+        <p:spPr>
+          <a:xfrm>
+            <a:off x="1371600" y="914400"/>
+            <a:ext cx="6400800" cy="3200400"/>
+          </a:xfrm>
+          <a:prstGeom prst="rect">
+            <a:avLst/>
+          </a:prstGeom>
+          <a:solidFill>
+            <a:srgbClr val="FFFFFF"/>
+          </a:solidFill>
+          <a:ln w="12700">
+            <a:solidFill>
+              <a:srgbClr val="E5E2DC"/>
+            </a:solidFill>
+            <a:prstDash val="solid"/>
+          </a:ln>
+          <a:effectLst>
+            <a:outerShdw sx="100000" sy="100000" kx="0" ky="0" algn="bl" rotWithShape="0" blurRad="50800" dist="25400" dir="8100000">
+              <a:srgbClr val="000000">
+                <a:alpha val="10000"/>
+              </a:srgbClr>
+            </a:outerShdw>
+          </a:effectLst>
+        </p:spPr>
+      </p:sp>
+      <p:sp>
+        <p:nvSpPr>
+          <p:cNvPr id="5" name="Shape 3"/>
+          <p:cNvSpPr/>
+          <p:nvPr/>
+        </p:nvSpPr>
+        <p:spPr>
+          <a:xfrm>
+            <a:off x="1371600" y="914400"/>
+            <a:ext cx="91440" cy="3200400"/>
+          </a:xfrm>
+          <a:prstGeom prst="rect">
+            <a:avLst/>
+          </a:prstGeom>
+          <a:solidFill>
+            <a:srgbClr val="2A9D8F"/>
+          </a:solidFill>
+          <a:ln/>
+        </p:spPr>
+      </p:sp>
+      <p:sp>
+        <p:nvSpPr>
+          <p:cNvPr id="6" name="Text 4"/>
+          <p:cNvSpPr/>
+          <p:nvPr/>
+        </p:nvSpPr>
+        <p:spPr>
+          <a:xfrm>
+            <a:off x="1828800" y="1097280"/>
+            <a:ext cx="5669280" cy="640080"/>
+          </a:xfrm>
+          <a:prstGeom prst="rect">
+            <a:avLst/>
+          </a:prstGeom>
+          <a:noFill/>
+          <a:ln/>
+        </p:spPr>
+        <p:txBody>
+          <a:bodyPr wrap="square" rtlCol="0" anchor="ctr"/>
           <a:lstStyle/>
           <a:p>
             <a:pPr indent="0" marL="0">
               <a:buNone/>
             </a:pPr>
             <a:r>
-              <a:rPr lang="en-US" sz="2600" b="1" dirty="0">
+              <a:rPr lang="en-US" sz="2400" b="1" dirty="0">
                 <a:solidFill>
                   <a:srgbClr val="1B2A4A"/>
                 </a:solidFill>
@@ -1455,20 +1657,20 @@
               </a:rPr>
               <a:t>Why Lab Safety Matters</a:t>
             </a:r>
-            <a:endParaRPr lang="en-US" sz="2600" dirty="0"/>
-          </a:p>
-        </p:txBody>
-      </p:sp>
-      <p:sp>
-        <p:nvSpPr>
-          <p:cNvPr id="4" name="Text 2"/>
-          <p:cNvSpPr/>
-          <p:nvPr/>
-        </p:nvSpPr>
-        <p:spPr>
-          <a:xfrm>
-            <a:off x="548640" y="1097280"/>
-            <a:ext cx="8046720" cy="3474720"/>
+            <a:endParaRPr lang="en-US" sz="2400" dirty="0"/>
+          </a:p>
+        </p:txBody>
+      </p:sp>
+      <p:sp>
+        <p:nvSpPr>
+          <p:cNvPr id="7" name="Text 5"/>
+          <p:cNvSpPr/>
+          <p:nvPr/>
+        </p:nvSpPr>
+        <p:spPr>
+          <a:xfrm>
+            <a:off x="1828800" y="1828800"/>
+            <a:ext cx="5669280" cy="2011680"/>
           </a:xfrm>
           <a:prstGeom prst="rect">
             <a:avLst/>
@@ -1480,12 +1682,11 @@
           <a:bodyPr wrap="square" rtlCol="0" anchor="t"/>
           <a:lstStyle/>
           <a:p>
-            <a:pPr marL="342900" indent="-342900">
-              <a:spcAft>
-                <a:spcPts val="800"/>
-              </a:spcAft>
-              <a:buSzPct val="100000"/>
-              <a:buChar char="•"/>
+            <a:pPr indent="0" marL="0">
+              <a:lnSpc>
+                <a:spcPct val="130000"/>
+              </a:lnSpc>
+              <a:buNone/>
             </a:pPr>
             <a:r>
               <a:rPr lang="en-US" sz="1500" dirty="0">
@@ -1496,128 +1697,9 @@
                 <a:ea typeface="Calibri" pitchFamily="34" charset="-122"/>
                 <a:cs typeface="Calibri" pitchFamily="34" charset="-120"/>
               </a:rPr>
-              <a:t>Science labs contain chemicals, heat, and glass that can cause injury</a:t>
+              <a:t>Science labs contain chemicals, heat, and equipment that can cause injury if misused. Following safety rules protects you AND your classmates. Every scientist — from Grade 6 students to NASA researchers — follows strict safety procedures.</a:t>
             </a:r>
             <a:endParaRPr lang="en-US" sz="1500" dirty="0"/>
-          </a:p>
-          <a:p>
-            <a:pPr marL="342900" indent="-342900">
-              <a:spcAft>
-                <a:spcPts val="800"/>
-              </a:spcAft>
-              <a:buSzPct val="100000"/>
-              <a:buChar char="•"/>
-            </a:pPr>
-            <a:r>
-              <a:rPr lang="en-US" sz="1500" dirty="0">
-                <a:solidFill>
-                  <a:srgbClr val="3D3A36"/>
-                </a:solidFill>
-                <a:latin typeface="Calibri" pitchFamily="34" charset="0"/>
-                <a:ea typeface="Calibri" pitchFamily="34" charset="-122"/>
-                <a:cs typeface="Calibri" pitchFamily="34" charset="-120"/>
-              </a:rPr>
-              <a:t>Following safety rules protects you AND your classmates</a:t>
-            </a:r>
-            <a:endParaRPr lang="en-US" sz="1500" dirty="0"/>
-          </a:p>
-          <a:p>
-            <a:pPr marL="342900" indent="-342900">
-              <a:spcAft>
-                <a:spcPts val="800"/>
-              </a:spcAft>
-              <a:buSzPct val="100000"/>
-              <a:buChar char="•"/>
-            </a:pPr>
-            <a:r>
-              <a:rPr lang="en-US" sz="1500" dirty="0">
-                <a:solidFill>
-                  <a:srgbClr val="3D3A36"/>
-                </a:solidFill>
-                <a:latin typeface="Calibri" pitchFamily="34" charset="0"/>
-                <a:ea typeface="Calibri" pitchFamily="34" charset="-122"/>
-                <a:cs typeface="Calibri" pitchFamily="34" charset="-120"/>
-              </a:rPr>
-              <a:t>Good scientists always think about safety BEFORE starting an experiment</a:t>
-            </a:r>
-            <a:endParaRPr lang="en-US" sz="1500" dirty="0"/>
-          </a:p>
-          <a:p>
-            <a:pPr marL="342900" indent="-342900">
-              <a:spcAft>
-                <a:spcPts val="800"/>
-              </a:spcAft>
-              <a:buSzPct val="100000"/>
-              <a:buChar char="•"/>
-            </a:pPr>
-            <a:r>
-              <a:rPr lang="en-US" sz="1500" dirty="0">
-                <a:solidFill>
-                  <a:srgbClr val="3D3A36"/>
-                </a:solidFill>
-                <a:latin typeface="Calibri" pitchFamily="34" charset="0"/>
-                <a:ea typeface="Calibri" pitchFamily="34" charset="-122"/>
-                <a:cs typeface="Calibri" pitchFamily="34" charset="-120"/>
-              </a:rPr>
-              <a:t>Every school lab has specific rules — learn yours</a:t>
-            </a:r>
-            <a:endParaRPr lang="en-US" sz="1500" dirty="0"/>
-          </a:p>
-        </p:txBody>
-      </p:sp>
-      <p:sp>
-        <p:nvSpPr>
-          <p:cNvPr id="5" name="Shape 3"/>
-          <p:cNvSpPr/>
-          <p:nvPr/>
-        </p:nvSpPr>
-        <p:spPr>
-          <a:xfrm>
-            <a:off x="548640" y="4754880"/>
-            <a:ext cx="8046720" cy="9144"/>
-          </a:xfrm>
-          <a:prstGeom prst="rect">
-            <a:avLst/>
-          </a:prstGeom>
-          <a:solidFill>
-            <a:srgbClr val="F3F1EE"/>
-          </a:solidFill>
-          <a:ln/>
-        </p:spPr>
-      </p:sp>
-      <p:sp>
-        <p:nvSpPr>
-          <p:cNvPr id="6" name="Text 4"/>
-          <p:cNvSpPr/>
-          <p:nvPr/>
-        </p:nvSpPr>
-        <p:spPr>
-          <a:xfrm>
-            <a:off x="548640" y="4800600"/>
-            <a:ext cx="3657600" cy="274320"/>
-          </a:xfrm>
-          <a:prstGeom prst="rect">
-            <a:avLst/>
-          </a:prstGeom>
-          <a:noFill/>
-          <a:ln/>
-        </p:spPr>
-        <p:txBody>
-          <a:bodyPr wrap="square" rtlCol="0" anchor="ctr"/>
-          <a:lstStyle/>
-          <a:p>
-            <a:pPr indent="0" marL="0">
-              <a:buNone/>
-            </a:pPr>
-            <a:r>
-              <a:rPr lang="en-US" sz="800" dirty="0">
-                <a:solidFill>
-                  <a:srgbClr val="9B9690"/>
-                </a:solidFill>
-              </a:rPr>
-              <a:t>mrzocchi.com</a:t>
-            </a:r>
-            <a:endParaRPr lang="en-US" sz="800" dirty="0"/>
           </a:p>
         </p:txBody>
       </p:sp>
@@ -1635,7 +1717,7 @@
     <p:bg>
       <p:bgPr>
         <a:solidFill>
-          <a:srgbClr val="FFFFFF"/>
+          <a:srgbClr val="FAF8F5"/>
         </a:solidFill>
       </p:bgPr>
     </p:bg>
@@ -1681,8 +1763,8 @@
         </p:nvSpPr>
         <p:spPr>
           <a:xfrm>
-            <a:off x="548640" y="274320"/>
-            <a:ext cx="8046720" cy="640080"/>
+            <a:off x="7772400" y="4709160"/>
+            <a:ext cx="1097280" cy="320040"/>
           </a:xfrm>
           <a:prstGeom prst="rect">
             <a:avLst/>
@@ -1691,7 +1773,46 @@
           <a:ln/>
         </p:spPr>
         <p:txBody>
-          <a:bodyPr wrap="square" lIns="0" tIns="0" rIns="0" bIns="0" rtlCol="0" anchor="ctr"/>
+          <a:bodyPr wrap="square" rtlCol="0" anchor="ctr"/>
+          <a:lstStyle/>
+          <a:p>
+            <a:pPr algn="r" indent="0" marL="0">
+              <a:buNone/>
+            </a:pPr>
+            <a:r>
+              <a:rPr lang="en-US" sz="900" dirty="0">
+                <a:solidFill>
+                  <a:srgbClr val="6B6660"/>
+                </a:solidFill>
+                <a:latin typeface="Calibri" pitchFamily="34" charset="0"/>
+                <a:ea typeface="Calibri" pitchFamily="34" charset="-122"/>
+                <a:cs typeface="Calibri" pitchFamily="34" charset="-120"/>
+              </a:rPr>
+              <a:t>3 / 6</a:t>
+            </a:r>
+            <a:endParaRPr lang="en-US" sz="900" dirty="0"/>
+          </a:p>
+        </p:txBody>
+      </p:sp>
+      <p:sp>
+        <p:nvSpPr>
+          <p:cNvPr id="4" name="Text 2"/>
+          <p:cNvSpPr/>
+          <p:nvPr/>
+        </p:nvSpPr>
+        <p:spPr>
+          <a:xfrm>
+            <a:off x="457200" y="274320"/>
+            <a:ext cx="8229600" cy="640080"/>
+          </a:xfrm>
+          <a:prstGeom prst="rect">
+            <a:avLst/>
+          </a:prstGeom>
+          <a:noFill/>
+          <a:ln/>
+        </p:spPr>
+        <p:txBody>
+          <a:bodyPr wrap="square" rtlCol="0" anchor="ctr"/>
           <a:lstStyle/>
           <a:p>
             <a:pPr indent="0" marL="0">
@@ -1706,7 +1827,7 @@
                 <a:ea typeface="Georgia" pitchFamily="34" charset="-122"/>
                 <a:cs typeface="Georgia" pitchFamily="34" charset="-120"/>
               </a:rPr>
-              <a:t>Lab Equipment Rules</a:t>
+              <a:t>Essential Lab Rules</a:t>
             </a:r>
             <a:endParaRPr lang="en-US" sz="2600" dirty="0"/>
           </a:p>
@@ -1714,22 +1835,27 @@
       </p:sp>
       <p:sp>
         <p:nvSpPr>
-          <p:cNvPr id="4" name="Shape 2"/>
-          <p:cNvSpPr/>
-          <p:nvPr/>
-        </p:nvSpPr>
-        <p:spPr>
-          <a:xfrm>
-            <a:off x="457200" y="1097280"/>
-            <a:ext cx="3840480" cy="3474720"/>
-          </a:xfrm>
-          <a:prstGeom prst="rect">
-            <a:avLst/>
-          </a:prstGeom>
-          <a:solidFill>
-            <a:srgbClr val="F3F1EE"/>
-          </a:solidFill>
-          <a:ln/>
+          <p:cNvPr id="5" name="Shape 3"/>
+          <p:cNvSpPr/>
+          <p:nvPr/>
+        </p:nvSpPr>
+        <p:spPr>
+          <a:xfrm>
+            <a:off x="457200" y="1188720"/>
+            <a:ext cx="2560320" cy="1828800"/>
+          </a:xfrm>
+          <a:prstGeom prst="rect">
+            <a:avLst/>
+          </a:prstGeom>
+          <a:solidFill>
+            <a:srgbClr val="FFFFFF"/>
+          </a:solidFill>
+          <a:ln w="12700">
+            <a:solidFill>
+              <a:srgbClr val="E5E2DC"/>
+            </a:solidFill>
+            <a:prstDash val="solid"/>
+          </a:ln>
           <a:effectLst>
             <a:outerShdw sx="100000" sy="100000" kx="0" ky="0" algn="bl" rotWithShape="0" blurRad="50800" dist="25400" dir="8100000">
               <a:srgbClr val="000000">
@@ -1741,14 +1867,34 @@
       </p:sp>
       <p:sp>
         <p:nvSpPr>
-          <p:cNvPr id="5" name="Text 3"/>
-          <p:cNvSpPr/>
-          <p:nvPr/>
-        </p:nvSpPr>
-        <p:spPr>
-          <a:xfrm>
-            <a:off x="640080" y="1234440"/>
-            <a:ext cx="3474720" cy="411480"/>
+          <p:cNvPr id="6" name="Shape 4"/>
+          <p:cNvSpPr/>
+          <p:nvPr/>
+        </p:nvSpPr>
+        <p:spPr>
+          <a:xfrm>
+            <a:off x="457200" y="1188720"/>
+            <a:ext cx="2560320" cy="54864"/>
+          </a:xfrm>
+          <a:prstGeom prst="rect">
+            <a:avLst/>
+          </a:prstGeom>
+          <a:solidFill>
+            <a:srgbClr val="2A9D8F"/>
+          </a:solidFill>
+          <a:ln/>
+        </p:spPr>
+      </p:sp>
+      <p:sp>
+        <p:nvSpPr>
+          <p:cNvPr id="7" name="Text 5"/>
+          <p:cNvSpPr/>
+          <p:nvPr/>
+        </p:nvSpPr>
+        <p:spPr>
+          <a:xfrm>
+            <a:off x="594360" y="1325880"/>
+            <a:ext cx="2286000" cy="365760"/>
           </a:xfrm>
           <a:prstGeom prst="rect">
             <a:avLst/>
@@ -1764,71 +1910,46 @@
               <a:buNone/>
             </a:pPr>
             <a:r>
-              <a:rPr lang="en-US" sz="1600" b="1" dirty="0">
+              <a:rPr lang="en-US" sz="1400" b="1" dirty="0">
                 <a:solidFill>
                   <a:srgbClr val="1B2A4A"/>
-                </a:solidFill>
-                <a:latin typeface="Georgia" pitchFamily="34" charset="0"/>
-                <a:ea typeface="Georgia" pitchFamily="34" charset="-122"/>
-                <a:cs typeface="Georgia" pitchFamily="34" charset="-120"/>
-              </a:rPr>
-              <a:t>DO</a:t>
-            </a:r>
-            <a:endParaRPr lang="en-US" sz="1600" dirty="0"/>
-          </a:p>
-        </p:txBody>
-      </p:sp>
-      <p:sp>
-        <p:nvSpPr>
-          <p:cNvPr id="6" name="Text 4"/>
-          <p:cNvSpPr/>
-          <p:nvPr/>
-        </p:nvSpPr>
-        <p:spPr>
-          <a:xfrm>
-            <a:off x="640080" y="1737360"/>
-            <a:ext cx="3474720" cy="2651760"/>
-          </a:xfrm>
-          <a:prstGeom prst="rect">
-            <a:avLst/>
-          </a:prstGeom>
-          <a:noFill/>
-          <a:ln/>
-        </p:spPr>
-        <p:txBody>
-          <a:bodyPr wrap="square" rtlCol="0" anchor="t"/>
-          <a:lstStyle/>
-          <a:p>
-            <a:pPr marL="342900" indent="-342900">
-              <a:spcAft>
-                <a:spcPts val="600"/>
-              </a:spcAft>
-              <a:buSzPct val="100000"/>
-              <a:buChar char="•"/>
-            </a:pPr>
-            <a:r>
-              <a:rPr lang="en-US" sz="1300" dirty="0">
-                <a:solidFill>
-                  <a:srgbClr val="3D3A36"/>
                 </a:solidFill>
                 <a:latin typeface="Calibri" pitchFamily="34" charset="0"/>
                 <a:ea typeface="Calibri" pitchFamily="34" charset="-122"/>
                 <a:cs typeface="Calibri" pitchFamily="34" charset="-120"/>
               </a:rPr>
-              <a:t>Wear safety goggles when using chemicals</a:t>
-            </a:r>
-            <a:endParaRPr lang="en-US" sz="1300" dirty="0"/>
-          </a:p>
-          <a:p>
-            <a:pPr marL="342900" indent="-342900">
-              <a:spcAft>
-                <a:spcPts val="600"/>
-              </a:spcAft>
-              <a:buSzPct val="100000"/>
-              <a:buChar char="•"/>
-            </a:pPr>
-            <a:r>
-              <a:rPr lang="en-US" sz="1300" dirty="0">
+              <a:t>Dress Code</a:t>
+            </a:r>
+            <a:endParaRPr lang="en-US" sz="1400" dirty="0"/>
+          </a:p>
+        </p:txBody>
+      </p:sp>
+      <p:sp>
+        <p:nvSpPr>
+          <p:cNvPr id="8" name="Text 6"/>
+          <p:cNvSpPr/>
+          <p:nvPr/>
+        </p:nvSpPr>
+        <p:spPr>
+          <a:xfrm>
+            <a:off x="594360" y="1737360"/>
+            <a:ext cx="2286000" cy="1097280"/>
+          </a:xfrm>
+          <a:prstGeom prst="rect">
+            <a:avLst/>
+          </a:prstGeom>
+          <a:noFill/>
+          <a:ln/>
+        </p:spPr>
+        <p:txBody>
+          <a:bodyPr wrap="square" rtlCol="0" anchor="t"/>
+          <a:lstStyle/>
+          <a:p>
+            <a:pPr indent="0" marL="0">
+              <a:buNone/>
+            </a:pPr>
+            <a:r>
+              <a:rPr lang="en-US" sz="1100" dirty="0">
                 <a:solidFill>
                   <a:srgbClr val="3D3A36"/>
                 </a:solidFill>
@@ -1836,72 +1957,35 @@
                 <a:ea typeface="Calibri" pitchFamily="34" charset="-122"/>
                 <a:cs typeface="Calibri" pitchFamily="34" charset="-120"/>
               </a:rPr>
-              <a:t>Tie back long hair</a:t>
-            </a:r>
-            <a:endParaRPr lang="en-US" sz="1300" dirty="0"/>
-          </a:p>
-          <a:p>
-            <a:pPr marL="342900" indent="-342900">
-              <a:spcAft>
-                <a:spcPts val="600"/>
-              </a:spcAft>
-              <a:buSzPct val="100000"/>
-              <a:buChar char="•"/>
-            </a:pPr>
-            <a:r>
-              <a:rPr lang="en-US" sz="1300" dirty="0">
-                <a:solidFill>
-                  <a:srgbClr val="3D3A36"/>
-                </a:solidFill>
-                <a:latin typeface="Calibri" pitchFamily="34" charset="0"/>
-                <a:ea typeface="Calibri" pitchFamily="34" charset="-122"/>
-                <a:cs typeface="Calibri" pitchFamily="34" charset="-120"/>
-              </a:rPr>
-              <a:t>Report broken glass immediately</a:t>
-            </a:r>
-            <a:endParaRPr lang="en-US" sz="1300" dirty="0"/>
-          </a:p>
-          <a:p>
-            <a:pPr marL="342900" indent="-342900">
-              <a:spcAft>
-                <a:spcPts val="600"/>
-              </a:spcAft>
-              <a:buSzPct val="100000"/>
-              <a:buChar char="•"/>
-            </a:pPr>
-            <a:r>
-              <a:rPr lang="en-US" sz="1300" dirty="0">
-                <a:solidFill>
-                  <a:srgbClr val="3D3A36"/>
-                </a:solidFill>
-                <a:latin typeface="Calibri" pitchFamily="34" charset="0"/>
-                <a:ea typeface="Calibri" pitchFamily="34" charset="-122"/>
-                <a:cs typeface="Calibri" pitchFamily="34" charset="-120"/>
-              </a:rPr>
-              <a:t>Wash hands after experiments</a:t>
-            </a:r>
-            <a:endParaRPr lang="en-US" sz="1300" dirty="0"/>
-          </a:p>
-        </p:txBody>
-      </p:sp>
-      <p:sp>
-        <p:nvSpPr>
-          <p:cNvPr id="7" name="Shape 5"/>
-          <p:cNvSpPr/>
-          <p:nvPr/>
-        </p:nvSpPr>
-        <p:spPr>
-          <a:xfrm>
-            <a:off x="4846320" y="1097280"/>
-            <a:ext cx="3840480" cy="3474720"/>
-          </a:xfrm>
-          <a:prstGeom prst="rect">
-            <a:avLst/>
-          </a:prstGeom>
-          <a:solidFill>
-            <a:srgbClr val="F3F1EE"/>
-          </a:solidFill>
-          <a:ln/>
+              <a:t>Tie back long hair. Remove dangling jewelry. Wear closed-toe shoes. Put on safety goggles before handling chemicals.</a:t>
+            </a:r>
+            <a:endParaRPr lang="en-US" sz="1100" dirty="0"/>
+          </a:p>
+        </p:txBody>
+      </p:sp>
+      <p:sp>
+        <p:nvSpPr>
+          <p:cNvPr id="9" name="Shape 7"/>
+          <p:cNvSpPr/>
+          <p:nvPr/>
+        </p:nvSpPr>
+        <p:spPr>
+          <a:xfrm>
+            <a:off x="3291840" y="1188720"/>
+            <a:ext cx="2560320" cy="1828800"/>
+          </a:xfrm>
+          <a:prstGeom prst="rect">
+            <a:avLst/>
+          </a:prstGeom>
+          <a:solidFill>
+            <a:srgbClr val="FFFFFF"/>
+          </a:solidFill>
+          <a:ln w="12700">
+            <a:solidFill>
+              <a:srgbClr val="E5E2DC"/>
+            </a:solidFill>
+            <a:prstDash val="solid"/>
+          </a:ln>
           <a:effectLst>
             <a:outerShdw sx="100000" sy="100000" kx="0" ky="0" algn="bl" rotWithShape="0" blurRad="50800" dist="25400" dir="8100000">
               <a:srgbClr val="000000">
@@ -1913,14 +1997,34 @@
       </p:sp>
       <p:sp>
         <p:nvSpPr>
-          <p:cNvPr id="8" name="Text 6"/>
-          <p:cNvSpPr/>
-          <p:nvPr/>
-        </p:nvSpPr>
-        <p:spPr>
-          <a:xfrm>
-            <a:off x="5029200" y="1234440"/>
-            <a:ext cx="3474720" cy="411480"/>
+          <p:cNvPr id="10" name="Shape 8"/>
+          <p:cNvSpPr/>
+          <p:nvPr/>
+        </p:nvSpPr>
+        <p:spPr>
+          <a:xfrm>
+            <a:off x="3291840" y="1188720"/>
+            <a:ext cx="2560320" cy="54864"/>
+          </a:xfrm>
+          <a:prstGeom prst="rect">
+            <a:avLst/>
+          </a:prstGeom>
+          <a:solidFill>
+            <a:srgbClr val="2A9D8F"/>
+          </a:solidFill>
+          <a:ln/>
+        </p:spPr>
+      </p:sp>
+      <p:sp>
+        <p:nvSpPr>
+          <p:cNvPr id="11" name="Text 9"/>
+          <p:cNvSpPr/>
+          <p:nvPr/>
+        </p:nvSpPr>
+        <p:spPr>
+          <a:xfrm>
+            <a:off x="3429000" y="1325880"/>
+            <a:ext cx="2286000" cy="365760"/>
           </a:xfrm>
           <a:prstGeom prst="rect">
             <a:avLst/>
@@ -1936,71 +2040,46 @@
               <a:buNone/>
             </a:pPr>
             <a:r>
-              <a:rPr lang="en-US" sz="1600" b="1" dirty="0">
+              <a:rPr lang="en-US" sz="1400" b="1" dirty="0">
                 <a:solidFill>
                   <a:srgbClr val="1B2A4A"/>
-                </a:solidFill>
-                <a:latin typeface="Georgia" pitchFamily="34" charset="0"/>
-                <a:ea typeface="Georgia" pitchFamily="34" charset="-122"/>
-                <a:cs typeface="Georgia" pitchFamily="34" charset="-120"/>
-              </a:rPr>
-              <a:t>DON'T</a:t>
-            </a:r>
-            <a:endParaRPr lang="en-US" sz="1600" dirty="0"/>
-          </a:p>
-        </p:txBody>
-      </p:sp>
-      <p:sp>
-        <p:nvSpPr>
-          <p:cNvPr id="9" name="Text 7"/>
-          <p:cNvSpPr/>
-          <p:nvPr/>
-        </p:nvSpPr>
-        <p:spPr>
-          <a:xfrm>
-            <a:off x="5029200" y="1737360"/>
-            <a:ext cx="3474720" cy="2651760"/>
-          </a:xfrm>
-          <a:prstGeom prst="rect">
-            <a:avLst/>
-          </a:prstGeom>
-          <a:noFill/>
-          <a:ln/>
-        </p:spPr>
-        <p:txBody>
-          <a:bodyPr wrap="square" rtlCol="0" anchor="t"/>
-          <a:lstStyle/>
-          <a:p>
-            <a:pPr marL="342900" indent="-342900">
-              <a:spcAft>
-                <a:spcPts val="600"/>
-              </a:spcAft>
-              <a:buSzPct val="100000"/>
-              <a:buChar char="•"/>
-            </a:pPr>
-            <a:r>
-              <a:rPr lang="en-US" sz="1300" dirty="0">
-                <a:solidFill>
-                  <a:srgbClr val="3D3A36"/>
                 </a:solidFill>
                 <a:latin typeface="Calibri" pitchFamily="34" charset="0"/>
                 <a:ea typeface="Calibri" pitchFamily="34" charset="-122"/>
                 <a:cs typeface="Calibri" pitchFamily="34" charset="-120"/>
               </a:rPr>
-              <a:t>Eat or drink in the lab</a:t>
-            </a:r>
-            <a:endParaRPr lang="en-US" sz="1300" dirty="0"/>
-          </a:p>
-          <a:p>
-            <a:pPr marL="342900" indent="-342900">
-              <a:spcAft>
-                <a:spcPts val="600"/>
-              </a:spcAft>
-              <a:buSzPct val="100000"/>
-              <a:buChar char="•"/>
-            </a:pPr>
-            <a:r>
-              <a:rPr lang="en-US" sz="1300" dirty="0">
+              <a:t>Behaviour</a:t>
+            </a:r>
+            <a:endParaRPr lang="en-US" sz="1400" dirty="0"/>
+          </a:p>
+        </p:txBody>
+      </p:sp>
+      <p:sp>
+        <p:nvSpPr>
+          <p:cNvPr id="12" name="Text 10"/>
+          <p:cNvSpPr/>
+          <p:nvPr/>
+        </p:nvSpPr>
+        <p:spPr>
+          <a:xfrm>
+            <a:off x="3429000" y="1737360"/>
+            <a:ext cx="2286000" cy="1097280"/>
+          </a:xfrm>
+          <a:prstGeom prst="rect">
+            <a:avLst/>
+          </a:prstGeom>
+          <a:noFill/>
+          <a:ln/>
+        </p:spPr>
+        <p:txBody>
+          <a:bodyPr wrap="square" rtlCol="0" anchor="t"/>
+          <a:lstStyle/>
+          <a:p>
+            <a:pPr indent="0" marL="0">
+              <a:buNone/>
+            </a:pPr>
+            <a:r>
+              <a:rPr lang="en-US" sz="1100" dirty="0">
                 <a:solidFill>
                   <a:srgbClr val="3D3A36"/>
                 </a:solidFill>
@@ -2008,41 +2087,129 @@
                 <a:ea typeface="Calibri" pitchFamily="34" charset="-122"/>
                 <a:cs typeface="Calibri" pitchFamily="34" charset="-120"/>
               </a:rPr>
-              <a:t>Run or push near equipment</a:t>
-            </a:r>
-            <a:endParaRPr lang="en-US" sz="1300" dirty="0"/>
-          </a:p>
-          <a:p>
-            <a:pPr marL="342900" indent="-342900">
-              <a:spcAft>
-                <a:spcPts val="600"/>
-              </a:spcAft>
-              <a:buSzPct val="100000"/>
-              <a:buChar char="•"/>
-            </a:pPr>
-            <a:r>
-              <a:rPr lang="en-US" sz="1300" dirty="0">
-                <a:solidFill>
-                  <a:srgbClr val="3D3A36"/>
+              <a:t>No running, eating, or drinking in the lab. Never taste or smell chemicals directly. Follow teacher instructions at all times.</a:t>
+            </a:r>
+            <a:endParaRPr lang="en-US" sz="1100" dirty="0"/>
+          </a:p>
+        </p:txBody>
+      </p:sp>
+      <p:sp>
+        <p:nvSpPr>
+          <p:cNvPr id="13" name="Shape 11"/>
+          <p:cNvSpPr/>
+          <p:nvPr/>
+        </p:nvSpPr>
+        <p:spPr>
+          <a:xfrm>
+            <a:off x="6126480" y="1188720"/>
+            <a:ext cx="2560320" cy="1828800"/>
+          </a:xfrm>
+          <a:prstGeom prst="rect">
+            <a:avLst/>
+          </a:prstGeom>
+          <a:solidFill>
+            <a:srgbClr val="FFFFFF"/>
+          </a:solidFill>
+          <a:ln w="12700">
+            <a:solidFill>
+              <a:srgbClr val="E5E2DC"/>
+            </a:solidFill>
+            <a:prstDash val="solid"/>
+          </a:ln>
+          <a:effectLst>
+            <a:outerShdw sx="100000" sy="100000" kx="0" ky="0" algn="bl" rotWithShape="0" blurRad="50800" dist="25400" dir="8100000">
+              <a:srgbClr val="000000">
+                <a:alpha val="10000"/>
+              </a:srgbClr>
+            </a:outerShdw>
+          </a:effectLst>
+        </p:spPr>
+      </p:sp>
+      <p:sp>
+        <p:nvSpPr>
+          <p:cNvPr id="14" name="Shape 12"/>
+          <p:cNvSpPr/>
+          <p:nvPr/>
+        </p:nvSpPr>
+        <p:spPr>
+          <a:xfrm>
+            <a:off x="6126480" y="1188720"/>
+            <a:ext cx="2560320" cy="54864"/>
+          </a:xfrm>
+          <a:prstGeom prst="rect">
+            <a:avLst/>
+          </a:prstGeom>
+          <a:solidFill>
+            <a:srgbClr val="2A9D8F"/>
+          </a:solidFill>
+          <a:ln/>
+        </p:spPr>
+      </p:sp>
+      <p:sp>
+        <p:nvSpPr>
+          <p:cNvPr id="15" name="Text 13"/>
+          <p:cNvSpPr/>
+          <p:nvPr/>
+        </p:nvSpPr>
+        <p:spPr>
+          <a:xfrm>
+            <a:off x="6263640" y="1325880"/>
+            <a:ext cx="2286000" cy="365760"/>
+          </a:xfrm>
+          <a:prstGeom prst="rect">
+            <a:avLst/>
+          </a:prstGeom>
+          <a:noFill/>
+          <a:ln/>
+        </p:spPr>
+        <p:txBody>
+          <a:bodyPr wrap="square" rtlCol="0" anchor="ctr"/>
+          <a:lstStyle/>
+          <a:p>
+            <a:pPr indent="0" marL="0">
+              <a:buNone/>
+            </a:pPr>
+            <a:r>
+              <a:rPr lang="en-US" sz="1400" b="1" dirty="0">
+                <a:solidFill>
+                  <a:srgbClr val="1B2A4A"/>
                 </a:solidFill>
                 <a:latin typeface="Calibri" pitchFamily="34" charset="0"/>
                 <a:ea typeface="Calibri" pitchFamily="34" charset="-122"/>
                 <a:cs typeface="Calibri" pitchFamily="34" charset="-120"/>
               </a:rPr>
-              <a:t>Touch chemicals with bare hands</a:t>
-            </a:r>
-            <a:endParaRPr lang="en-US" sz="1300" dirty="0"/>
-          </a:p>
-          <a:p>
-            <a:pPr marL="342900" indent="-342900">
-              <a:spcAft>
-                <a:spcPts val="600"/>
-              </a:spcAft>
-              <a:buSzPct val="100000"/>
-              <a:buChar char="•"/>
-            </a:pPr>
-            <a:r>
-              <a:rPr lang="en-US" sz="1300" dirty="0">
+              <a:t>Equipment</a:t>
+            </a:r>
+            <a:endParaRPr lang="en-US" sz="1400" dirty="0"/>
+          </a:p>
+        </p:txBody>
+      </p:sp>
+      <p:sp>
+        <p:nvSpPr>
+          <p:cNvPr id="16" name="Text 14"/>
+          <p:cNvSpPr/>
+          <p:nvPr/>
+        </p:nvSpPr>
+        <p:spPr>
+          <a:xfrm>
+            <a:off x="6263640" y="1737360"/>
+            <a:ext cx="2286000" cy="1097280"/>
+          </a:xfrm>
+          <a:prstGeom prst="rect">
+            <a:avLst/>
+          </a:prstGeom>
+          <a:noFill/>
+          <a:ln/>
+        </p:spPr>
+        <p:txBody>
+          <a:bodyPr wrap="square" rtlCol="0" anchor="t"/>
+          <a:lstStyle/>
+          <a:p>
+            <a:pPr indent="0" marL="0">
+              <a:buNone/>
+            </a:pPr>
+            <a:r>
+              <a:rPr lang="en-US" sz="1100" dirty="0">
                 <a:solidFill>
                   <a:srgbClr val="3D3A36"/>
                 </a:solidFill>
@@ -2050,45 +2217,9 @@
                 <a:ea typeface="Calibri" pitchFamily="34" charset="-122"/>
                 <a:cs typeface="Calibri" pitchFamily="34" charset="-120"/>
               </a:rPr>
-              <a:t>Point test tubes at anyone</a:t>
-            </a:r>
-            <a:endParaRPr lang="en-US" sz="1300" dirty="0"/>
-          </a:p>
-        </p:txBody>
-      </p:sp>
-      <p:sp>
-        <p:nvSpPr>
-          <p:cNvPr id="10" name="Text 8"/>
-          <p:cNvSpPr/>
-          <p:nvPr/>
-        </p:nvSpPr>
-        <p:spPr>
-          <a:xfrm>
-            <a:off x="548640" y="4800600"/>
-            <a:ext cx="3657600" cy="274320"/>
-          </a:xfrm>
-          <a:prstGeom prst="rect">
-            <a:avLst/>
-          </a:prstGeom>
-          <a:noFill/>
-          <a:ln/>
-        </p:spPr>
-        <p:txBody>
-          <a:bodyPr wrap="square" rtlCol="0" anchor="ctr"/>
-          <a:lstStyle/>
-          <a:p>
-            <a:pPr indent="0" marL="0">
-              <a:buNone/>
-            </a:pPr>
-            <a:r>
-              <a:rPr lang="en-US" sz="800" dirty="0">
-                <a:solidFill>
-                  <a:srgbClr val="9B9690"/>
-                </a:solidFill>
-              </a:rPr>
-              <a:t>mrzocchi.com</a:t>
-            </a:r>
-            <a:endParaRPr lang="en-US" sz="800" dirty="0"/>
+              <a:t>Check glassware for cracks before use. Carry microscopes with two hands. Never point a test tube at anyone when heating.</a:t>
+            </a:r>
+            <a:endParaRPr lang="en-US" sz="1100" dirty="0"/>
           </a:p>
         </p:txBody>
       </p:sp>
@@ -2152,8 +2283,8 @@
         </p:nvSpPr>
         <p:spPr>
           <a:xfrm>
-            <a:off x="548640" y="274320"/>
-            <a:ext cx="8046720" cy="640080"/>
+            <a:off x="7772400" y="4709160"/>
+            <a:ext cx="1097280" cy="320040"/>
           </a:xfrm>
           <a:prstGeom prst="rect">
             <a:avLst/>
@@ -2162,7 +2293,46 @@
           <a:ln/>
         </p:spPr>
         <p:txBody>
-          <a:bodyPr wrap="square" lIns="0" tIns="0" rIns="0" bIns="0" rtlCol="0" anchor="ctr"/>
+          <a:bodyPr wrap="square" rtlCol="0" anchor="ctr"/>
+          <a:lstStyle/>
+          <a:p>
+            <a:pPr algn="r" indent="0" marL="0">
+              <a:buNone/>
+            </a:pPr>
+            <a:r>
+              <a:rPr lang="en-US" sz="900" dirty="0">
+                <a:solidFill>
+                  <a:srgbClr val="6B6660"/>
+                </a:solidFill>
+                <a:latin typeface="Calibri" pitchFamily="34" charset="0"/>
+                <a:ea typeface="Calibri" pitchFamily="34" charset="-122"/>
+                <a:cs typeface="Calibri" pitchFamily="34" charset="-120"/>
+              </a:rPr>
+              <a:t>4 / 6</a:t>
+            </a:r>
+            <a:endParaRPr lang="en-US" sz="900" dirty="0"/>
+          </a:p>
+        </p:txBody>
+      </p:sp>
+      <p:sp>
+        <p:nvSpPr>
+          <p:cNvPr id="4" name="Text 2"/>
+          <p:cNvSpPr/>
+          <p:nvPr/>
+        </p:nvSpPr>
+        <p:spPr>
+          <a:xfrm>
+            <a:off x="457200" y="274320"/>
+            <a:ext cx="8229600" cy="640080"/>
+          </a:xfrm>
+          <a:prstGeom prst="rect">
+            <a:avLst/>
+          </a:prstGeom>
+          <a:noFill/>
+          <a:ln/>
+        </p:spPr>
+        <p:txBody>
+          <a:bodyPr wrap="square" rtlCol="0" anchor="ctr"/>
           <a:lstStyle/>
           <a:p>
             <a:pPr indent="0" marL="0">
@@ -2177,7 +2347,7 @@
                 <a:ea typeface="Georgia" pitchFamily="34" charset="-122"/>
                 <a:cs typeface="Georgia" pitchFamily="34" charset="-120"/>
               </a:rPr>
-              <a:t>Key Safety Terms</a:t>
+              <a:t>Hazard Symbols You Must Know</a:t>
             </a:r>
             <a:endParaRPr lang="en-US" sz="2600" dirty="0"/>
           </a:p>
@@ -2185,14 +2355,141 @@
       </p:sp>
       <p:sp>
         <p:nvSpPr>
-          <p:cNvPr id="4" name="Shape 2"/>
-          <p:cNvSpPr/>
-          <p:nvPr/>
-        </p:nvSpPr>
-        <p:spPr>
-          <a:xfrm>
-            <a:off x="548640" y="1097280"/>
-            <a:ext cx="3749040" cy="594360"/>
+          <p:cNvPr id="5" name="Text 3"/>
+          <p:cNvSpPr/>
+          <p:nvPr/>
+        </p:nvSpPr>
+        <p:spPr>
+          <a:xfrm>
+            <a:off x="457200" y="1188720"/>
+            <a:ext cx="3840480" cy="3474720"/>
+          </a:xfrm>
+          <a:prstGeom prst="rect">
+            <a:avLst/>
+          </a:prstGeom>
+          <a:noFill/>
+          <a:ln/>
+        </p:spPr>
+        <p:txBody>
+          <a:bodyPr wrap="square" rtlCol="0" anchor="t"/>
+          <a:lstStyle/>
+          <a:p>
+            <a:pPr marL="342900" indent="-342900">
+              <a:spcAft>
+                <a:spcPts val="600"/>
+              </a:spcAft>
+              <a:buSzPct val="100000"/>
+              <a:buChar char="•"/>
+            </a:pPr>
+            <a:r>
+              <a:rPr lang="en-US" sz="1400" dirty="0">
+                <a:solidFill>
+                  <a:srgbClr val="3D3A36"/>
+                </a:solidFill>
+                <a:latin typeface="Calibri" pitchFamily="34" charset="0"/>
+                <a:ea typeface="Calibri" pitchFamily="34" charset="-122"/>
+                <a:cs typeface="Calibri" pitchFamily="34" charset="-120"/>
+              </a:rPr>
+              <a:t>Flammable — catches fire easily</a:t>
+            </a:r>
+            <a:endParaRPr lang="en-US" sz="1400" dirty="0"/>
+          </a:p>
+          <a:p>
+            <a:pPr marL="342900" indent="-342900">
+              <a:spcAft>
+                <a:spcPts val="600"/>
+              </a:spcAft>
+              <a:buSzPct val="100000"/>
+              <a:buChar char="•"/>
+            </a:pPr>
+            <a:r>
+              <a:rPr lang="en-US" sz="1400" dirty="0">
+                <a:solidFill>
+                  <a:srgbClr val="3D3A36"/>
+                </a:solidFill>
+                <a:latin typeface="Calibri" pitchFamily="34" charset="0"/>
+                <a:ea typeface="Calibri" pitchFamily="34" charset="-122"/>
+                <a:cs typeface="Calibri" pitchFamily="34" charset="-120"/>
+              </a:rPr>
+              <a:t>Corrosive — burns skin or eyes</a:t>
+            </a:r>
+            <a:endParaRPr lang="en-US" sz="1400" dirty="0"/>
+          </a:p>
+          <a:p>
+            <a:pPr marL="342900" indent="-342900">
+              <a:spcAft>
+                <a:spcPts val="600"/>
+              </a:spcAft>
+              <a:buSzPct val="100000"/>
+              <a:buChar char="•"/>
+            </a:pPr>
+            <a:r>
+              <a:rPr lang="en-US" sz="1400" dirty="0">
+                <a:solidFill>
+                  <a:srgbClr val="3D3A36"/>
+                </a:solidFill>
+                <a:latin typeface="Calibri" pitchFamily="34" charset="0"/>
+                <a:ea typeface="Calibri" pitchFamily="34" charset="-122"/>
+                <a:cs typeface="Calibri" pitchFamily="34" charset="-120"/>
+              </a:rPr>
+              <a:t>Toxic — poisonous if swallowed, inhaled, or absorbed</a:t>
+            </a:r>
+            <a:endParaRPr lang="en-US" sz="1400" dirty="0"/>
+          </a:p>
+          <a:p>
+            <a:pPr marL="342900" indent="-342900">
+              <a:spcAft>
+                <a:spcPts val="600"/>
+              </a:spcAft>
+              <a:buSzPct val="100000"/>
+              <a:buChar char="•"/>
+            </a:pPr>
+            <a:r>
+              <a:rPr lang="en-US" sz="1400" dirty="0">
+                <a:solidFill>
+                  <a:srgbClr val="3D3A36"/>
+                </a:solidFill>
+                <a:latin typeface="Calibri" pitchFamily="34" charset="0"/>
+                <a:ea typeface="Calibri" pitchFamily="34" charset="-122"/>
+                <a:cs typeface="Calibri" pitchFamily="34" charset="-120"/>
+              </a:rPr>
+              <a:t>Irritant — causes redness, itching, or swelling</a:t>
+            </a:r>
+            <a:endParaRPr lang="en-US" sz="1400" dirty="0"/>
+          </a:p>
+          <a:p>
+            <a:pPr marL="342900" indent="-342900">
+              <a:spcAft>
+                <a:spcPts val="600"/>
+              </a:spcAft>
+              <a:buSzPct val="100000"/>
+              <a:buChar char="•"/>
+            </a:pPr>
+            <a:r>
+              <a:rPr lang="en-US" sz="1400" dirty="0">
+                <a:solidFill>
+                  <a:srgbClr val="3D3A36"/>
+                </a:solidFill>
+                <a:latin typeface="Calibri" pitchFamily="34" charset="0"/>
+                <a:ea typeface="Calibri" pitchFamily="34" charset="-122"/>
+                <a:cs typeface="Calibri" pitchFamily="34" charset="-120"/>
+              </a:rPr>
+              <a:t>Oxidising — makes fires burn more intensely</a:t>
+            </a:r>
+            <a:endParaRPr lang="en-US" sz="1400" dirty="0"/>
+          </a:p>
+        </p:txBody>
+      </p:sp>
+      <p:sp>
+        <p:nvSpPr>
+          <p:cNvPr id="6" name="Shape 4"/>
+          <p:cNvSpPr/>
+          <p:nvPr/>
+        </p:nvSpPr>
+        <p:spPr>
+          <a:xfrm>
+            <a:off x="4846320" y="1188720"/>
+            <a:ext cx="3840480" cy="3474720"/>
           </a:xfrm>
           <a:prstGeom prst="rect">
             <a:avLst/>
@@ -2200,7 +2497,12 @@
           <a:solidFill>
             <a:srgbClr val="FFFFFF"/>
           </a:solidFill>
-          <a:ln/>
+          <a:ln w="12700">
+            <a:solidFill>
+              <a:srgbClr val="E5E2DC"/>
+            </a:solidFill>
+            <a:prstDash val="solid"/>
+          </a:ln>
           <a:effectLst>
             <a:outerShdw sx="100000" sy="100000" kx="0" ky="0" algn="bl" rotWithShape="0" blurRad="50800" dist="25400" dir="8100000">
               <a:srgbClr val="000000">
@@ -2212,14 +2514,14 @@
       </p:sp>
       <p:sp>
         <p:nvSpPr>
-          <p:cNvPr id="5" name="Shape 3"/>
-          <p:cNvSpPr/>
-          <p:nvPr/>
-        </p:nvSpPr>
-        <p:spPr>
-          <a:xfrm>
-            <a:off x="548640" y="1097280"/>
-            <a:ext cx="54864" cy="594360"/>
+          <p:cNvPr id="7" name="Shape 5"/>
+          <p:cNvSpPr/>
+          <p:nvPr/>
+        </p:nvSpPr>
+        <p:spPr>
+          <a:xfrm>
+            <a:off x="4846320" y="1188720"/>
+            <a:ext cx="3840480" cy="54864"/>
           </a:xfrm>
           <a:prstGeom prst="rect">
             <a:avLst/>
@@ -2232,14 +2534,14 @@
       </p:sp>
       <p:sp>
         <p:nvSpPr>
-          <p:cNvPr id="6" name="Text 4"/>
-          <p:cNvSpPr/>
-          <p:nvPr/>
-        </p:nvSpPr>
-        <p:spPr>
-          <a:xfrm>
-            <a:off x="685800" y="1143000"/>
-            <a:ext cx="3520440" cy="502920"/>
+          <p:cNvPr id="8" name="Text 6"/>
+          <p:cNvSpPr/>
+          <p:nvPr/>
+        </p:nvSpPr>
+        <p:spPr>
+          <a:xfrm>
+            <a:off x="5120640" y="1371600"/>
+            <a:ext cx="3291840" cy="3108960"/>
           </a:xfrm>
           <a:prstGeom prst="rect">
             <a:avLst/>
@@ -2248,750 +2550,116 @@
           <a:ln/>
         </p:spPr>
         <p:txBody>
-          <a:bodyPr wrap="square" rtlCol="0" anchor="ctr"/>
+          <a:bodyPr wrap="square" rtlCol="0" anchor="t"/>
           <a:lstStyle/>
           <a:p>
             <a:pPr indent="0" marL="0">
+              <a:spcAft>
+                <a:spcPts val="400"/>
+              </a:spcAft>
               <a:buNone/>
             </a:pPr>
             <a:r>
-              <a:rPr lang="en-US" sz="1200" b="1" dirty="0">
+              <a:rPr lang="en-US" sz="1600" b="1" dirty="0">
                 <a:solidFill>
                   <a:srgbClr val="1B2A4A"/>
                 </a:solidFill>
-              </a:rPr>
-              <a:t>Hazard</a:t>
-            </a:r>
-            <a:endParaRPr lang="en-US" sz="1200" dirty="0"/>
+                <a:latin typeface="Calibri" pitchFamily="34" charset="0"/>
+                <a:ea typeface="Calibri" pitchFamily="34" charset="-122"/>
+                <a:cs typeface="Calibri" pitchFamily="34" charset="-120"/>
+              </a:rPr>
+              <a:t>What to Do in an Emergency</a:t>
+            </a:r>
+            <a:endParaRPr lang="en-US" sz="1600" dirty="0"/>
           </a:p>
           <a:p>
             <a:pPr indent="0" marL="0">
+              <a:spcAft>
+                <a:spcPts val="400"/>
+              </a:spcAft>
               <a:buNone/>
             </a:pPr>
-            <a:r>
-              <a:rPr lang="en-US" sz="1000" dirty="0">
-                <a:solidFill>
-                  <a:srgbClr val="6B6660"/>
-                </a:solidFill>
-              </a:rPr>
-              <a:t>Something that could cause harm</a:t>
-            </a:r>
-            <a:endParaRPr lang="en-US" sz="1200" dirty="0"/>
-          </a:p>
-        </p:txBody>
-      </p:sp>
-      <p:sp>
-        <p:nvSpPr>
-          <p:cNvPr id="7" name="Shape 5"/>
-          <p:cNvSpPr/>
-          <p:nvPr/>
-        </p:nvSpPr>
-        <p:spPr>
-          <a:xfrm>
-            <a:off x="4480560" y="1097280"/>
-            <a:ext cx="3749040" cy="594360"/>
-          </a:xfrm>
-          <a:prstGeom prst="rect">
-            <a:avLst/>
-          </a:prstGeom>
-          <a:solidFill>
-            <a:srgbClr val="FFFFFF"/>
-          </a:solidFill>
-          <a:ln/>
-          <a:effectLst>
-            <a:outerShdw sx="100000" sy="100000" kx="0" ky="0" algn="bl" rotWithShape="0" blurRad="50800" dist="25400" dir="8100000">
-              <a:srgbClr val="000000">
-                <a:alpha val="10000"/>
-              </a:srgbClr>
-            </a:outerShdw>
-          </a:effectLst>
-        </p:spPr>
-      </p:sp>
-      <p:sp>
-        <p:nvSpPr>
-          <p:cNvPr id="8" name="Shape 6"/>
-          <p:cNvSpPr/>
-          <p:nvPr/>
-        </p:nvSpPr>
-        <p:spPr>
-          <a:xfrm>
-            <a:off x="4480560" y="1097280"/>
-            <a:ext cx="54864" cy="594360"/>
-          </a:xfrm>
-          <a:prstGeom prst="rect">
-            <a:avLst/>
-          </a:prstGeom>
-          <a:solidFill>
-            <a:srgbClr val="2A9D8F"/>
-          </a:solidFill>
-          <a:ln/>
-        </p:spPr>
-      </p:sp>
-      <p:sp>
-        <p:nvSpPr>
-          <p:cNvPr id="9" name="Text 7"/>
-          <p:cNvSpPr/>
-          <p:nvPr/>
-        </p:nvSpPr>
-        <p:spPr>
-          <a:xfrm>
-            <a:off x="4617720" y="1143000"/>
-            <a:ext cx="3520440" cy="502920"/>
-          </a:xfrm>
-          <a:prstGeom prst="rect">
-            <a:avLst/>
-          </a:prstGeom>
-          <a:noFill/>
-          <a:ln/>
-        </p:spPr>
-        <p:txBody>
-          <a:bodyPr wrap="square" rtlCol="0" anchor="ctr"/>
-          <a:lstStyle/>
+            <a:endParaRPr lang="en-US" sz="1600" dirty="0"/>
+          </a:p>
           <a:p>
             <a:pPr indent="0" marL="0">
+              <a:spcAft>
+                <a:spcPts val="400"/>
+              </a:spcAft>
               <a:buNone/>
             </a:pPr>
             <a:r>
-              <a:rPr lang="en-US" sz="1200" b="1" dirty="0">
-                <a:solidFill>
-                  <a:srgbClr val="1B2A4A"/>
-                </a:solidFill>
-              </a:rPr>
-              <a:t>Risk</a:t>
-            </a:r>
-            <a:endParaRPr lang="en-US" sz="1200" dirty="0"/>
+              <a:rPr lang="en-US" sz="1300" dirty="0">
+                <a:solidFill>
+                  <a:srgbClr val="3D3A36"/>
+                </a:solidFill>
+                <a:latin typeface="Calibri" pitchFamily="34" charset="0"/>
+                <a:ea typeface="Calibri" pitchFamily="34" charset="-122"/>
+                <a:cs typeface="Calibri" pitchFamily="34" charset="-120"/>
+              </a:rPr>
+              <a:t>Tell the teacher IMMEDIATELY</a:t>
+            </a:r>
+            <a:endParaRPr lang="en-US" sz="1600" dirty="0"/>
           </a:p>
           <a:p>
             <a:pPr indent="0" marL="0">
+              <a:spcAft>
+                <a:spcPts val="400"/>
+              </a:spcAft>
               <a:buNone/>
             </a:pPr>
             <a:r>
-              <a:rPr lang="en-US" sz="1000" dirty="0">
-                <a:solidFill>
-                  <a:srgbClr val="6B6660"/>
-                </a:solidFill>
-              </a:rPr>
-              <a:t>The chance that a hazard causes harm</a:t>
-            </a:r>
-            <a:endParaRPr lang="en-US" sz="1200" dirty="0"/>
-          </a:p>
-        </p:txBody>
-      </p:sp>
-      <p:sp>
-        <p:nvSpPr>
-          <p:cNvPr id="10" name="Shape 8"/>
-          <p:cNvSpPr/>
-          <p:nvPr/>
-        </p:nvSpPr>
-        <p:spPr>
-          <a:xfrm>
-            <a:off x="548640" y="1828800"/>
-            <a:ext cx="3749040" cy="594360"/>
-          </a:xfrm>
-          <a:prstGeom prst="rect">
-            <a:avLst/>
-          </a:prstGeom>
-          <a:solidFill>
-            <a:srgbClr val="FFFFFF"/>
-          </a:solidFill>
-          <a:ln/>
-          <a:effectLst>
-            <a:outerShdw sx="100000" sy="100000" kx="0" ky="0" algn="bl" rotWithShape="0" blurRad="50800" dist="25400" dir="8100000">
-              <a:srgbClr val="000000">
-                <a:alpha val="10000"/>
-              </a:srgbClr>
-            </a:outerShdw>
-          </a:effectLst>
-        </p:spPr>
-      </p:sp>
-      <p:sp>
-        <p:nvSpPr>
-          <p:cNvPr id="11" name="Shape 9"/>
-          <p:cNvSpPr/>
-          <p:nvPr/>
-        </p:nvSpPr>
-        <p:spPr>
-          <a:xfrm>
-            <a:off x="548640" y="1828800"/>
-            <a:ext cx="54864" cy="594360"/>
-          </a:xfrm>
-          <a:prstGeom prst="rect">
-            <a:avLst/>
-          </a:prstGeom>
-          <a:solidFill>
-            <a:srgbClr val="2A9D8F"/>
-          </a:solidFill>
-          <a:ln/>
-        </p:spPr>
-      </p:sp>
-      <p:sp>
-        <p:nvSpPr>
-          <p:cNvPr id="12" name="Text 10"/>
-          <p:cNvSpPr/>
-          <p:nvPr/>
-        </p:nvSpPr>
-        <p:spPr>
-          <a:xfrm>
-            <a:off x="685800" y="1874520"/>
-            <a:ext cx="3520440" cy="502920"/>
-          </a:xfrm>
-          <a:prstGeom prst="rect">
-            <a:avLst/>
-          </a:prstGeom>
-          <a:noFill/>
-          <a:ln/>
-        </p:spPr>
-        <p:txBody>
-          <a:bodyPr wrap="square" rtlCol="0" anchor="ctr"/>
-          <a:lstStyle/>
+              <a:rPr lang="en-US" sz="1300" dirty="0">
+                <a:solidFill>
+                  <a:srgbClr val="3D3A36"/>
+                </a:solidFill>
+                <a:latin typeface="Calibri" pitchFamily="34" charset="0"/>
+                <a:ea typeface="Calibri" pitchFamily="34" charset="-122"/>
+                <a:cs typeface="Calibri" pitchFamily="34" charset="-120"/>
+              </a:rPr>
+              <a:t>Know where the fire extinguisher, eye wash station, and first aid kit are</a:t>
+            </a:r>
+            <a:endParaRPr lang="en-US" sz="1600" dirty="0"/>
+          </a:p>
           <a:p>
             <a:pPr indent="0" marL="0">
+              <a:spcAft>
+                <a:spcPts val="400"/>
+              </a:spcAft>
               <a:buNone/>
             </a:pPr>
             <a:r>
-              <a:rPr lang="en-US" sz="1200" b="1" dirty="0">
-                <a:solidFill>
-                  <a:srgbClr val="1B2A4A"/>
-                </a:solidFill>
-              </a:rPr>
-              <a:t>PPE</a:t>
-            </a:r>
-            <a:endParaRPr lang="en-US" sz="1200" dirty="0"/>
+              <a:rPr lang="en-US" sz="1300" dirty="0">
+                <a:solidFill>
+                  <a:srgbClr val="3D3A36"/>
+                </a:solidFill>
+                <a:latin typeface="Calibri" pitchFamily="34" charset="0"/>
+                <a:ea typeface="Calibri" pitchFamily="34" charset="-122"/>
+                <a:cs typeface="Calibri" pitchFamily="34" charset="-120"/>
+              </a:rPr>
+              <a:t>If chemicals splash on skin, wash with water for 15 minutes</a:t>
+            </a:r>
+            <a:endParaRPr lang="en-US" sz="1600" dirty="0"/>
           </a:p>
           <a:p>
             <a:pPr indent="0" marL="0">
+              <a:spcAft>
+                <a:spcPts val="400"/>
+              </a:spcAft>
               <a:buNone/>
             </a:pPr>
             <a:r>
-              <a:rPr lang="en-US" sz="1000" dirty="0">
-                <a:solidFill>
-                  <a:srgbClr val="6B6660"/>
-                </a:solidFill>
-              </a:rPr>
-              <a:t>Personal Protective Equipment (goggles, gloves, coat)</a:t>
-            </a:r>
-            <a:endParaRPr lang="en-US" sz="1200" dirty="0"/>
-          </a:p>
-        </p:txBody>
-      </p:sp>
-      <p:sp>
-        <p:nvSpPr>
-          <p:cNvPr id="13" name="Shape 11"/>
-          <p:cNvSpPr/>
-          <p:nvPr/>
-        </p:nvSpPr>
-        <p:spPr>
-          <a:xfrm>
-            <a:off x="4480560" y="1828800"/>
-            <a:ext cx="3749040" cy="594360"/>
-          </a:xfrm>
-          <a:prstGeom prst="rect">
-            <a:avLst/>
-          </a:prstGeom>
-          <a:solidFill>
-            <a:srgbClr val="FFFFFF"/>
-          </a:solidFill>
-          <a:ln/>
-          <a:effectLst>
-            <a:outerShdw sx="100000" sy="100000" kx="0" ky="0" algn="bl" rotWithShape="0" blurRad="50800" dist="25400" dir="8100000">
-              <a:srgbClr val="000000">
-                <a:alpha val="10000"/>
-              </a:srgbClr>
-            </a:outerShdw>
-          </a:effectLst>
-        </p:spPr>
-      </p:sp>
-      <p:sp>
-        <p:nvSpPr>
-          <p:cNvPr id="14" name="Shape 12"/>
-          <p:cNvSpPr/>
-          <p:nvPr/>
-        </p:nvSpPr>
-        <p:spPr>
-          <a:xfrm>
-            <a:off x="4480560" y="1828800"/>
-            <a:ext cx="54864" cy="594360"/>
-          </a:xfrm>
-          <a:prstGeom prst="rect">
-            <a:avLst/>
-          </a:prstGeom>
-          <a:solidFill>
-            <a:srgbClr val="2A9D8F"/>
-          </a:solidFill>
-          <a:ln/>
-        </p:spPr>
-      </p:sp>
-      <p:sp>
-        <p:nvSpPr>
-          <p:cNvPr id="15" name="Text 13"/>
-          <p:cNvSpPr/>
-          <p:nvPr/>
-        </p:nvSpPr>
-        <p:spPr>
-          <a:xfrm>
-            <a:off x="4617720" y="1874520"/>
-            <a:ext cx="3520440" cy="502920"/>
-          </a:xfrm>
-          <a:prstGeom prst="rect">
-            <a:avLst/>
-          </a:prstGeom>
-          <a:noFill/>
-          <a:ln/>
-        </p:spPr>
-        <p:txBody>
-          <a:bodyPr wrap="square" rtlCol="0" anchor="ctr"/>
-          <a:lstStyle/>
-          <a:p>
-            <a:pPr indent="0" marL="0">
-              <a:buNone/>
-            </a:pPr>
-            <a:r>
-              <a:rPr lang="en-US" sz="1200" b="1" dirty="0">
-                <a:solidFill>
-                  <a:srgbClr val="1B2A4A"/>
-                </a:solidFill>
-              </a:rPr>
-              <a:t>MSDS</a:t>
-            </a:r>
-            <a:endParaRPr lang="en-US" sz="1200" dirty="0"/>
-          </a:p>
-          <a:p>
-            <a:pPr indent="0" marL="0">
-              <a:buNone/>
-            </a:pPr>
-            <a:r>
-              <a:rPr lang="en-US" sz="1000" dirty="0">
-                <a:solidFill>
-                  <a:srgbClr val="6B6660"/>
-                </a:solidFill>
-              </a:rPr>
-              <a:t>Safety data sheet for chemicals</a:t>
-            </a:r>
-            <a:endParaRPr lang="en-US" sz="1200" dirty="0"/>
-          </a:p>
-        </p:txBody>
-      </p:sp>
-      <p:sp>
-        <p:nvSpPr>
-          <p:cNvPr id="16" name="Shape 14"/>
-          <p:cNvSpPr/>
-          <p:nvPr/>
-        </p:nvSpPr>
-        <p:spPr>
-          <a:xfrm>
-            <a:off x="548640" y="2560320"/>
-            <a:ext cx="3749040" cy="594360"/>
-          </a:xfrm>
-          <a:prstGeom prst="rect">
-            <a:avLst/>
-          </a:prstGeom>
-          <a:solidFill>
-            <a:srgbClr val="FFFFFF"/>
-          </a:solidFill>
-          <a:ln/>
-          <a:effectLst>
-            <a:outerShdw sx="100000" sy="100000" kx="0" ky="0" algn="bl" rotWithShape="0" blurRad="50800" dist="25400" dir="8100000">
-              <a:srgbClr val="000000">
-                <a:alpha val="10000"/>
-              </a:srgbClr>
-            </a:outerShdw>
-          </a:effectLst>
-        </p:spPr>
-      </p:sp>
-      <p:sp>
-        <p:nvSpPr>
-          <p:cNvPr id="17" name="Shape 15"/>
-          <p:cNvSpPr/>
-          <p:nvPr/>
-        </p:nvSpPr>
-        <p:spPr>
-          <a:xfrm>
-            <a:off x="548640" y="2560320"/>
-            <a:ext cx="54864" cy="594360"/>
-          </a:xfrm>
-          <a:prstGeom prst="rect">
-            <a:avLst/>
-          </a:prstGeom>
-          <a:solidFill>
-            <a:srgbClr val="2A9D8F"/>
-          </a:solidFill>
-          <a:ln/>
-        </p:spPr>
-      </p:sp>
-      <p:sp>
-        <p:nvSpPr>
-          <p:cNvPr id="18" name="Text 16"/>
-          <p:cNvSpPr/>
-          <p:nvPr/>
-        </p:nvSpPr>
-        <p:spPr>
-          <a:xfrm>
-            <a:off x="685800" y="2606040"/>
-            <a:ext cx="3520440" cy="502920"/>
-          </a:xfrm>
-          <a:prstGeom prst="rect">
-            <a:avLst/>
-          </a:prstGeom>
-          <a:noFill/>
-          <a:ln/>
-        </p:spPr>
-        <p:txBody>
-          <a:bodyPr wrap="square" rtlCol="0" anchor="ctr"/>
-          <a:lstStyle/>
-          <a:p>
-            <a:pPr indent="0" marL="0">
-              <a:buNone/>
-            </a:pPr>
-            <a:r>
-              <a:rPr lang="en-US" sz="1200" b="1" dirty="0">
-                <a:solidFill>
-                  <a:srgbClr val="1B2A4A"/>
-                </a:solidFill>
-              </a:rPr>
-              <a:t>Flammable</a:t>
-            </a:r>
-            <a:endParaRPr lang="en-US" sz="1200" dirty="0"/>
-          </a:p>
-          <a:p>
-            <a:pPr indent="0" marL="0">
-              <a:buNone/>
-            </a:pPr>
-            <a:r>
-              <a:rPr lang="en-US" sz="1000" dirty="0">
-                <a:solidFill>
-                  <a:srgbClr val="6B6660"/>
-                </a:solidFill>
-              </a:rPr>
-              <a:t>Can catch fire easily</a:t>
-            </a:r>
-            <a:endParaRPr lang="en-US" sz="1200" dirty="0"/>
-          </a:p>
-        </p:txBody>
-      </p:sp>
-      <p:sp>
-        <p:nvSpPr>
-          <p:cNvPr id="19" name="Shape 17"/>
-          <p:cNvSpPr/>
-          <p:nvPr/>
-        </p:nvSpPr>
-        <p:spPr>
-          <a:xfrm>
-            <a:off x="4480560" y="2560320"/>
-            <a:ext cx="3749040" cy="594360"/>
-          </a:xfrm>
-          <a:prstGeom prst="rect">
-            <a:avLst/>
-          </a:prstGeom>
-          <a:solidFill>
-            <a:srgbClr val="FFFFFF"/>
-          </a:solidFill>
-          <a:ln/>
-          <a:effectLst>
-            <a:outerShdw sx="100000" sy="100000" kx="0" ky="0" algn="bl" rotWithShape="0" blurRad="50800" dist="25400" dir="8100000">
-              <a:srgbClr val="000000">
-                <a:alpha val="10000"/>
-              </a:srgbClr>
-            </a:outerShdw>
-          </a:effectLst>
-        </p:spPr>
-      </p:sp>
-      <p:sp>
-        <p:nvSpPr>
-          <p:cNvPr id="20" name="Shape 18"/>
-          <p:cNvSpPr/>
-          <p:nvPr/>
-        </p:nvSpPr>
-        <p:spPr>
-          <a:xfrm>
-            <a:off x="4480560" y="2560320"/>
-            <a:ext cx="54864" cy="594360"/>
-          </a:xfrm>
-          <a:prstGeom prst="rect">
-            <a:avLst/>
-          </a:prstGeom>
-          <a:solidFill>
-            <a:srgbClr val="2A9D8F"/>
-          </a:solidFill>
-          <a:ln/>
-        </p:spPr>
-      </p:sp>
-      <p:sp>
-        <p:nvSpPr>
-          <p:cNvPr id="21" name="Text 19"/>
-          <p:cNvSpPr/>
-          <p:nvPr/>
-        </p:nvSpPr>
-        <p:spPr>
-          <a:xfrm>
-            <a:off x="4617720" y="2606040"/>
-            <a:ext cx="3520440" cy="502920"/>
-          </a:xfrm>
-          <a:prstGeom prst="rect">
-            <a:avLst/>
-          </a:prstGeom>
-          <a:noFill/>
-          <a:ln/>
-        </p:spPr>
-        <p:txBody>
-          <a:bodyPr wrap="square" rtlCol="0" anchor="ctr"/>
-          <a:lstStyle/>
-          <a:p>
-            <a:pPr indent="0" marL="0">
-              <a:buNone/>
-            </a:pPr>
-            <a:r>
-              <a:rPr lang="en-US" sz="1200" b="1" dirty="0">
-                <a:solidFill>
-                  <a:srgbClr val="1B2A4A"/>
-                </a:solidFill>
-              </a:rPr>
-              <a:t>Corrosive</a:t>
-            </a:r>
-            <a:endParaRPr lang="en-US" sz="1200" dirty="0"/>
-          </a:p>
-          <a:p>
-            <a:pPr indent="0" marL="0">
-              <a:buNone/>
-            </a:pPr>
-            <a:r>
-              <a:rPr lang="en-US" sz="1000" dirty="0">
-                <a:solidFill>
-                  <a:srgbClr val="6B6660"/>
-                </a:solidFill>
-              </a:rPr>
-              <a:t>Can burn/damage skin or materials</a:t>
-            </a:r>
-            <a:endParaRPr lang="en-US" sz="1200" dirty="0"/>
-          </a:p>
-        </p:txBody>
-      </p:sp>
-      <p:sp>
-        <p:nvSpPr>
-          <p:cNvPr id="22" name="Shape 20"/>
-          <p:cNvSpPr/>
-          <p:nvPr/>
-        </p:nvSpPr>
-        <p:spPr>
-          <a:xfrm>
-            <a:off x="548640" y="3291840"/>
-            <a:ext cx="3749040" cy="594360"/>
-          </a:xfrm>
-          <a:prstGeom prst="rect">
-            <a:avLst/>
-          </a:prstGeom>
-          <a:solidFill>
-            <a:srgbClr val="FFFFFF"/>
-          </a:solidFill>
-          <a:ln/>
-          <a:effectLst>
-            <a:outerShdw sx="100000" sy="100000" kx="0" ky="0" algn="bl" rotWithShape="0" blurRad="50800" dist="25400" dir="8100000">
-              <a:srgbClr val="000000">
-                <a:alpha val="10000"/>
-              </a:srgbClr>
-            </a:outerShdw>
-          </a:effectLst>
-        </p:spPr>
-      </p:sp>
-      <p:sp>
-        <p:nvSpPr>
-          <p:cNvPr id="23" name="Shape 21"/>
-          <p:cNvSpPr/>
-          <p:nvPr/>
-        </p:nvSpPr>
-        <p:spPr>
-          <a:xfrm>
-            <a:off x="548640" y="3291840"/>
-            <a:ext cx="54864" cy="594360"/>
-          </a:xfrm>
-          <a:prstGeom prst="rect">
-            <a:avLst/>
-          </a:prstGeom>
-          <a:solidFill>
-            <a:srgbClr val="2A9D8F"/>
-          </a:solidFill>
-          <a:ln/>
-        </p:spPr>
-      </p:sp>
-      <p:sp>
-        <p:nvSpPr>
-          <p:cNvPr id="24" name="Text 22"/>
-          <p:cNvSpPr/>
-          <p:nvPr/>
-        </p:nvSpPr>
-        <p:spPr>
-          <a:xfrm>
-            <a:off x="685800" y="3337560"/>
-            <a:ext cx="3520440" cy="502920"/>
-          </a:xfrm>
-          <a:prstGeom prst="rect">
-            <a:avLst/>
-          </a:prstGeom>
-          <a:noFill/>
-          <a:ln/>
-        </p:spPr>
-        <p:txBody>
-          <a:bodyPr wrap="square" rtlCol="0" anchor="ctr"/>
-          <a:lstStyle/>
-          <a:p>
-            <a:pPr indent="0" marL="0">
-              <a:buNone/>
-            </a:pPr>
-            <a:r>
-              <a:rPr lang="en-US" sz="1200" b="1" dirty="0">
-                <a:solidFill>
-                  <a:srgbClr val="1B2A4A"/>
-                </a:solidFill>
-              </a:rPr>
-              <a:t>Toxic</a:t>
-            </a:r>
-            <a:endParaRPr lang="en-US" sz="1200" dirty="0"/>
-          </a:p>
-          <a:p>
-            <a:pPr indent="0" marL="0">
-              <a:buNone/>
-            </a:pPr>
-            <a:r>
-              <a:rPr lang="en-US" sz="1000" dirty="0">
-                <a:solidFill>
-                  <a:srgbClr val="6B6660"/>
-                </a:solidFill>
-              </a:rPr>
-              <a:t>Poisonous if inhaled, touched, or swallowed</a:t>
-            </a:r>
-            <a:endParaRPr lang="en-US" sz="1200" dirty="0"/>
-          </a:p>
-        </p:txBody>
-      </p:sp>
-      <p:sp>
-        <p:nvSpPr>
-          <p:cNvPr id="25" name="Shape 23"/>
-          <p:cNvSpPr/>
-          <p:nvPr/>
-        </p:nvSpPr>
-        <p:spPr>
-          <a:xfrm>
-            <a:off x="4480560" y="3291840"/>
-            <a:ext cx="3749040" cy="594360"/>
-          </a:xfrm>
-          <a:prstGeom prst="rect">
-            <a:avLst/>
-          </a:prstGeom>
-          <a:solidFill>
-            <a:srgbClr val="FFFFFF"/>
-          </a:solidFill>
-          <a:ln/>
-          <a:effectLst>
-            <a:outerShdw sx="100000" sy="100000" kx="0" ky="0" algn="bl" rotWithShape="0" blurRad="50800" dist="25400" dir="8100000">
-              <a:srgbClr val="000000">
-                <a:alpha val="10000"/>
-              </a:srgbClr>
-            </a:outerShdw>
-          </a:effectLst>
-        </p:spPr>
-      </p:sp>
-      <p:sp>
-        <p:nvSpPr>
-          <p:cNvPr id="26" name="Shape 24"/>
-          <p:cNvSpPr/>
-          <p:nvPr/>
-        </p:nvSpPr>
-        <p:spPr>
-          <a:xfrm>
-            <a:off x="4480560" y="3291840"/>
-            <a:ext cx="54864" cy="594360"/>
-          </a:xfrm>
-          <a:prstGeom prst="rect">
-            <a:avLst/>
-          </a:prstGeom>
-          <a:solidFill>
-            <a:srgbClr val="2A9D8F"/>
-          </a:solidFill>
-          <a:ln/>
-        </p:spPr>
-      </p:sp>
-      <p:sp>
-        <p:nvSpPr>
-          <p:cNvPr id="27" name="Text 25"/>
-          <p:cNvSpPr/>
-          <p:nvPr/>
-        </p:nvSpPr>
-        <p:spPr>
-          <a:xfrm>
-            <a:off x="4617720" y="3337560"/>
-            <a:ext cx="3520440" cy="502920"/>
-          </a:xfrm>
-          <a:prstGeom prst="rect">
-            <a:avLst/>
-          </a:prstGeom>
-          <a:noFill/>
-          <a:ln/>
-        </p:spPr>
-        <p:txBody>
-          <a:bodyPr wrap="square" rtlCol="0" anchor="ctr"/>
-          <a:lstStyle/>
-          <a:p>
-            <a:pPr indent="0" marL="0">
-              <a:buNone/>
-            </a:pPr>
-            <a:r>
-              <a:rPr lang="en-US" sz="1200" b="1" dirty="0">
-                <a:solidFill>
-                  <a:srgbClr val="1B2A4A"/>
-                </a:solidFill>
-              </a:rPr>
-              <a:t>Irritant</a:t>
-            </a:r>
-            <a:endParaRPr lang="en-US" sz="1200" dirty="0"/>
-          </a:p>
-          <a:p>
-            <a:pPr indent="0" marL="0">
-              <a:buNone/>
-            </a:pPr>
-            <a:r>
-              <a:rPr lang="en-US" sz="1000" dirty="0">
-                <a:solidFill>
-                  <a:srgbClr val="6B6660"/>
-                </a:solidFill>
-              </a:rPr>
-              <a:t>Can cause redness or itching</a:t>
-            </a:r>
-            <a:endParaRPr lang="en-US" sz="1200" dirty="0"/>
-          </a:p>
-        </p:txBody>
-      </p:sp>
-      <p:sp>
-        <p:nvSpPr>
-          <p:cNvPr id="28" name="Text 26"/>
-          <p:cNvSpPr/>
-          <p:nvPr/>
-        </p:nvSpPr>
-        <p:spPr>
-          <a:xfrm>
-            <a:off x="548640" y="4800600"/>
-            <a:ext cx="3657600" cy="274320"/>
-          </a:xfrm>
-          <a:prstGeom prst="rect">
-            <a:avLst/>
-          </a:prstGeom>
-          <a:noFill/>
-          <a:ln/>
-        </p:spPr>
-        <p:txBody>
-          <a:bodyPr wrap="square" rtlCol="0" anchor="ctr"/>
-          <a:lstStyle/>
-          <a:p>
-            <a:pPr indent="0" marL="0">
-              <a:buNone/>
-            </a:pPr>
-            <a:r>
-              <a:rPr lang="en-US" sz="800" dirty="0">
-                <a:solidFill>
-                  <a:srgbClr val="9B9690"/>
-                </a:solidFill>
-              </a:rPr>
-              <a:t>mrzocchi.com</a:t>
-            </a:r>
-            <a:endParaRPr lang="en-US" sz="800" dirty="0"/>
+              <a:rPr lang="en-US" sz="1300" dirty="0">
+                <a:solidFill>
+                  <a:srgbClr val="3D3A36"/>
+                </a:solidFill>
+                <a:latin typeface="Calibri" pitchFamily="34" charset="0"/>
+                <a:ea typeface="Calibri" pitchFamily="34" charset="-122"/>
+                <a:cs typeface="Calibri" pitchFamily="34" charset="-120"/>
+              </a:rPr>
+              <a:t>If clothing catches fire: STOP, DROP, ROLL</a:t>
+            </a:r>
+            <a:endParaRPr lang="en-US" sz="1600" dirty="0"/>
           </a:p>
         </p:txBody>
       </p:sp>
@@ -3006,6 +2674,263 @@
 <file path=ppt/slides/slide5.xml><?xml version="1.0" encoding="utf-8"?>
 <p:sld xmlns:a="http://schemas.openxmlformats.org/drawingml/2006/main" xmlns:r="http://schemas.openxmlformats.org/officeDocument/2006/relationships" xmlns:p="http://schemas.openxmlformats.org/presentationml/2006/main">
   <p:cSld name="Slide 5">
+    <p:bg>
+      <p:bgPr>
+        <a:solidFill>
+          <a:srgbClr val="FAF8F5"/>
+        </a:solidFill>
+      </p:bgPr>
+    </p:bg>
+    <p:spTree>
+      <p:nvGrpSpPr>
+        <p:cNvPr id="1" name=""/>
+        <p:cNvGrpSpPr/>
+        <p:nvPr/>
+      </p:nvGrpSpPr>
+      <p:grpSpPr>
+        <a:xfrm>
+          <a:off x="0" y="0"/>
+          <a:ext cx="0" cy="0"/>
+          <a:chOff x="0" y="0"/>
+          <a:chExt cx="0" cy="0"/>
+        </a:xfrm>
+      </p:grpSpPr>
+      <p:sp>
+        <p:nvSpPr>
+          <p:cNvPr id="2" name="Shape 0"/>
+          <p:cNvSpPr/>
+          <p:nvPr/>
+        </p:nvSpPr>
+        <p:spPr>
+          <a:xfrm>
+            <a:off x="0" y="0"/>
+            <a:ext cx="9144000" cy="54864"/>
+          </a:xfrm>
+          <a:prstGeom prst="rect">
+            <a:avLst/>
+          </a:prstGeom>
+          <a:solidFill>
+            <a:srgbClr val="2A9D8F"/>
+          </a:solidFill>
+          <a:ln/>
+        </p:spPr>
+      </p:sp>
+      <p:sp>
+        <p:nvSpPr>
+          <p:cNvPr id="3" name="Text 1"/>
+          <p:cNvSpPr/>
+          <p:nvPr/>
+        </p:nvSpPr>
+        <p:spPr>
+          <a:xfrm>
+            <a:off x="7772400" y="4709160"/>
+            <a:ext cx="1097280" cy="320040"/>
+          </a:xfrm>
+          <a:prstGeom prst="rect">
+            <a:avLst/>
+          </a:prstGeom>
+          <a:noFill/>
+          <a:ln/>
+        </p:spPr>
+        <p:txBody>
+          <a:bodyPr wrap="square" rtlCol="0" anchor="ctr"/>
+          <a:lstStyle/>
+          <a:p>
+            <a:pPr algn="r" indent="0" marL="0">
+              <a:buNone/>
+            </a:pPr>
+            <a:r>
+              <a:rPr lang="en-US" sz="900" dirty="0">
+                <a:solidFill>
+                  <a:srgbClr val="6B6660"/>
+                </a:solidFill>
+                <a:latin typeface="Calibri" pitchFamily="34" charset="0"/>
+                <a:ea typeface="Calibri" pitchFamily="34" charset="-122"/>
+                <a:cs typeface="Calibri" pitchFamily="34" charset="-120"/>
+              </a:rPr>
+              <a:t>5 / 6</a:t>
+            </a:r>
+            <a:endParaRPr lang="en-US" sz="900" dirty="0"/>
+          </a:p>
+        </p:txBody>
+      </p:sp>
+      <p:sp>
+        <p:nvSpPr>
+          <p:cNvPr id="4" name="Text 2"/>
+          <p:cNvSpPr/>
+          <p:nvPr/>
+        </p:nvSpPr>
+        <p:spPr>
+          <a:xfrm>
+            <a:off x="457200" y="274320"/>
+            <a:ext cx="8229600" cy="640080"/>
+          </a:xfrm>
+          <a:prstGeom prst="rect">
+            <a:avLst/>
+          </a:prstGeom>
+          <a:noFill/>
+          <a:ln/>
+        </p:spPr>
+        <p:txBody>
+          <a:bodyPr wrap="square" rtlCol="0" anchor="ctr"/>
+          <a:lstStyle/>
+          <a:p>
+            <a:pPr indent="0" marL="0">
+              <a:buNone/>
+            </a:pPr>
+            <a:r>
+              <a:rPr lang="en-US" sz="2600" b="1" dirty="0">
+                <a:solidFill>
+                  <a:srgbClr val="1B2A4A"/>
+                </a:solidFill>
+                <a:latin typeface="Georgia" pitchFamily="34" charset="0"/>
+                <a:ea typeface="Georgia" pitchFamily="34" charset="-122"/>
+                <a:cs typeface="Georgia" pitchFamily="34" charset="-120"/>
+              </a:rPr>
+              <a:t>Clean-Up Procedures</a:t>
+            </a:r>
+            <a:endParaRPr lang="en-US" sz="2600" dirty="0"/>
+          </a:p>
+        </p:txBody>
+      </p:sp>
+      <p:sp>
+        <p:nvSpPr>
+          <p:cNvPr id="5" name="Text 3"/>
+          <p:cNvSpPr/>
+          <p:nvPr/>
+        </p:nvSpPr>
+        <p:spPr>
+          <a:xfrm>
+            <a:off x="457200" y="1097280"/>
+            <a:ext cx="8229600" cy="3657600"/>
+          </a:xfrm>
+          <a:prstGeom prst="rect">
+            <a:avLst/>
+          </a:prstGeom>
+          <a:noFill/>
+          <a:ln/>
+        </p:spPr>
+        <p:txBody>
+          <a:bodyPr wrap="square" rtlCol="0" anchor="t"/>
+          <a:lstStyle/>
+          <a:p>
+            <a:pPr marL="342900" indent="-342900">
+              <a:spcAft>
+                <a:spcPts val="800"/>
+              </a:spcAft>
+              <a:buSzPct val="100000"/>
+              <a:buChar char="•"/>
+            </a:pPr>
+            <a:r>
+              <a:rPr lang="en-US" sz="1400" dirty="0">
+                <a:solidFill>
+                  <a:srgbClr val="3D3A36"/>
+                </a:solidFill>
+                <a:latin typeface="Calibri" pitchFamily="34" charset="0"/>
+                <a:ea typeface="Calibri" pitchFamily="34" charset="-122"/>
+                <a:cs typeface="Calibri" pitchFamily="34" charset="-120"/>
+              </a:rPr>
+              <a:t>Wash all equipment and return to correct place</a:t>
+            </a:r>
+            <a:endParaRPr lang="en-US" sz="1400" dirty="0"/>
+          </a:p>
+          <a:p>
+            <a:pPr marL="342900" indent="-342900">
+              <a:spcAft>
+                <a:spcPts val="800"/>
+              </a:spcAft>
+              <a:buSzPct val="100000"/>
+              <a:buChar char="•"/>
+            </a:pPr>
+            <a:r>
+              <a:rPr lang="en-US" sz="1400" dirty="0">
+                <a:solidFill>
+                  <a:srgbClr val="3D3A36"/>
+                </a:solidFill>
+                <a:latin typeface="Calibri" pitchFamily="34" charset="0"/>
+                <a:ea typeface="Calibri" pitchFamily="34" charset="-122"/>
+                <a:cs typeface="Calibri" pitchFamily="34" charset="-120"/>
+              </a:rPr>
+              <a:t>Wipe down bench surfaces</a:t>
+            </a:r>
+            <a:endParaRPr lang="en-US" sz="1400" dirty="0"/>
+          </a:p>
+          <a:p>
+            <a:pPr marL="342900" indent="-342900">
+              <a:spcAft>
+                <a:spcPts val="800"/>
+              </a:spcAft>
+              <a:buSzPct val="100000"/>
+              <a:buChar char="•"/>
+            </a:pPr>
+            <a:r>
+              <a:rPr lang="en-US" sz="1400" dirty="0">
+                <a:solidFill>
+                  <a:srgbClr val="3D3A36"/>
+                </a:solidFill>
+                <a:latin typeface="Calibri" pitchFamily="34" charset="0"/>
+                <a:ea typeface="Calibri" pitchFamily="34" charset="-122"/>
+                <a:cs typeface="Calibri" pitchFamily="34" charset="-120"/>
+              </a:rPr>
+              <a:t>Wash your hands thoroughly with soap and water</a:t>
+            </a:r>
+            <a:endParaRPr lang="en-US" sz="1400" dirty="0"/>
+          </a:p>
+          <a:p>
+            <a:pPr marL="342900" indent="-342900">
+              <a:spcAft>
+                <a:spcPts val="800"/>
+              </a:spcAft>
+              <a:buSzPct val="100000"/>
+              <a:buChar char="•"/>
+            </a:pPr>
+            <a:r>
+              <a:rPr lang="en-US" sz="1400" dirty="0">
+                <a:solidFill>
+                  <a:srgbClr val="3D3A36"/>
+                </a:solidFill>
+                <a:latin typeface="Calibri" pitchFamily="34" charset="0"/>
+                <a:ea typeface="Calibri" pitchFamily="34" charset="-122"/>
+                <a:cs typeface="Calibri" pitchFamily="34" charset="-120"/>
+              </a:rPr>
+              <a:t>Dispose of chemicals ONLY in designated containers — NEVER down the sink</a:t>
+            </a:r>
+            <a:endParaRPr lang="en-US" sz="1400" dirty="0"/>
+          </a:p>
+          <a:p>
+            <a:pPr marL="342900" indent="-342900">
+              <a:spcAft>
+                <a:spcPts val="800"/>
+              </a:spcAft>
+              <a:buSzPct val="100000"/>
+              <a:buChar char="•"/>
+            </a:pPr>
+            <a:r>
+              <a:rPr lang="en-US" sz="1400" dirty="0">
+                <a:solidFill>
+                  <a:srgbClr val="3D3A36"/>
+                </a:solidFill>
+                <a:latin typeface="Calibri" pitchFamily="34" charset="0"/>
+                <a:ea typeface="Calibri" pitchFamily="34" charset="-122"/>
+                <a:cs typeface="Calibri" pitchFamily="34" charset="-120"/>
+              </a:rPr>
+              <a:t>Report any spills, breakages, or injuries to the teacher</a:t>
+            </a:r>
+            <a:endParaRPr lang="en-US" sz="1400" dirty="0"/>
+          </a:p>
+        </p:txBody>
+      </p:sp>
+    </p:spTree>
+  </p:cSld>
+  <p:clrMapOvr>
+    <a:masterClrMapping/>
+  </p:clrMapOvr>
+</p:sld>
+</file>
+
+<file path=ppt/slides/slide6.xml><?xml version="1.0" encoding="utf-8"?>
+<p:sld xmlns:a="http://schemas.openxmlformats.org/drawingml/2006/main" xmlns:r="http://schemas.openxmlformats.org/officeDocument/2006/relationships" xmlns:p="http://schemas.openxmlformats.org/presentationml/2006/main">
+  <p:cSld name="Slide 6">
     <p:bg>
       <p:bgPr>
         <a:solidFill>
@@ -3036,13 +2961,13 @@
         <p:spPr>
           <a:xfrm>
             <a:off x="0" y="0"/>
-            <a:ext cx="9144000" cy="54864"/>
-          </a:xfrm>
-          <a:prstGeom prst="rect">
-            <a:avLst/>
-          </a:prstGeom>
-          <a:solidFill>
-            <a:srgbClr val="2A9D8F"/>
+            <a:ext cx="109728" cy="5143500"/>
+          </a:xfrm>
+          <a:prstGeom prst="rect">
+            <a:avLst/>
+          </a:prstGeom>
+          <a:solidFill>
+            <a:srgbClr val="E9C46A"/>
           </a:solidFill>
           <a:ln/>
         </p:spPr>
@@ -3055,8 +2980,8 @@
         </p:nvSpPr>
         <p:spPr>
           <a:xfrm>
-            <a:off x="548640" y="457200"/>
-            <a:ext cx="8046720" cy="640080"/>
+            <a:off x="731520" y="457200"/>
+            <a:ext cx="7772400" cy="731520"/>
           </a:xfrm>
           <a:prstGeom prst="rect">
             <a:avLst/>
@@ -3072,7 +2997,7 @@
               <a:buNone/>
             </a:pPr>
             <a:r>
-              <a:rPr lang="en-US" sz="2800" b="1" dirty="0">
+              <a:rPr lang="en-US" sz="3200" b="1" dirty="0">
                 <a:solidFill>
                   <a:srgbClr val="FFFFFF"/>
                 </a:solidFill>
@@ -3082,7 +3007,7 @@
               </a:rPr>
               <a:t>Key Takeaways</a:t>
             </a:r>
-            <a:endParaRPr lang="en-US" sz="2800" dirty="0"/>
+            <a:endParaRPr lang="en-US" sz="3200" dirty="0"/>
           </a:p>
         </p:txBody>
       </p:sp>
@@ -3094,8 +3019,8 @@
         </p:nvSpPr>
         <p:spPr>
           <a:xfrm>
-            <a:off x="731520" y="1371600"/>
-            <a:ext cx="7680960" cy="3200400"/>
+            <a:off x="731520" y="1463040"/>
+            <a:ext cx="7772400" cy="3200400"/>
           </a:xfrm>
           <a:prstGeom prst="rect">
             <a:avLst/>
@@ -3115,7 +3040,7 @@
               <a:buChar char="•"/>
             </a:pPr>
             <a:r>
-              <a:rPr lang="en-US" sz="1600" dirty="0">
+              <a:rPr lang="en-US" sz="1500" dirty="0">
                 <a:solidFill>
                   <a:srgbClr val="CADCFC"/>
                 </a:solidFill>
@@ -3123,9 +3048,9 @@
                 <a:ea typeface="Calibri" pitchFamily="34" charset="-122"/>
                 <a:cs typeface="Calibri" pitchFamily="34" charset="-120"/>
               </a:rPr>
-              <a:t>Always wear PPE when instructed</a:t>
-            </a:r>
-            <a:endParaRPr lang="en-US" sz="1600" dirty="0"/>
+              <a:t>Always wear safety goggles when handling chemicals</a:t>
+            </a:r>
+            <a:endParaRPr lang="en-US" sz="1500" dirty="0"/>
           </a:p>
           <a:p>
             <a:pPr marL="342900" indent="-342900">
@@ -3136,7 +3061,7 @@
               <a:buChar char="•"/>
             </a:pPr>
             <a:r>
-              <a:rPr lang="en-US" sz="1600" dirty="0">
+              <a:rPr lang="en-US" sz="1500" dirty="0">
                 <a:solidFill>
                   <a:srgbClr val="CADCFC"/>
                 </a:solidFill>
@@ -3144,9 +3069,9 @@
                 <a:ea typeface="Calibri" pitchFamily="34" charset="-122"/>
                 <a:cs typeface="Calibri" pitchFamily="34" charset="-120"/>
               </a:rPr>
-              <a:t>Know where safety equipment is (fire extinguisher, eye wash, first aid)</a:t>
-            </a:r>
-            <a:endParaRPr lang="en-US" sz="1600" dirty="0"/>
+              <a:t>Know the location of safety equipment</a:t>
+            </a:r>
+            <a:endParaRPr lang="en-US" sz="1500" dirty="0"/>
           </a:p>
           <a:p>
             <a:pPr marL="342900" indent="-342900">
@@ -3157,7 +3082,7 @@
               <a:buChar char="•"/>
             </a:pPr>
             <a:r>
-              <a:rPr lang="en-US" sz="1600" dirty="0">
+              <a:rPr lang="en-US" sz="1500" dirty="0">
                 <a:solidFill>
                   <a:srgbClr val="CADCFC"/>
                 </a:solidFill>
@@ -3165,9 +3090,9 @@
                 <a:ea typeface="Calibri" pitchFamily="34" charset="-122"/>
                 <a:cs typeface="Calibri" pitchFamily="34" charset="-120"/>
               </a:rPr>
-              <a:t>Read instructions COMPLETELY before starting</a:t>
-            </a:r>
-            <a:endParaRPr lang="en-US" sz="1600" dirty="0"/>
+              <a:t>Never eat, drink, or run in the lab</a:t>
+            </a:r>
+            <a:endParaRPr lang="en-US" sz="1500" dirty="0"/>
           </a:p>
           <a:p>
             <a:pPr marL="342900" indent="-342900">
@@ -3178,7 +3103,7 @@
               <a:buChar char="•"/>
             </a:pPr>
             <a:r>
-              <a:rPr lang="en-US" sz="1600" dirty="0">
+              <a:rPr lang="en-US" sz="1500" dirty="0">
                 <a:solidFill>
                   <a:srgbClr val="CADCFC"/>
                 </a:solidFill>
@@ -3186,9 +3111,30 @@
                 <a:ea typeface="Calibri" pitchFamily="34" charset="-122"/>
                 <a:cs typeface="Calibri" pitchFamily="34" charset="-120"/>
               </a:rPr>
-              <a:t>Report ALL accidents to your teacher immediately</a:t>
-            </a:r>
-            <a:endParaRPr lang="en-US" sz="1600" dirty="0"/>
+              <a:t>Report ALL accidents to the teacher immediately</a:t>
+            </a:r>
+            <a:endParaRPr lang="en-US" sz="1500" dirty="0"/>
+          </a:p>
+          <a:p>
+            <a:pPr marL="342900" indent="-342900">
+              <a:spcAft>
+                <a:spcPts val="1000"/>
+              </a:spcAft>
+              <a:buSzPct val="100000"/>
+              <a:buChar char="•"/>
+            </a:pPr>
+            <a:r>
+              <a:rPr lang="en-US" sz="1500" dirty="0">
+                <a:solidFill>
+                  <a:srgbClr val="CADCFC"/>
+                </a:solidFill>
+                <a:latin typeface="Calibri" pitchFamily="34" charset="0"/>
+                <a:ea typeface="Calibri" pitchFamily="34" charset="-122"/>
+                <a:cs typeface="Calibri" pitchFamily="34" charset="-120"/>
+              </a:rPr>
+              <a:t>Clean up properly after every experiment</a:t>
+            </a:r>
+            <a:endParaRPr lang="en-US" sz="1500" dirty="0"/>
           </a:p>
         </p:txBody>
       </p:sp>
@@ -3200,8 +3146,8 @@
         </p:nvSpPr>
         <p:spPr>
           <a:xfrm>
-            <a:off x="548640" y="4572000"/>
-            <a:ext cx="3657600" cy="274320"/>
+            <a:off x="731520" y="4572000"/>
+            <a:ext cx="7772400" cy="365760"/>
           </a:xfrm>
           <a:prstGeom prst="rect">
             <a:avLst/>
@@ -3217,14 +3163,17 @@
               <a:buNone/>
             </a:pPr>
             <a:r>
-              <a:rPr lang="en-US" sz="1000" dirty="0">
-                <a:solidFill>
-                  <a:srgbClr val="6B6660"/>
-                </a:solidFill>
+              <a:rPr lang="en-US" sz="1100" dirty="0">
+                <a:solidFill>
+                  <a:srgbClr val="E9C46A"/>
+                </a:solidFill>
+                <a:latin typeface="Calibri" pitchFamily="34" charset="0"/>
+                <a:ea typeface="Calibri" pitchFamily="34" charset="-122"/>
+                <a:cs typeface="Calibri" pitchFamily="34" charset="-120"/>
               </a:rPr>
               <a:t>mrzocchi.com</a:t>
             </a:r>
-            <a:endParaRPr lang="en-US" sz="1000" dirty="0"/>
+            <a:endParaRPr lang="en-US" sz="1100" dirty="0"/>
           </a:p>
         </p:txBody>
       </p:sp>

--- a/static/ppts/G6_Sci_T1_Lab_Safety.pptx
+++ b/static/ppts/G6_Sci_T1_Lab_Safety.pptx
@@ -11,9 +11,12 @@
     <p:sldId id="259" r:id="rId5"/>
     <p:sldId id="260" r:id="rId6"/>
     <p:sldId id="261" r:id="rId7"/>
+    <p:sldId id="262" r:id="rId8"/>
+    <p:sldId id="263" r:id="rId9"/>
+    <p:sldId id="264" r:id="rId10"/>
   </p:sldIdLst>
   <p:notesMasterIdLst>
-    <p:notesMasterId r:id="rId8"/>
+    <p:notesMasterId r:id="rId11"/>
   </p:notesMasterIdLst>
   <p:sldSz cx="9144000" cy="5143500"/>
   <p:notesSz cx="5143500" cy="9144000"/>
@@ -989,6 +992,270 @@
 </p:notes>
 </file>
 
+<file path=ppt/notesSlides/notesSlide7.xml><?xml version="1.0" encoding="utf-8"?>
+<p:notes xmlns:a="http://schemas.openxmlformats.org/drawingml/2006/main" xmlns:r="http://schemas.openxmlformats.org/officeDocument/2006/relationships" xmlns:p="http://schemas.openxmlformats.org/presentationml/2006/main">
+  <p:cSld>
+    <p:spTree>
+      <p:nvGrpSpPr>
+        <p:cNvPr id="1" name=""/>
+        <p:cNvGrpSpPr/>
+        <p:nvPr/>
+      </p:nvGrpSpPr>
+      <p:grpSpPr>
+        <a:xfrm>
+          <a:off x="0" y="0"/>
+          <a:ext cx="0" cy="0"/>
+          <a:chOff x="0" y="0"/>
+          <a:chExt cx="0" cy="0"/>
+        </a:xfrm>
+      </p:grpSpPr>
+      <p:sp>
+        <p:nvSpPr>
+          <p:cNvPr id="2" name="Slide Image Placeholder 1"/>
+          <p:cNvSpPr>
+            <a:spLocks noGrp="1" noRot="1" noChangeAspect="1"/>
+          </p:cNvSpPr>
+          <p:nvPr>
+            <p:ph type="sldImg"/>
+          </p:nvPr>
+        </p:nvSpPr>
+        <p:spPr/>
+      </p:sp>
+      <p:sp>
+        <p:nvSpPr>
+          <p:cNvPr id="3" name="Notes Placeholder 2"/>
+          <p:cNvSpPr>
+            <a:spLocks noGrp="1"/>
+          </p:cNvSpPr>
+          <p:nvPr>
+            <p:ph type="body" idx="1"/>
+          </p:nvPr>
+        </p:nvSpPr>
+        <p:spPr/>
+        <p:txBody>
+          <a:bodyPr/>
+          <a:lstStyle/>
+          <a:p>
+            <a:r>
+              <a:rPr lang="en-US" dirty="0"/>
+              <a:t/>
+            </a:r>
+            <a:endParaRPr lang="en-US" dirty="0"/>
+          </a:p>
+        </p:txBody>
+      </p:sp>
+      <p:sp>
+        <p:nvSpPr>
+          <p:cNvPr id="4" name="Slide Number Placeholder 3"/>
+          <p:cNvSpPr>
+            <a:spLocks noGrp="1"/>
+          </p:cNvSpPr>
+          <p:nvPr>
+            <p:ph type="sldNum" sz="quarter" idx="10"/>
+          </p:nvPr>
+        </p:nvSpPr>
+        <p:spPr/>
+        <p:txBody>
+          <a:bodyPr/>
+          <a:lstStyle/>
+          <a:p>
+            <a:fld id="{F7021451-1387-4CA6-816F-3879F97B5CBC}" type="slidenum">
+              <a:rPr lang="en-US"/>
+              <a:t>7</a:t>
+            </a:fld>
+            <a:endParaRPr lang="en-US"/>
+          </a:p>
+        </p:txBody>
+      </p:sp>
+    </p:spTree>
+    <p:extLst>
+      <p:ext uri="{BB962C8B-B14F-4D97-AF65-F5344CB8AC3E}">
+        <p14:creationId xmlns:p14="http://schemas.microsoft.com/office/powerpoint/2010/main" val="1024086991"/>
+      </p:ext>
+    </p:extLst>
+  </p:cSld>
+  <p:clrMapOvr>
+    <a:masterClrMapping/>
+  </p:clrMapOvr>
+</p:notes>
+</file>
+
+<file path=ppt/notesSlides/notesSlide8.xml><?xml version="1.0" encoding="utf-8"?>
+<p:notes xmlns:a="http://schemas.openxmlformats.org/drawingml/2006/main" xmlns:r="http://schemas.openxmlformats.org/officeDocument/2006/relationships" xmlns:p="http://schemas.openxmlformats.org/presentationml/2006/main">
+  <p:cSld>
+    <p:spTree>
+      <p:nvGrpSpPr>
+        <p:cNvPr id="1" name=""/>
+        <p:cNvGrpSpPr/>
+        <p:nvPr/>
+      </p:nvGrpSpPr>
+      <p:grpSpPr>
+        <a:xfrm>
+          <a:off x="0" y="0"/>
+          <a:ext cx="0" cy="0"/>
+          <a:chOff x="0" y="0"/>
+          <a:chExt cx="0" cy="0"/>
+        </a:xfrm>
+      </p:grpSpPr>
+      <p:sp>
+        <p:nvSpPr>
+          <p:cNvPr id="2" name="Slide Image Placeholder 1"/>
+          <p:cNvSpPr>
+            <a:spLocks noGrp="1" noRot="1" noChangeAspect="1"/>
+          </p:cNvSpPr>
+          <p:nvPr>
+            <p:ph type="sldImg"/>
+          </p:nvPr>
+        </p:nvSpPr>
+        <p:spPr/>
+      </p:sp>
+      <p:sp>
+        <p:nvSpPr>
+          <p:cNvPr id="3" name="Notes Placeholder 2"/>
+          <p:cNvSpPr>
+            <a:spLocks noGrp="1"/>
+          </p:cNvSpPr>
+          <p:nvPr>
+            <p:ph type="body" idx="1"/>
+          </p:nvPr>
+        </p:nvSpPr>
+        <p:spPr/>
+        <p:txBody>
+          <a:bodyPr/>
+          <a:lstStyle/>
+          <a:p>
+            <a:r>
+              <a:rPr lang="en-US" dirty="0"/>
+              <a:t/>
+            </a:r>
+            <a:endParaRPr lang="en-US" dirty="0"/>
+          </a:p>
+        </p:txBody>
+      </p:sp>
+      <p:sp>
+        <p:nvSpPr>
+          <p:cNvPr id="4" name="Slide Number Placeholder 3"/>
+          <p:cNvSpPr>
+            <a:spLocks noGrp="1"/>
+          </p:cNvSpPr>
+          <p:nvPr>
+            <p:ph type="sldNum" sz="quarter" idx="10"/>
+          </p:nvPr>
+        </p:nvSpPr>
+        <p:spPr/>
+        <p:txBody>
+          <a:bodyPr/>
+          <a:lstStyle/>
+          <a:p>
+            <a:fld id="{F7021451-1387-4CA6-816F-3879F97B5CBC}" type="slidenum">
+              <a:rPr lang="en-US"/>
+              <a:t>8</a:t>
+            </a:fld>
+            <a:endParaRPr lang="en-US"/>
+          </a:p>
+        </p:txBody>
+      </p:sp>
+    </p:spTree>
+    <p:extLst>
+      <p:ext uri="{BB962C8B-B14F-4D97-AF65-F5344CB8AC3E}">
+        <p14:creationId xmlns:p14="http://schemas.microsoft.com/office/powerpoint/2010/main" val="1024086991"/>
+      </p:ext>
+    </p:extLst>
+  </p:cSld>
+  <p:clrMapOvr>
+    <a:masterClrMapping/>
+  </p:clrMapOvr>
+</p:notes>
+</file>
+
+<file path=ppt/notesSlides/notesSlide9.xml><?xml version="1.0" encoding="utf-8"?>
+<p:notes xmlns:a="http://schemas.openxmlformats.org/drawingml/2006/main" xmlns:r="http://schemas.openxmlformats.org/officeDocument/2006/relationships" xmlns:p="http://schemas.openxmlformats.org/presentationml/2006/main">
+  <p:cSld>
+    <p:spTree>
+      <p:nvGrpSpPr>
+        <p:cNvPr id="1" name=""/>
+        <p:cNvGrpSpPr/>
+        <p:nvPr/>
+      </p:nvGrpSpPr>
+      <p:grpSpPr>
+        <a:xfrm>
+          <a:off x="0" y="0"/>
+          <a:ext cx="0" cy="0"/>
+          <a:chOff x="0" y="0"/>
+          <a:chExt cx="0" cy="0"/>
+        </a:xfrm>
+      </p:grpSpPr>
+      <p:sp>
+        <p:nvSpPr>
+          <p:cNvPr id="2" name="Slide Image Placeholder 1"/>
+          <p:cNvSpPr>
+            <a:spLocks noGrp="1" noRot="1" noChangeAspect="1"/>
+          </p:cNvSpPr>
+          <p:nvPr>
+            <p:ph type="sldImg"/>
+          </p:nvPr>
+        </p:nvSpPr>
+        <p:spPr/>
+      </p:sp>
+      <p:sp>
+        <p:nvSpPr>
+          <p:cNvPr id="3" name="Notes Placeholder 2"/>
+          <p:cNvSpPr>
+            <a:spLocks noGrp="1"/>
+          </p:cNvSpPr>
+          <p:nvPr>
+            <p:ph type="body" idx="1"/>
+          </p:nvPr>
+        </p:nvSpPr>
+        <p:spPr/>
+        <p:txBody>
+          <a:bodyPr/>
+          <a:lstStyle/>
+          <a:p>
+            <a:r>
+              <a:rPr lang="en-US" dirty="0"/>
+              <a:t/>
+            </a:r>
+            <a:endParaRPr lang="en-US" dirty="0"/>
+          </a:p>
+        </p:txBody>
+      </p:sp>
+      <p:sp>
+        <p:nvSpPr>
+          <p:cNvPr id="4" name="Slide Number Placeholder 3"/>
+          <p:cNvSpPr>
+            <a:spLocks noGrp="1"/>
+          </p:cNvSpPr>
+          <p:nvPr>
+            <p:ph type="sldNum" sz="quarter" idx="10"/>
+          </p:nvPr>
+        </p:nvSpPr>
+        <p:spPr/>
+        <p:txBody>
+          <a:bodyPr/>
+          <a:lstStyle/>
+          <a:p>
+            <a:fld id="{F7021451-1387-4CA6-816F-3879F97B5CBC}" type="slidenum">
+              <a:rPr lang="en-US"/>
+              <a:t>9</a:t>
+            </a:fld>
+            <a:endParaRPr lang="en-US"/>
+          </a:p>
+        </p:txBody>
+      </p:sp>
+    </p:spTree>
+    <p:extLst>
+      <p:ext uri="{BB962C8B-B14F-4D97-AF65-F5344CB8AC3E}">
+        <p14:creationId xmlns:p14="http://schemas.microsoft.com/office/powerpoint/2010/main" val="1024086991"/>
+      </p:ext>
+    </p:extLst>
+  </p:cSld>
+  <p:clrMapOvr>
+    <a:masterClrMapping/>
+  </p:clrMapOvr>
+</p:notes>
+</file>
+
 <file path=ppt/slideLayouts/slideLayout1.xml><?xml version="1.0" encoding="utf-8"?>
 <p:sldLayout xmlns:a="http://schemas.openxmlformats.org/drawingml/2006/main" xmlns:r="http://schemas.openxmlformats.org/officeDocument/2006/relationships" xmlns:p="http://schemas.openxmlformats.org/presentationml/2006/main" preserve="1">
   <p:cSld name="DEFAULT">
@@ -1299,13 +1566,6 @@
 <file path=ppt/slides/slide1.xml><?xml version="1.0" encoding="utf-8"?>
 <p:sld xmlns:a="http://schemas.openxmlformats.org/drawingml/2006/main" xmlns:r="http://schemas.openxmlformats.org/officeDocument/2006/relationships" xmlns:p="http://schemas.openxmlformats.org/presentationml/2006/main">
   <p:cSld name="Slide 1">
-    <p:bg>
-      <p:bgPr>
-        <a:solidFill>
-          <a:srgbClr val="1B2A4A"/>
-        </a:solidFill>
-      </p:bgPr>
-    </p:bg>
     <p:spTree>
       <p:nvGrpSpPr>
         <p:cNvPr id="1" name=""/>
@@ -1329,7 +1589,27 @@
         <p:spPr>
           <a:xfrm>
             <a:off x="0" y="0"/>
-            <a:ext cx="109728" cy="5143500"/>
+            <a:ext cx="9144000" cy="5143500"/>
+          </a:xfrm>
+          <a:prstGeom prst="rect">
+            <a:avLst/>
+          </a:prstGeom>
+          <a:solidFill>
+            <a:srgbClr val="1B2A4A"/>
+          </a:solidFill>
+          <a:ln/>
+        </p:spPr>
+      </p:sp>
+      <p:sp>
+        <p:nvSpPr>
+          <p:cNvPr id="3" name="Shape 1"/>
+          <p:cNvSpPr/>
+          <p:nvPr/>
+        </p:nvSpPr>
+        <p:spPr>
+          <a:xfrm>
+            <a:off x="0" y="4777740"/>
+            <a:ext cx="9144000" cy="365760"/>
           </a:xfrm>
           <a:prstGeom prst="rect">
             <a:avLst/>
@@ -1342,14 +1622,36 @@
       </p:sp>
       <p:sp>
         <p:nvSpPr>
-          <p:cNvPr id="3" name="Text 1"/>
-          <p:cNvSpPr/>
-          <p:nvPr/>
-        </p:nvSpPr>
-        <p:spPr>
-          <a:xfrm>
-            <a:off x="731520" y="1097280"/>
-            <a:ext cx="7772400" cy="1371600"/>
+          <p:cNvPr id="4" name="Shape 2"/>
+          <p:cNvSpPr/>
+          <p:nvPr/>
+        </p:nvSpPr>
+        <p:spPr>
+          <a:xfrm>
+            <a:off x="6858000" y="-1371600"/>
+            <a:ext cx="4572000" cy="4572000"/>
+          </a:xfrm>
+          <a:prstGeom prst="ellipse">
+            <a:avLst/>
+          </a:prstGeom>
+          <a:solidFill>
+            <a:srgbClr val="2A9D8F">
+              <a:alpha val="12000"/>
+            </a:srgbClr>
+          </a:solidFill>
+          <a:ln/>
+        </p:spPr>
+      </p:sp>
+      <p:sp>
+        <p:nvSpPr>
+          <p:cNvPr id="5" name="Text 3"/>
+          <p:cNvSpPr/>
+          <p:nvPr/>
+        </p:nvSpPr>
+        <p:spPr>
+          <a:xfrm>
+            <a:off x="731520" y="914400"/>
+            <a:ext cx="7680960" cy="457200"/>
           </a:xfrm>
           <a:prstGeom prst="rect">
             <a:avLst/>
@@ -1365,7 +1667,46 @@
               <a:buNone/>
             </a:pPr>
             <a:r>
-              <a:rPr lang="en-US" sz="4000" b="1" dirty="0">
+              <a:rPr lang="en-US" sz="1300" b="1" spc="500" kern="0" dirty="0">
+                <a:solidFill>
+                  <a:srgbClr val="2A9D8F"/>
+                </a:solidFill>
+                <a:latin typeface="Calibri" pitchFamily="34" charset="0"/>
+                <a:ea typeface="Calibri" pitchFamily="34" charset="-122"/>
+                <a:cs typeface="Calibri" pitchFamily="34" charset="-120"/>
+              </a:rPr>
+              <a:t>GRADE 6 SCIENCE</a:t>
+            </a:r>
+            <a:endParaRPr lang="en-US" sz="1300" dirty="0"/>
+          </a:p>
+        </p:txBody>
+      </p:sp>
+      <p:sp>
+        <p:nvSpPr>
+          <p:cNvPr id="6" name="Text 4"/>
+          <p:cNvSpPr/>
+          <p:nvPr/>
+        </p:nvSpPr>
+        <p:spPr>
+          <a:xfrm>
+            <a:off x="731520" y="1463040"/>
+            <a:ext cx="6858000" cy="1645920"/>
+          </a:xfrm>
+          <a:prstGeom prst="rect">
+            <a:avLst/>
+          </a:prstGeom>
+          <a:noFill/>
+          <a:ln/>
+        </p:spPr>
+        <p:txBody>
+          <a:bodyPr wrap="square" rtlCol="0" anchor="t"/>
+          <a:lstStyle/>
+          <a:p>
+            <a:pPr indent="0" marL="0">
+              <a:buNone/>
+            </a:pPr>
+            <a:r>
+              <a:rPr lang="en-US" sz="3800" b="1" dirty="0">
                 <a:solidFill>
                   <a:srgbClr val="FFFFFF"/>
                 </a:solidFill>
@@ -1375,20 +1716,20 @@
               </a:rPr>
               <a:t>Lab Safety</a:t>
             </a:r>
-            <a:endParaRPr lang="en-US" sz="4000" dirty="0"/>
-          </a:p>
-        </p:txBody>
-      </p:sp>
-      <p:sp>
-        <p:nvSpPr>
-          <p:cNvPr id="4" name="Text 2"/>
-          <p:cNvSpPr/>
-          <p:nvPr/>
-        </p:nvSpPr>
-        <p:spPr>
-          <a:xfrm>
-            <a:off x="731520" y="2560320"/>
-            <a:ext cx="7772400" cy="548640"/>
+            <a:endParaRPr lang="en-US" sz="3800" dirty="0"/>
+          </a:p>
+        </p:txBody>
+      </p:sp>
+      <p:sp>
+        <p:nvSpPr>
+          <p:cNvPr id="7" name="Text 5"/>
+          <p:cNvSpPr/>
+          <p:nvPr/>
+        </p:nvSpPr>
+        <p:spPr>
+          <a:xfrm>
+            <a:off x="731520" y="3200400"/>
+            <a:ext cx="6400800" cy="548640"/>
           </a:xfrm>
           <a:prstGeom prst="rect">
             <a:avLst/>
@@ -1404,15 +1745,15 @@
               <a:buNone/>
             </a:pPr>
             <a:r>
-              <a:rPr lang="en-US" sz="1600" dirty="0">
-                <a:solidFill>
-                  <a:srgbClr val="E9C46A"/>
+              <a:rPr lang="en-US" sz="1600" i="1" dirty="0">
+                <a:solidFill>
+                  <a:srgbClr val="9B9690"/>
                 </a:solidFill>
                 <a:latin typeface="Calibri" pitchFamily="34" charset="0"/>
                 <a:ea typeface="Calibri" pitchFamily="34" charset="-122"/>
                 <a:cs typeface="Calibri" pitchFamily="34" charset="-120"/>
               </a:rPr>
-              <a:t>Grade 6 Science · Mr Zocchi</a:t>
+              <a:t>How to stay safe in the science laboratory</a:t>
             </a:r>
             <a:endParaRPr lang="en-US" sz="1600" dirty="0"/>
           </a:p>
@@ -1420,36 +1761,14 @@
       </p:sp>
       <p:sp>
         <p:nvSpPr>
-          <p:cNvPr id="5" name="Shape 3"/>
-          <p:cNvSpPr/>
-          <p:nvPr/>
-        </p:nvSpPr>
-        <p:spPr>
-          <a:xfrm>
-            <a:off x="731520" y="3474720"/>
-            <a:ext cx="2011680" cy="411480"/>
-          </a:xfrm>
-          <a:prstGeom prst="roundRect">
-            <a:avLst>
-              <a:gd name="adj" fmla="val 17778"/>
-            </a:avLst>
-          </a:prstGeom>
-          <a:solidFill>
-            <a:srgbClr val="2A9D8F"/>
-          </a:solidFill>
-          <a:ln/>
-        </p:spPr>
-      </p:sp>
-      <p:sp>
-        <p:nvSpPr>
-          <p:cNvPr id="6" name="Text 4"/>
-          <p:cNvSpPr/>
-          <p:nvPr/>
-        </p:nvSpPr>
-        <p:spPr>
-          <a:xfrm>
-            <a:off x="731520" y="3474720"/>
-            <a:ext cx="2011680" cy="411480"/>
+          <p:cNvPr id="8" name="Text 6"/>
+          <p:cNvSpPr/>
+          <p:nvPr/>
+        </p:nvSpPr>
+        <p:spPr>
+          <a:xfrm>
+            <a:off x="731520" y="4297680"/>
+            <a:ext cx="2743200" cy="365760"/>
           </a:xfrm>
           <a:prstGeom prst="rect">
             <a:avLst/>
@@ -1461,21 +1780,21 @@
           <a:bodyPr wrap="square" rtlCol="0" anchor="ctr"/>
           <a:lstStyle/>
           <a:p>
-            <a:pPr algn="ctr" indent="0" marL="0">
+            <a:pPr indent="0" marL="0">
               <a:buNone/>
             </a:pPr>
             <a:r>
-              <a:rPr lang="en-US" sz="1200" b="1" dirty="0">
-                <a:solidFill>
-                  <a:srgbClr val="FFFFFF"/>
+              <a:rPr lang="en-US" sz="1100" dirty="0">
+                <a:solidFill>
+                  <a:srgbClr val="9B9690"/>
                 </a:solidFill>
                 <a:latin typeface="Calibri" pitchFamily="34" charset="0"/>
                 <a:ea typeface="Calibri" pitchFamily="34" charset="-122"/>
                 <a:cs typeface="Calibri" pitchFamily="34" charset="-120"/>
               </a:rPr>
-              <a:t>Term 1 · Scientific Skills</a:t>
-            </a:r>
-            <a:endParaRPr lang="en-US" sz="1200" dirty="0"/>
+              <a:t>mrzocchi.com</a:t>
+            </a:r>
+            <a:endParaRPr lang="en-US" sz="1100" dirty="0"/>
           </a:p>
         </p:txBody>
       </p:sp>
@@ -1520,7 +1839,47 @@
         <p:spPr>
           <a:xfrm>
             <a:off x="0" y="0"/>
-            <a:ext cx="9144000" cy="54864"/>
+            <a:ext cx="9144000" cy="822960"/>
+          </a:xfrm>
+          <a:prstGeom prst="rect">
+            <a:avLst/>
+          </a:prstGeom>
+          <a:solidFill>
+            <a:srgbClr val="FFFFFF"/>
+          </a:solidFill>
+          <a:ln/>
+        </p:spPr>
+      </p:sp>
+      <p:sp>
+        <p:nvSpPr>
+          <p:cNvPr id="3" name="Shape 1"/>
+          <p:cNvSpPr/>
+          <p:nvPr/>
+        </p:nvSpPr>
+        <p:spPr>
+          <a:xfrm>
+            <a:off x="0" y="804672"/>
+            <a:ext cx="9144000" cy="27432"/>
+          </a:xfrm>
+          <a:prstGeom prst="rect">
+            <a:avLst/>
+          </a:prstGeom>
+          <a:solidFill>
+            <a:srgbClr val="E5E2DC"/>
+          </a:solidFill>
+          <a:ln/>
+        </p:spPr>
+      </p:sp>
+      <p:sp>
+        <p:nvSpPr>
+          <p:cNvPr id="4" name="Shape 2"/>
+          <p:cNvSpPr/>
+          <p:nvPr/>
+        </p:nvSpPr>
+        <p:spPr>
+          <a:xfrm>
+            <a:off x="548640" y="201168"/>
+            <a:ext cx="54864" cy="420624"/>
           </a:xfrm>
           <a:prstGeom prst="rect">
             <a:avLst/>
@@ -1533,14 +1892,14 @@
       </p:sp>
       <p:sp>
         <p:nvSpPr>
-          <p:cNvPr id="3" name="Text 1"/>
-          <p:cNvSpPr/>
-          <p:nvPr/>
-        </p:nvSpPr>
-        <p:spPr>
-          <a:xfrm>
-            <a:off x="7772400" y="4709160"/>
-            <a:ext cx="1097280" cy="320040"/>
+          <p:cNvPr id="5" name="Text 3"/>
+          <p:cNvSpPr/>
+          <p:nvPr/>
+        </p:nvSpPr>
+        <p:spPr>
+          <a:xfrm>
+            <a:off x="777240" y="137160"/>
+            <a:ext cx="7772400" cy="548640"/>
           </a:xfrm>
           <a:prstGeom prst="rect">
             <a:avLst/>
@@ -1549,37 +1908,37 @@
           <a:ln/>
         </p:spPr>
         <p:txBody>
-          <a:bodyPr wrap="square" rtlCol="0" anchor="ctr"/>
+          <a:bodyPr wrap="square" lIns="0" tIns="0" rIns="0" bIns="0" rtlCol="0" anchor="ctr"/>
           <a:lstStyle/>
           <a:p>
-            <a:pPr algn="r" indent="0" marL="0">
+            <a:pPr indent="0" marL="0">
               <a:buNone/>
             </a:pPr>
             <a:r>
-              <a:rPr lang="en-US" sz="900" dirty="0">
-                <a:solidFill>
-                  <a:srgbClr val="6B6660"/>
-                </a:solidFill>
-                <a:latin typeface="Calibri" pitchFamily="34" charset="0"/>
-                <a:ea typeface="Calibri" pitchFamily="34" charset="-122"/>
-                <a:cs typeface="Calibri" pitchFamily="34" charset="-120"/>
-              </a:rPr>
-              <a:t>2 / 6</a:t>
-            </a:r>
-            <a:endParaRPr lang="en-US" sz="900" dirty="0"/>
-          </a:p>
-        </p:txBody>
-      </p:sp>
-      <p:sp>
-        <p:nvSpPr>
-          <p:cNvPr id="4" name="Shape 2"/>
-          <p:cNvSpPr/>
-          <p:nvPr/>
-        </p:nvSpPr>
-        <p:spPr>
-          <a:xfrm>
-            <a:off x="1371600" y="914400"/>
-            <a:ext cx="6400800" cy="3200400"/>
+              <a:rPr lang="en-US" sz="2000" b="1" dirty="0">
+                <a:solidFill>
+                  <a:srgbClr val="1B2A4A"/>
+                </a:solidFill>
+                <a:latin typeface="Georgia" pitchFamily="34" charset="0"/>
+                <a:ea typeface="Georgia" pitchFamily="34" charset="-122"/>
+                <a:cs typeface="Georgia" pitchFamily="34" charset="-120"/>
+              </a:rPr>
+              <a:t>Key Vocabulary</a:t>
+            </a:r>
+            <a:endParaRPr lang="en-US" sz="2000" dirty="0"/>
+          </a:p>
+        </p:txBody>
+      </p:sp>
+      <p:sp>
+        <p:nvSpPr>
+          <p:cNvPr id="6" name="Shape 4"/>
+          <p:cNvSpPr/>
+          <p:nvPr/>
+        </p:nvSpPr>
+        <p:spPr>
+          <a:xfrm>
+            <a:off x="731520" y="1051560"/>
+            <a:ext cx="3657600" cy="658368"/>
           </a:xfrm>
           <a:prstGeom prst="rect">
             <a:avLst/>
@@ -1587,12 +1946,7 @@
           <a:solidFill>
             <a:srgbClr val="FFFFFF"/>
           </a:solidFill>
-          <a:ln w="12700">
-            <a:solidFill>
-              <a:srgbClr val="E5E2DC"/>
-            </a:solidFill>
-            <a:prstDash val="solid"/>
-          </a:ln>
+          <a:ln/>
           <a:effectLst>
             <a:outerShdw sx="100000" sy="100000" kx="0" ky="0" algn="bl" rotWithShape="0" blurRad="50800" dist="25400" dir="8100000">
               <a:srgbClr val="000000">
@@ -1604,14 +1958,14 @@
       </p:sp>
       <p:sp>
         <p:nvSpPr>
-          <p:cNvPr id="5" name="Shape 3"/>
-          <p:cNvSpPr/>
-          <p:nvPr/>
-        </p:nvSpPr>
-        <p:spPr>
-          <a:xfrm>
-            <a:off x="1371600" y="914400"/>
-            <a:ext cx="91440" cy="3200400"/>
+          <p:cNvPr id="7" name="Shape 5"/>
+          <p:cNvSpPr/>
+          <p:nvPr/>
+        </p:nvSpPr>
+        <p:spPr>
+          <a:xfrm>
+            <a:off x="731520" y="1051560"/>
+            <a:ext cx="54864" cy="658368"/>
           </a:xfrm>
           <a:prstGeom prst="rect">
             <a:avLst/>
@@ -1624,14 +1978,14 @@
       </p:sp>
       <p:sp>
         <p:nvSpPr>
-          <p:cNvPr id="6" name="Text 4"/>
-          <p:cNvSpPr/>
-          <p:nvPr/>
-        </p:nvSpPr>
-        <p:spPr>
-          <a:xfrm>
-            <a:off x="1828800" y="1097280"/>
-            <a:ext cx="5669280" cy="640080"/>
+          <p:cNvPr id="8" name="Text 6"/>
+          <p:cNvSpPr/>
+          <p:nvPr/>
+        </p:nvSpPr>
+        <p:spPr>
+          <a:xfrm>
+            <a:off x="914400" y="1051560"/>
+            <a:ext cx="1463040" cy="658368"/>
           </a:xfrm>
           <a:prstGeom prst="rect">
             <a:avLst/>
@@ -1640,14 +1994,14 @@
           <a:ln/>
         </p:spPr>
         <p:txBody>
-          <a:bodyPr wrap="square" rtlCol="0" anchor="ctr"/>
+          <a:bodyPr wrap="square" lIns="0" tIns="0" rIns="0" bIns="0" rtlCol="0" anchor="ctr"/>
           <a:lstStyle/>
           <a:p>
             <a:pPr indent="0" marL="0">
               <a:buNone/>
             </a:pPr>
             <a:r>
-              <a:rPr lang="en-US" sz="2400" b="1" dirty="0">
+              <a:rPr lang="en-US" sz="1300" b="1" dirty="0">
                 <a:solidFill>
                   <a:srgbClr val="1B2A4A"/>
                 </a:solidFill>
@@ -1655,22 +2009,22 @@
                 <a:ea typeface="Georgia" pitchFamily="34" charset="-122"/>
                 <a:cs typeface="Georgia" pitchFamily="34" charset="-120"/>
               </a:rPr>
-              <a:t>Why Lab Safety Matters</a:t>
-            </a:r>
-            <a:endParaRPr lang="en-US" sz="2400" dirty="0"/>
-          </a:p>
-        </p:txBody>
-      </p:sp>
-      <p:sp>
-        <p:nvSpPr>
-          <p:cNvPr id="7" name="Text 5"/>
-          <p:cNvSpPr/>
-          <p:nvPr/>
-        </p:nvSpPr>
-        <p:spPr>
-          <a:xfrm>
-            <a:off x="1828800" y="1828800"/>
-            <a:ext cx="5669280" cy="2011680"/>
+              <a:t>Hazard</a:t>
+            </a:r>
+            <a:endParaRPr lang="en-US" sz="1300" dirty="0"/>
+          </a:p>
+        </p:txBody>
+      </p:sp>
+      <p:sp>
+        <p:nvSpPr>
+          <p:cNvPr id="9" name="Text 7"/>
+          <p:cNvSpPr/>
+          <p:nvPr/>
+        </p:nvSpPr>
+        <p:spPr>
+          <a:xfrm>
+            <a:off x="2377440" y="1051560"/>
+            <a:ext cx="1920240" cy="658368"/>
           </a:xfrm>
           <a:prstGeom prst="rect">
             <a:avLst/>
@@ -1679,27 +2033,649 @@
           <a:ln/>
         </p:spPr>
         <p:txBody>
-          <a:bodyPr wrap="square" rtlCol="0" anchor="t"/>
+          <a:bodyPr wrap="square" lIns="0" tIns="0" rIns="0" bIns="0" rtlCol="0" anchor="ctr"/>
           <a:lstStyle/>
           <a:p>
             <a:pPr indent="0" marL="0">
-              <a:lnSpc>
-                <a:spcPct val="130000"/>
-              </a:lnSpc>
               <a:buNone/>
             </a:pPr>
             <a:r>
-              <a:rPr lang="en-US" sz="1500" dirty="0">
-                <a:solidFill>
-                  <a:srgbClr val="3D3A36"/>
+              <a:rPr lang="en-US" sz="1100" dirty="0">
+                <a:solidFill>
+                  <a:srgbClr val="6B6660"/>
                 </a:solidFill>
                 <a:latin typeface="Calibri" pitchFamily="34" charset="0"/>
                 <a:ea typeface="Calibri" pitchFamily="34" charset="-122"/>
                 <a:cs typeface="Calibri" pitchFamily="34" charset="-120"/>
               </a:rPr>
-              <a:t>Science labs contain chemicals, heat, and equipment that can cause injury if misused. Following safety rules protects you AND your classmates. Every scientist — from Grade 6 students to NASA researchers — follows strict safety procedures.</a:t>
-            </a:r>
-            <a:endParaRPr lang="en-US" sz="1500" dirty="0"/>
+              <a:t>Something that can cause harm</a:t>
+            </a:r>
+            <a:endParaRPr lang="en-US" sz="1100" dirty="0"/>
+          </a:p>
+        </p:txBody>
+      </p:sp>
+      <p:sp>
+        <p:nvSpPr>
+          <p:cNvPr id="10" name="Shape 8"/>
+          <p:cNvSpPr/>
+          <p:nvPr/>
+        </p:nvSpPr>
+        <p:spPr>
+          <a:xfrm>
+            <a:off x="4754880" y="1051560"/>
+            <a:ext cx="3657600" cy="658368"/>
+          </a:xfrm>
+          <a:prstGeom prst="rect">
+            <a:avLst/>
+          </a:prstGeom>
+          <a:solidFill>
+            <a:srgbClr val="FFFFFF"/>
+          </a:solidFill>
+          <a:ln/>
+          <a:effectLst>
+            <a:outerShdw sx="100000" sy="100000" kx="0" ky="0" algn="bl" rotWithShape="0" blurRad="50800" dist="25400" dir="8100000">
+              <a:srgbClr val="000000">
+                <a:alpha val="10000"/>
+              </a:srgbClr>
+            </a:outerShdw>
+          </a:effectLst>
+        </p:spPr>
+      </p:sp>
+      <p:sp>
+        <p:nvSpPr>
+          <p:cNvPr id="11" name="Shape 9"/>
+          <p:cNvSpPr/>
+          <p:nvPr/>
+        </p:nvSpPr>
+        <p:spPr>
+          <a:xfrm>
+            <a:off x="4754880" y="1051560"/>
+            <a:ext cx="54864" cy="658368"/>
+          </a:xfrm>
+          <a:prstGeom prst="rect">
+            <a:avLst/>
+          </a:prstGeom>
+          <a:solidFill>
+            <a:srgbClr val="2A9D8F"/>
+          </a:solidFill>
+          <a:ln/>
+        </p:spPr>
+      </p:sp>
+      <p:sp>
+        <p:nvSpPr>
+          <p:cNvPr id="12" name="Text 10"/>
+          <p:cNvSpPr/>
+          <p:nvPr/>
+        </p:nvSpPr>
+        <p:spPr>
+          <a:xfrm>
+            <a:off x="4937760" y="1051560"/>
+            <a:ext cx="1463040" cy="658368"/>
+          </a:xfrm>
+          <a:prstGeom prst="rect">
+            <a:avLst/>
+          </a:prstGeom>
+          <a:noFill/>
+          <a:ln/>
+        </p:spPr>
+        <p:txBody>
+          <a:bodyPr wrap="square" lIns="0" tIns="0" rIns="0" bIns="0" rtlCol="0" anchor="ctr"/>
+          <a:lstStyle/>
+          <a:p>
+            <a:pPr indent="0" marL="0">
+              <a:buNone/>
+            </a:pPr>
+            <a:r>
+              <a:rPr lang="en-US" sz="1300" b="1" dirty="0">
+                <a:solidFill>
+                  <a:srgbClr val="1B2A4A"/>
+                </a:solidFill>
+                <a:latin typeface="Georgia" pitchFamily="34" charset="0"/>
+                <a:ea typeface="Georgia" pitchFamily="34" charset="-122"/>
+                <a:cs typeface="Georgia" pitchFamily="34" charset="-120"/>
+              </a:rPr>
+              <a:t>Risk</a:t>
+            </a:r>
+            <a:endParaRPr lang="en-US" sz="1300" dirty="0"/>
+          </a:p>
+        </p:txBody>
+      </p:sp>
+      <p:sp>
+        <p:nvSpPr>
+          <p:cNvPr id="13" name="Text 11"/>
+          <p:cNvSpPr/>
+          <p:nvPr/>
+        </p:nvSpPr>
+        <p:spPr>
+          <a:xfrm>
+            <a:off x="6400800" y="1051560"/>
+            <a:ext cx="1920240" cy="658368"/>
+          </a:xfrm>
+          <a:prstGeom prst="rect">
+            <a:avLst/>
+          </a:prstGeom>
+          <a:noFill/>
+          <a:ln/>
+        </p:spPr>
+        <p:txBody>
+          <a:bodyPr wrap="square" lIns="0" tIns="0" rIns="0" bIns="0" rtlCol="0" anchor="ctr"/>
+          <a:lstStyle/>
+          <a:p>
+            <a:pPr indent="0" marL="0">
+              <a:buNone/>
+            </a:pPr>
+            <a:r>
+              <a:rPr lang="en-US" sz="1100" dirty="0">
+                <a:solidFill>
+                  <a:srgbClr val="6B6660"/>
+                </a:solidFill>
+                <a:latin typeface="Calibri" pitchFamily="34" charset="0"/>
+                <a:ea typeface="Calibri" pitchFamily="34" charset="-122"/>
+                <a:cs typeface="Calibri" pitchFamily="34" charset="-120"/>
+              </a:rPr>
+              <a:t>The chance of harm happening</a:t>
+            </a:r>
+            <a:endParaRPr lang="en-US" sz="1100" dirty="0"/>
+          </a:p>
+        </p:txBody>
+      </p:sp>
+      <p:sp>
+        <p:nvSpPr>
+          <p:cNvPr id="14" name="Shape 12"/>
+          <p:cNvSpPr/>
+          <p:nvPr/>
+        </p:nvSpPr>
+        <p:spPr>
+          <a:xfrm>
+            <a:off x="731520" y="1819656"/>
+            <a:ext cx="3657600" cy="658368"/>
+          </a:xfrm>
+          <a:prstGeom prst="rect">
+            <a:avLst/>
+          </a:prstGeom>
+          <a:solidFill>
+            <a:srgbClr val="FFFFFF"/>
+          </a:solidFill>
+          <a:ln/>
+          <a:effectLst>
+            <a:outerShdw sx="100000" sy="100000" kx="0" ky="0" algn="bl" rotWithShape="0" blurRad="50800" dist="25400" dir="8100000">
+              <a:srgbClr val="000000">
+                <a:alpha val="10000"/>
+              </a:srgbClr>
+            </a:outerShdw>
+          </a:effectLst>
+        </p:spPr>
+      </p:sp>
+      <p:sp>
+        <p:nvSpPr>
+          <p:cNvPr id="15" name="Shape 13"/>
+          <p:cNvSpPr/>
+          <p:nvPr/>
+        </p:nvSpPr>
+        <p:spPr>
+          <a:xfrm>
+            <a:off x="731520" y="1819656"/>
+            <a:ext cx="54864" cy="658368"/>
+          </a:xfrm>
+          <a:prstGeom prst="rect">
+            <a:avLst/>
+          </a:prstGeom>
+          <a:solidFill>
+            <a:srgbClr val="2A9D8F"/>
+          </a:solidFill>
+          <a:ln/>
+        </p:spPr>
+      </p:sp>
+      <p:sp>
+        <p:nvSpPr>
+          <p:cNvPr id="16" name="Text 14"/>
+          <p:cNvSpPr/>
+          <p:nvPr/>
+        </p:nvSpPr>
+        <p:spPr>
+          <a:xfrm>
+            <a:off x="914400" y="1819656"/>
+            <a:ext cx="1463040" cy="658368"/>
+          </a:xfrm>
+          <a:prstGeom prst="rect">
+            <a:avLst/>
+          </a:prstGeom>
+          <a:noFill/>
+          <a:ln/>
+        </p:spPr>
+        <p:txBody>
+          <a:bodyPr wrap="square" lIns="0" tIns="0" rIns="0" bIns="0" rtlCol="0" anchor="ctr"/>
+          <a:lstStyle/>
+          <a:p>
+            <a:pPr indent="0" marL="0">
+              <a:buNone/>
+            </a:pPr>
+            <a:r>
+              <a:rPr lang="en-US" sz="1300" b="1" dirty="0">
+                <a:solidFill>
+                  <a:srgbClr val="1B2A4A"/>
+                </a:solidFill>
+                <a:latin typeface="Georgia" pitchFamily="34" charset="0"/>
+                <a:ea typeface="Georgia" pitchFamily="34" charset="-122"/>
+                <a:cs typeface="Georgia" pitchFamily="34" charset="-120"/>
+              </a:rPr>
+              <a:t>PPE</a:t>
+            </a:r>
+            <a:endParaRPr lang="en-US" sz="1300" dirty="0"/>
+          </a:p>
+        </p:txBody>
+      </p:sp>
+      <p:sp>
+        <p:nvSpPr>
+          <p:cNvPr id="17" name="Text 15"/>
+          <p:cNvSpPr/>
+          <p:nvPr/>
+        </p:nvSpPr>
+        <p:spPr>
+          <a:xfrm>
+            <a:off x="2377440" y="1819656"/>
+            <a:ext cx="1920240" cy="658368"/>
+          </a:xfrm>
+          <a:prstGeom prst="rect">
+            <a:avLst/>
+          </a:prstGeom>
+          <a:noFill/>
+          <a:ln/>
+        </p:spPr>
+        <p:txBody>
+          <a:bodyPr wrap="square" lIns="0" tIns="0" rIns="0" bIns="0" rtlCol="0" anchor="ctr"/>
+          <a:lstStyle/>
+          <a:p>
+            <a:pPr indent="0" marL="0">
+              <a:buNone/>
+            </a:pPr>
+            <a:r>
+              <a:rPr lang="en-US" sz="1100" dirty="0">
+                <a:solidFill>
+                  <a:srgbClr val="6B6660"/>
+                </a:solidFill>
+                <a:latin typeface="Calibri" pitchFamily="34" charset="0"/>
+                <a:ea typeface="Calibri" pitchFamily="34" charset="-122"/>
+                <a:cs typeface="Calibri" pitchFamily="34" charset="-120"/>
+              </a:rPr>
+              <a:t>Equipment that protects your body</a:t>
+            </a:r>
+            <a:endParaRPr lang="en-US" sz="1100" dirty="0"/>
+          </a:p>
+        </p:txBody>
+      </p:sp>
+      <p:sp>
+        <p:nvSpPr>
+          <p:cNvPr id="18" name="Shape 16"/>
+          <p:cNvSpPr/>
+          <p:nvPr/>
+        </p:nvSpPr>
+        <p:spPr>
+          <a:xfrm>
+            <a:off x="4754880" y="1819656"/>
+            <a:ext cx="3657600" cy="658368"/>
+          </a:xfrm>
+          <a:prstGeom prst="rect">
+            <a:avLst/>
+          </a:prstGeom>
+          <a:solidFill>
+            <a:srgbClr val="FFFFFF"/>
+          </a:solidFill>
+          <a:ln/>
+          <a:effectLst>
+            <a:outerShdw sx="100000" sy="100000" kx="0" ky="0" algn="bl" rotWithShape="0" blurRad="50800" dist="25400" dir="8100000">
+              <a:srgbClr val="000000">
+                <a:alpha val="10000"/>
+              </a:srgbClr>
+            </a:outerShdw>
+          </a:effectLst>
+        </p:spPr>
+      </p:sp>
+      <p:sp>
+        <p:nvSpPr>
+          <p:cNvPr id="19" name="Shape 17"/>
+          <p:cNvSpPr/>
+          <p:nvPr/>
+        </p:nvSpPr>
+        <p:spPr>
+          <a:xfrm>
+            <a:off x="4754880" y="1819656"/>
+            <a:ext cx="54864" cy="658368"/>
+          </a:xfrm>
+          <a:prstGeom prst="rect">
+            <a:avLst/>
+          </a:prstGeom>
+          <a:solidFill>
+            <a:srgbClr val="2A9D8F"/>
+          </a:solidFill>
+          <a:ln/>
+        </p:spPr>
+      </p:sp>
+      <p:sp>
+        <p:nvSpPr>
+          <p:cNvPr id="20" name="Text 18"/>
+          <p:cNvSpPr/>
+          <p:nvPr/>
+        </p:nvSpPr>
+        <p:spPr>
+          <a:xfrm>
+            <a:off x="4937760" y="1819656"/>
+            <a:ext cx="1463040" cy="658368"/>
+          </a:xfrm>
+          <a:prstGeom prst="rect">
+            <a:avLst/>
+          </a:prstGeom>
+          <a:noFill/>
+          <a:ln/>
+        </p:spPr>
+        <p:txBody>
+          <a:bodyPr wrap="square" lIns="0" tIns="0" rIns="0" bIns="0" rtlCol="0" anchor="ctr"/>
+          <a:lstStyle/>
+          <a:p>
+            <a:pPr indent="0" marL="0">
+              <a:buNone/>
+            </a:pPr>
+            <a:r>
+              <a:rPr lang="en-US" sz="1300" b="1" dirty="0">
+                <a:solidFill>
+                  <a:srgbClr val="1B2A4A"/>
+                </a:solidFill>
+                <a:latin typeface="Georgia" pitchFamily="34" charset="0"/>
+                <a:ea typeface="Georgia" pitchFamily="34" charset="-122"/>
+                <a:cs typeface="Georgia" pitchFamily="34" charset="-120"/>
+              </a:rPr>
+              <a:t>Hazard symbol</a:t>
+            </a:r>
+            <a:endParaRPr lang="en-US" sz="1300" dirty="0"/>
+          </a:p>
+        </p:txBody>
+      </p:sp>
+      <p:sp>
+        <p:nvSpPr>
+          <p:cNvPr id="21" name="Text 19"/>
+          <p:cNvSpPr/>
+          <p:nvPr/>
+        </p:nvSpPr>
+        <p:spPr>
+          <a:xfrm>
+            <a:off x="6400800" y="1819656"/>
+            <a:ext cx="1920240" cy="658368"/>
+          </a:xfrm>
+          <a:prstGeom prst="rect">
+            <a:avLst/>
+          </a:prstGeom>
+          <a:noFill/>
+          <a:ln/>
+        </p:spPr>
+        <p:txBody>
+          <a:bodyPr wrap="square" lIns="0" tIns="0" rIns="0" bIns="0" rtlCol="0" anchor="ctr"/>
+          <a:lstStyle/>
+          <a:p>
+            <a:pPr indent="0" marL="0">
+              <a:buNone/>
+            </a:pPr>
+            <a:r>
+              <a:rPr lang="en-US" sz="1100" dirty="0">
+                <a:solidFill>
+                  <a:srgbClr val="6B6660"/>
+                </a:solidFill>
+                <a:latin typeface="Calibri" pitchFamily="34" charset="0"/>
+                <a:ea typeface="Calibri" pitchFamily="34" charset="-122"/>
+                <a:cs typeface="Calibri" pitchFamily="34" charset="-120"/>
+              </a:rPr>
+              <a:t>Warning sign on chemicals</a:t>
+            </a:r>
+            <a:endParaRPr lang="en-US" sz="1100" dirty="0"/>
+          </a:p>
+        </p:txBody>
+      </p:sp>
+      <p:sp>
+        <p:nvSpPr>
+          <p:cNvPr id="22" name="Shape 20"/>
+          <p:cNvSpPr/>
+          <p:nvPr/>
+        </p:nvSpPr>
+        <p:spPr>
+          <a:xfrm>
+            <a:off x="731520" y="2587752"/>
+            <a:ext cx="3657600" cy="658368"/>
+          </a:xfrm>
+          <a:prstGeom prst="rect">
+            <a:avLst/>
+          </a:prstGeom>
+          <a:solidFill>
+            <a:srgbClr val="FFFFFF"/>
+          </a:solidFill>
+          <a:ln/>
+          <a:effectLst>
+            <a:outerShdw sx="100000" sy="100000" kx="0" ky="0" algn="bl" rotWithShape="0" blurRad="50800" dist="25400" dir="8100000">
+              <a:srgbClr val="000000">
+                <a:alpha val="10000"/>
+              </a:srgbClr>
+            </a:outerShdw>
+          </a:effectLst>
+        </p:spPr>
+      </p:sp>
+      <p:sp>
+        <p:nvSpPr>
+          <p:cNvPr id="23" name="Shape 21"/>
+          <p:cNvSpPr/>
+          <p:nvPr/>
+        </p:nvSpPr>
+        <p:spPr>
+          <a:xfrm>
+            <a:off x="731520" y="2587752"/>
+            <a:ext cx="54864" cy="658368"/>
+          </a:xfrm>
+          <a:prstGeom prst="rect">
+            <a:avLst/>
+          </a:prstGeom>
+          <a:solidFill>
+            <a:srgbClr val="2A9D8F"/>
+          </a:solidFill>
+          <a:ln/>
+        </p:spPr>
+      </p:sp>
+      <p:sp>
+        <p:nvSpPr>
+          <p:cNvPr id="24" name="Text 22"/>
+          <p:cNvSpPr/>
+          <p:nvPr/>
+        </p:nvSpPr>
+        <p:spPr>
+          <a:xfrm>
+            <a:off x="914400" y="2587752"/>
+            <a:ext cx="1463040" cy="658368"/>
+          </a:xfrm>
+          <a:prstGeom prst="rect">
+            <a:avLst/>
+          </a:prstGeom>
+          <a:noFill/>
+          <a:ln/>
+        </p:spPr>
+        <p:txBody>
+          <a:bodyPr wrap="square" lIns="0" tIns="0" rIns="0" bIns="0" rtlCol="0" anchor="ctr"/>
+          <a:lstStyle/>
+          <a:p>
+            <a:pPr indent="0" marL="0">
+              <a:buNone/>
+            </a:pPr>
+            <a:r>
+              <a:rPr lang="en-US" sz="1300" b="1" dirty="0">
+                <a:solidFill>
+                  <a:srgbClr val="1B2A4A"/>
+                </a:solidFill>
+                <a:latin typeface="Georgia" pitchFamily="34" charset="0"/>
+                <a:ea typeface="Georgia" pitchFamily="34" charset="-122"/>
+                <a:cs typeface="Georgia" pitchFamily="34" charset="-120"/>
+              </a:rPr>
+              <a:t>First aid</a:t>
+            </a:r>
+            <a:endParaRPr lang="en-US" sz="1300" dirty="0"/>
+          </a:p>
+        </p:txBody>
+      </p:sp>
+      <p:sp>
+        <p:nvSpPr>
+          <p:cNvPr id="25" name="Text 23"/>
+          <p:cNvSpPr/>
+          <p:nvPr/>
+        </p:nvSpPr>
+        <p:spPr>
+          <a:xfrm>
+            <a:off x="2377440" y="2587752"/>
+            <a:ext cx="1920240" cy="658368"/>
+          </a:xfrm>
+          <a:prstGeom prst="rect">
+            <a:avLst/>
+          </a:prstGeom>
+          <a:noFill/>
+          <a:ln/>
+        </p:spPr>
+        <p:txBody>
+          <a:bodyPr wrap="square" lIns="0" tIns="0" rIns="0" bIns="0" rtlCol="0" anchor="ctr"/>
+          <a:lstStyle/>
+          <a:p>
+            <a:pPr indent="0" marL="0">
+              <a:buNone/>
+            </a:pPr>
+            <a:r>
+              <a:rPr lang="en-US" sz="1100" dirty="0">
+                <a:solidFill>
+                  <a:srgbClr val="6B6660"/>
+                </a:solidFill>
+                <a:latin typeface="Calibri" pitchFamily="34" charset="0"/>
+                <a:ea typeface="Calibri" pitchFamily="34" charset="-122"/>
+                <a:cs typeface="Calibri" pitchFamily="34" charset="-120"/>
+              </a:rPr>
+              <a:t>Help given before doctor arrives</a:t>
+            </a:r>
+            <a:endParaRPr lang="en-US" sz="1100" dirty="0"/>
+          </a:p>
+        </p:txBody>
+      </p:sp>
+      <p:sp>
+        <p:nvSpPr>
+          <p:cNvPr id="26" name="Shape 24"/>
+          <p:cNvSpPr/>
+          <p:nvPr/>
+        </p:nvSpPr>
+        <p:spPr>
+          <a:xfrm>
+            <a:off x="4754880" y="2587752"/>
+            <a:ext cx="3657600" cy="658368"/>
+          </a:xfrm>
+          <a:prstGeom prst="rect">
+            <a:avLst/>
+          </a:prstGeom>
+          <a:solidFill>
+            <a:srgbClr val="FFFFFF"/>
+          </a:solidFill>
+          <a:ln/>
+          <a:effectLst>
+            <a:outerShdw sx="100000" sy="100000" kx="0" ky="0" algn="bl" rotWithShape="0" blurRad="50800" dist="25400" dir="8100000">
+              <a:srgbClr val="000000">
+                <a:alpha val="10000"/>
+              </a:srgbClr>
+            </a:outerShdw>
+          </a:effectLst>
+        </p:spPr>
+      </p:sp>
+      <p:sp>
+        <p:nvSpPr>
+          <p:cNvPr id="27" name="Shape 25"/>
+          <p:cNvSpPr/>
+          <p:nvPr/>
+        </p:nvSpPr>
+        <p:spPr>
+          <a:xfrm>
+            <a:off x="4754880" y="2587752"/>
+            <a:ext cx="54864" cy="658368"/>
+          </a:xfrm>
+          <a:prstGeom prst="rect">
+            <a:avLst/>
+          </a:prstGeom>
+          <a:solidFill>
+            <a:srgbClr val="2A9D8F"/>
+          </a:solidFill>
+          <a:ln/>
+        </p:spPr>
+      </p:sp>
+      <p:sp>
+        <p:nvSpPr>
+          <p:cNvPr id="28" name="Text 26"/>
+          <p:cNvSpPr/>
+          <p:nvPr/>
+        </p:nvSpPr>
+        <p:spPr>
+          <a:xfrm>
+            <a:off x="4937760" y="2587752"/>
+            <a:ext cx="1463040" cy="658368"/>
+          </a:xfrm>
+          <a:prstGeom prst="rect">
+            <a:avLst/>
+          </a:prstGeom>
+          <a:noFill/>
+          <a:ln/>
+        </p:spPr>
+        <p:txBody>
+          <a:bodyPr wrap="square" lIns="0" tIns="0" rIns="0" bIns="0" rtlCol="0" anchor="ctr"/>
+          <a:lstStyle/>
+          <a:p>
+            <a:pPr indent="0" marL="0">
+              <a:buNone/>
+            </a:pPr>
+            <a:r>
+              <a:rPr lang="en-US" sz="1300" b="1" dirty="0">
+                <a:solidFill>
+                  <a:srgbClr val="1B2A4A"/>
+                </a:solidFill>
+                <a:latin typeface="Georgia" pitchFamily="34" charset="0"/>
+                <a:ea typeface="Georgia" pitchFamily="34" charset="-122"/>
+                <a:cs typeface="Georgia" pitchFamily="34" charset="-120"/>
+              </a:rPr>
+              <a:t>Emergency exit</a:t>
+            </a:r>
+            <a:endParaRPr lang="en-US" sz="1300" dirty="0"/>
+          </a:p>
+        </p:txBody>
+      </p:sp>
+      <p:sp>
+        <p:nvSpPr>
+          <p:cNvPr id="29" name="Text 27"/>
+          <p:cNvSpPr/>
+          <p:nvPr/>
+        </p:nvSpPr>
+        <p:spPr>
+          <a:xfrm>
+            <a:off x="6400800" y="2587752"/>
+            <a:ext cx="1920240" cy="658368"/>
+          </a:xfrm>
+          <a:prstGeom prst="rect">
+            <a:avLst/>
+          </a:prstGeom>
+          <a:noFill/>
+          <a:ln/>
+        </p:spPr>
+        <p:txBody>
+          <a:bodyPr wrap="square" lIns="0" tIns="0" rIns="0" bIns="0" rtlCol="0" anchor="ctr"/>
+          <a:lstStyle/>
+          <a:p>
+            <a:pPr indent="0" marL="0">
+              <a:buNone/>
+            </a:pPr>
+            <a:r>
+              <a:rPr lang="en-US" sz="1100" dirty="0">
+                <a:solidFill>
+                  <a:srgbClr val="6B6660"/>
+                </a:solidFill>
+                <a:latin typeface="Calibri" pitchFamily="34" charset="0"/>
+                <a:ea typeface="Calibri" pitchFamily="34" charset="-122"/>
+                <a:cs typeface="Calibri" pitchFamily="34" charset="-120"/>
+              </a:rPr>
+              <a:t>The way out in an emergency</a:t>
+            </a:r>
+            <a:endParaRPr lang="en-US" sz="1100" dirty="0"/>
           </a:p>
         </p:txBody>
       </p:sp>
@@ -1744,7 +2720,47 @@
         <p:spPr>
           <a:xfrm>
             <a:off x="0" y="0"/>
-            <a:ext cx="9144000" cy="54864"/>
+            <a:ext cx="9144000" cy="822960"/>
+          </a:xfrm>
+          <a:prstGeom prst="rect">
+            <a:avLst/>
+          </a:prstGeom>
+          <a:solidFill>
+            <a:srgbClr val="FFFFFF"/>
+          </a:solidFill>
+          <a:ln/>
+        </p:spPr>
+      </p:sp>
+      <p:sp>
+        <p:nvSpPr>
+          <p:cNvPr id="3" name="Shape 1"/>
+          <p:cNvSpPr/>
+          <p:nvPr/>
+        </p:nvSpPr>
+        <p:spPr>
+          <a:xfrm>
+            <a:off x="0" y="804672"/>
+            <a:ext cx="9144000" cy="27432"/>
+          </a:xfrm>
+          <a:prstGeom prst="rect">
+            <a:avLst/>
+          </a:prstGeom>
+          <a:solidFill>
+            <a:srgbClr val="E5E2DC"/>
+          </a:solidFill>
+          <a:ln/>
+        </p:spPr>
+      </p:sp>
+      <p:sp>
+        <p:nvSpPr>
+          <p:cNvPr id="4" name="Shape 2"/>
+          <p:cNvSpPr/>
+          <p:nvPr/>
+        </p:nvSpPr>
+        <p:spPr>
+          <a:xfrm>
+            <a:off x="548640" y="201168"/>
+            <a:ext cx="54864" cy="420624"/>
           </a:xfrm>
           <a:prstGeom prst="rect">
             <a:avLst/>
@@ -1757,14 +2773,14 @@
       </p:sp>
       <p:sp>
         <p:nvSpPr>
-          <p:cNvPr id="3" name="Text 1"/>
-          <p:cNvSpPr/>
-          <p:nvPr/>
-        </p:nvSpPr>
-        <p:spPr>
-          <a:xfrm>
-            <a:off x="7772400" y="4709160"/>
-            <a:ext cx="1097280" cy="320040"/>
+          <p:cNvPr id="5" name="Text 3"/>
+          <p:cNvSpPr/>
+          <p:nvPr/>
+        </p:nvSpPr>
+        <p:spPr>
+          <a:xfrm>
+            <a:off x="777240" y="137160"/>
+            <a:ext cx="7772400" cy="548640"/>
           </a:xfrm>
           <a:prstGeom prst="rect">
             <a:avLst/>
@@ -1773,89 +2789,193 @@
           <a:ln/>
         </p:spPr>
         <p:txBody>
-          <a:bodyPr wrap="square" rtlCol="0" anchor="ctr"/>
+          <a:bodyPr wrap="square" lIns="0" tIns="0" rIns="0" bIns="0" rtlCol="0" anchor="ctr"/>
           <a:lstStyle/>
           <a:p>
-            <a:pPr algn="r" indent="0" marL="0">
+            <a:pPr indent="0" marL="0">
               <a:buNone/>
             </a:pPr>
             <a:r>
-              <a:rPr lang="en-US" sz="900" dirty="0">
-                <a:solidFill>
-                  <a:srgbClr val="6B6660"/>
+              <a:rPr lang="en-US" sz="2000" b="1" dirty="0">
+                <a:solidFill>
+                  <a:srgbClr val="1B2A4A"/>
+                </a:solidFill>
+                <a:latin typeface="Georgia" pitchFamily="34" charset="0"/>
+                <a:ea typeface="Georgia" pitchFamily="34" charset="-122"/>
+                <a:cs typeface="Georgia" pitchFamily="34" charset="-120"/>
+              </a:rPr>
+              <a:t>Lab Rules Everyone Must Follow</a:t>
+            </a:r>
+            <a:endParaRPr lang="en-US" sz="2000" dirty="0"/>
+          </a:p>
+        </p:txBody>
+      </p:sp>
+      <p:sp>
+        <p:nvSpPr>
+          <p:cNvPr id="6" name="Text 4"/>
+          <p:cNvSpPr/>
+          <p:nvPr/>
+        </p:nvSpPr>
+        <p:spPr>
+          <a:xfrm>
+            <a:off x="731520" y="1051560"/>
+            <a:ext cx="7680960" cy="3108960"/>
+          </a:xfrm>
+          <a:prstGeom prst="rect">
+            <a:avLst/>
+          </a:prstGeom>
+          <a:noFill/>
+          <a:ln/>
+        </p:spPr>
+        <p:txBody>
+          <a:bodyPr wrap="square" rtlCol="0" anchor="t"/>
+          <a:lstStyle/>
+          <a:p>
+            <a:pPr marL="342900" indent="-342900">
+              <a:spcAft>
+                <a:spcPts val="800"/>
+              </a:spcAft>
+              <a:buSzPct val="100000"/>
+              <a:buChar char="•"/>
+            </a:pPr>
+            <a:r>
+              <a:rPr lang="en-US" sz="1500" dirty="0">
+                <a:solidFill>
+                  <a:srgbClr val="3D3A36"/>
                 </a:solidFill>
                 <a:latin typeface="Calibri" pitchFamily="34" charset="0"/>
                 <a:ea typeface="Calibri" pitchFamily="34" charset="-122"/>
                 <a:cs typeface="Calibri" pitchFamily="34" charset="-120"/>
               </a:rPr>
-              <a:t>3 / 6</a:t>
-            </a:r>
-            <a:endParaRPr lang="en-US" sz="900" dirty="0"/>
-          </a:p>
-        </p:txBody>
-      </p:sp>
-      <p:sp>
-        <p:nvSpPr>
-          <p:cNvPr id="4" name="Text 2"/>
-          <p:cNvSpPr/>
-          <p:nvPr/>
-        </p:nvSpPr>
-        <p:spPr>
-          <a:xfrm>
-            <a:off x="457200" y="274320"/>
-            <a:ext cx="8229600" cy="640080"/>
-          </a:xfrm>
-          <a:prstGeom prst="rect">
-            <a:avLst/>
-          </a:prstGeom>
-          <a:noFill/>
-          <a:ln/>
-        </p:spPr>
-        <p:txBody>
-          <a:bodyPr wrap="square" rtlCol="0" anchor="ctr"/>
-          <a:lstStyle/>
-          <a:p>
-            <a:pPr indent="0" marL="0">
-              <a:buNone/>
-            </a:pPr>
-            <a:r>
-              <a:rPr lang="en-US" sz="2600" b="1" dirty="0">
-                <a:solidFill>
-                  <a:srgbClr val="1B2A4A"/>
-                </a:solidFill>
-                <a:latin typeface="Georgia" pitchFamily="34" charset="0"/>
-                <a:ea typeface="Georgia" pitchFamily="34" charset="-122"/>
-                <a:cs typeface="Georgia" pitchFamily="34" charset="-120"/>
-              </a:rPr>
-              <a:t>Essential Lab Rules</a:t>
-            </a:r>
-            <a:endParaRPr lang="en-US" sz="2600" dirty="0"/>
-          </a:p>
-        </p:txBody>
-      </p:sp>
-      <p:sp>
-        <p:nvSpPr>
-          <p:cNvPr id="5" name="Shape 3"/>
-          <p:cNvSpPr/>
-          <p:nvPr/>
-        </p:nvSpPr>
-        <p:spPr>
-          <a:xfrm>
-            <a:off x="457200" y="1188720"/>
-            <a:ext cx="2560320" cy="1828800"/>
-          </a:xfrm>
-          <a:prstGeom prst="rect">
-            <a:avLst/>
-          </a:prstGeom>
-          <a:solidFill>
-            <a:srgbClr val="FFFFFF"/>
-          </a:solidFill>
-          <a:ln w="12700">
-            <a:solidFill>
-              <a:srgbClr val="E5E2DC"/>
-            </a:solidFill>
-            <a:prstDash val="solid"/>
-          </a:ln>
+              <a:t>Never eat, drink, or chew gum in the lab.</a:t>
+            </a:r>
+            <a:endParaRPr lang="en-US" sz="1500" dirty="0"/>
+          </a:p>
+          <a:p>
+            <a:pPr marL="342900" indent="-342900">
+              <a:spcAft>
+                <a:spcPts val="800"/>
+              </a:spcAft>
+              <a:buSzPct val="100000"/>
+              <a:buChar char="•"/>
+            </a:pPr>
+            <a:r>
+              <a:rPr lang="en-US" sz="1500" dirty="0">
+                <a:solidFill>
+                  <a:srgbClr val="3D3A36"/>
+                </a:solidFill>
+                <a:latin typeface="Calibri" pitchFamily="34" charset="0"/>
+                <a:ea typeface="Calibri" pitchFamily="34" charset="-122"/>
+                <a:cs typeface="Calibri" pitchFamily="34" charset="-120"/>
+              </a:rPr>
+              <a:t>Always wear safety goggles when heating or using chemicals.</a:t>
+            </a:r>
+            <a:endParaRPr lang="en-US" sz="1500" dirty="0"/>
+          </a:p>
+          <a:p>
+            <a:pPr marL="342900" indent="-342900">
+              <a:spcAft>
+                <a:spcPts val="800"/>
+              </a:spcAft>
+              <a:buSzPct val="100000"/>
+              <a:buChar char="•"/>
+            </a:pPr>
+            <a:r>
+              <a:rPr lang="en-US" sz="1500" dirty="0">
+                <a:solidFill>
+                  <a:srgbClr val="3D3A36"/>
+                </a:solidFill>
+                <a:latin typeface="Calibri" pitchFamily="34" charset="0"/>
+                <a:ea typeface="Calibri" pitchFamily="34" charset="-122"/>
+                <a:cs typeface="Calibri" pitchFamily="34" charset="-120"/>
+              </a:rPr>
+              <a:t>Tie back long hair and tuck in loose clothing.</a:t>
+            </a:r>
+            <a:endParaRPr lang="en-US" sz="1500" dirty="0"/>
+          </a:p>
+          <a:p>
+            <a:pPr marL="342900" indent="-342900">
+              <a:spcAft>
+                <a:spcPts val="800"/>
+              </a:spcAft>
+              <a:buSzPct val="100000"/>
+              <a:buChar char="•"/>
+            </a:pPr>
+            <a:r>
+              <a:rPr lang="en-US" sz="1500" dirty="0">
+                <a:solidFill>
+                  <a:srgbClr val="3D3A36"/>
+                </a:solidFill>
+                <a:latin typeface="Calibri" pitchFamily="34" charset="0"/>
+                <a:ea typeface="Calibri" pitchFamily="34" charset="-122"/>
+                <a:cs typeface="Calibri" pitchFamily="34" charset="-120"/>
+              </a:rPr>
+              <a:t>Walk — never run — in the laboratory.</a:t>
+            </a:r>
+            <a:endParaRPr lang="en-US" sz="1500" dirty="0"/>
+          </a:p>
+          <a:p>
+            <a:pPr marL="342900" indent="-342900">
+              <a:spcAft>
+                <a:spcPts val="800"/>
+              </a:spcAft>
+              <a:buSzPct val="100000"/>
+              <a:buChar char="•"/>
+            </a:pPr>
+            <a:r>
+              <a:rPr lang="en-US" sz="1500" dirty="0">
+                <a:solidFill>
+                  <a:srgbClr val="3D3A36"/>
+                </a:solidFill>
+                <a:latin typeface="Calibri" pitchFamily="34" charset="0"/>
+                <a:ea typeface="Calibri" pitchFamily="34" charset="-122"/>
+                <a:cs typeface="Calibri" pitchFamily="34" charset="-120"/>
+              </a:rPr>
+              <a:t>Report any spills, breakages, or injuries immediately.</a:t>
+            </a:r>
+            <a:endParaRPr lang="en-US" sz="1500" dirty="0"/>
+          </a:p>
+          <a:p>
+            <a:pPr marL="342900" indent="-342900">
+              <a:spcAft>
+                <a:spcPts val="800"/>
+              </a:spcAft>
+              <a:buSzPct val="100000"/>
+              <a:buChar char="•"/>
+            </a:pPr>
+            <a:r>
+              <a:rPr lang="en-US" sz="1500" dirty="0">
+                <a:solidFill>
+                  <a:srgbClr val="3D3A36"/>
+                </a:solidFill>
+                <a:latin typeface="Calibri" pitchFamily="34" charset="0"/>
+                <a:ea typeface="Calibri" pitchFamily="34" charset="-122"/>
+                <a:cs typeface="Calibri" pitchFamily="34" charset="-120"/>
+              </a:rPr>
+              <a:t>Follow your teacher's instructions at all times.</a:t>
+            </a:r>
+            <a:endParaRPr lang="en-US" sz="1500" dirty="0"/>
+          </a:p>
+        </p:txBody>
+      </p:sp>
+      <p:sp>
+        <p:nvSpPr>
+          <p:cNvPr id="7" name="Shape 5"/>
+          <p:cNvSpPr/>
+          <p:nvPr/>
+        </p:nvSpPr>
+        <p:spPr>
+          <a:xfrm>
+            <a:off x="731520" y="4206240"/>
+            <a:ext cx="7680960" cy="640080"/>
+          </a:xfrm>
+          <a:prstGeom prst="rect">
+            <a:avLst/>
+          </a:prstGeom>
+          <a:solidFill>
+            <a:srgbClr val="E8F5F3"/>
+          </a:solidFill>
+          <a:ln/>
           <a:effectLst>
             <a:outerShdw sx="100000" sy="100000" kx="0" ky="0" algn="bl" rotWithShape="0" blurRad="50800" dist="25400" dir="8100000">
               <a:srgbClr val="000000">
@@ -1867,34 +2987,14 @@
       </p:sp>
       <p:sp>
         <p:nvSpPr>
-          <p:cNvPr id="6" name="Shape 4"/>
-          <p:cNvSpPr/>
-          <p:nvPr/>
-        </p:nvSpPr>
-        <p:spPr>
-          <a:xfrm>
-            <a:off x="457200" y="1188720"/>
-            <a:ext cx="2560320" cy="54864"/>
-          </a:xfrm>
-          <a:prstGeom prst="rect">
-            <a:avLst/>
-          </a:prstGeom>
-          <a:solidFill>
-            <a:srgbClr val="2A9D8F"/>
-          </a:solidFill>
-          <a:ln/>
-        </p:spPr>
-      </p:sp>
-      <p:sp>
-        <p:nvSpPr>
-          <p:cNvPr id="7" name="Text 5"/>
-          <p:cNvSpPr/>
-          <p:nvPr/>
-        </p:nvSpPr>
-        <p:spPr>
-          <a:xfrm>
-            <a:off x="594360" y="1325880"/>
-            <a:ext cx="2286000" cy="365760"/>
+          <p:cNvPr id="8" name="Text 6"/>
+          <p:cNvSpPr/>
+          <p:nvPr/>
+        </p:nvSpPr>
+        <p:spPr>
+          <a:xfrm>
+            <a:off x="914400" y="4251960"/>
+            <a:ext cx="7315200" cy="548640"/>
           </a:xfrm>
           <a:prstGeom prst="rect">
             <a:avLst/>
@@ -1910,46 +3010,21 @@
               <a:buNone/>
             </a:pPr>
             <a:r>
-              <a:rPr lang="en-US" sz="1400" b="1" dirty="0">
-                <a:solidFill>
-                  <a:srgbClr val="1B2A4A"/>
+              <a:rPr lang="en-US" sz="1200" b="1" dirty="0">
+                <a:solidFill>
+                  <a:srgbClr val="2A9D8F"/>
                 </a:solidFill>
                 <a:latin typeface="Calibri" pitchFamily="34" charset="0"/>
                 <a:ea typeface="Calibri" pitchFamily="34" charset="-122"/>
                 <a:cs typeface="Calibri" pitchFamily="34" charset="-120"/>
               </a:rPr>
-              <a:t>Dress Code</a:t>
-            </a:r>
-            <a:endParaRPr lang="en-US" sz="1400" dirty="0"/>
-          </a:p>
-        </p:txBody>
-      </p:sp>
-      <p:sp>
-        <p:nvSpPr>
-          <p:cNvPr id="8" name="Text 6"/>
-          <p:cNvSpPr/>
-          <p:nvPr/>
-        </p:nvSpPr>
-        <p:spPr>
-          <a:xfrm>
-            <a:off x="594360" y="1737360"/>
-            <a:ext cx="2286000" cy="1097280"/>
-          </a:xfrm>
-          <a:prstGeom prst="rect">
-            <a:avLst/>
-          </a:prstGeom>
-          <a:noFill/>
-          <a:ln/>
-        </p:spPr>
-        <p:txBody>
-          <a:bodyPr wrap="square" rtlCol="0" anchor="t"/>
-          <a:lstStyle/>
-          <a:p>
+              <a:t>Key Idea: </a:t>
+            </a:r>
             <a:pPr indent="0" marL="0">
               <a:buNone/>
             </a:pPr>
             <a:r>
-              <a:rPr lang="en-US" sz="1100" dirty="0">
+              <a:rPr lang="en-US" sz="1200" i="1" dirty="0">
                 <a:solidFill>
                   <a:srgbClr val="3D3A36"/>
                 </a:solidFill>
@@ -1957,269 +3032,9 @@
                 <a:ea typeface="Calibri" pitchFamily="34" charset="-122"/>
                 <a:cs typeface="Calibri" pitchFamily="34" charset="-120"/>
               </a:rPr>
-              <a:t>Tie back long hair. Remove dangling jewelry. Wear closed-toe shoes. Put on safety goggles before handling chemicals.</a:t>
-            </a:r>
-            <a:endParaRPr lang="en-US" sz="1100" dirty="0"/>
-          </a:p>
-        </p:txBody>
-      </p:sp>
-      <p:sp>
-        <p:nvSpPr>
-          <p:cNvPr id="9" name="Shape 7"/>
-          <p:cNvSpPr/>
-          <p:nvPr/>
-        </p:nvSpPr>
-        <p:spPr>
-          <a:xfrm>
-            <a:off x="3291840" y="1188720"/>
-            <a:ext cx="2560320" cy="1828800"/>
-          </a:xfrm>
-          <a:prstGeom prst="rect">
-            <a:avLst/>
-          </a:prstGeom>
-          <a:solidFill>
-            <a:srgbClr val="FFFFFF"/>
-          </a:solidFill>
-          <a:ln w="12700">
-            <a:solidFill>
-              <a:srgbClr val="E5E2DC"/>
-            </a:solidFill>
-            <a:prstDash val="solid"/>
-          </a:ln>
-          <a:effectLst>
-            <a:outerShdw sx="100000" sy="100000" kx="0" ky="0" algn="bl" rotWithShape="0" blurRad="50800" dist="25400" dir="8100000">
-              <a:srgbClr val="000000">
-                <a:alpha val="10000"/>
-              </a:srgbClr>
-            </a:outerShdw>
-          </a:effectLst>
-        </p:spPr>
-      </p:sp>
-      <p:sp>
-        <p:nvSpPr>
-          <p:cNvPr id="10" name="Shape 8"/>
-          <p:cNvSpPr/>
-          <p:nvPr/>
-        </p:nvSpPr>
-        <p:spPr>
-          <a:xfrm>
-            <a:off x="3291840" y="1188720"/>
-            <a:ext cx="2560320" cy="54864"/>
-          </a:xfrm>
-          <a:prstGeom prst="rect">
-            <a:avLst/>
-          </a:prstGeom>
-          <a:solidFill>
-            <a:srgbClr val="2A9D8F"/>
-          </a:solidFill>
-          <a:ln/>
-        </p:spPr>
-      </p:sp>
-      <p:sp>
-        <p:nvSpPr>
-          <p:cNvPr id="11" name="Text 9"/>
-          <p:cNvSpPr/>
-          <p:nvPr/>
-        </p:nvSpPr>
-        <p:spPr>
-          <a:xfrm>
-            <a:off x="3429000" y="1325880"/>
-            <a:ext cx="2286000" cy="365760"/>
-          </a:xfrm>
-          <a:prstGeom prst="rect">
-            <a:avLst/>
-          </a:prstGeom>
-          <a:noFill/>
-          <a:ln/>
-        </p:spPr>
-        <p:txBody>
-          <a:bodyPr wrap="square" rtlCol="0" anchor="ctr"/>
-          <a:lstStyle/>
-          <a:p>
-            <a:pPr indent="0" marL="0">
-              <a:buNone/>
-            </a:pPr>
-            <a:r>
-              <a:rPr lang="en-US" sz="1400" b="1" dirty="0">
-                <a:solidFill>
-                  <a:srgbClr val="1B2A4A"/>
-                </a:solidFill>
-                <a:latin typeface="Calibri" pitchFamily="34" charset="0"/>
-                <a:ea typeface="Calibri" pitchFamily="34" charset="-122"/>
-                <a:cs typeface="Calibri" pitchFamily="34" charset="-120"/>
-              </a:rPr>
-              <a:t>Behaviour</a:t>
-            </a:r>
-            <a:endParaRPr lang="en-US" sz="1400" dirty="0"/>
-          </a:p>
-        </p:txBody>
-      </p:sp>
-      <p:sp>
-        <p:nvSpPr>
-          <p:cNvPr id="12" name="Text 10"/>
-          <p:cNvSpPr/>
-          <p:nvPr/>
-        </p:nvSpPr>
-        <p:spPr>
-          <a:xfrm>
-            <a:off x="3429000" y="1737360"/>
-            <a:ext cx="2286000" cy="1097280"/>
-          </a:xfrm>
-          <a:prstGeom prst="rect">
-            <a:avLst/>
-          </a:prstGeom>
-          <a:noFill/>
-          <a:ln/>
-        </p:spPr>
-        <p:txBody>
-          <a:bodyPr wrap="square" rtlCol="0" anchor="t"/>
-          <a:lstStyle/>
-          <a:p>
-            <a:pPr indent="0" marL="0">
-              <a:buNone/>
-            </a:pPr>
-            <a:r>
-              <a:rPr lang="en-US" sz="1100" dirty="0">
-                <a:solidFill>
-                  <a:srgbClr val="3D3A36"/>
-                </a:solidFill>
-                <a:latin typeface="Calibri" pitchFamily="34" charset="0"/>
-                <a:ea typeface="Calibri" pitchFamily="34" charset="-122"/>
-                <a:cs typeface="Calibri" pitchFamily="34" charset="-120"/>
-              </a:rPr>
-              <a:t>No running, eating, or drinking in the lab. Never taste or smell chemicals directly. Follow teacher instructions at all times.</a:t>
-            </a:r>
-            <a:endParaRPr lang="en-US" sz="1100" dirty="0"/>
-          </a:p>
-        </p:txBody>
-      </p:sp>
-      <p:sp>
-        <p:nvSpPr>
-          <p:cNvPr id="13" name="Shape 11"/>
-          <p:cNvSpPr/>
-          <p:nvPr/>
-        </p:nvSpPr>
-        <p:spPr>
-          <a:xfrm>
-            <a:off x="6126480" y="1188720"/>
-            <a:ext cx="2560320" cy="1828800"/>
-          </a:xfrm>
-          <a:prstGeom prst="rect">
-            <a:avLst/>
-          </a:prstGeom>
-          <a:solidFill>
-            <a:srgbClr val="FFFFFF"/>
-          </a:solidFill>
-          <a:ln w="12700">
-            <a:solidFill>
-              <a:srgbClr val="E5E2DC"/>
-            </a:solidFill>
-            <a:prstDash val="solid"/>
-          </a:ln>
-          <a:effectLst>
-            <a:outerShdw sx="100000" sy="100000" kx="0" ky="0" algn="bl" rotWithShape="0" blurRad="50800" dist="25400" dir="8100000">
-              <a:srgbClr val="000000">
-                <a:alpha val="10000"/>
-              </a:srgbClr>
-            </a:outerShdw>
-          </a:effectLst>
-        </p:spPr>
-      </p:sp>
-      <p:sp>
-        <p:nvSpPr>
-          <p:cNvPr id="14" name="Shape 12"/>
-          <p:cNvSpPr/>
-          <p:nvPr/>
-        </p:nvSpPr>
-        <p:spPr>
-          <a:xfrm>
-            <a:off x="6126480" y="1188720"/>
-            <a:ext cx="2560320" cy="54864"/>
-          </a:xfrm>
-          <a:prstGeom prst="rect">
-            <a:avLst/>
-          </a:prstGeom>
-          <a:solidFill>
-            <a:srgbClr val="2A9D8F"/>
-          </a:solidFill>
-          <a:ln/>
-        </p:spPr>
-      </p:sp>
-      <p:sp>
-        <p:nvSpPr>
-          <p:cNvPr id="15" name="Text 13"/>
-          <p:cNvSpPr/>
-          <p:nvPr/>
-        </p:nvSpPr>
-        <p:spPr>
-          <a:xfrm>
-            <a:off x="6263640" y="1325880"/>
-            <a:ext cx="2286000" cy="365760"/>
-          </a:xfrm>
-          <a:prstGeom prst="rect">
-            <a:avLst/>
-          </a:prstGeom>
-          <a:noFill/>
-          <a:ln/>
-        </p:spPr>
-        <p:txBody>
-          <a:bodyPr wrap="square" rtlCol="0" anchor="ctr"/>
-          <a:lstStyle/>
-          <a:p>
-            <a:pPr indent="0" marL="0">
-              <a:buNone/>
-            </a:pPr>
-            <a:r>
-              <a:rPr lang="en-US" sz="1400" b="1" dirty="0">
-                <a:solidFill>
-                  <a:srgbClr val="1B2A4A"/>
-                </a:solidFill>
-                <a:latin typeface="Calibri" pitchFamily="34" charset="0"/>
-                <a:ea typeface="Calibri" pitchFamily="34" charset="-122"/>
-                <a:cs typeface="Calibri" pitchFamily="34" charset="-120"/>
-              </a:rPr>
-              <a:t>Equipment</a:t>
-            </a:r>
-            <a:endParaRPr lang="en-US" sz="1400" dirty="0"/>
-          </a:p>
-        </p:txBody>
-      </p:sp>
-      <p:sp>
-        <p:nvSpPr>
-          <p:cNvPr id="16" name="Text 14"/>
-          <p:cNvSpPr/>
-          <p:nvPr/>
-        </p:nvSpPr>
-        <p:spPr>
-          <a:xfrm>
-            <a:off x="6263640" y="1737360"/>
-            <a:ext cx="2286000" cy="1097280"/>
-          </a:xfrm>
-          <a:prstGeom prst="rect">
-            <a:avLst/>
-          </a:prstGeom>
-          <a:noFill/>
-          <a:ln/>
-        </p:spPr>
-        <p:txBody>
-          <a:bodyPr wrap="square" rtlCol="0" anchor="t"/>
-          <a:lstStyle/>
-          <a:p>
-            <a:pPr indent="0" marL="0">
-              <a:buNone/>
-            </a:pPr>
-            <a:r>
-              <a:rPr lang="en-US" sz="1100" dirty="0">
-                <a:solidFill>
-                  <a:srgbClr val="3D3A36"/>
-                </a:solidFill>
-                <a:latin typeface="Calibri" pitchFamily="34" charset="0"/>
-                <a:ea typeface="Calibri" pitchFamily="34" charset="-122"/>
-                <a:cs typeface="Calibri" pitchFamily="34" charset="-120"/>
-              </a:rPr>
-              <a:t>Check glassware for cracks before use. Carry microscopes with two hands. Never point a test tube at anyone when heating.</a:t>
-            </a:r>
-            <a:endParaRPr lang="en-US" sz="1100" dirty="0"/>
+              <a:t>Safety is everyone's responsibility — one mistake can put the whole class at risk.</a:t>
+            </a:r>
+            <a:endParaRPr lang="en-US" sz="1200" dirty="0"/>
           </a:p>
         </p:txBody>
       </p:sp>
@@ -2264,7 +3079,47 @@
         <p:spPr>
           <a:xfrm>
             <a:off x="0" y="0"/>
-            <a:ext cx="9144000" cy="54864"/>
+            <a:ext cx="9144000" cy="822960"/>
+          </a:xfrm>
+          <a:prstGeom prst="rect">
+            <a:avLst/>
+          </a:prstGeom>
+          <a:solidFill>
+            <a:srgbClr val="FFFFFF"/>
+          </a:solidFill>
+          <a:ln/>
+        </p:spPr>
+      </p:sp>
+      <p:sp>
+        <p:nvSpPr>
+          <p:cNvPr id="3" name="Shape 1"/>
+          <p:cNvSpPr/>
+          <p:nvPr/>
+        </p:nvSpPr>
+        <p:spPr>
+          <a:xfrm>
+            <a:off x="0" y="804672"/>
+            <a:ext cx="9144000" cy="27432"/>
+          </a:xfrm>
+          <a:prstGeom prst="rect">
+            <a:avLst/>
+          </a:prstGeom>
+          <a:solidFill>
+            <a:srgbClr val="E5E2DC"/>
+          </a:solidFill>
+          <a:ln/>
+        </p:spPr>
+      </p:sp>
+      <p:sp>
+        <p:nvSpPr>
+          <p:cNvPr id="4" name="Shape 2"/>
+          <p:cNvSpPr/>
+          <p:nvPr/>
+        </p:nvSpPr>
+        <p:spPr>
+          <a:xfrm>
+            <a:off x="548640" y="201168"/>
+            <a:ext cx="54864" cy="420624"/>
           </a:xfrm>
           <a:prstGeom prst="rect">
             <a:avLst/>
@@ -2277,14 +3132,14 @@
       </p:sp>
       <p:sp>
         <p:nvSpPr>
-          <p:cNvPr id="3" name="Text 1"/>
-          <p:cNvSpPr/>
-          <p:nvPr/>
-        </p:nvSpPr>
-        <p:spPr>
-          <a:xfrm>
-            <a:off x="7772400" y="4709160"/>
-            <a:ext cx="1097280" cy="320040"/>
+          <p:cNvPr id="5" name="Text 3"/>
+          <p:cNvSpPr/>
+          <p:nvPr/>
+        </p:nvSpPr>
+        <p:spPr>
+          <a:xfrm>
+            <a:off x="777240" y="137160"/>
+            <a:ext cx="7772400" cy="548640"/>
           </a:xfrm>
           <a:prstGeom prst="rect">
             <a:avLst/>
@@ -2293,53 +3148,14 @@
           <a:ln/>
         </p:spPr>
         <p:txBody>
-          <a:bodyPr wrap="square" rtlCol="0" anchor="ctr"/>
-          <a:lstStyle/>
-          <a:p>
-            <a:pPr algn="r" indent="0" marL="0">
-              <a:buNone/>
-            </a:pPr>
-            <a:r>
-              <a:rPr lang="en-US" sz="900" dirty="0">
-                <a:solidFill>
-                  <a:srgbClr val="6B6660"/>
-                </a:solidFill>
-                <a:latin typeface="Calibri" pitchFamily="34" charset="0"/>
-                <a:ea typeface="Calibri" pitchFamily="34" charset="-122"/>
-                <a:cs typeface="Calibri" pitchFamily="34" charset="-120"/>
-              </a:rPr>
-              <a:t>4 / 6</a:t>
-            </a:r>
-            <a:endParaRPr lang="en-US" sz="900" dirty="0"/>
-          </a:p>
-        </p:txBody>
-      </p:sp>
-      <p:sp>
-        <p:nvSpPr>
-          <p:cNvPr id="4" name="Text 2"/>
-          <p:cNvSpPr/>
-          <p:nvPr/>
-        </p:nvSpPr>
-        <p:spPr>
-          <a:xfrm>
-            <a:off x="457200" y="274320"/>
-            <a:ext cx="8229600" cy="640080"/>
-          </a:xfrm>
-          <a:prstGeom prst="rect">
-            <a:avLst/>
-          </a:prstGeom>
-          <a:noFill/>
-          <a:ln/>
-        </p:spPr>
-        <p:txBody>
-          <a:bodyPr wrap="square" rtlCol="0" anchor="ctr"/>
+          <a:bodyPr wrap="square" lIns="0" tIns="0" rIns="0" bIns="0" rtlCol="0" anchor="ctr"/>
           <a:lstStyle/>
           <a:p>
             <a:pPr indent="0" marL="0">
               <a:buNone/>
             </a:pPr>
             <a:r>
-              <a:rPr lang="en-US" sz="2600" b="1" dirty="0">
+              <a:rPr lang="en-US" sz="2000" b="1" dirty="0">
                 <a:solidFill>
                   <a:srgbClr val="1B2A4A"/>
                 </a:solidFill>
@@ -2347,136 +3163,9 @@
                 <a:ea typeface="Georgia" pitchFamily="34" charset="-122"/>
                 <a:cs typeface="Georgia" pitchFamily="34" charset="-120"/>
               </a:rPr>
-              <a:t>Hazard Symbols You Must Know</a:t>
-            </a:r>
-            <a:endParaRPr lang="en-US" sz="2600" dirty="0"/>
-          </a:p>
-        </p:txBody>
-      </p:sp>
-      <p:sp>
-        <p:nvSpPr>
-          <p:cNvPr id="5" name="Text 3"/>
-          <p:cNvSpPr/>
-          <p:nvPr/>
-        </p:nvSpPr>
-        <p:spPr>
-          <a:xfrm>
-            <a:off x="457200" y="1188720"/>
-            <a:ext cx="3840480" cy="3474720"/>
-          </a:xfrm>
-          <a:prstGeom prst="rect">
-            <a:avLst/>
-          </a:prstGeom>
-          <a:noFill/>
-          <a:ln/>
-        </p:spPr>
-        <p:txBody>
-          <a:bodyPr wrap="square" rtlCol="0" anchor="t"/>
-          <a:lstStyle/>
-          <a:p>
-            <a:pPr marL="342900" indent="-342900">
-              <a:spcAft>
-                <a:spcPts val="600"/>
-              </a:spcAft>
-              <a:buSzPct val="100000"/>
-              <a:buChar char="•"/>
-            </a:pPr>
-            <a:r>
-              <a:rPr lang="en-US" sz="1400" dirty="0">
-                <a:solidFill>
-                  <a:srgbClr val="3D3A36"/>
-                </a:solidFill>
-                <a:latin typeface="Calibri" pitchFamily="34" charset="0"/>
-                <a:ea typeface="Calibri" pitchFamily="34" charset="-122"/>
-                <a:cs typeface="Calibri" pitchFamily="34" charset="-120"/>
-              </a:rPr>
-              <a:t>Flammable — catches fire easily</a:t>
-            </a:r>
-            <a:endParaRPr lang="en-US" sz="1400" dirty="0"/>
-          </a:p>
-          <a:p>
-            <a:pPr marL="342900" indent="-342900">
-              <a:spcAft>
-                <a:spcPts val="600"/>
-              </a:spcAft>
-              <a:buSzPct val="100000"/>
-              <a:buChar char="•"/>
-            </a:pPr>
-            <a:r>
-              <a:rPr lang="en-US" sz="1400" dirty="0">
-                <a:solidFill>
-                  <a:srgbClr val="3D3A36"/>
-                </a:solidFill>
-                <a:latin typeface="Calibri" pitchFamily="34" charset="0"/>
-                <a:ea typeface="Calibri" pitchFamily="34" charset="-122"/>
-                <a:cs typeface="Calibri" pitchFamily="34" charset="-120"/>
-              </a:rPr>
-              <a:t>Corrosive — burns skin or eyes</a:t>
-            </a:r>
-            <a:endParaRPr lang="en-US" sz="1400" dirty="0"/>
-          </a:p>
-          <a:p>
-            <a:pPr marL="342900" indent="-342900">
-              <a:spcAft>
-                <a:spcPts val="600"/>
-              </a:spcAft>
-              <a:buSzPct val="100000"/>
-              <a:buChar char="•"/>
-            </a:pPr>
-            <a:r>
-              <a:rPr lang="en-US" sz="1400" dirty="0">
-                <a:solidFill>
-                  <a:srgbClr val="3D3A36"/>
-                </a:solidFill>
-                <a:latin typeface="Calibri" pitchFamily="34" charset="0"/>
-                <a:ea typeface="Calibri" pitchFamily="34" charset="-122"/>
-                <a:cs typeface="Calibri" pitchFamily="34" charset="-120"/>
-              </a:rPr>
-              <a:t>Toxic — poisonous if swallowed, inhaled, or absorbed</a:t>
-            </a:r>
-            <a:endParaRPr lang="en-US" sz="1400" dirty="0"/>
-          </a:p>
-          <a:p>
-            <a:pPr marL="342900" indent="-342900">
-              <a:spcAft>
-                <a:spcPts val="600"/>
-              </a:spcAft>
-              <a:buSzPct val="100000"/>
-              <a:buChar char="•"/>
-            </a:pPr>
-            <a:r>
-              <a:rPr lang="en-US" sz="1400" dirty="0">
-                <a:solidFill>
-                  <a:srgbClr val="3D3A36"/>
-                </a:solidFill>
-                <a:latin typeface="Calibri" pitchFamily="34" charset="0"/>
-                <a:ea typeface="Calibri" pitchFamily="34" charset="-122"/>
-                <a:cs typeface="Calibri" pitchFamily="34" charset="-120"/>
-              </a:rPr>
-              <a:t>Irritant — causes redness, itching, or swelling</a:t>
-            </a:r>
-            <a:endParaRPr lang="en-US" sz="1400" dirty="0"/>
-          </a:p>
-          <a:p>
-            <a:pPr marL="342900" indent="-342900">
-              <a:spcAft>
-                <a:spcPts val="600"/>
-              </a:spcAft>
-              <a:buSzPct val="100000"/>
-              <a:buChar char="•"/>
-            </a:pPr>
-            <a:r>
-              <a:rPr lang="en-US" sz="1400" dirty="0">
-                <a:solidFill>
-                  <a:srgbClr val="3D3A36"/>
-                </a:solidFill>
-                <a:latin typeface="Calibri" pitchFamily="34" charset="0"/>
-                <a:ea typeface="Calibri" pitchFamily="34" charset="-122"/>
-                <a:cs typeface="Calibri" pitchFamily="34" charset="-120"/>
-              </a:rPr>
-              <a:t>Oxidising — makes fires burn more intensely</a:t>
-            </a:r>
-            <a:endParaRPr lang="en-US" sz="1400" dirty="0"/>
+              <a:t>Common Lab Equipment &amp; Safety</a:t>
+            </a:r>
+            <a:endParaRPr lang="en-US" sz="2000" dirty="0"/>
           </a:p>
         </p:txBody>
       </p:sp>
@@ -2488,8 +3177,8 @@
         </p:nvSpPr>
         <p:spPr>
           <a:xfrm>
-            <a:off x="4846320" y="1188720"/>
-            <a:ext cx="3840480" cy="3474720"/>
+            <a:off x="640080" y="1051560"/>
+            <a:ext cx="2468880" cy="3657600"/>
           </a:xfrm>
           <a:prstGeom prst="rect">
             <a:avLst/>
@@ -2497,12 +3186,7 @@
           <a:solidFill>
             <a:srgbClr val="FFFFFF"/>
           </a:solidFill>
-          <a:ln w="12700">
-            <a:solidFill>
-              <a:srgbClr val="E5E2DC"/>
-            </a:solidFill>
-            <a:prstDash val="solid"/>
-          </a:ln>
+          <a:ln/>
           <a:effectLst>
             <a:outerShdw sx="100000" sy="100000" kx="0" ky="0" algn="bl" rotWithShape="0" blurRad="50800" dist="25400" dir="8100000">
               <a:srgbClr val="000000">
@@ -2520,8 +3204,8 @@
         </p:nvSpPr>
         <p:spPr>
           <a:xfrm>
-            <a:off x="4846320" y="1188720"/>
-            <a:ext cx="3840480" cy="54864"/>
+            <a:off x="640080" y="1051560"/>
+            <a:ext cx="2468880" cy="54864"/>
           </a:xfrm>
           <a:prstGeom prst="rect">
             <a:avLst/>
@@ -2540,8 +3224,47 @@
         </p:nvSpPr>
         <p:spPr>
           <a:xfrm>
-            <a:off x="5120640" y="1371600"/>
-            <a:ext cx="3291840" cy="3108960"/>
+            <a:off x="777240" y="1234440"/>
+            <a:ext cx="2194560" cy="457200"/>
+          </a:xfrm>
+          <a:prstGeom prst="rect">
+            <a:avLst/>
+          </a:prstGeom>
+          <a:noFill/>
+          <a:ln/>
+        </p:spPr>
+        <p:txBody>
+          <a:bodyPr wrap="square" rtlCol="0" anchor="ctr"/>
+          <a:lstStyle/>
+          <a:p>
+            <a:pPr algn="ctr" indent="0" marL="0">
+              <a:buNone/>
+            </a:pPr>
+            <a:r>
+              <a:rPr lang="en-US" sz="1400" b="1" dirty="0">
+                <a:solidFill>
+                  <a:srgbClr val="1B2A4A"/>
+                </a:solidFill>
+                <a:latin typeface="Georgia" pitchFamily="34" charset="0"/>
+                <a:ea typeface="Georgia" pitchFamily="34" charset="-122"/>
+                <a:cs typeface="Georgia" pitchFamily="34" charset="-120"/>
+              </a:rPr>
+              <a:t>Heating</a:t>
+            </a:r>
+            <a:endParaRPr lang="en-US" sz="1400" dirty="0"/>
+          </a:p>
+        </p:txBody>
+      </p:sp>
+      <p:sp>
+        <p:nvSpPr>
+          <p:cNvPr id="9" name="Text 7"/>
+          <p:cNvSpPr/>
+          <p:nvPr/>
+        </p:nvSpPr>
+        <p:spPr>
+          <a:xfrm>
+            <a:off x="777240" y="1737360"/>
+            <a:ext cx="2194560" cy="2834640"/>
           </a:xfrm>
           <a:prstGeom prst="rect">
             <a:avLst/>
@@ -2553,113 +3276,472 @@
           <a:bodyPr wrap="square" rtlCol="0" anchor="t"/>
           <a:lstStyle/>
           <a:p>
-            <a:pPr indent="0" marL="0">
+            <a:pPr marL="342900" indent="-342900">
               <a:spcAft>
                 <a:spcPts val="400"/>
               </a:spcAft>
-              <a:buNone/>
-            </a:pPr>
-            <a:r>
-              <a:rPr lang="en-US" sz="1600" b="1" dirty="0">
-                <a:solidFill>
-                  <a:srgbClr val="1B2A4A"/>
+              <a:buSzPct val="100000"/>
+              <a:buChar char="•"/>
+            </a:pPr>
+            <a:r>
+              <a:rPr lang="en-US" sz="1100" dirty="0">
+                <a:solidFill>
+                  <a:srgbClr val="6B6660"/>
                 </a:solidFill>
                 <a:latin typeface="Calibri" pitchFamily="34" charset="0"/>
                 <a:ea typeface="Calibri" pitchFamily="34" charset="-122"/>
                 <a:cs typeface="Calibri" pitchFamily="34" charset="-120"/>
               </a:rPr>
-              <a:t>What to Do in an Emergency</a:t>
-            </a:r>
-            <a:endParaRPr lang="en-US" sz="1600" dirty="0"/>
-          </a:p>
-          <a:p>
-            <a:pPr indent="0" marL="0">
+              <a:t>Bunsen burner — blue flame is hottest</a:t>
+            </a:r>
+            <a:endParaRPr lang="en-US" sz="1100" dirty="0"/>
+          </a:p>
+          <a:p>
+            <a:pPr marL="342900" indent="-342900">
               <a:spcAft>
                 <a:spcPts val="400"/>
               </a:spcAft>
-              <a:buNone/>
-            </a:pPr>
-            <a:endParaRPr lang="en-US" sz="1600" dirty="0"/>
-          </a:p>
-          <a:p>
-            <a:pPr indent="0" marL="0">
+              <a:buSzPct val="100000"/>
+              <a:buChar char="•"/>
+            </a:pPr>
+            <a:r>
+              <a:rPr lang="en-US" sz="1100" dirty="0">
+                <a:solidFill>
+                  <a:srgbClr val="6B6660"/>
+                </a:solidFill>
+                <a:latin typeface="Calibri" pitchFamily="34" charset="0"/>
+                <a:ea typeface="Calibri" pitchFamily="34" charset="-122"/>
+                <a:cs typeface="Calibri" pitchFamily="34" charset="-120"/>
+              </a:rPr>
+              <a:t>Tripod and gauze for stability</a:t>
+            </a:r>
+            <a:endParaRPr lang="en-US" sz="1100" dirty="0"/>
+          </a:p>
+          <a:p>
+            <a:pPr marL="342900" indent="-342900">
               <a:spcAft>
                 <a:spcPts val="400"/>
               </a:spcAft>
-              <a:buNone/>
-            </a:pPr>
-            <a:r>
-              <a:rPr lang="en-US" sz="1300" dirty="0">
-                <a:solidFill>
-                  <a:srgbClr val="3D3A36"/>
+              <a:buSzPct val="100000"/>
+              <a:buChar char="•"/>
+            </a:pPr>
+            <a:r>
+              <a:rPr lang="en-US" sz="1100" dirty="0">
+                <a:solidFill>
+                  <a:srgbClr val="6B6660"/>
                 </a:solidFill>
                 <a:latin typeface="Calibri" pitchFamily="34" charset="0"/>
                 <a:ea typeface="Calibri" pitchFamily="34" charset="-122"/>
                 <a:cs typeface="Calibri" pitchFamily="34" charset="-120"/>
               </a:rPr>
-              <a:t>Tell the teacher IMMEDIATELY</a:t>
-            </a:r>
-            <a:endParaRPr lang="en-US" sz="1600" dirty="0"/>
-          </a:p>
-          <a:p>
-            <a:pPr indent="0" marL="0">
+              <a:t>Never leave flames unattended</a:t>
+            </a:r>
+            <a:endParaRPr lang="en-US" sz="1100" dirty="0"/>
+          </a:p>
+          <a:p>
+            <a:pPr marL="342900" indent="-342900">
               <a:spcAft>
                 <a:spcPts val="400"/>
               </a:spcAft>
-              <a:buNone/>
-            </a:pPr>
-            <a:r>
-              <a:rPr lang="en-US" sz="1300" dirty="0">
-                <a:solidFill>
-                  <a:srgbClr val="3D3A36"/>
+              <a:buSzPct val="100000"/>
+              <a:buChar char="•"/>
+            </a:pPr>
+            <a:r>
+              <a:rPr lang="en-US" sz="1100" dirty="0">
+                <a:solidFill>
+                  <a:srgbClr val="6B6660"/>
                 </a:solidFill>
                 <a:latin typeface="Calibri" pitchFamily="34" charset="0"/>
                 <a:ea typeface="Calibri" pitchFamily="34" charset="-122"/>
                 <a:cs typeface="Calibri" pitchFamily="34" charset="-120"/>
               </a:rPr>
-              <a:t>Know where the fire extinguisher, eye wash station, and first aid kit are</a:t>
-            </a:r>
-            <a:endParaRPr lang="en-US" sz="1600" dirty="0"/>
-          </a:p>
-          <a:p>
-            <a:pPr indent="0" marL="0">
+              <a:t>Let hot equipment cool before touching</a:t>
+            </a:r>
+            <a:endParaRPr lang="en-US" sz="1100" dirty="0"/>
+          </a:p>
+        </p:txBody>
+      </p:sp>
+      <p:sp>
+        <p:nvSpPr>
+          <p:cNvPr id="10" name="Shape 8"/>
+          <p:cNvSpPr/>
+          <p:nvPr/>
+        </p:nvSpPr>
+        <p:spPr>
+          <a:xfrm>
+            <a:off x="3246120" y="1051560"/>
+            <a:ext cx="2468880" cy="3657600"/>
+          </a:xfrm>
+          <a:prstGeom prst="rect">
+            <a:avLst/>
+          </a:prstGeom>
+          <a:solidFill>
+            <a:srgbClr val="FFFFFF"/>
+          </a:solidFill>
+          <a:ln/>
+          <a:effectLst>
+            <a:outerShdw sx="100000" sy="100000" kx="0" ky="0" algn="bl" rotWithShape="0" blurRad="50800" dist="25400" dir="8100000">
+              <a:srgbClr val="000000">
+                <a:alpha val="10000"/>
+              </a:srgbClr>
+            </a:outerShdw>
+          </a:effectLst>
+        </p:spPr>
+      </p:sp>
+      <p:sp>
+        <p:nvSpPr>
+          <p:cNvPr id="11" name="Shape 9"/>
+          <p:cNvSpPr/>
+          <p:nvPr/>
+        </p:nvSpPr>
+        <p:spPr>
+          <a:xfrm>
+            <a:off x="3246120" y="1051560"/>
+            <a:ext cx="2468880" cy="54864"/>
+          </a:xfrm>
+          <a:prstGeom prst="rect">
+            <a:avLst/>
+          </a:prstGeom>
+          <a:solidFill>
+            <a:srgbClr val="E9C46A"/>
+          </a:solidFill>
+          <a:ln/>
+        </p:spPr>
+      </p:sp>
+      <p:sp>
+        <p:nvSpPr>
+          <p:cNvPr id="12" name="Text 10"/>
+          <p:cNvSpPr/>
+          <p:nvPr/>
+        </p:nvSpPr>
+        <p:spPr>
+          <a:xfrm>
+            <a:off x="3383280" y="1234440"/>
+            <a:ext cx="2194560" cy="457200"/>
+          </a:xfrm>
+          <a:prstGeom prst="rect">
+            <a:avLst/>
+          </a:prstGeom>
+          <a:noFill/>
+          <a:ln/>
+        </p:spPr>
+        <p:txBody>
+          <a:bodyPr wrap="square" rtlCol="0" anchor="ctr"/>
+          <a:lstStyle/>
+          <a:p>
+            <a:pPr algn="ctr" indent="0" marL="0">
+              <a:buNone/>
+            </a:pPr>
+            <a:r>
+              <a:rPr lang="en-US" sz="1400" b="1" dirty="0">
+                <a:solidFill>
+                  <a:srgbClr val="1B2A4A"/>
+                </a:solidFill>
+                <a:latin typeface="Georgia" pitchFamily="34" charset="0"/>
+                <a:ea typeface="Georgia" pitchFamily="34" charset="-122"/>
+                <a:cs typeface="Georgia" pitchFamily="34" charset="-120"/>
+              </a:rPr>
+              <a:t>Measuring</a:t>
+            </a:r>
+            <a:endParaRPr lang="en-US" sz="1400" dirty="0"/>
+          </a:p>
+        </p:txBody>
+      </p:sp>
+      <p:sp>
+        <p:nvSpPr>
+          <p:cNvPr id="13" name="Text 11"/>
+          <p:cNvSpPr/>
+          <p:nvPr/>
+        </p:nvSpPr>
+        <p:spPr>
+          <a:xfrm>
+            <a:off x="3383280" y="1737360"/>
+            <a:ext cx="2194560" cy="2834640"/>
+          </a:xfrm>
+          <a:prstGeom prst="rect">
+            <a:avLst/>
+          </a:prstGeom>
+          <a:noFill/>
+          <a:ln/>
+        </p:spPr>
+        <p:txBody>
+          <a:bodyPr wrap="square" rtlCol="0" anchor="t"/>
+          <a:lstStyle/>
+          <a:p>
+            <a:pPr marL="342900" indent="-342900">
               <a:spcAft>
                 <a:spcPts val="400"/>
               </a:spcAft>
-              <a:buNone/>
-            </a:pPr>
-            <a:r>
-              <a:rPr lang="en-US" sz="1300" dirty="0">
-                <a:solidFill>
-                  <a:srgbClr val="3D3A36"/>
+              <a:buSzPct val="100000"/>
+              <a:buChar char="•"/>
+            </a:pPr>
+            <a:r>
+              <a:rPr lang="en-US" sz="1100" dirty="0">
+                <a:solidFill>
+                  <a:srgbClr val="6B6660"/>
                 </a:solidFill>
                 <a:latin typeface="Calibri" pitchFamily="34" charset="0"/>
                 <a:ea typeface="Calibri" pitchFamily="34" charset="-122"/>
                 <a:cs typeface="Calibri" pitchFamily="34" charset="-120"/>
               </a:rPr>
-              <a:t>If chemicals splash on skin, wash with water for 15 minutes</a:t>
-            </a:r>
-            <a:endParaRPr lang="en-US" sz="1600" dirty="0"/>
-          </a:p>
-          <a:p>
-            <a:pPr indent="0" marL="0">
+              <a:t>Graduated cylinder for liquids</a:t>
+            </a:r>
+            <a:endParaRPr lang="en-US" sz="1100" dirty="0"/>
+          </a:p>
+          <a:p>
+            <a:pPr marL="342900" indent="-342900">
               <a:spcAft>
                 <a:spcPts val="400"/>
               </a:spcAft>
-              <a:buNone/>
-            </a:pPr>
-            <a:r>
-              <a:rPr lang="en-US" sz="1300" dirty="0">
-                <a:solidFill>
-                  <a:srgbClr val="3D3A36"/>
+              <a:buSzPct val="100000"/>
+              <a:buChar char="•"/>
+            </a:pPr>
+            <a:r>
+              <a:rPr lang="en-US" sz="1100" dirty="0">
+                <a:solidFill>
+                  <a:srgbClr val="6B6660"/>
                 </a:solidFill>
                 <a:latin typeface="Calibri" pitchFamily="34" charset="0"/>
                 <a:ea typeface="Calibri" pitchFamily="34" charset="-122"/>
                 <a:cs typeface="Calibri" pitchFamily="34" charset="-120"/>
               </a:rPr>
-              <a:t>If clothing catches fire: STOP, DROP, ROLL</a:t>
-            </a:r>
-            <a:endParaRPr lang="en-US" sz="1600" dirty="0"/>
+              <a:t>Read at the meniscus (bottom of curve)</a:t>
+            </a:r>
+            <a:endParaRPr lang="en-US" sz="1100" dirty="0"/>
+          </a:p>
+          <a:p>
+            <a:pPr marL="342900" indent="-342900">
+              <a:spcAft>
+                <a:spcPts val="400"/>
+              </a:spcAft>
+              <a:buSzPct val="100000"/>
+              <a:buChar char="•"/>
+            </a:pPr>
+            <a:r>
+              <a:rPr lang="en-US" sz="1100" dirty="0">
+                <a:solidFill>
+                  <a:srgbClr val="6B6660"/>
+                </a:solidFill>
+                <a:latin typeface="Calibri" pitchFamily="34" charset="0"/>
+                <a:ea typeface="Calibri" pitchFamily="34" charset="-122"/>
+                <a:cs typeface="Calibri" pitchFamily="34" charset="-120"/>
+              </a:rPr>
+              <a:t>Balance for mass (grams)</a:t>
+            </a:r>
+            <a:endParaRPr lang="en-US" sz="1100" dirty="0"/>
+          </a:p>
+          <a:p>
+            <a:pPr marL="342900" indent="-342900">
+              <a:spcAft>
+                <a:spcPts val="400"/>
+              </a:spcAft>
+              <a:buSzPct val="100000"/>
+              <a:buChar char="•"/>
+            </a:pPr>
+            <a:r>
+              <a:rPr lang="en-US" sz="1100" dirty="0">
+                <a:solidFill>
+                  <a:srgbClr val="6B6660"/>
+                </a:solidFill>
+                <a:latin typeface="Calibri" pitchFamily="34" charset="0"/>
+                <a:ea typeface="Calibri" pitchFamily="34" charset="-122"/>
+                <a:cs typeface="Calibri" pitchFamily="34" charset="-120"/>
+              </a:rPr>
+              <a:t>Ruler for length (cm or mm)</a:t>
+            </a:r>
+            <a:endParaRPr lang="en-US" sz="1100" dirty="0"/>
+          </a:p>
+        </p:txBody>
+      </p:sp>
+      <p:sp>
+        <p:nvSpPr>
+          <p:cNvPr id="14" name="Shape 12"/>
+          <p:cNvSpPr/>
+          <p:nvPr/>
+        </p:nvSpPr>
+        <p:spPr>
+          <a:xfrm>
+            <a:off x="5852160" y="1051560"/>
+            <a:ext cx="2468880" cy="3657600"/>
+          </a:xfrm>
+          <a:prstGeom prst="rect">
+            <a:avLst/>
+          </a:prstGeom>
+          <a:solidFill>
+            <a:srgbClr val="FFFFFF"/>
+          </a:solidFill>
+          <a:ln/>
+          <a:effectLst>
+            <a:outerShdw sx="100000" sy="100000" kx="0" ky="0" algn="bl" rotWithShape="0" blurRad="50800" dist="25400" dir="8100000">
+              <a:srgbClr val="000000">
+                <a:alpha val="10000"/>
+              </a:srgbClr>
+            </a:outerShdw>
+          </a:effectLst>
+        </p:spPr>
+      </p:sp>
+      <p:sp>
+        <p:nvSpPr>
+          <p:cNvPr id="15" name="Shape 13"/>
+          <p:cNvSpPr/>
+          <p:nvPr/>
+        </p:nvSpPr>
+        <p:spPr>
+          <a:xfrm>
+            <a:off x="5852160" y="1051560"/>
+            <a:ext cx="2468880" cy="54864"/>
+          </a:xfrm>
+          <a:prstGeom prst="rect">
+            <a:avLst/>
+          </a:prstGeom>
+          <a:solidFill>
+            <a:srgbClr val="9B9690"/>
+          </a:solidFill>
+          <a:ln/>
+        </p:spPr>
+      </p:sp>
+      <p:sp>
+        <p:nvSpPr>
+          <p:cNvPr id="16" name="Text 14"/>
+          <p:cNvSpPr/>
+          <p:nvPr/>
+        </p:nvSpPr>
+        <p:spPr>
+          <a:xfrm>
+            <a:off x="5989320" y="1234440"/>
+            <a:ext cx="2194560" cy="457200"/>
+          </a:xfrm>
+          <a:prstGeom prst="rect">
+            <a:avLst/>
+          </a:prstGeom>
+          <a:noFill/>
+          <a:ln/>
+        </p:spPr>
+        <p:txBody>
+          <a:bodyPr wrap="square" rtlCol="0" anchor="ctr"/>
+          <a:lstStyle/>
+          <a:p>
+            <a:pPr algn="ctr" indent="0" marL="0">
+              <a:buNone/>
+            </a:pPr>
+            <a:r>
+              <a:rPr lang="en-US" sz="1400" b="1" dirty="0">
+                <a:solidFill>
+                  <a:srgbClr val="1B2A4A"/>
+                </a:solidFill>
+                <a:latin typeface="Georgia" pitchFamily="34" charset="0"/>
+                <a:ea typeface="Georgia" pitchFamily="34" charset="-122"/>
+                <a:cs typeface="Georgia" pitchFamily="34" charset="-120"/>
+              </a:rPr>
+              <a:t>Protection</a:t>
+            </a:r>
+            <a:endParaRPr lang="en-US" sz="1400" dirty="0"/>
+          </a:p>
+        </p:txBody>
+      </p:sp>
+      <p:sp>
+        <p:nvSpPr>
+          <p:cNvPr id="17" name="Text 15"/>
+          <p:cNvSpPr/>
+          <p:nvPr/>
+        </p:nvSpPr>
+        <p:spPr>
+          <a:xfrm>
+            <a:off x="5989320" y="1737360"/>
+            <a:ext cx="2194560" cy="2834640"/>
+          </a:xfrm>
+          <a:prstGeom prst="rect">
+            <a:avLst/>
+          </a:prstGeom>
+          <a:noFill/>
+          <a:ln/>
+        </p:spPr>
+        <p:txBody>
+          <a:bodyPr wrap="square" rtlCol="0" anchor="t"/>
+          <a:lstStyle/>
+          <a:p>
+            <a:pPr marL="342900" indent="-342900">
+              <a:spcAft>
+                <a:spcPts val="400"/>
+              </a:spcAft>
+              <a:buSzPct val="100000"/>
+              <a:buChar char="•"/>
+            </a:pPr>
+            <a:r>
+              <a:rPr lang="en-US" sz="1100" dirty="0">
+                <a:solidFill>
+                  <a:srgbClr val="6B6660"/>
+                </a:solidFill>
+                <a:latin typeface="Calibri" pitchFamily="34" charset="0"/>
+                <a:ea typeface="Calibri" pitchFamily="34" charset="-122"/>
+                <a:cs typeface="Calibri" pitchFamily="34" charset="-120"/>
+              </a:rPr>
+              <a:t>Goggles protect eyes from splashes</a:t>
+            </a:r>
+            <a:endParaRPr lang="en-US" sz="1100" dirty="0"/>
+          </a:p>
+          <a:p>
+            <a:pPr marL="342900" indent="-342900">
+              <a:spcAft>
+                <a:spcPts val="400"/>
+              </a:spcAft>
+              <a:buSzPct val="100000"/>
+              <a:buChar char="•"/>
+            </a:pPr>
+            <a:r>
+              <a:rPr lang="en-US" sz="1100" dirty="0">
+                <a:solidFill>
+                  <a:srgbClr val="6B6660"/>
+                </a:solidFill>
+                <a:latin typeface="Calibri" pitchFamily="34" charset="0"/>
+                <a:ea typeface="Calibri" pitchFamily="34" charset="-122"/>
+                <a:cs typeface="Calibri" pitchFamily="34" charset="-120"/>
+              </a:rPr>
+              <a:t>Gloves for handling chemicals</a:t>
+            </a:r>
+            <a:endParaRPr lang="en-US" sz="1100" dirty="0"/>
+          </a:p>
+          <a:p>
+            <a:pPr marL="342900" indent="-342900">
+              <a:spcAft>
+                <a:spcPts val="400"/>
+              </a:spcAft>
+              <a:buSzPct val="100000"/>
+              <a:buChar char="•"/>
+            </a:pPr>
+            <a:r>
+              <a:rPr lang="en-US" sz="1100" dirty="0">
+                <a:solidFill>
+                  <a:srgbClr val="6B6660"/>
+                </a:solidFill>
+                <a:latin typeface="Calibri" pitchFamily="34" charset="0"/>
+                <a:ea typeface="Calibri" pitchFamily="34" charset="-122"/>
+                <a:cs typeface="Calibri" pitchFamily="34" charset="-120"/>
+              </a:rPr>
+              <a:t>Lab coat to protect clothing</a:t>
+            </a:r>
+            <a:endParaRPr lang="en-US" sz="1100" dirty="0"/>
+          </a:p>
+          <a:p>
+            <a:pPr marL="342900" indent="-342900">
+              <a:spcAft>
+                <a:spcPts val="400"/>
+              </a:spcAft>
+              <a:buSzPct val="100000"/>
+              <a:buChar char="•"/>
+            </a:pPr>
+            <a:r>
+              <a:rPr lang="en-US" sz="1100" dirty="0">
+                <a:solidFill>
+                  <a:srgbClr val="6B6660"/>
+                </a:solidFill>
+                <a:latin typeface="Calibri" pitchFamily="34" charset="0"/>
+                <a:ea typeface="Calibri" pitchFamily="34" charset="-122"/>
+                <a:cs typeface="Calibri" pitchFamily="34" charset="-120"/>
+              </a:rPr>
+              <a:t>Closed shoes — no sandals</a:t>
+            </a:r>
+            <a:endParaRPr lang="en-US" sz="1100" dirty="0"/>
           </a:p>
         </p:txBody>
       </p:sp>
@@ -2704,7 +3786,47 @@
         <p:spPr>
           <a:xfrm>
             <a:off x="0" y="0"/>
-            <a:ext cx="9144000" cy="54864"/>
+            <a:ext cx="9144000" cy="822960"/>
+          </a:xfrm>
+          <a:prstGeom prst="rect">
+            <a:avLst/>
+          </a:prstGeom>
+          <a:solidFill>
+            <a:srgbClr val="FFFFFF"/>
+          </a:solidFill>
+          <a:ln/>
+        </p:spPr>
+      </p:sp>
+      <p:sp>
+        <p:nvSpPr>
+          <p:cNvPr id="3" name="Shape 1"/>
+          <p:cNvSpPr/>
+          <p:nvPr/>
+        </p:nvSpPr>
+        <p:spPr>
+          <a:xfrm>
+            <a:off x="0" y="804672"/>
+            <a:ext cx="9144000" cy="27432"/>
+          </a:xfrm>
+          <a:prstGeom prst="rect">
+            <a:avLst/>
+          </a:prstGeom>
+          <a:solidFill>
+            <a:srgbClr val="E5E2DC"/>
+          </a:solidFill>
+          <a:ln/>
+        </p:spPr>
+      </p:sp>
+      <p:sp>
+        <p:nvSpPr>
+          <p:cNvPr id="4" name="Shape 2"/>
+          <p:cNvSpPr/>
+          <p:nvPr/>
+        </p:nvSpPr>
+        <p:spPr>
+          <a:xfrm>
+            <a:off x="548640" y="201168"/>
+            <a:ext cx="54864" cy="420624"/>
           </a:xfrm>
           <a:prstGeom prst="rect">
             <a:avLst/>
@@ -2717,14 +3839,14 @@
       </p:sp>
       <p:sp>
         <p:nvSpPr>
-          <p:cNvPr id="3" name="Text 1"/>
-          <p:cNvSpPr/>
-          <p:nvPr/>
-        </p:nvSpPr>
-        <p:spPr>
-          <a:xfrm>
-            <a:off x="7772400" y="4709160"/>
-            <a:ext cx="1097280" cy="320040"/>
+          <p:cNvPr id="5" name="Text 3"/>
+          <p:cNvSpPr/>
+          <p:nvPr/>
+        </p:nvSpPr>
+        <p:spPr>
+          <a:xfrm>
+            <a:off x="777240" y="137160"/>
+            <a:ext cx="7772400" cy="548640"/>
           </a:xfrm>
           <a:prstGeom prst="rect">
             <a:avLst/>
@@ -2733,37 +3855,276 @@
           <a:ln/>
         </p:spPr>
         <p:txBody>
-          <a:bodyPr wrap="square" rtlCol="0" anchor="ctr"/>
+          <a:bodyPr wrap="square" lIns="0" tIns="0" rIns="0" bIns="0" rtlCol="0" anchor="ctr"/>
           <a:lstStyle/>
           <a:p>
-            <a:pPr algn="r" indent="0" marL="0">
+            <a:pPr indent="0" marL="0">
               <a:buNone/>
             </a:pPr>
             <a:r>
-              <a:rPr lang="en-US" sz="900" dirty="0">
-                <a:solidFill>
-                  <a:srgbClr val="6B6660"/>
+              <a:rPr lang="en-US" sz="2000" b="1" dirty="0">
+                <a:solidFill>
+                  <a:srgbClr val="1B2A4A"/>
+                </a:solidFill>
+                <a:latin typeface="Georgia" pitchFamily="34" charset="0"/>
+                <a:ea typeface="Georgia" pitchFamily="34" charset="-122"/>
+                <a:cs typeface="Georgia" pitchFamily="34" charset="-120"/>
+              </a:rPr>
+              <a:t>Hazard vs Risk</a:t>
+            </a:r>
+            <a:endParaRPr lang="en-US" sz="2000" dirty="0"/>
+          </a:p>
+        </p:txBody>
+      </p:sp>
+      <p:sp>
+        <p:nvSpPr>
+          <p:cNvPr id="6" name="Shape 4"/>
+          <p:cNvSpPr/>
+          <p:nvPr/>
+        </p:nvSpPr>
+        <p:spPr>
+          <a:xfrm>
+            <a:off x="548640" y="1051560"/>
+            <a:ext cx="3840480" cy="3474720"/>
+          </a:xfrm>
+          <a:prstGeom prst="rect">
+            <a:avLst/>
+          </a:prstGeom>
+          <a:solidFill>
+            <a:srgbClr val="FFFFFF"/>
+          </a:solidFill>
+          <a:ln/>
+          <a:effectLst>
+            <a:outerShdw sx="100000" sy="100000" kx="0" ky="0" algn="bl" rotWithShape="0" blurRad="50800" dist="25400" dir="8100000">
+              <a:srgbClr val="000000">
+                <a:alpha val="10000"/>
+              </a:srgbClr>
+            </a:outerShdw>
+          </a:effectLst>
+        </p:spPr>
+      </p:sp>
+      <p:sp>
+        <p:nvSpPr>
+          <p:cNvPr id="7" name="Shape 5"/>
+          <p:cNvSpPr/>
+          <p:nvPr/>
+        </p:nvSpPr>
+        <p:spPr>
+          <a:xfrm>
+            <a:off x="548640" y="1051560"/>
+            <a:ext cx="3840480" cy="54864"/>
+          </a:xfrm>
+          <a:prstGeom prst="rect">
+            <a:avLst/>
+          </a:prstGeom>
+          <a:solidFill>
+            <a:srgbClr val="2A9D8F"/>
+          </a:solidFill>
+          <a:ln/>
+        </p:spPr>
+      </p:sp>
+      <p:sp>
+        <p:nvSpPr>
+          <p:cNvPr id="8" name="Text 6"/>
+          <p:cNvSpPr/>
+          <p:nvPr/>
+        </p:nvSpPr>
+        <p:spPr>
+          <a:xfrm>
+            <a:off x="777240" y="1188720"/>
+            <a:ext cx="3383280" cy="457200"/>
+          </a:xfrm>
+          <a:prstGeom prst="rect">
+            <a:avLst/>
+          </a:prstGeom>
+          <a:noFill/>
+          <a:ln/>
+        </p:spPr>
+        <p:txBody>
+          <a:bodyPr wrap="square" lIns="0" tIns="0" rIns="0" bIns="0" rtlCol="0" anchor="ctr"/>
+          <a:lstStyle/>
+          <a:p>
+            <a:pPr indent="0" marL="0">
+              <a:buNone/>
+            </a:pPr>
+            <a:r>
+              <a:rPr lang="en-US" sz="1500" b="1" dirty="0">
+                <a:solidFill>
+                  <a:srgbClr val="1B2A4A"/>
+                </a:solidFill>
+                <a:latin typeface="Georgia" pitchFamily="34" charset="0"/>
+                <a:ea typeface="Georgia" pitchFamily="34" charset="-122"/>
+                <a:cs typeface="Georgia" pitchFamily="34" charset="-120"/>
+              </a:rPr>
+              <a:t>Hazard</a:t>
+            </a:r>
+            <a:endParaRPr lang="en-US" sz="1500" dirty="0"/>
+          </a:p>
+        </p:txBody>
+      </p:sp>
+      <p:sp>
+        <p:nvSpPr>
+          <p:cNvPr id="9" name="Text 7"/>
+          <p:cNvSpPr/>
+          <p:nvPr/>
+        </p:nvSpPr>
+        <p:spPr>
+          <a:xfrm>
+            <a:off x="777240" y="1691640"/>
+            <a:ext cx="3383280" cy="2651760"/>
+          </a:xfrm>
+          <a:prstGeom prst="rect">
+            <a:avLst/>
+          </a:prstGeom>
+          <a:noFill/>
+          <a:ln/>
+        </p:spPr>
+        <p:txBody>
+          <a:bodyPr wrap="square" rtlCol="0" anchor="t"/>
+          <a:lstStyle/>
+          <a:p>
+            <a:pPr marL="342900" indent="-342900">
+              <a:spcAft>
+                <a:spcPts val="600"/>
+              </a:spcAft>
+              <a:buSzPct val="100000"/>
+              <a:buChar char="•"/>
+            </a:pPr>
+            <a:r>
+              <a:rPr lang="en-US" sz="1300" dirty="0">
+                <a:solidFill>
+                  <a:srgbClr val="3D3A36"/>
                 </a:solidFill>
                 <a:latin typeface="Calibri" pitchFamily="34" charset="0"/>
                 <a:ea typeface="Calibri" pitchFamily="34" charset="-122"/>
                 <a:cs typeface="Calibri" pitchFamily="34" charset="-120"/>
               </a:rPr>
-              <a:t>5 / 6</a:t>
-            </a:r>
-            <a:endParaRPr lang="en-US" sz="900" dirty="0"/>
-          </a:p>
-        </p:txBody>
-      </p:sp>
-      <p:sp>
-        <p:nvSpPr>
-          <p:cNvPr id="4" name="Text 2"/>
-          <p:cNvSpPr/>
-          <p:nvPr/>
-        </p:nvSpPr>
-        <p:spPr>
-          <a:xfrm>
-            <a:off x="457200" y="274320"/>
-            <a:ext cx="8229600" cy="640080"/>
+              <a:t>Something that COULD cause harm</a:t>
+            </a:r>
+            <a:endParaRPr lang="en-US" sz="1300" dirty="0"/>
+          </a:p>
+          <a:p>
+            <a:pPr marL="342900" indent="-342900">
+              <a:spcAft>
+                <a:spcPts val="600"/>
+              </a:spcAft>
+              <a:buSzPct val="100000"/>
+              <a:buChar char="•"/>
+            </a:pPr>
+            <a:r>
+              <a:rPr lang="en-US" sz="1300" dirty="0">
+                <a:solidFill>
+                  <a:srgbClr val="3D3A36"/>
+                </a:solidFill>
+                <a:latin typeface="Calibri" pitchFamily="34" charset="0"/>
+                <a:ea typeface="Calibri" pitchFamily="34" charset="-122"/>
+                <a:cs typeface="Calibri" pitchFamily="34" charset="-120"/>
+              </a:rPr>
+              <a:t>A broken glass beaker is a hazard</a:t>
+            </a:r>
+            <a:endParaRPr lang="en-US" sz="1300" dirty="0"/>
+          </a:p>
+          <a:p>
+            <a:pPr marL="342900" indent="-342900">
+              <a:spcAft>
+                <a:spcPts val="600"/>
+              </a:spcAft>
+              <a:buSzPct val="100000"/>
+              <a:buChar char="•"/>
+            </a:pPr>
+            <a:r>
+              <a:rPr lang="en-US" sz="1300" dirty="0">
+                <a:solidFill>
+                  <a:srgbClr val="3D3A36"/>
+                </a:solidFill>
+                <a:latin typeface="Calibri" pitchFamily="34" charset="0"/>
+                <a:ea typeface="Calibri" pitchFamily="34" charset="-122"/>
+                <a:cs typeface="Calibri" pitchFamily="34" charset="-120"/>
+              </a:rPr>
+              <a:t>Concentrated acid is a hazard</a:t>
+            </a:r>
+            <a:endParaRPr lang="en-US" sz="1300" dirty="0"/>
+          </a:p>
+          <a:p>
+            <a:pPr marL="342900" indent="-342900">
+              <a:spcAft>
+                <a:spcPts val="600"/>
+              </a:spcAft>
+              <a:buSzPct val="100000"/>
+              <a:buChar char="•"/>
+            </a:pPr>
+            <a:r>
+              <a:rPr lang="en-US" sz="1300" dirty="0">
+                <a:solidFill>
+                  <a:srgbClr val="3D3A36"/>
+                </a:solidFill>
+                <a:latin typeface="Calibri" pitchFamily="34" charset="0"/>
+                <a:ea typeface="Calibri" pitchFamily="34" charset="-122"/>
+                <a:cs typeface="Calibri" pitchFamily="34" charset="-120"/>
+              </a:rPr>
+              <a:t>The hazard exists whether you use it or not</a:t>
+            </a:r>
+            <a:endParaRPr lang="en-US" sz="1300" dirty="0"/>
+          </a:p>
+        </p:txBody>
+      </p:sp>
+      <p:sp>
+        <p:nvSpPr>
+          <p:cNvPr id="10" name="Shape 8"/>
+          <p:cNvSpPr/>
+          <p:nvPr/>
+        </p:nvSpPr>
+        <p:spPr>
+          <a:xfrm>
+            <a:off x="4754880" y="1051560"/>
+            <a:ext cx="3840480" cy="3474720"/>
+          </a:xfrm>
+          <a:prstGeom prst="rect">
+            <a:avLst/>
+          </a:prstGeom>
+          <a:solidFill>
+            <a:srgbClr val="FFFFFF"/>
+          </a:solidFill>
+          <a:ln/>
+          <a:effectLst>
+            <a:outerShdw sx="100000" sy="100000" kx="0" ky="0" algn="bl" rotWithShape="0" blurRad="50800" dist="25400" dir="8100000">
+              <a:srgbClr val="000000">
+                <a:alpha val="10000"/>
+              </a:srgbClr>
+            </a:outerShdw>
+          </a:effectLst>
+        </p:spPr>
+      </p:sp>
+      <p:sp>
+        <p:nvSpPr>
+          <p:cNvPr id="11" name="Shape 9"/>
+          <p:cNvSpPr/>
+          <p:nvPr/>
+        </p:nvSpPr>
+        <p:spPr>
+          <a:xfrm>
+            <a:off x="4754880" y="1051560"/>
+            <a:ext cx="3840480" cy="54864"/>
+          </a:xfrm>
+          <a:prstGeom prst="rect">
+            <a:avLst/>
+          </a:prstGeom>
+          <a:solidFill>
+            <a:srgbClr val="E9C46A"/>
+          </a:solidFill>
+          <a:ln/>
+        </p:spPr>
+      </p:sp>
+      <p:sp>
+        <p:nvSpPr>
+          <p:cNvPr id="12" name="Text 10"/>
+          <p:cNvSpPr/>
+          <p:nvPr/>
+        </p:nvSpPr>
+        <p:spPr>
+          <a:xfrm>
+            <a:off x="4983480" y="1188720"/>
+            <a:ext cx="3383280" cy="457200"/>
           </a:xfrm>
           <a:prstGeom prst="rect">
             <a:avLst/>
@@ -2772,14 +4133,14 @@
           <a:ln/>
         </p:spPr>
         <p:txBody>
-          <a:bodyPr wrap="square" rtlCol="0" anchor="ctr"/>
+          <a:bodyPr wrap="square" lIns="0" tIns="0" rIns="0" bIns="0" rtlCol="0" anchor="ctr"/>
           <a:lstStyle/>
           <a:p>
             <a:pPr indent="0" marL="0">
               <a:buNone/>
             </a:pPr>
             <a:r>
-              <a:rPr lang="en-US" sz="2600" b="1" dirty="0">
+              <a:rPr lang="en-US" sz="1500" b="1" dirty="0">
                 <a:solidFill>
                   <a:srgbClr val="1B2A4A"/>
                 </a:solidFill>
@@ -2787,22 +4148,22 @@
                 <a:ea typeface="Georgia" pitchFamily="34" charset="-122"/>
                 <a:cs typeface="Georgia" pitchFamily="34" charset="-120"/>
               </a:rPr>
-              <a:t>Clean-Up Procedures</a:t>
-            </a:r>
-            <a:endParaRPr lang="en-US" sz="2600" dirty="0"/>
-          </a:p>
-        </p:txBody>
-      </p:sp>
-      <p:sp>
-        <p:nvSpPr>
-          <p:cNvPr id="5" name="Text 3"/>
-          <p:cNvSpPr/>
-          <p:nvPr/>
-        </p:nvSpPr>
-        <p:spPr>
-          <a:xfrm>
-            <a:off x="457200" y="1097280"/>
-            <a:ext cx="8229600" cy="3657600"/>
+              <a:t>Risk</a:t>
+            </a:r>
+            <a:endParaRPr lang="en-US" sz="1500" dirty="0"/>
+          </a:p>
+        </p:txBody>
+      </p:sp>
+      <p:sp>
+        <p:nvSpPr>
+          <p:cNvPr id="13" name="Text 11"/>
+          <p:cNvSpPr/>
+          <p:nvPr/>
+        </p:nvSpPr>
+        <p:spPr>
+          <a:xfrm>
+            <a:off x="4983480" y="1691640"/>
+            <a:ext cx="3383280" cy="2651760"/>
           </a:xfrm>
           <a:prstGeom prst="rect">
             <a:avLst/>
@@ -2816,13 +4177,13 @@
           <a:p>
             <a:pPr marL="342900" indent="-342900">
               <a:spcAft>
-                <a:spcPts val="800"/>
+                <a:spcPts val="600"/>
               </a:spcAft>
               <a:buSzPct val="100000"/>
               <a:buChar char="•"/>
             </a:pPr>
             <a:r>
-              <a:rPr lang="en-US" sz="1400" dirty="0">
+              <a:rPr lang="en-US" sz="1300" dirty="0">
                 <a:solidFill>
                   <a:srgbClr val="3D3A36"/>
                 </a:solidFill>
@@ -2830,20 +4191,20 @@
                 <a:ea typeface="Calibri" pitchFamily="34" charset="-122"/>
                 <a:cs typeface="Calibri" pitchFamily="34" charset="-120"/>
               </a:rPr>
-              <a:t>Wash all equipment and return to correct place</a:t>
-            </a:r>
-            <a:endParaRPr lang="en-US" sz="1400" dirty="0"/>
+              <a:t>The CHANCE that harm will happen</a:t>
+            </a:r>
+            <a:endParaRPr lang="en-US" sz="1300" dirty="0"/>
           </a:p>
           <a:p>
             <a:pPr marL="342900" indent="-342900">
               <a:spcAft>
-                <a:spcPts val="800"/>
+                <a:spcPts val="600"/>
               </a:spcAft>
               <a:buSzPct val="100000"/>
               <a:buChar char="•"/>
             </a:pPr>
             <a:r>
-              <a:rPr lang="en-US" sz="1400" dirty="0">
+              <a:rPr lang="en-US" sz="1300" dirty="0">
                 <a:solidFill>
                   <a:srgbClr val="3D3A36"/>
                 </a:solidFill>
@@ -2851,20 +4212,20 @@
                 <a:ea typeface="Calibri" pitchFamily="34" charset="-122"/>
                 <a:cs typeface="Calibri" pitchFamily="34" charset="-120"/>
               </a:rPr>
-              <a:t>Wipe down bench surfaces</a:t>
-            </a:r>
-            <a:endParaRPr lang="en-US" sz="1400" dirty="0"/>
+              <a:t>Risk depends on how careful you are</a:t>
+            </a:r>
+            <a:endParaRPr lang="en-US" sz="1300" dirty="0"/>
           </a:p>
           <a:p>
             <a:pPr marL="342900" indent="-342900">
               <a:spcAft>
-                <a:spcPts val="800"/>
+                <a:spcPts val="600"/>
               </a:spcAft>
               <a:buSzPct val="100000"/>
               <a:buChar char="•"/>
             </a:pPr>
             <a:r>
-              <a:rPr lang="en-US" sz="1400" dirty="0">
+              <a:rPr lang="en-US" sz="1300" dirty="0">
                 <a:solidFill>
                   <a:srgbClr val="3D3A36"/>
                 </a:solidFill>
@@ -2872,20 +4233,20 @@
                 <a:ea typeface="Calibri" pitchFamily="34" charset="-122"/>
                 <a:cs typeface="Calibri" pitchFamily="34" charset="-120"/>
               </a:rPr>
-              <a:t>Wash your hands thoroughly with soap and water</a:t>
-            </a:r>
-            <a:endParaRPr lang="en-US" sz="1400" dirty="0"/>
+              <a:t>Wearing goggles reduces the risk</a:t>
+            </a:r>
+            <a:endParaRPr lang="en-US" sz="1300" dirty="0"/>
           </a:p>
           <a:p>
             <a:pPr marL="342900" indent="-342900">
               <a:spcAft>
-                <a:spcPts val="800"/>
+                <a:spcPts val="600"/>
               </a:spcAft>
               <a:buSzPct val="100000"/>
               <a:buChar char="•"/>
             </a:pPr>
             <a:r>
-              <a:rPr lang="en-US" sz="1400" dirty="0">
+              <a:rPr lang="en-US" sz="1300" dirty="0">
                 <a:solidFill>
                   <a:srgbClr val="3D3A36"/>
                 </a:solidFill>
@@ -2893,30 +4254,9 @@
                 <a:ea typeface="Calibri" pitchFamily="34" charset="-122"/>
                 <a:cs typeface="Calibri" pitchFamily="34" charset="-120"/>
               </a:rPr>
-              <a:t>Dispose of chemicals ONLY in designated containers — NEVER down the sink</a:t>
-            </a:r>
-            <a:endParaRPr lang="en-US" sz="1400" dirty="0"/>
-          </a:p>
-          <a:p>
-            <a:pPr marL="342900" indent="-342900">
-              <a:spcAft>
-                <a:spcPts val="800"/>
-              </a:spcAft>
-              <a:buSzPct val="100000"/>
-              <a:buChar char="•"/>
-            </a:pPr>
-            <a:r>
-              <a:rPr lang="en-US" sz="1400" dirty="0">
-                <a:solidFill>
-                  <a:srgbClr val="3D3A36"/>
-                </a:solidFill>
-                <a:latin typeface="Calibri" pitchFamily="34" charset="0"/>
-                <a:ea typeface="Calibri" pitchFamily="34" charset="-122"/>
-                <a:cs typeface="Calibri" pitchFamily="34" charset="-120"/>
-              </a:rPr>
-              <a:t>Report any spills, breakages, or injuries to the teacher</a:t>
-            </a:r>
-            <a:endParaRPr lang="en-US" sz="1400" dirty="0"/>
+              <a:t>Following instructions reduces risk</a:t>
+            </a:r>
+            <a:endParaRPr lang="en-US" sz="1300" dirty="0"/>
           </a:p>
         </p:txBody>
       </p:sp>
@@ -2934,7 +4274,7 @@
     <p:bg>
       <p:bgPr>
         <a:solidFill>
-          <a:srgbClr val="1B2A4A"/>
+          <a:srgbClr val="FAF8F5"/>
         </a:solidFill>
       </p:bgPr>
     </p:bg>
@@ -2961,27 +4301,67 @@
         <p:spPr>
           <a:xfrm>
             <a:off x="0" y="0"/>
-            <a:ext cx="109728" cy="5143500"/>
-          </a:xfrm>
-          <a:prstGeom prst="rect">
-            <a:avLst/>
-          </a:prstGeom>
-          <a:solidFill>
-            <a:srgbClr val="E9C46A"/>
-          </a:solidFill>
-          <a:ln/>
-        </p:spPr>
-      </p:sp>
-      <p:sp>
-        <p:nvSpPr>
-          <p:cNvPr id="3" name="Text 1"/>
-          <p:cNvSpPr/>
-          <p:nvPr/>
-        </p:nvSpPr>
-        <p:spPr>
-          <a:xfrm>
-            <a:off x="731520" y="457200"/>
-            <a:ext cx="7772400" cy="731520"/>
+            <a:ext cx="9144000" cy="822960"/>
+          </a:xfrm>
+          <a:prstGeom prst="rect">
+            <a:avLst/>
+          </a:prstGeom>
+          <a:solidFill>
+            <a:srgbClr val="FFFFFF"/>
+          </a:solidFill>
+          <a:ln/>
+        </p:spPr>
+      </p:sp>
+      <p:sp>
+        <p:nvSpPr>
+          <p:cNvPr id="3" name="Shape 1"/>
+          <p:cNvSpPr/>
+          <p:nvPr/>
+        </p:nvSpPr>
+        <p:spPr>
+          <a:xfrm>
+            <a:off x="0" y="804672"/>
+            <a:ext cx="9144000" cy="27432"/>
+          </a:xfrm>
+          <a:prstGeom prst="rect">
+            <a:avLst/>
+          </a:prstGeom>
+          <a:solidFill>
+            <a:srgbClr val="E5E2DC"/>
+          </a:solidFill>
+          <a:ln/>
+        </p:spPr>
+      </p:sp>
+      <p:sp>
+        <p:nvSpPr>
+          <p:cNvPr id="4" name="Shape 2"/>
+          <p:cNvSpPr/>
+          <p:nvPr/>
+        </p:nvSpPr>
+        <p:spPr>
+          <a:xfrm>
+            <a:off x="548640" y="201168"/>
+            <a:ext cx="54864" cy="420624"/>
+          </a:xfrm>
+          <a:prstGeom prst="rect">
+            <a:avLst/>
+          </a:prstGeom>
+          <a:solidFill>
+            <a:srgbClr val="2A9D8F"/>
+          </a:solidFill>
+          <a:ln/>
+        </p:spPr>
+      </p:sp>
+      <p:sp>
+        <p:nvSpPr>
+          <p:cNvPr id="5" name="Text 3"/>
+          <p:cNvSpPr/>
+          <p:nvPr/>
+        </p:nvSpPr>
+        <p:spPr>
+          <a:xfrm>
+            <a:off x="777240" y="137160"/>
+            <a:ext cx="7772400" cy="548640"/>
           </a:xfrm>
           <a:prstGeom prst="rect">
             <a:avLst/>
@@ -2990,37 +4370,1435 @@
           <a:ln/>
         </p:spPr>
         <p:txBody>
-          <a:bodyPr wrap="square" rtlCol="0" anchor="ctr"/>
+          <a:bodyPr wrap="square" lIns="0" tIns="0" rIns="0" bIns="0" rtlCol="0" anchor="ctr"/>
           <a:lstStyle/>
           <a:p>
             <a:pPr indent="0" marL="0">
               <a:buNone/>
             </a:pPr>
             <a:r>
-              <a:rPr lang="en-US" sz="3200" b="1" dirty="0">
-                <a:solidFill>
-                  <a:srgbClr val="FFFFFF"/>
+              <a:rPr lang="en-US" sz="2000" b="1" dirty="0">
+                <a:solidFill>
+                  <a:srgbClr val="1B2A4A"/>
                 </a:solidFill>
                 <a:latin typeface="Georgia" pitchFamily="34" charset="0"/>
                 <a:ea typeface="Georgia" pitchFamily="34" charset="-122"/>
                 <a:cs typeface="Georgia" pitchFamily="34" charset="-120"/>
               </a:rPr>
-              <a:t>Key Takeaways</a:t>
-            </a:r>
-            <a:endParaRPr lang="en-US" sz="3200" dirty="0"/>
-          </a:p>
-        </p:txBody>
-      </p:sp>
-      <p:sp>
-        <p:nvSpPr>
-          <p:cNvPr id="4" name="Text 2"/>
-          <p:cNvSpPr/>
-          <p:nvPr/>
-        </p:nvSpPr>
-        <p:spPr>
-          <a:xfrm>
-            <a:off x="731520" y="1463040"/>
-            <a:ext cx="7772400" cy="3200400"/>
+              <a:t>Hazard Symbols You Must Know</a:t>
+            </a:r>
+            <a:endParaRPr lang="en-US" sz="2000" dirty="0"/>
+          </a:p>
+        </p:txBody>
+      </p:sp>
+      <p:graphicFrame>
+        <p:nvGraphicFramePr>
+          <p:cNvPr id="7" name="Table 0"/>
+          <p:cNvGraphicFramePr>
+            <a:graphicFrameLocks noGrp="1"/>
+          </p:cNvGraphicFramePr>
+          <p:nvPr>
+            <p:extLst>
+              <p:ext uri="{D42A27DB-BD31-4B8C-83A1-F6EECF244321}">
+                <p14:modId xmlns:p14="http://schemas.microsoft.com/office/powerpoint/2010/main" val="1579011935"/>
+              </p:ext>
+            </p:extLst>
+          </p:nvPr>
+        </p:nvGraphicFramePr>
+        <p:xfrm>
+          <a:off x="640080" y="1051560"/>
+          <a:ext cx="7863840" cy="914400"/>
+        </p:xfrm>
+        <a:graphic>
+          <a:graphicData uri="http://schemas.openxmlformats.org/drawingml/2006/table">
+            <a:tbl>
+              <a:tblPr/>
+              <a:tblGrid>
+                <a:gridCol w="2621280"/>
+                <a:gridCol w="2621280"/>
+                <a:gridCol w="2621280"/>
+              </a:tblGrid>
+              <a:tr h="502920">
+                <a:tc>
+                  <a:txBody>
+                    <a:bodyPr/>
+                    <a:lstStyle/>
+                    <a:p>
+                      <a:pPr indent="0" marL="0">
+                        <a:buNone/>
+                      </a:pPr>
+                      <a:r>
+                        <a:rPr lang="en-US" sz="1200" b="1" dirty="0">
+                          <a:solidFill>
+                            <a:srgbClr val="FFFFFF"/>
+                          </a:solidFill>
+                          <a:latin typeface="Calibri" pitchFamily="34" charset="0"/>
+                          <a:ea typeface="Calibri" pitchFamily="34" charset="-122"/>
+                          <a:cs typeface="Calibri" pitchFamily="34" charset="-120"/>
+                        </a:rPr>
+                        <a:t>Symbol Name</a:t>
+                      </a:r>
+                      <a:endParaRPr lang="en-US" sz="1200" dirty="0">
+                        <a:latin typeface="Calibri" charset="0"/>
+                        <a:ea typeface="Calibri" charset="0"/>
+                        <a:cs typeface="Calibri" charset="0"/>
+                      </a:endParaRPr>
+                    </a:p>
+                  </a:txBody>
+                  <a:tcPr marL="91440" marR="91440" marT="45720" marB="45720">
+                    <a:lnL w="6350" cap="flat" cmpd="sng" algn="ctr">
+                      <a:solidFill>
+                        <a:srgbClr val="E5E2DC"/>
+                      </a:solidFill>
+                      <a:prstDash val="solid"/>
+                      <a:round/>
+                      <a:headEnd type="none" w="med" len="med"/>
+                      <a:tailEnd type="none" w="med" len="med"/>
+                    </a:lnL>
+                    <a:lnR w="6350" cap="flat" cmpd="sng" algn="ctr">
+                      <a:solidFill>
+                        <a:srgbClr val="E5E2DC"/>
+                      </a:solidFill>
+                      <a:prstDash val="solid"/>
+                      <a:round/>
+                      <a:headEnd type="none" w="med" len="med"/>
+                      <a:tailEnd type="none" w="med" len="med"/>
+                    </a:lnR>
+                    <a:lnT w="6350" cap="flat" cmpd="sng" algn="ctr">
+                      <a:solidFill>
+                        <a:srgbClr val="E5E2DC"/>
+                      </a:solidFill>
+                      <a:prstDash val="solid"/>
+                      <a:round/>
+                      <a:headEnd type="none" w="med" len="med"/>
+                      <a:tailEnd type="none" w="med" len="med"/>
+                    </a:lnT>
+                    <a:lnB w="6350" cap="flat" cmpd="sng" algn="ctr">
+                      <a:solidFill>
+                        <a:srgbClr val="E5E2DC"/>
+                      </a:solidFill>
+                      <a:prstDash val="solid"/>
+                      <a:round/>
+                      <a:headEnd type="none" w="med" len="med"/>
+                      <a:tailEnd type="none" w="med" len="med"/>
+                    </a:lnB>
+                    <a:solidFill>
+                      <a:srgbClr val="2A9D8F"/>
+                    </a:solidFill>
+                  </a:tcPr>
+                </a:tc>
+                <a:tc>
+                  <a:txBody>
+                    <a:bodyPr/>
+                    <a:lstStyle/>
+                    <a:p>
+                      <a:pPr indent="0" marL="0">
+                        <a:buNone/>
+                      </a:pPr>
+                      <a:r>
+                        <a:rPr lang="en-US" sz="1200" b="1" dirty="0">
+                          <a:solidFill>
+                            <a:srgbClr val="FFFFFF"/>
+                          </a:solidFill>
+                          <a:latin typeface="Calibri" pitchFamily="34" charset="0"/>
+                          <a:ea typeface="Calibri" pitchFamily="34" charset="-122"/>
+                          <a:cs typeface="Calibri" pitchFamily="34" charset="-120"/>
+                        </a:rPr>
+                        <a:t>Meaning</a:t>
+                      </a:r>
+                      <a:endParaRPr lang="en-US" sz="1200" dirty="0">
+                        <a:latin typeface="Calibri" charset="0"/>
+                        <a:ea typeface="Calibri" charset="0"/>
+                        <a:cs typeface="Calibri" charset="0"/>
+                      </a:endParaRPr>
+                    </a:p>
+                  </a:txBody>
+                  <a:tcPr marL="91440" marR="91440" marT="45720" marB="45720">
+                    <a:lnL w="6350" cap="flat" cmpd="sng" algn="ctr">
+                      <a:solidFill>
+                        <a:srgbClr val="E5E2DC"/>
+                      </a:solidFill>
+                      <a:prstDash val="solid"/>
+                      <a:round/>
+                      <a:headEnd type="none" w="med" len="med"/>
+                      <a:tailEnd type="none" w="med" len="med"/>
+                    </a:lnL>
+                    <a:lnR w="6350" cap="flat" cmpd="sng" algn="ctr">
+                      <a:solidFill>
+                        <a:srgbClr val="E5E2DC"/>
+                      </a:solidFill>
+                      <a:prstDash val="solid"/>
+                      <a:round/>
+                      <a:headEnd type="none" w="med" len="med"/>
+                      <a:tailEnd type="none" w="med" len="med"/>
+                    </a:lnR>
+                    <a:lnT w="6350" cap="flat" cmpd="sng" algn="ctr">
+                      <a:solidFill>
+                        <a:srgbClr val="E5E2DC"/>
+                      </a:solidFill>
+                      <a:prstDash val="solid"/>
+                      <a:round/>
+                      <a:headEnd type="none" w="med" len="med"/>
+                      <a:tailEnd type="none" w="med" len="med"/>
+                    </a:lnT>
+                    <a:lnB w="6350" cap="flat" cmpd="sng" algn="ctr">
+                      <a:solidFill>
+                        <a:srgbClr val="E5E2DC"/>
+                      </a:solidFill>
+                      <a:prstDash val="solid"/>
+                      <a:round/>
+                      <a:headEnd type="none" w="med" len="med"/>
+                      <a:tailEnd type="none" w="med" len="med"/>
+                    </a:lnB>
+                    <a:solidFill>
+                      <a:srgbClr val="2A9D8F"/>
+                    </a:solidFill>
+                  </a:tcPr>
+                </a:tc>
+                <a:tc>
+                  <a:txBody>
+                    <a:bodyPr/>
+                    <a:lstStyle/>
+                    <a:p>
+                      <a:pPr indent="0" marL="0">
+                        <a:buNone/>
+                      </a:pPr>
+                      <a:r>
+                        <a:rPr lang="en-US" sz="1200" b="1" dirty="0">
+                          <a:solidFill>
+                            <a:srgbClr val="FFFFFF"/>
+                          </a:solidFill>
+                          <a:latin typeface="Calibri" pitchFamily="34" charset="0"/>
+                          <a:ea typeface="Calibri" pitchFamily="34" charset="-122"/>
+                          <a:cs typeface="Calibri" pitchFamily="34" charset="-120"/>
+                        </a:rPr>
+                        <a:t>Example</a:t>
+                      </a:r>
+                      <a:endParaRPr lang="en-US" sz="1200" dirty="0">
+                        <a:latin typeface="Calibri" charset="0"/>
+                        <a:ea typeface="Calibri" charset="0"/>
+                        <a:cs typeface="Calibri" charset="0"/>
+                      </a:endParaRPr>
+                    </a:p>
+                  </a:txBody>
+                  <a:tcPr marL="91440" marR="91440" marT="45720" marB="45720">
+                    <a:lnL w="6350" cap="flat" cmpd="sng" algn="ctr">
+                      <a:solidFill>
+                        <a:srgbClr val="E5E2DC"/>
+                      </a:solidFill>
+                      <a:prstDash val="solid"/>
+                      <a:round/>
+                      <a:headEnd type="none" w="med" len="med"/>
+                      <a:tailEnd type="none" w="med" len="med"/>
+                    </a:lnL>
+                    <a:lnR w="6350" cap="flat" cmpd="sng" algn="ctr">
+                      <a:solidFill>
+                        <a:srgbClr val="E5E2DC"/>
+                      </a:solidFill>
+                      <a:prstDash val="solid"/>
+                      <a:round/>
+                      <a:headEnd type="none" w="med" len="med"/>
+                      <a:tailEnd type="none" w="med" len="med"/>
+                    </a:lnR>
+                    <a:lnT w="6350" cap="flat" cmpd="sng" algn="ctr">
+                      <a:solidFill>
+                        <a:srgbClr val="E5E2DC"/>
+                      </a:solidFill>
+                      <a:prstDash val="solid"/>
+                      <a:round/>
+                      <a:headEnd type="none" w="med" len="med"/>
+                      <a:tailEnd type="none" w="med" len="med"/>
+                    </a:lnT>
+                    <a:lnB w="6350" cap="flat" cmpd="sng" algn="ctr">
+                      <a:solidFill>
+                        <a:srgbClr val="E5E2DC"/>
+                      </a:solidFill>
+                      <a:prstDash val="solid"/>
+                      <a:round/>
+                      <a:headEnd type="none" w="med" len="med"/>
+                      <a:tailEnd type="none" w="med" len="med"/>
+                    </a:lnB>
+                    <a:solidFill>
+                      <a:srgbClr val="2A9D8F"/>
+                    </a:solidFill>
+                  </a:tcPr>
+                </a:tc>
+              </a:tr>
+              <a:tr h="502920">
+                <a:tc>
+                  <a:txBody>
+                    <a:bodyPr/>
+                    <a:lstStyle/>
+                    <a:p>
+                      <a:pPr indent="0" marL="0">
+                        <a:buNone/>
+                      </a:pPr>
+                      <a:r>
+                        <a:rPr lang="en-US" sz="1200" dirty="0">
+                          <a:solidFill>
+                            <a:srgbClr val="3D3A36"/>
+                          </a:solidFill>
+                          <a:latin typeface="Calibri" pitchFamily="34" charset="0"/>
+                          <a:ea typeface="Calibri" pitchFamily="34" charset="-122"/>
+                          <a:cs typeface="Calibri" pitchFamily="34" charset="-120"/>
+                        </a:rPr>
+                        <a:t>Flammable</a:t>
+                      </a:r>
+                      <a:endParaRPr lang="en-US" sz="1200" dirty="0">
+                        <a:latin typeface="Calibri" charset="0"/>
+                        <a:ea typeface="Calibri" charset="0"/>
+                        <a:cs typeface="Calibri" charset="0"/>
+                      </a:endParaRPr>
+                    </a:p>
+                  </a:txBody>
+                  <a:tcPr marL="91440" marR="91440" marT="45720" marB="45720">
+                    <a:lnL w="6350" cap="flat" cmpd="sng" algn="ctr">
+                      <a:solidFill>
+                        <a:srgbClr val="E5E2DC"/>
+                      </a:solidFill>
+                      <a:prstDash val="solid"/>
+                      <a:round/>
+                      <a:headEnd type="none" w="med" len="med"/>
+                      <a:tailEnd type="none" w="med" len="med"/>
+                    </a:lnL>
+                    <a:lnR w="6350" cap="flat" cmpd="sng" algn="ctr">
+                      <a:solidFill>
+                        <a:srgbClr val="E5E2DC"/>
+                      </a:solidFill>
+                      <a:prstDash val="solid"/>
+                      <a:round/>
+                      <a:headEnd type="none" w="med" len="med"/>
+                      <a:tailEnd type="none" w="med" len="med"/>
+                    </a:lnR>
+                    <a:lnT w="6350" cap="flat" cmpd="sng" algn="ctr">
+                      <a:solidFill>
+                        <a:srgbClr val="E5E2DC"/>
+                      </a:solidFill>
+                      <a:prstDash val="solid"/>
+                      <a:round/>
+                      <a:headEnd type="none" w="med" len="med"/>
+                      <a:tailEnd type="none" w="med" len="med"/>
+                    </a:lnT>
+                    <a:lnB w="6350" cap="flat" cmpd="sng" algn="ctr">
+                      <a:solidFill>
+                        <a:srgbClr val="E5E2DC"/>
+                      </a:solidFill>
+                      <a:prstDash val="solid"/>
+                      <a:round/>
+                      <a:headEnd type="none" w="med" len="med"/>
+                      <a:tailEnd type="none" w="med" len="med"/>
+                    </a:lnB>
+                    <a:solidFill>
+                      <a:srgbClr val="FFFFFF"/>
+                    </a:solidFill>
+                  </a:tcPr>
+                </a:tc>
+                <a:tc>
+                  <a:txBody>
+                    <a:bodyPr/>
+                    <a:lstStyle/>
+                    <a:p>
+                      <a:pPr indent="0" marL="0">
+                        <a:buNone/>
+                      </a:pPr>
+                      <a:r>
+                        <a:rPr lang="en-US" sz="1200" dirty="0">
+                          <a:solidFill>
+                            <a:srgbClr val="3D3A36"/>
+                          </a:solidFill>
+                          <a:latin typeface="Calibri" pitchFamily="34" charset="0"/>
+                          <a:ea typeface="Calibri" pitchFamily="34" charset="-122"/>
+                          <a:cs typeface="Calibri" pitchFamily="34" charset="-120"/>
+                        </a:rPr>
+                        <a:t>Catches fire easily</a:t>
+                      </a:r>
+                      <a:endParaRPr lang="en-US" sz="1200" dirty="0">
+                        <a:latin typeface="Calibri" charset="0"/>
+                        <a:ea typeface="Calibri" charset="0"/>
+                        <a:cs typeface="Calibri" charset="0"/>
+                      </a:endParaRPr>
+                    </a:p>
+                  </a:txBody>
+                  <a:tcPr marL="91440" marR="91440" marT="45720" marB="45720">
+                    <a:lnL w="6350" cap="flat" cmpd="sng" algn="ctr">
+                      <a:solidFill>
+                        <a:srgbClr val="E5E2DC"/>
+                      </a:solidFill>
+                      <a:prstDash val="solid"/>
+                      <a:round/>
+                      <a:headEnd type="none" w="med" len="med"/>
+                      <a:tailEnd type="none" w="med" len="med"/>
+                    </a:lnL>
+                    <a:lnR w="6350" cap="flat" cmpd="sng" algn="ctr">
+                      <a:solidFill>
+                        <a:srgbClr val="E5E2DC"/>
+                      </a:solidFill>
+                      <a:prstDash val="solid"/>
+                      <a:round/>
+                      <a:headEnd type="none" w="med" len="med"/>
+                      <a:tailEnd type="none" w="med" len="med"/>
+                    </a:lnR>
+                    <a:lnT w="6350" cap="flat" cmpd="sng" algn="ctr">
+                      <a:solidFill>
+                        <a:srgbClr val="E5E2DC"/>
+                      </a:solidFill>
+                      <a:prstDash val="solid"/>
+                      <a:round/>
+                      <a:headEnd type="none" w="med" len="med"/>
+                      <a:tailEnd type="none" w="med" len="med"/>
+                    </a:lnT>
+                    <a:lnB w="6350" cap="flat" cmpd="sng" algn="ctr">
+                      <a:solidFill>
+                        <a:srgbClr val="E5E2DC"/>
+                      </a:solidFill>
+                      <a:prstDash val="solid"/>
+                      <a:round/>
+                      <a:headEnd type="none" w="med" len="med"/>
+                      <a:tailEnd type="none" w="med" len="med"/>
+                    </a:lnB>
+                    <a:solidFill>
+                      <a:srgbClr val="FFFFFF"/>
+                    </a:solidFill>
+                  </a:tcPr>
+                </a:tc>
+                <a:tc>
+                  <a:txBody>
+                    <a:bodyPr/>
+                    <a:lstStyle/>
+                    <a:p>
+                      <a:pPr indent="0" marL="0">
+                        <a:buNone/>
+                      </a:pPr>
+                      <a:r>
+                        <a:rPr lang="en-US" sz="1200" dirty="0">
+                          <a:solidFill>
+                            <a:srgbClr val="3D3A36"/>
+                          </a:solidFill>
+                          <a:latin typeface="Calibri" pitchFamily="34" charset="0"/>
+                          <a:ea typeface="Calibri" pitchFamily="34" charset="-122"/>
+                          <a:cs typeface="Calibri" pitchFamily="34" charset="-120"/>
+                        </a:rPr>
+                        <a:t>Ethanol, methanol</a:t>
+                      </a:r>
+                      <a:endParaRPr lang="en-US" sz="1200" dirty="0">
+                        <a:latin typeface="Calibri" charset="0"/>
+                        <a:ea typeface="Calibri" charset="0"/>
+                        <a:cs typeface="Calibri" charset="0"/>
+                      </a:endParaRPr>
+                    </a:p>
+                  </a:txBody>
+                  <a:tcPr marL="91440" marR="91440" marT="45720" marB="45720">
+                    <a:lnL w="6350" cap="flat" cmpd="sng" algn="ctr">
+                      <a:solidFill>
+                        <a:srgbClr val="E5E2DC"/>
+                      </a:solidFill>
+                      <a:prstDash val="solid"/>
+                      <a:round/>
+                      <a:headEnd type="none" w="med" len="med"/>
+                      <a:tailEnd type="none" w="med" len="med"/>
+                    </a:lnL>
+                    <a:lnR w="6350" cap="flat" cmpd="sng" algn="ctr">
+                      <a:solidFill>
+                        <a:srgbClr val="E5E2DC"/>
+                      </a:solidFill>
+                      <a:prstDash val="solid"/>
+                      <a:round/>
+                      <a:headEnd type="none" w="med" len="med"/>
+                      <a:tailEnd type="none" w="med" len="med"/>
+                    </a:lnR>
+                    <a:lnT w="6350" cap="flat" cmpd="sng" algn="ctr">
+                      <a:solidFill>
+                        <a:srgbClr val="E5E2DC"/>
+                      </a:solidFill>
+                      <a:prstDash val="solid"/>
+                      <a:round/>
+                      <a:headEnd type="none" w="med" len="med"/>
+                      <a:tailEnd type="none" w="med" len="med"/>
+                    </a:lnT>
+                    <a:lnB w="6350" cap="flat" cmpd="sng" algn="ctr">
+                      <a:solidFill>
+                        <a:srgbClr val="E5E2DC"/>
+                      </a:solidFill>
+                      <a:prstDash val="solid"/>
+                      <a:round/>
+                      <a:headEnd type="none" w="med" len="med"/>
+                      <a:tailEnd type="none" w="med" len="med"/>
+                    </a:lnB>
+                    <a:solidFill>
+                      <a:srgbClr val="FFFFFF"/>
+                    </a:solidFill>
+                  </a:tcPr>
+                </a:tc>
+              </a:tr>
+              <a:tr h="502920">
+                <a:tc>
+                  <a:txBody>
+                    <a:bodyPr/>
+                    <a:lstStyle/>
+                    <a:p>
+                      <a:pPr indent="0" marL="0">
+                        <a:buNone/>
+                      </a:pPr>
+                      <a:r>
+                        <a:rPr lang="en-US" sz="1200" dirty="0">
+                          <a:solidFill>
+                            <a:srgbClr val="3D3A36"/>
+                          </a:solidFill>
+                          <a:latin typeface="Calibri" pitchFamily="34" charset="0"/>
+                          <a:ea typeface="Calibri" pitchFamily="34" charset="-122"/>
+                          <a:cs typeface="Calibri" pitchFamily="34" charset="-120"/>
+                        </a:rPr>
+                        <a:t>Corrosive</a:t>
+                      </a:r>
+                      <a:endParaRPr lang="en-US" sz="1200" dirty="0">
+                        <a:latin typeface="Calibri" charset="0"/>
+                        <a:ea typeface="Calibri" charset="0"/>
+                        <a:cs typeface="Calibri" charset="0"/>
+                      </a:endParaRPr>
+                    </a:p>
+                  </a:txBody>
+                  <a:tcPr marL="91440" marR="91440" marT="45720" marB="45720">
+                    <a:lnL w="6350" cap="flat" cmpd="sng" algn="ctr">
+                      <a:solidFill>
+                        <a:srgbClr val="E5E2DC"/>
+                      </a:solidFill>
+                      <a:prstDash val="solid"/>
+                      <a:round/>
+                      <a:headEnd type="none" w="med" len="med"/>
+                      <a:tailEnd type="none" w="med" len="med"/>
+                    </a:lnL>
+                    <a:lnR w="6350" cap="flat" cmpd="sng" algn="ctr">
+                      <a:solidFill>
+                        <a:srgbClr val="E5E2DC"/>
+                      </a:solidFill>
+                      <a:prstDash val="solid"/>
+                      <a:round/>
+                      <a:headEnd type="none" w="med" len="med"/>
+                      <a:tailEnd type="none" w="med" len="med"/>
+                    </a:lnR>
+                    <a:lnT w="6350" cap="flat" cmpd="sng" algn="ctr">
+                      <a:solidFill>
+                        <a:srgbClr val="E5E2DC"/>
+                      </a:solidFill>
+                      <a:prstDash val="solid"/>
+                      <a:round/>
+                      <a:headEnd type="none" w="med" len="med"/>
+                      <a:tailEnd type="none" w="med" len="med"/>
+                    </a:lnT>
+                    <a:lnB w="6350" cap="flat" cmpd="sng" algn="ctr">
+                      <a:solidFill>
+                        <a:srgbClr val="E5E2DC"/>
+                      </a:solidFill>
+                      <a:prstDash val="solid"/>
+                      <a:round/>
+                      <a:headEnd type="none" w="med" len="med"/>
+                      <a:tailEnd type="none" w="med" len="med"/>
+                    </a:lnB>
+                    <a:solidFill>
+                      <a:srgbClr val="F8F6F3"/>
+                    </a:solidFill>
+                  </a:tcPr>
+                </a:tc>
+                <a:tc>
+                  <a:txBody>
+                    <a:bodyPr/>
+                    <a:lstStyle/>
+                    <a:p>
+                      <a:pPr indent="0" marL="0">
+                        <a:buNone/>
+                      </a:pPr>
+                      <a:r>
+                        <a:rPr lang="en-US" sz="1200" dirty="0">
+                          <a:solidFill>
+                            <a:srgbClr val="3D3A36"/>
+                          </a:solidFill>
+                          <a:latin typeface="Calibri" pitchFamily="34" charset="0"/>
+                          <a:ea typeface="Calibri" pitchFamily="34" charset="-122"/>
+                          <a:cs typeface="Calibri" pitchFamily="34" charset="-120"/>
+                        </a:rPr>
+                        <a:t>Burns skin or eyes</a:t>
+                      </a:r>
+                      <a:endParaRPr lang="en-US" sz="1200" dirty="0">
+                        <a:latin typeface="Calibri" charset="0"/>
+                        <a:ea typeface="Calibri" charset="0"/>
+                        <a:cs typeface="Calibri" charset="0"/>
+                      </a:endParaRPr>
+                    </a:p>
+                  </a:txBody>
+                  <a:tcPr marL="91440" marR="91440" marT="45720" marB="45720">
+                    <a:lnL w="6350" cap="flat" cmpd="sng" algn="ctr">
+                      <a:solidFill>
+                        <a:srgbClr val="E5E2DC"/>
+                      </a:solidFill>
+                      <a:prstDash val="solid"/>
+                      <a:round/>
+                      <a:headEnd type="none" w="med" len="med"/>
+                      <a:tailEnd type="none" w="med" len="med"/>
+                    </a:lnL>
+                    <a:lnR w="6350" cap="flat" cmpd="sng" algn="ctr">
+                      <a:solidFill>
+                        <a:srgbClr val="E5E2DC"/>
+                      </a:solidFill>
+                      <a:prstDash val="solid"/>
+                      <a:round/>
+                      <a:headEnd type="none" w="med" len="med"/>
+                      <a:tailEnd type="none" w="med" len="med"/>
+                    </a:lnR>
+                    <a:lnT w="6350" cap="flat" cmpd="sng" algn="ctr">
+                      <a:solidFill>
+                        <a:srgbClr val="E5E2DC"/>
+                      </a:solidFill>
+                      <a:prstDash val="solid"/>
+                      <a:round/>
+                      <a:headEnd type="none" w="med" len="med"/>
+                      <a:tailEnd type="none" w="med" len="med"/>
+                    </a:lnT>
+                    <a:lnB w="6350" cap="flat" cmpd="sng" algn="ctr">
+                      <a:solidFill>
+                        <a:srgbClr val="E5E2DC"/>
+                      </a:solidFill>
+                      <a:prstDash val="solid"/>
+                      <a:round/>
+                      <a:headEnd type="none" w="med" len="med"/>
+                      <a:tailEnd type="none" w="med" len="med"/>
+                    </a:lnB>
+                    <a:solidFill>
+                      <a:srgbClr val="F8F6F3"/>
+                    </a:solidFill>
+                  </a:tcPr>
+                </a:tc>
+                <a:tc>
+                  <a:txBody>
+                    <a:bodyPr/>
+                    <a:lstStyle/>
+                    <a:p>
+                      <a:pPr indent="0" marL="0">
+                        <a:buNone/>
+                      </a:pPr>
+                      <a:r>
+                        <a:rPr lang="en-US" sz="1200" dirty="0">
+                          <a:solidFill>
+                            <a:srgbClr val="3D3A36"/>
+                          </a:solidFill>
+                          <a:latin typeface="Calibri" pitchFamily="34" charset="0"/>
+                          <a:ea typeface="Calibri" pitchFamily="34" charset="-122"/>
+                          <a:cs typeface="Calibri" pitchFamily="34" charset="-120"/>
+                        </a:rPr>
+                        <a:t>Strong acids, bleach</a:t>
+                      </a:r>
+                      <a:endParaRPr lang="en-US" sz="1200" dirty="0">
+                        <a:latin typeface="Calibri" charset="0"/>
+                        <a:ea typeface="Calibri" charset="0"/>
+                        <a:cs typeface="Calibri" charset="0"/>
+                      </a:endParaRPr>
+                    </a:p>
+                  </a:txBody>
+                  <a:tcPr marL="91440" marR="91440" marT="45720" marB="45720">
+                    <a:lnL w="6350" cap="flat" cmpd="sng" algn="ctr">
+                      <a:solidFill>
+                        <a:srgbClr val="E5E2DC"/>
+                      </a:solidFill>
+                      <a:prstDash val="solid"/>
+                      <a:round/>
+                      <a:headEnd type="none" w="med" len="med"/>
+                      <a:tailEnd type="none" w="med" len="med"/>
+                    </a:lnL>
+                    <a:lnR w="6350" cap="flat" cmpd="sng" algn="ctr">
+                      <a:solidFill>
+                        <a:srgbClr val="E5E2DC"/>
+                      </a:solidFill>
+                      <a:prstDash val="solid"/>
+                      <a:round/>
+                      <a:headEnd type="none" w="med" len="med"/>
+                      <a:tailEnd type="none" w="med" len="med"/>
+                    </a:lnR>
+                    <a:lnT w="6350" cap="flat" cmpd="sng" algn="ctr">
+                      <a:solidFill>
+                        <a:srgbClr val="E5E2DC"/>
+                      </a:solidFill>
+                      <a:prstDash val="solid"/>
+                      <a:round/>
+                      <a:headEnd type="none" w="med" len="med"/>
+                      <a:tailEnd type="none" w="med" len="med"/>
+                    </a:lnT>
+                    <a:lnB w="6350" cap="flat" cmpd="sng" algn="ctr">
+                      <a:solidFill>
+                        <a:srgbClr val="E5E2DC"/>
+                      </a:solidFill>
+                      <a:prstDash val="solid"/>
+                      <a:round/>
+                      <a:headEnd type="none" w="med" len="med"/>
+                      <a:tailEnd type="none" w="med" len="med"/>
+                    </a:lnB>
+                    <a:solidFill>
+                      <a:srgbClr val="F8F6F3"/>
+                    </a:solidFill>
+                  </a:tcPr>
+                </a:tc>
+              </a:tr>
+              <a:tr h="502920">
+                <a:tc>
+                  <a:txBody>
+                    <a:bodyPr/>
+                    <a:lstStyle/>
+                    <a:p>
+                      <a:pPr indent="0" marL="0">
+                        <a:buNone/>
+                      </a:pPr>
+                      <a:r>
+                        <a:rPr lang="en-US" sz="1200" dirty="0">
+                          <a:solidFill>
+                            <a:srgbClr val="3D3A36"/>
+                          </a:solidFill>
+                          <a:latin typeface="Calibri" pitchFamily="34" charset="0"/>
+                          <a:ea typeface="Calibri" pitchFamily="34" charset="-122"/>
+                          <a:cs typeface="Calibri" pitchFamily="34" charset="-120"/>
+                        </a:rPr>
+                        <a:t>Toxic</a:t>
+                      </a:r>
+                      <a:endParaRPr lang="en-US" sz="1200" dirty="0">
+                        <a:latin typeface="Calibri" charset="0"/>
+                        <a:ea typeface="Calibri" charset="0"/>
+                        <a:cs typeface="Calibri" charset="0"/>
+                      </a:endParaRPr>
+                    </a:p>
+                  </a:txBody>
+                  <a:tcPr marL="91440" marR="91440" marT="45720" marB="45720">
+                    <a:lnL w="6350" cap="flat" cmpd="sng" algn="ctr">
+                      <a:solidFill>
+                        <a:srgbClr val="E5E2DC"/>
+                      </a:solidFill>
+                      <a:prstDash val="solid"/>
+                      <a:round/>
+                      <a:headEnd type="none" w="med" len="med"/>
+                      <a:tailEnd type="none" w="med" len="med"/>
+                    </a:lnL>
+                    <a:lnR w="6350" cap="flat" cmpd="sng" algn="ctr">
+                      <a:solidFill>
+                        <a:srgbClr val="E5E2DC"/>
+                      </a:solidFill>
+                      <a:prstDash val="solid"/>
+                      <a:round/>
+                      <a:headEnd type="none" w="med" len="med"/>
+                      <a:tailEnd type="none" w="med" len="med"/>
+                    </a:lnR>
+                    <a:lnT w="6350" cap="flat" cmpd="sng" algn="ctr">
+                      <a:solidFill>
+                        <a:srgbClr val="E5E2DC"/>
+                      </a:solidFill>
+                      <a:prstDash val="solid"/>
+                      <a:round/>
+                      <a:headEnd type="none" w="med" len="med"/>
+                      <a:tailEnd type="none" w="med" len="med"/>
+                    </a:lnT>
+                    <a:lnB w="6350" cap="flat" cmpd="sng" algn="ctr">
+                      <a:solidFill>
+                        <a:srgbClr val="E5E2DC"/>
+                      </a:solidFill>
+                      <a:prstDash val="solid"/>
+                      <a:round/>
+                      <a:headEnd type="none" w="med" len="med"/>
+                      <a:tailEnd type="none" w="med" len="med"/>
+                    </a:lnB>
+                    <a:solidFill>
+                      <a:srgbClr val="FFFFFF"/>
+                    </a:solidFill>
+                  </a:tcPr>
+                </a:tc>
+                <a:tc>
+                  <a:txBody>
+                    <a:bodyPr/>
+                    <a:lstStyle/>
+                    <a:p>
+                      <a:pPr indent="0" marL="0">
+                        <a:buNone/>
+                      </a:pPr>
+                      <a:r>
+                        <a:rPr lang="en-US" sz="1200" dirty="0">
+                          <a:solidFill>
+                            <a:srgbClr val="3D3A36"/>
+                          </a:solidFill>
+                          <a:latin typeface="Calibri" pitchFamily="34" charset="0"/>
+                          <a:ea typeface="Calibri" pitchFamily="34" charset="-122"/>
+                          <a:cs typeface="Calibri" pitchFamily="34" charset="-120"/>
+                        </a:rPr>
+                        <a:t>Can cause death if swallowed/inhaled</a:t>
+                      </a:r>
+                      <a:endParaRPr lang="en-US" sz="1200" dirty="0">
+                        <a:latin typeface="Calibri" charset="0"/>
+                        <a:ea typeface="Calibri" charset="0"/>
+                        <a:cs typeface="Calibri" charset="0"/>
+                      </a:endParaRPr>
+                    </a:p>
+                  </a:txBody>
+                  <a:tcPr marL="91440" marR="91440" marT="45720" marB="45720">
+                    <a:lnL w="6350" cap="flat" cmpd="sng" algn="ctr">
+                      <a:solidFill>
+                        <a:srgbClr val="E5E2DC"/>
+                      </a:solidFill>
+                      <a:prstDash val="solid"/>
+                      <a:round/>
+                      <a:headEnd type="none" w="med" len="med"/>
+                      <a:tailEnd type="none" w="med" len="med"/>
+                    </a:lnL>
+                    <a:lnR w="6350" cap="flat" cmpd="sng" algn="ctr">
+                      <a:solidFill>
+                        <a:srgbClr val="E5E2DC"/>
+                      </a:solidFill>
+                      <a:prstDash val="solid"/>
+                      <a:round/>
+                      <a:headEnd type="none" w="med" len="med"/>
+                      <a:tailEnd type="none" w="med" len="med"/>
+                    </a:lnR>
+                    <a:lnT w="6350" cap="flat" cmpd="sng" algn="ctr">
+                      <a:solidFill>
+                        <a:srgbClr val="E5E2DC"/>
+                      </a:solidFill>
+                      <a:prstDash val="solid"/>
+                      <a:round/>
+                      <a:headEnd type="none" w="med" len="med"/>
+                      <a:tailEnd type="none" w="med" len="med"/>
+                    </a:lnT>
+                    <a:lnB w="6350" cap="flat" cmpd="sng" algn="ctr">
+                      <a:solidFill>
+                        <a:srgbClr val="E5E2DC"/>
+                      </a:solidFill>
+                      <a:prstDash val="solid"/>
+                      <a:round/>
+                      <a:headEnd type="none" w="med" len="med"/>
+                      <a:tailEnd type="none" w="med" len="med"/>
+                    </a:lnB>
+                    <a:solidFill>
+                      <a:srgbClr val="FFFFFF"/>
+                    </a:solidFill>
+                  </a:tcPr>
+                </a:tc>
+                <a:tc>
+                  <a:txBody>
+                    <a:bodyPr/>
+                    <a:lstStyle/>
+                    <a:p>
+                      <a:pPr indent="0" marL="0">
+                        <a:buNone/>
+                      </a:pPr>
+                      <a:r>
+                        <a:rPr lang="en-US" sz="1200" dirty="0">
+                          <a:solidFill>
+                            <a:srgbClr val="3D3A36"/>
+                          </a:solidFill>
+                          <a:latin typeface="Calibri" pitchFamily="34" charset="0"/>
+                          <a:ea typeface="Calibri" pitchFamily="34" charset="-122"/>
+                          <a:cs typeface="Calibri" pitchFamily="34" charset="-120"/>
+                        </a:rPr>
+                        <a:t>Chlorine gas, mercury</a:t>
+                      </a:r>
+                      <a:endParaRPr lang="en-US" sz="1200" dirty="0">
+                        <a:latin typeface="Calibri" charset="0"/>
+                        <a:ea typeface="Calibri" charset="0"/>
+                        <a:cs typeface="Calibri" charset="0"/>
+                      </a:endParaRPr>
+                    </a:p>
+                  </a:txBody>
+                  <a:tcPr marL="91440" marR="91440" marT="45720" marB="45720">
+                    <a:lnL w="6350" cap="flat" cmpd="sng" algn="ctr">
+                      <a:solidFill>
+                        <a:srgbClr val="E5E2DC"/>
+                      </a:solidFill>
+                      <a:prstDash val="solid"/>
+                      <a:round/>
+                      <a:headEnd type="none" w="med" len="med"/>
+                      <a:tailEnd type="none" w="med" len="med"/>
+                    </a:lnL>
+                    <a:lnR w="6350" cap="flat" cmpd="sng" algn="ctr">
+                      <a:solidFill>
+                        <a:srgbClr val="E5E2DC"/>
+                      </a:solidFill>
+                      <a:prstDash val="solid"/>
+                      <a:round/>
+                      <a:headEnd type="none" w="med" len="med"/>
+                      <a:tailEnd type="none" w="med" len="med"/>
+                    </a:lnR>
+                    <a:lnT w="6350" cap="flat" cmpd="sng" algn="ctr">
+                      <a:solidFill>
+                        <a:srgbClr val="E5E2DC"/>
+                      </a:solidFill>
+                      <a:prstDash val="solid"/>
+                      <a:round/>
+                      <a:headEnd type="none" w="med" len="med"/>
+                      <a:tailEnd type="none" w="med" len="med"/>
+                    </a:lnT>
+                    <a:lnB w="6350" cap="flat" cmpd="sng" algn="ctr">
+                      <a:solidFill>
+                        <a:srgbClr val="E5E2DC"/>
+                      </a:solidFill>
+                      <a:prstDash val="solid"/>
+                      <a:round/>
+                      <a:headEnd type="none" w="med" len="med"/>
+                      <a:tailEnd type="none" w="med" len="med"/>
+                    </a:lnB>
+                    <a:solidFill>
+                      <a:srgbClr val="FFFFFF"/>
+                    </a:solidFill>
+                  </a:tcPr>
+                </a:tc>
+              </a:tr>
+              <a:tr h="502920">
+                <a:tc>
+                  <a:txBody>
+                    <a:bodyPr/>
+                    <a:lstStyle/>
+                    <a:p>
+                      <a:pPr indent="0" marL="0">
+                        <a:buNone/>
+                      </a:pPr>
+                      <a:r>
+                        <a:rPr lang="en-US" sz="1200" dirty="0">
+                          <a:solidFill>
+                            <a:srgbClr val="3D3A36"/>
+                          </a:solidFill>
+                          <a:latin typeface="Calibri" pitchFamily="34" charset="0"/>
+                          <a:ea typeface="Calibri" pitchFamily="34" charset="-122"/>
+                          <a:cs typeface="Calibri" pitchFamily="34" charset="-120"/>
+                        </a:rPr>
+                        <a:t>Irritant</a:t>
+                      </a:r>
+                      <a:endParaRPr lang="en-US" sz="1200" dirty="0">
+                        <a:latin typeface="Calibri" charset="0"/>
+                        <a:ea typeface="Calibri" charset="0"/>
+                        <a:cs typeface="Calibri" charset="0"/>
+                      </a:endParaRPr>
+                    </a:p>
+                  </a:txBody>
+                  <a:tcPr marL="91440" marR="91440" marT="45720" marB="45720">
+                    <a:lnL w="6350" cap="flat" cmpd="sng" algn="ctr">
+                      <a:solidFill>
+                        <a:srgbClr val="E5E2DC"/>
+                      </a:solidFill>
+                      <a:prstDash val="solid"/>
+                      <a:round/>
+                      <a:headEnd type="none" w="med" len="med"/>
+                      <a:tailEnd type="none" w="med" len="med"/>
+                    </a:lnL>
+                    <a:lnR w="6350" cap="flat" cmpd="sng" algn="ctr">
+                      <a:solidFill>
+                        <a:srgbClr val="E5E2DC"/>
+                      </a:solidFill>
+                      <a:prstDash val="solid"/>
+                      <a:round/>
+                      <a:headEnd type="none" w="med" len="med"/>
+                      <a:tailEnd type="none" w="med" len="med"/>
+                    </a:lnR>
+                    <a:lnT w="6350" cap="flat" cmpd="sng" algn="ctr">
+                      <a:solidFill>
+                        <a:srgbClr val="E5E2DC"/>
+                      </a:solidFill>
+                      <a:prstDash val="solid"/>
+                      <a:round/>
+                      <a:headEnd type="none" w="med" len="med"/>
+                      <a:tailEnd type="none" w="med" len="med"/>
+                    </a:lnT>
+                    <a:lnB w="6350" cap="flat" cmpd="sng" algn="ctr">
+                      <a:solidFill>
+                        <a:srgbClr val="E5E2DC"/>
+                      </a:solidFill>
+                      <a:prstDash val="solid"/>
+                      <a:round/>
+                      <a:headEnd type="none" w="med" len="med"/>
+                      <a:tailEnd type="none" w="med" len="med"/>
+                    </a:lnB>
+                    <a:solidFill>
+                      <a:srgbClr val="F8F6F3"/>
+                    </a:solidFill>
+                  </a:tcPr>
+                </a:tc>
+                <a:tc>
+                  <a:txBody>
+                    <a:bodyPr/>
+                    <a:lstStyle/>
+                    <a:p>
+                      <a:pPr indent="0" marL="0">
+                        <a:buNone/>
+                      </a:pPr>
+                      <a:r>
+                        <a:rPr lang="en-US" sz="1200" dirty="0">
+                          <a:solidFill>
+                            <a:srgbClr val="3D3A36"/>
+                          </a:solidFill>
+                          <a:latin typeface="Calibri" pitchFamily="34" charset="0"/>
+                          <a:ea typeface="Calibri" pitchFamily="34" charset="-122"/>
+                          <a:cs typeface="Calibri" pitchFamily="34" charset="-120"/>
+                        </a:rPr>
+                        <a:t>Can make skin red or sore</a:t>
+                      </a:r>
+                      <a:endParaRPr lang="en-US" sz="1200" dirty="0">
+                        <a:latin typeface="Calibri" charset="0"/>
+                        <a:ea typeface="Calibri" charset="0"/>
+                        <a:cs typeface="Calibri" charset="0"/>
+                      </a:endParaRPr>
+                    </a:p>
+                  </a:txBody>
+                  <a:tcPr marL="91440" marR="91440" marT="45720" marB="45720">
+                    <a:lnL w="6350" cap="flat" cmpd="sng" algn="ctr">
+                      <a:solidFill>
+                        <a:srgbClr val="E5E2DC"/>
+                      </a:solidFill>
+                      <a:prstDash val="solid"/>
+                      <a:round/>
+                      <a:headEnd type="none" w="med" len="med"/>
+                      <a:tailEnd type="none" w="med" len="med"/>
+                    </a:lnL>
+                    <a:lnR w="6350" cap="flat" cmpd="sng" algn="ctr">
+                      <a:solidFill>
+                        <a:srgbClr val="E5E2DC"/>
+                      </a:solidFill>
+                      <a:prstDash val="solid"/>
+                      <a:round/>
+                      <a:headEnd type="none" w="med" len="med"/>
+                      <a:tailEnd type="none" w="med" len="med"/>
+                    </a:lnR>
+                    <a:lnT w="6350" cap="flat" cmpd="sng" algn="ctr">
+                      <a:solidFill>
+                        <a:srgbClr val="E5E2DC"/>
+                      </a:solidFill>
+                      <a:prstDash val="solid"/>
+                      <a:round/>
+                      <a:headEnd type="none" w="med" len="med"/>
+                      <a:tailEnd type="none" w="med" len="med"/>
+                    </a:lnT>
+                    <a:lnB w="6350" cap="flat" cmpd="sng" algn="ctr">
+                      <a:solidFill>
+                        <a:srgbClr val="E5E2DC"/>
+                      </a:solidFill>
+                      <a:prstDash val="solid"/>
+                      <a:round/>
+                      <a:headEnd type="none" w="med" len="med"/>
+                      <a:tailEnd type="none" w="med" len="med"/>
+                    </a:lnB>
+                    <a:solidFill>
+                      <a:srgbClr val="F8F6F3"/>
+                    </a:solidFill>
+                  </a:tcPr>
+                </a:tc>
+                <a:tc>
+                  <a:txBody>
+                    <a:bodyPr/>
+                    <a:lstStyle/>
+                    <a:p>
+                      <a:pPr indent="0" marL="0">
+                        <a:buNone/>
+                      </a:pPr>
+                      <a:r>
+                        <a:rPr lang="en-US" sz="1200" dirty="0">
+                          <a:solidFill>
+                            <a:srgbClr val="3D3A36"/>
+                          </a:solidFill>
+                          <a:latin typeface="Calibri" pitchFamily="34" charset="0"/>
+                          <a:ea typeface="Calibri" pitchFamily="34" charset="-122"/>
+                          <a:cs typeface="Calibri" pitchFamily="34" charset="-120"/>
+                        </a:rPr>
+                        <a:t>Dilute acids, detergent</a:t>
+                      </a:r>
+                      <a:endParaRPr lang="en-US" sz="1200" dirty="0">
+                        <a:latin typeface="Calibri" charset="0"/>
+                        <a:ea typeface="Calibri" charset="0"/>
+                        <a:cs typeface="Calibri" charset="0"/>
+                      </a:endParaRPr>
+                    </a:p>
+                  </a:txBody>
+                  <a:tcPr marL="91440" marR="91440" marT="45720" marB="45720">
+                    <a:lnL w="6350" cap="flat" cmpd="sng" algn="ctr">
+                      <a:solidFill>
+                        <a:srgbClr val="E5E2DC"/>
+                      </a:solidFill>
+                      <a:prstDash val="solid"/>
+                      <a:round/>
+                      <a:headEnd type="none" w="med" len="med"/>
+                      <a:tailEnd type="none" w="med" len="med"/>
+                    </a:lnL>
+                    <a:lnR w="6350" cap="flat" cmpd="sng" algn="ctr">
+                      <a:solidFill>
+                        <a:srgbClr val="E5E2DC"/>
+                      </a:solidFill>
+                      <a:prstDash val="solid"/>
+                      <a:round/>
+                      <a:headEnd type="none" w="med" len="med"/>
+                      <a:tailEnd type="none" w="med" len="med"/>
+                    </a:lnR>
+                    <a:lnT w="6350" cap="flat" cmpd="sng" algn="ctr">
+                      <a:solidFill>
+                        <a:srgbClr val="E5E2DC"/>
+                      </a:solidFill>
+                      <a:prstDash val="solid"/>
+                      <a:round/>
+                      <a:headEnd type="none" w="med" len="med"/>
+                      <a:tailEnd type="none" w="med" len="med"/>
+                    </a:lnT>
+                    <a:lnB w="6350" cap="flat" cmpd="sng" algn="ctr">
+                      <a:solidFill>
+                        <a:srgbClr val="E5E2DC"/>
+                      </a:solidFill>
+                      <a:prstDash val="solid"/>
+                      <a:round/>
+                      <a:headEnd type="none" w="med" len="med"/>
+                      <a:tailEnd type="none" w="med" len="med"/>
+                    </a:lnB>
+                    <a:solidFill>
+                      <a:srgbClr val="F8F6F3"/>
+                    </a:solidFill>
+                  </a:tcPr>
+                </a:tc>
+              </a:tr>
+              <a:tr h="502920">
+                <a:tc>
+                  <a:txBody>
+                    <a:bodyPr/>
+                    <a:lstStyle/>
+                    <a:p>
+                      <a:pPr indent="0" marL="0">
+                        <a:buNone/>
+                      </a:pPr>
+                      <a:r>
+                        <a:rPr lang="en-US" sz="1200" dirty="0">
+                          <a:solidFill>
+                            <a:srgbClr val="3D3A36"/>
+                          </a:solidFill>
+                          <a:latin typeface="Calibri" pitchFamily="34" charset="0"/>
+                          <a:ea typeface="Calibri" pitchFamily="34" charset="-122"/>
+                          <a:cs typeface="Calibri" pitchFamily="34" charset="-120"/>
+                        </a:rPr>
+                        <a:t>Oxidising</a:t>
+                      </a:r>
+                      <a:endParaRPr lang="en-US" sz="1200" dirty="0">
+                        <a:latin typeface="Calibri" charset="0"/>
+                        <a:ea typeface="Calibri" charset="0"/>
+                        <a:cs typeface="Calibri" charset="0"/>
+                      </a:endParaRPr>
+                    </a:p>
+                  </a:txBody>
+                  <a:tcPr marL="91440" marR="91440" marT="45720" marB="45720">
+                    <a:lnL w="6350" cap="flat" cmpd="sng" algn="ctr">
+                      <a:solidFill>
+                        <a:srgbClr val="E5E2DC"/>
+                      </a:solidFill>
+                      <a:prstDash val="solid"/>
+                      <a:round/>
+                      <a:headEnd type="none" w="med" len="med"/>
+                      <a:tailEnd type="none" w="med" len="med"/>
+                    </a:lnL>
+                    <a:lnR w="6350" cap="flat" cmpd="sng" algn="ctr">
+                      <a:solidFill>
+                        <a:srgbClr val="E5E2DC"/>
+                      </a:solidFill>
+                      <a:prstDash val="solid"/>
+                      <a:round/>
+                      <a:headEnd type="none" w="med" len="med"/>
+                      <a:tailEnd type="none" w="med" len="med"/>
+                    </a:lnR>
+                    <a:lnT w="6350" cap="flat" cmpd="sng" algn="ctr">
+                      <a:solidFill>
+                        <a:srgbClr val="E5E2DC"/>
+                      </a:solidFill>
+                      <a:prstDash val="solid"/>
+                      <a:round/>
+                      <a:headEnd type="none" w="med" len="med"/>
+                      <a:tailEnd type="none" w="med" len="med"/>
+                    </a:lnT>
+                    <a:lnB w="6350" cap="flat" cmpd="sng" algn="ctr">
+                      <a:solidFill>
+                        <a:srgbClr val="E5E2DC"/>
+                      </a:solidFill>
+                      <a:prstDash val="solid"/>
+                      <a:round/>
+                      <a:headEnd type="none" w="med" len="med"/>
+                      <a:tailEnd type="none" w="med" len="med"/>
+                    </a:lnB>
+                    <a:solidFill>
+                      <a:srgbClr val="FFFFFF"/>
+                    </a:solidFill>
+                  </a:tcPr>
+                </a:tc>
+                <a:tc>
+                  <a:txBody>
+                    <a:bodyPr/>
+                    <a:lstStyle/>
+                    <a:p>
+                      <a:pPr indent="0" marL="0">
+                        <a:buNone/>
+                      </a:pPr>
+                      <a:r>
+                        <a:rPr lang="en-US" sz="1200" dirty="0">
+                          <a:solidFill>
+                            <a:srgbClr val="3D3A36"/>
+                          </a:solidFill>
+                          <a:latin typeface="Calibri" pitchFamily="34" charset="0"/>
+                          <a:ea typeface="Calibri" pitchFamily="34" charset="-122"/>
+                          <a:cs typeface="Calibri" pitchFamily="34" charset="-120"/>
+                        </a:rPr>
+                        <a:t>Makes other things burn more fiercely</a:t>
+                      </a:r>
+                      <a:endParaRPr lang="en-US" sz="1200" dirty="0">
+                        <a:latin typeface="Calibri" charset="0"/>
+                        <a:ea typeface="Calibri" charset="0"/>
+                        <a:cs typeface="Calibri" charset="0"/>
+                      </a:endParaRPr>
+                    </a:p>
+                  </a:txBody>
+                  <a:tcPr marL="91440" marR="91440" marT="45720" marB="45720">
+                    <a:lnL w="6350" cap="flat" cmpd="sng" algn="ctr">
+                      <a:solidFill>
+                        <a:srgbClr val="E5E2DC"/>
+                      </a:solidFill>
+                      <a:prstDash val="solid"/>
+                      <a:round/>
+                      <a:headEnd type="none" w="med" len="med"/>
+                      <a:tailEnd type="none" w="med" len="med"/>
+                    </a:lnL>
+                    <a:lnR w="6350" cap="flat" cmpd="sng" algn="ctr">
+                      <a:solidFill>
+                        <a:srgbClr val="E5E2DC"/>
+                      </a:solidFill>
+                      <a:prstDash val="solid"/>
+                      <a:round/>
+                      <a:headEnd type="none" w="med" len="med"/>
+                      <a:tailEnd type="none" w="med" len="med"/>
+                    </a:lnR>
+                    <a:lnT w="6350" cap="flat" cmpd="sng" algn="ctr">
+                      <a:solidFill>
+                        <a:srgbClr val="E5E2DC"/>
+                      </a:solidFill>
+                      <a:prstDash val="solid"/>
+                      <a:round/>
+                      <a:headEnd type="none" w="med" len="med"/>
+                      <a:tailEnd type="none" w="med" len="med"/>
+                    </a:lnT>
+                    <a:lnB w="6350" cap="flat" cmpd="sng" algn="ctr">
+                      <a:solidFill>
+                        <a:srgbClr val="E5E2DC"/>
+                      </a:solidFill>
+                      <a:prstDash val="solid"/>
+                      <a:round/>
+                      <a:headEnd type="none" w="med" len="med"/>
+                      <a:tailEnd type="none" w="med" len="med"/>
+                    </a:lnB>
+                    <a:solidFill>
+                      <a:srgbClr val="FFFFFF"/>
+                    </a:solidFill>
+                  </a:tcPr>
+                </a:tc>
+                <a:tc>
+                  <a:txBody>
+                    <a:bodyPr/>
+                    <a:lstStyle/>
+                    <a:p>
+                      <a:pPr indent="0" marL="0">
+                        <a:buNone/>
+                      </a:pPr>
+                      <a:r>
+                        <a:rPr lang="en-US" sz="1200" dirty="0">
+                          <a:solidFill>
+                            <a:srgbClr val="3D3A36"/>
+                          </a:solidFill>
+                          <a:latin typeface="Calibri" pitchFamily="34" charset="0"/>
+                          <a:ea typeface="Calibri" pitchFamily="34" charset="-122"/>
+                          <a:cs typeface="Calibri" pitchFamily="34" charset="-120"/>
+                        </a:rPr>
+                        <a:t>Hydrogen peroxide</a:t>
+                      </a:r>
+                      <a:endParaRPr lang="en-US" sz="1200" dirty="0">
+                        <a:latin typeface="Calibri" charset="0"/>
+                        <a:ea typeface="Calibri" charset="0"/>
+                        <a:cs typeface="Calibri" charset="0"/>
+                      </a:endParaRPr>
+                    </a:p>
+                  </a:txBody>
+                  <a:tcPr marL="91440" marR="91440" marT="45720" marB="45720">
+                    <a:lnL w="6350" cap="flat" cmpd="sng" algn="ctr">
+                      <a:solidFill>
+                        <a:srgbClr val="E5E2DC"/>
+                      </a:solidFill>
+                      <a:prstDash val="solid"/>
+                      <a:round/>
+                      <a:headEnd type="none" w="med" len="med"/>
+                      <a:tailEnd type="none" w="med" len="med"/>
+                    </a:lnL>
+                    <a:lnR w="6350" cap="flat" cmpd="sng" algn="ctr">
+                      <a:solidFill>
+                        <a:srgbClr val="E5E2DC"/>
+                      </a:solidFill>
+                      <a:prstDash val="solid"/>
+                      <a:round/>
+                      <a:headEnd type="none" w="med" len="med"/>
+                      <a:tailEnd type="none" w="med" len="med"/>
+                    </a:lnR>
+                    <a:lnT w="6350" cap="flat" cmpd="sng" algn="ctr">
+                      <a:solidFill>
+                        <a:srgbClr val="E5E2DC"/>
+                      </a:solidFill>
+                      <a:prstDash val="solid"/>
+                      <a:round/>
+                      <a:headEnd type="none" w="med" len="med"/>
+                      <a:tailEnd type="none" w="med" len="med"/>
+                    </a:lnT>
+                    <a:lnB w="6350" cap="flat" cmpd="sng" algn="ctr">
+                      <a:solidFill>
+                        <a:srgbClr val="E5E2DC"/>
+                      </a:solidFill>
+                      <a:prstDash val="solid"/>
+                      <a:round/>
+                      <a:headEnd type="none" w="med" len="med"/>
+                      <a:tailEnd type="none" w="med" len="med"/>
+                    </a:lnB>
+                    <a:solidFill>
+                      <a:srgbClr val="FFFFFF"/>
+                    </a:solidFill>
+                  </a:tcPr>
+                </a:tc>
+              </a:tr>
+            </a:tbl>
+          </a:graphicData>
+        </a:graphic>
+      </p:graphicFrame>
+    </p:spTree>
+  </p:cSld>
+  <p:clrMapOvr>
+    <a:masterClrMapping/>
+  </p:clrMapOvr>
+</p:sld>
+</file>
+
+<file path=ppt/slides/slide7.xml><?xml version="1.0" encoding="utf-8"?>
+<p:sld xmlns:a="http://schemas.openxmlformats.org/drawingml/2006/main" xmlns:r="http://schemas.openxmlformats.org/officeDocument/2006/relationships" xmlns:p="http://schemas.openxmlformats.org/presentationml/2006/main">
+  <p:cSld name="Slide 7">
+    <p:bg>
+      <p:bgPr>
+        <a:solidFill>
+          <a:srgbClr val="FAF8F5"/>
+        </a:solidFill>
+      </p:bgPr>
+    </p:bg>
+    <p:spTree>
+      <p:nvGrpSpPr>
+        <p:cNvPr id="1" name=""/>
+        <p:cNvGrpSpPr/>
+        <p:nvPr/>
+      </p:nvGrpSpPr>
+      <p:grpSpPr>
+        <a:xfrm>
+          <a:off x="0" y="0"/>
+          <a:ext cx="0" cy="0"/>
+          <a:chOff x="0" y="0"/>
+          <a:chExt cx="0" cy="0"/>
+        </a:xfrm>
+      </p:grpSpPr>
+      <p:sp>
+        <p:nvSpPr>
+          <p:cNvPr id="2" name="Shape 0"/>
+          <p:cNvSpPr/>
+          <p:nvPr/>
+        </p:nvSpPr>
+        <p:spPr>
+          <a:xfrm>
+            <a:off x="0" y="0"/>
+            <a:ext cx="9144000" cy="822960"/>
+          </a:xfrm>
+          <a:prstGeom prst="rect">
+            <a:avLst/>
+          </a:prstGeom>
+          <a:solidFill>
+            <a:srgbClr val="FFFFFF"/>
+          </a:solidFill>
+          <a:ln/>
+        </p:spPr>
+      </p:sp>
+      <p:sp>
+        <p:nvSpPr>
+          <p:cNvPr id="3" name="Shape 1"/>
+          <p:cNvSpPr/>
+          <p:nvPr/>
+        </p:nvSpPr>
+        <p:spPr>
+          <a:xfrm>
+            <a:off x="0" y="804672"/>
+            <a:ext cx="9144000" cy="27432"/>
+          </a:xfrm>
+          <a:prstGeom prst="rect">
+            <a:avLst/>
+          </a:prstGeom>
+          <a:solidFill>
+            <a:srgbClr val="E5E2DC"/>
+          </a:solidFill>
+          <a:ln/>
+        </p:spPr>
+      </p:sp>
+      <p:sp>
+        <p:nvSpPr>
+          <p:cNvPr id="4" name="Shape 2"/>
+          <p:cNvSpPr/>
+          <p:nvPr/>
+        </p:nvSpPr>
+        <p:spPr>
+          <a:xfrm>
+            <a:off x="548640" y="201168"/>
+            <a:ext cx="54864" cy="420624"/>
+          </a:xfrm>
+          <a:prstGeom prst="rect">
+            <a:avLst/>
+          </a:prstGeom>
+          <a:solidFill>
+            <a:srgbClr val="2A9D8F"/>
+          </a:solidFill>
+          <a:ln/>
+        </p:spPr>
+      </p:sp>
+      <p:sp>
+        <p:nvSpPr>
+          <p:cNvPr id="5" name="Text 3"/>
+          <p:cNvSpPr/>
+          <p:nvPr/>
+        </p:nvSpPr>
+        <p:spPr>
+          <a:xfrm>
+            <a:off x="777240" y="137160"/>
+            <a:ext cx="7772400" cy="548640"/>
+          </a:xfrm>
+          <a:prstGeom prst="rect">
+            <a:avLst/>
+          </a:prstGeom>
+          <a:noFill/>
+          <a:ln/>
+        </p:spPr>
+        <p:txBody>
+          <a:bodyPr wrap="square" lIns="0" tIns="0" rIns="0" bIns="0" rtlCol="0" anchor="ctr"/>
+          <a:lstStyle/>
+          <a:p>
+            <a:pPr indent="0" marL="0">
+              <a:buNone/>
+            </a:pPr>
+            <a:r>
+              <a:rPr lang="en-US" sz="2000" b="1" dirty="0">
+                <a:solidFill>
+                  <a:srgbClr val="1B2A4A"/>
+                </a:solidFill>
+                <a:latin typeface="Georgia" pitchFamily="34" charset="0"/>
+                <a:ea typeface="Georgia" pitchFamily="34" charset="-122"/>
+                <a:cs typeface="Georgia" pitchFamily="34" charset="-120"/>
+              </a:rPr>
+              <a:t>What To Do In An Emergency</a:t>
+            </a:r>
+            <a:endParaRPr lang="en-US" sz="2000" dirty="0"/>
+          </a:p>
+        </p:txBody>
+      </p:sp>
+      <p:sp>
+        <p:nvSpPr>
+          <p:cNvPr id="6" name="Text 4"/>
+          <p:cNvSpPr/>
+          <p:nvPr/>
+        </p:nvSpPr>
+        <p:spPr>
+          <a:xfrm>
+            <a:off x="731520" y="1051560"/>
+            <a:ext cx="7680960" cy="3108960"/>
           </a:xfrm>
           <a:prstGeom prst="rect">
             <a:avLst/>
@@ -3034,7 +5812,7 @@
           <a:p>
             <a:pPr marL="342900" indent="-342900">
               <a:spcAft>
-                <a:spcPts val="1000"/>
+                <a:spcPts val="800"/>
               </a:spcAft>
               <a:buSzPct val="100000"/>
               <a:buChar char="•"/>
@@ -3042,20 +5820,20 @@
             <a:r>
               <a:rPr lang="en-US" sz="1500" dirty="0">
                 <a:solidFill>
-                  <a:srgbClr val="CADCFC"/>
+                  <a:srgbClr val="3D3A36"/>
                 </a:solidFill>
                 <a:latin typeface="Calibri" pitchFamily="34" charset="0"/>
                 <a:ea typeface="Calibri" pitchFamily="34" charset="-122"/>
                 <a:cs typeface="Calibri" pitchFamily="34" charset="-120"/>
               </a:rPr>
-              <a:t>Always wear safety goggles when handling chemicals</a:t>
+              <a:t>Chemical in eyes — wash with water for at least 20 minutes.</a:t>
             </a:r>
             <a:endParaRPr lang="en-US" sz="1500" dirty="0"/>
           </a:p>
           <a:p>
             <a:pPr marL="342900" indent="-342900">
               <a:spcAft>
-                <a:spcPts val="1000"/>
+                <a:spcPts val="800"/>
               </a:spcAft>
               <a:buSzPct val="100000"/>
               <a:buChar char="•"/>
@@ -3063,20 +5841,20 @@
             <a:r>
               <a:rPr lang="en-US" sz="1500" dirty="0">
                 <a:solidFill>
-                  <a:srgbClr val="CADCFC"/>
+                  <a:srgbClr val="3D3A36"/>
                 </a:solidFill>
                 <a:latin typeface="Calibri" pitchFamily="34" charset="0"/>
                 <a:ea typeface="Calibri" pitchFamily="34" charset="-122"/>
                 <a:cs typeface="Calibri" pitchFamily="34" charset="-120"/>
               </a:rPr>
-              <a:t>Know the location of safety equipment</a:t>
+              <a:t>Burns — run cool water over the burn for 10 minutes.</a:t>
             </a:r>
             <a:endParaRPr lang="en-US" sz="1500" dirty="0"/>
           </a:p>
           <a:p>
             <a:pPr marL="342900" indent="-342900">
               <a:spcAft>
-                <a:spcPts val="1000"/>
+                <a:spcPts val="800"/>
               </a:spcAft>
               <a:buSzPct val="100000"/>
               <a:buChar char="•"/>
@@ -3084,20 +5862,20 @@
             <a:r>
               <a:rPr lang="en-US" sz="1500" dirty="0">
                 <a:solidFill>
-                  <a:srgbClr val="CADCFC"/>
+                  <a:srgbClr val="3D3A36"/>
                 </a:solidFill>
                 <a:latin typeface="Calibri" pitchFamily="34" charset="0"/>
                 <a:ea typeface="Calibri" pitchFamily="34" charset="-122"/>
                 <a:cs typeface="Calibri" pitchFamily="34" charset="-120"/>
               </a:rPr>
-              <a:t>Never eat, drink, or run in the lab</a:t>
+              <a:t>Spill on skin — wash immediately with plenty of water.</a:t>
             </a:r>
             <a:endParaRPr lang="en-US" sz="1500" dirty="0"/>
           </a:p>
           <a:p>
             <a:pPr marL="342900" indent="-342900">
               <a:spcAft>
-                <a:spcPts val="1000"/>
+                <a:spcPts val="800"/>
               </a:spcAft>
               <a:buSzPct val="100000"/>
               <a:buChar char="•"/>
@@ -3105,20 +5883,20 @@
             <a:r>
               <a:rPr lang="en-US" sz="1500" dirty="0">
                 <a:solidFill>
-                  <a:srgbClr val="CADCFC"/>
+                  <a:srgbClr val="3D3A36"/>
                 </a:solidFill>
                 <a:latin typeface="Calibri" pitchFamily="34" charset="0"/>
                 <a:ea typeface="Calibri" pitchFamily="34" charset="-122"/>
                 <a:cs typeface="Calibri" pitchFamily="34" charset="-120"/>
               </a:rPr>
-              <a:t>Report ALL accidents to the teacher immediately</a:t>
+              <a:t>Fire — do NOT use water on chemical fires. Tell your teacher.</a:t>
             </a:r>
             <a:endParaRPr lang="en-US" sz="1500" dirty="0"/>
           </a:p>
           <a:p>
             <a:pPr marL="342900" indent="-342900">
               <a:spcAft>
-                <a:spcPts val="1000"/>
+                <a:spcPts val="800"/>
               </a:spcAft>
               <a:buSzPct val="100000"/>
               <a:buChar char="•"/>
@@ -3126,13 +5904,13 @@
             <a:r>
               <a:rPr lang="en-US" sz="1500" dirty="0">
                 <a:solidFill>
-                  <a:srgbClr val="CADCFC"/>
+                  <a:srgbClr val="3D3A36"/>
                 </a:solidFill>
                 <a:latin typeface="Calibri" pitchFamily="34" charset="0"/>
                 <a:ea typeface="Calibri" pitchFamily="34" charset="-122"/>
                 <a:cs typeface="Calibri" pitchFamily="34" charset="-120"/>
               </a:rPr>
-              <a:t>Clean up properly after every experiment</a:t>
+              <a:t>Broken glass — do NOT pick it up with your hands. Use a dustpan.</a:t>
             </a:r>
             <a:endParaRPr lang="en-US" sz="1500" dirty="0"/>
           </a:p>
@@ -3140,14 +5918,41 @@
       </p:sp>
       <p:sp>
         <p:nvSpPr>
-          <p:cNvPr id="5" name="Text 3"/>
-          <p:cNvSpPr/>
-          <p:nvPr/>
-        </p:nvSpPr>
-        <p:spPr>
-          <a:xfrm>
-            <a:off x="731520" y="4572000"/>
-            <a:ext cx="7772400" cy="365760"/>
+          <p:cNvPr id="7" name="Shape 5"/>
+          <p:cNvSpPr/>
+          <p:nvPr/>
+        </p:nvSpPr>
+        <p:spPr>
+          <a:xfrm>
+            <a:off x="731520" y="4206240"/>
+            <a:ext cx="7680960" cy="640080"/>
+          </a:xfrm>
+          <a:prstGeom prst="rect">
+            <a:avLst/>
+          </a:prstGeom>
+          <a:solidFill>
+            <a:srgbClr val="E8F5F3"/>
+          </a:solidFill>
+          <a:ln/>
+          <a:effectLst>
+            <a:outerShdw sx="100000" sy="100000" kx="0" ky="0" algn="bl" rotWithShape="0" blurRad="50800" dist="25400" dir="8100000">
+              <a:srgbClr val="000000">
+                <a:alpha val="10000"/>
+              </a:srgbClr>
+            </a:outerShdw>
+          </a:effectLst>
+        </p:spPr>
+      </p:sp>
+      <p:sp>
+        <p:nvSpPr>
+          <p:cNvPr id="8" name="Text 6"/>
+          <p:cNvSpPr/>
+          <p:nvPr/>
+        </p:nvSpPr>
+        <p:spPr>
+          <a:xfrm>
+            <a:off x="914400" y="4251960"/>
+            <a:ext cx="7315200" cy="548640"/>
           </a:xfrm>
           <a:prstGeom prst="rect">
             <a:avLst/>
@@ -3163,17 +5968,921 @@
               <a:buNone/>
             </a:pPr>
             <a:r>
-              <a:rPr lang="en-US" sz="1100" dirty="0">
-                <a:solidFill>
-                  <a:srgbClr val="E9C46A"/>
+              <a:rPr lang="en-US" sz="1200" b="1" dirty="0">
+                <a:solidFill>
+                  <a:srgbClr val="2A9D8F"/>
                 </a:solidFill>
                 <a:latin typeface="Calibri" pitchFamily="34" charset="0"/>
                 <a:ea typeface="Calibri" pitchFamily="34" charset="-122"/>
                 <a:cs typeface="Calibri" pitchFamily="34" charset="-120"/>
               </a:rPr>
+              <a:t>Key Idea: </a:t>
+            </a:r>
+            <a:pPr indent="0" marL="0">
+              <a:buNone/>
+            </a:pPr>
+            <a:r>
+              <a:rPr lang="en-US" sz="1200" i="1" dirty="0">
+                <a:solidFill>
+                  <a:srgbClr val="3D3A36"/>
+                </a:solidFill>
+                <a:latin typeface="Calibri" pitchFamily="34" charset="0"/>
+                <a:ea typeface="Calibri" pitchFamily="34" charset="-122"/>
+                <a:cs typeface="Calibri" pitchFamily="34" charset="-120"/>
+              </a:rPr>
+              <a:t>The first thing to do in ANY emergency is TELL YOUR TEACHER.</a:t>
+            </a:r>
+            <a:endParaRPr lang="en-US" sz="1200" dirty="0"/>
+          </a:p>
+        </p:txBody>
+      </p:sp>
+    </p:spTree>
+  </p:cSld>
+  <p:clrMapOvr>
+    <a:masterClrMapping/>
+  </p:clrMapOvr>
+</p:sld>
+</file>
+
+<file path=ppt/slides/slide8.xml><?xml version="1.0" encoding="utf-8"?>
+<p:sld xmlns:a="http://schemas.openxmlformats.org/drawingml/2006/main" xmlns:r="http://schemas.openxmlformats.org/officeDocument/2006/relationships" xmlns:p="http://schemas.openxmlformats.org/presentationml/2006/main">
+  <p:cSld name="Slide 8">
+    <p:bg>
+      <p:bgPr>
+        <a:solidFill>
+          <a:srgbClr val="FAF8F5"/>
+        </a:solidFill>
+      </p:bgPr>
+    </p:bg>
+    <p:spTree>
+      <p:nvGrpSpPr>
+        <p:cNvPr id="1" name=""/>
+        <p:cNvGrpSpPr/>
+        <p:nvPr/>
+      </p:nvGrpSpPr>
+      <p:grpSpPr>
+        <a:xfrm>
+          <a:off x="0" y="0"/>
+          <a:ext cx="0" cy="0"/>
+          <a:chOff x="0" y="0"/>
+          <a:chExt cx="0" cy="0"/>
+        </a:xfrm>
+      </p:grpSpPr>
+      <p:sp>
+        <p:nvSpPr>
+          <p:cNvPr id="2" name="Shape 0"/>
+          <p:cNvSpPr/>
+          <p:nvPr/>
+        </p:nvSpPr>
+        <p:spPr>
+          <a:xfrm>
+            <a:off x="0" y="0"/>
+            <a:ext cx="9144000" cy="822960"/>
+          </a:xfrm>
+          <a:prstGeom prst="rect">
+            <a:avLst/>
+          </a:prstGeom>
+          <a:solidFill>
+            <a:srgbClr val="FFFFFF"/>
+          </a:solidFill>
+          <a:ln/>
+        </p:spPr>
+      </p:sp>
+      <p:sp>
+        <p:nvSpPr>
+          <p:cNvPr id="3" name="Shape 1"/>
+          <p:cNvSpPr/>
+          <p:nvPr/>
+        </p:nvSpPr>
+        <p:spPr>
+          <a:xfrm>
+            <a:off x="0" y="804672"/>
+            <a:ext cx="9144000" cy="27432"/>
+          </a:xfrm>
+          <a:prstGeom prst="rect">
+            <a:avLst/>
+          </a:prstGeom>
+          <a:solidFill>
+            <a:srgbClr val="E5E2DC"/>
+          </a:solidFill>
+          <a:ln/>
+        </p:spPr>
+      </p:sp>
+      <p:sp>
+        <p:nvSpPr>
+          <p:cNvPr id="4" name="Shape 2"/>
+          <p:cNvSpPr/>
+          <p:nvPr/>
+        </p:nvSpPr>
+        <p:spPr>
+          <a:xfrm>
+            <a:off x="548640" y="201168"/>
+            <a:ext cx="54864" cy="420624"/>
+          </a:xfrm>
+          <a:prstGeom prst="rect">
+            <a:avLst/>
+          </a:prstGeom>
+          <a:solidFill>
+            <a:srgbClr val="2A9D8F"/>
+          </a:solidFill>
+          <a:ln/>
+        </p:spPr>
+      </p:sp>
+      <p:sp>
+        <p:nvSpPr>
+          <p:cNvPr id="5" name="Text 3"/>
+          <p:cNvSpPr/>
+          <p:nvPr/>
+        </p:nvSpPr>
+        <p:spPr>
+          <a:xfrm>
+            <a:off x="777240" y="137160"/>
+            <a:ext cx="7772400" cy="548640"/>
+          </a:xfrm>
+          <a:prstGeom prst="rect">
+            <a:avLst/>
+          </a:prstGeom>
+          <a:noFill/>
+          <a:ln/>
+        </p:spPr>
+        <p:txBody>
+          <a:bodyPr wrap="square" lIns="0" tIns="0" rIns="0" bIns="0" rtlCol="0" anchor="ctr"/>
+          <a:lstStyle/>
+          <a:p>
+            <a:pPr indent="0" marL="0">
+              <a:buNone/>
+            </a:pPr>
+            <a:r>
+              <a:rPr lang="en-US" sz="2000" b="1" dirty="0">
+                <a:solidFill>
+                  <a:srgbClr val="1B2A4A"/>
+                </a:solidFill>
+                <a:latin typeface="Georgia" pitchFamily="34" charset="0"/>
+                <a:ea typeface="Georgia" pitchFamily="34" charset="-122"/>
+                <a:cs typeface="Georgia" pitchFamily="34" charset="-120"/>
+              </a:rPr>
+              <a:t>Check Your Understanding</a:t>
+            </a:r>
+            <a:endParaRPr lang="en-US" sz="2000" dirty="0"/>
+          </a:p>
+        </p:txBody>
+      </p:sp>
+      <p:sp>
+        <p:nvSpPr>
+          <p:cNvPr id="6" name="Shape 4"/>
+          <p:cNvSpPr/>
+          <p:nvPr/>
+        </p:nvSpPr>
+        <p:spPr>
+          <a:xfrm>
+            <a:off x="731520" y="1051560"/>
+            <a:ext cx="7680960" cy="438912"/>
+          </a:xfrm>
+          <a:prstGeom prst="rect">
+            <a:avLst/>
+          </a:prstGeom>
+          <a:solidFill>
+            <a:srgbClr val="FFFFFF"/>
+          </a:solidFill>
+          <a:ln/>
+        </p:spPr>
+      </p:sp>
+      <p:sp>
+        <p:nvSpPr>
+          <p:cNvPr id="7" name="Text 5"/>
+          <p:cNvSpPr/>
+          <p:nvPr/>
+        </p:nvSpPr>
+        <p:spPr>
+          <a:xfrm>
+            <a:off x="868680" y="1051560"/>
+            <a:ext cx="320040" cy="438912"/>
+          </a:xfrm>
+          <a:prstGeom prst="rect">
+            <a:avLst/>
+          </a:prstGeom>
+          <a:noFill/>
+          <a:ln/>
+        </p:spPr>
+        <p:txBody>
+          <a:bodyPr wrap="square" rtlCol="0" anchor="ctr"/>
+          <a:lstStyle/>
+          <a:p>
+            <a:pPr indent="0" marL="0">
+              <a:buNone/>
+            </a:pPr>
+            <a:r>
+              <a:rPr lang="en-US" sz="1400" dirty="0">
+                <a:solidFill>
+                  <a:srgbClr val="2A9D8F"/>
+                </a:solidFill>
+              </a:rPr>
+              <a:t>☐</a:t>
+            </a:r>
+            <a:endParaRPr lang="en-US" sz="1400" dirty="0"/>
+          </a:p>
+        </p:txBody>
+      </p:sp>
+      <p:sp>
+        <p:nvSpPr>
+          <p:cNvPr id="8" name="Text 6"/>
+          <p:cNvSpPr/>
+          <p:nvPr/>
+        </p:nvSpPr>
+        <p:spPr>
+          <a:xfrm>
+            <a:off x="1234440" y="1051560"/>
+            <a:ext cx="6949440" cy="438912"/>
+          </a:xfrm>
+          <a:prstGeom prst="rect">
+            <a:avLst/>
+          </a:prstGeom>
+          <a:noFill/>
+          <a:ln/>
+        </p:spPr>
+        <p:txBody>
+          <a:bodyPr wrap="square" rtlCol="0" anchor="ctr"/>
+          <a:lstStyle/>
+          <a:p>
+            <a:pPr indent="0" marL="0">
+              <a:buNone/>
+            </a:pPr>
+            <a:r>
+              <a:rPr lang="en-US" sz="1300" dirty="0">
+                <a:solidFill>
+                  <a:srgbClr val="3D3A36"/>
+                </a:solidFill>
+                <a:latin typeface="Calibri" pitchFamily="34" charset="0"/>
+                <a:ea typeface="Calibri" pitchFamily="34" charset="-122"/>
+                <a:cs typeface="Calibri" pitchFamily="34" charset="-120"/>
+              </a:rPr>
+              <a:t>I can name 3 lab safety rules</a:t>
+            </a:r>
+            <a:endParaRPr lang="en-US" sz="1300" dirty="0"/>
+          </a:p>
+        </p:txBody>
+      </p:sp>
+      <p:sp>
+        <p:nvSpPr>
+          <p:cNvPr id="9" name="Shape 7"/>
+          <p:cNvSpPr/>
+          <p:nvPr/>
+        </p:nvSpPr>
+        <p:spPr>
+          <a:xfrm>
+            <a:off x="731520" y="1554480"/>
+            <a:ext cx="7680960" cy="438912"/>
+          </a:xfrm>
+          <a:prstGeom prst="rect">
+            <a:avLst/>
+          </a:prstGeom>
+          <a:solidFill>
+            <a:srgbClr val="F8F6F3"/>
+          </a:solidFill>
+          <a:ln/>
+        </p:spPr>
+      </p:sp>
+      <p:sp>
+        <p:nvSpPr>
+          <p:cNvPr id="10" name="Text 8"/>
+          <p:cNvSpPr/>
+          <p:nvPr/>
+        </p:nvSpPr>
+        <p:spPr>
+          <a:xfrm>
+            <a:off x="868680" y="1554480"/>
+            <a:ext cx="320040" cy="438912"/>
+          </a:xfrm>
+          <a:prstGeom prst="rect">
+            <a:avLst/>
+          </a:prstGeom>
+          <a:noFill/>
+          <a:ln/>
+        </p:spPr>
+        <p:txBody>
+          <a:bodyPr wrap="square" rtlCol="0" anchor="ctr"/>
+          <a:lstStyle/>
+          <a:p>
+            <a:pPr indent="0" marL="0">
+              <a:buNone/>
+            </a:pPr>
+            <a:r>
+              <a:rPr lang="en-US" sz="1400" dirty="0">
+                <a:solidFill>
+                  <a:srgbClr val="2A9D8F"/>
+                </a:solidFill>
+              </a:rPr>
+              <a:t>☐</a:t>
+            </a:r>
+            <a:endParaRPr lang="en-US" sz="1400" dirty="0"/>
+          </a:p>
+        </p:txBody>
+      </p:sp>
+      <p:sp>
+        <p:nvSpPr>
+          <p:cNvPr id="11" name="Text 9"/>
+          <p:cNvSpPr/>
+          <p:nvPr/>
+        </p:nvSpPr>
+        <p:spPr>
+          <a:xfrm>
+            <a:off x="1234440" y="1554480"/>
+            <a:ext cx="6949440" cy="438912"/>
+          </a:xfrm>
+          <a:prstGeom prst="rect">
+            <a:avLst/>
+          </a:prstGeom>
+          <a:noFill/>
+          <a:ln/>
+        </p:spPr>
+        <p:txBody>
+          <a:bodyPr wrap="square" rtlCol="0" anchor="ctr"/>
+          <a:lstStyle/>
+          <a:p>
+            <a:pPr indent="0" marL="0">
+              <a:buNone/>
+            </a:pPr>
+            <a:r>
+              <a:rPr lang="en-US" sz="1300" dirty="0">
+                <a:solidFill>
+                  <a:srgbClr val="3D3A36"/>
+                </a:solidFill>
+                <a:latin typeface="Calibri" pitchFamily="34" charset="0"/>
+                <a:ea typeface="Calibri" pitchFamily="34" charset="-122"/>
+                <a:cs typeface="Calibri" pitchFamily="34" charset="-120"/>
+              </a:rPr>
+              <a:t>I know the difference between a hazard and a risk</a:t>
+            </a:r>
+            <a:endParaRPr lang="en-US" sz="1300" dirty="0"/>
+          </a:p>
+        </p:txBody>
+      </p:sp>
+      <p:sp>
+        <p:nvSpPr>
+          <p:cNvPr id="12" name="Shape 10"/>
+          <p:cNvSpPr/>
+          <p:nvPr/>
+        </p:nvSpPr>
+        <p:spPr>
+          <a:xfrm>
+            <a:off x="731520" y="2057400"/>
+            <a:ext cx="7680960" cy="438912"/>
+          </a:xfrm>
+          <a:prstGeom prst="rect">
+            <a:avLst/>
+          </a:prstGeom>
+          <a:solidFill>
+            <a:srgbClr val="FFFFFF"/>
+          </a:solidFill>
+          <a:ln/>
+        </p:spPr>
+      </p:sp>
+      <p:sp>
+        <p:nvSpPr>
+          <p:cNvPr id="13" name="Text 11"/>
+          <p:cNvSpPr/>
+          <p:nvPr/>
+        </p:nvSpPr>
+        <p:spPr>
+          <a:xfrm>
+            <a:off x="868680" y="2057400"/>
+            <a:ext cx="320040" cy="438912"/>
+          </a:xfrm>
+          <a:prstGeom prst="rect">
+            <a:avLst/>
+          </a:prstGeom>
+          <a:noFill/>
+          <a:ln/>
+        </p:spPr>
+        <p:txBody>
+          <a:bodyPr wrap="square" rtlCol="0" anchor="ctr"/>
+          <a:lstStyle/>
+          <a:p>
+            <a:pPr indent="0" marL="0">
+              <a:buNone/>
+            </a:pPr>
+            <a:r>
+              <a:rPr lang="en-US" sz="1400" dirty="0">
+                <a:solidFill>
+                  <a:srgbClr val="2A9D8F"/>
+                </a:solidFill>
+              </a:rPr>
+              <a:t>☐</a:t>
+            </a:r>
+            <a:endParaRPr lang="en-US" sz="1400" dirty="0"/>
+          </a:p>
+        </p:txBody>
+      </p:sp>
+      <p:sp>
+        <p:nvSpPr>
+          <p:cNvPr id="14" name="Text 12"/>
+          <p:cNvSpPr/>
+          <p:nvPr/>
+        </p:nvSpPr>
+        <p:spPr>
+          <a:xfrm>
+            <a:off x="1234440" y="2057400"/>
+            <a:ext cx="6949440" cy="438912"/>
+          </a:xfrm>
+          <a:prstGeom prst="rect">
+            <a:avLst/>
+          </a:prstGeom>
+          <a:noFill/>
+          <a:ln/>
+        </p:spPr>
+        <p:txBody>
+          <a:bodyPr wrap="square" rtlCol="0" anchor="ctr"/>
+          <a:lstStyle/>
+          <a:p>
+            <a:pPr indent="0" marL="0">
+              <a:buNone/>
+            </a:pPr>
+            <a:r>
+              <a:rPr lang="en-US" sz="1300" dirty="0">
+                <a:solidFill>
+                  <a:srgbClr val="3D3A36"/>
+                </a:solidFill>
+                <a:latin typeface="Calibri" pitchFamily="34" charset="0"/>
+                <a:ea typeface="Calibri" pitchFamily="34" charset="-122"/>
+                <a:cs typeface="Calibri" pitchFamily="34" charset="-120"/>
+              </a:rPr>
+              <a:t>I can identify common hazard symbols</a:t>
+            </a:r>
+            <a:endParaRPr lang="en-US" sz="1300" dirty="0"/>
+          </a:p>
+        </p:txBody>
+      </p:sp>
+      <p:sp>
+        <p:nvSpPr>
+          <p:cNvPr id="15" name="Shape 13"/>
+          <p:cNvSpPr/>
+          <p:nvPr/>
+        </p:nvSpPr>
+        <p:spPr>
+          <a:xfrm>
+            <a:off x="731520" y="2560320"/>
+            <a:ext cx="7680960" cy="438912"/>
+          </a:xfrm>
+          <a:prstGeom prst="rect">
+            <a:avLst/>
+          </a:prstGeom>
+          <a:solidFill>
+            <a:srgbClr val="F8F6F3"/>
+          </a:solidFill>
+          <a:ln/>
+        </p:spPr>
+      </p:sp>
+      <p:sp>
+        <p:nvSpPr>
+          <p:cNvPr id="16" name="Text 14"/>
+          <p:cNvSpPr/>
+          <p:nvPr/>
+        </p:nvSpPr>
+        <p:spPr>
+          <a:xfrm>
+            <a:off x="868680" y="2560320"/>
+            <a:ext cx="320040" cy="438912"/>
+          </a:xfrm>
+          <a:prstGeom prst="rect">
+            <a:avLst/>
+          </a:prstGeom>
+          <a:noFill/>
+          <a:ln/>
+        </p:spPr>
+        <p:txBody>
+          <a:bodyPr wrap="square" rtlCol="0" anchor="ctr"/>
+          <a:lstStyle/>
+          <a:p>
+            <a:pPr indent="0" marL="0">
+              <a:buNone/>
+            </a:pPr>
+            <a:r>
+              <a:rPr lang="en-US" sz="1400" dirty="0">
+                <a:solidFill>
+                  <a:srgbClr val="2A9D8F"/>
+                </a:solidFill>
+              </a:rPr>
+              <a:t>☐</a:t>
+            </a:r>
+            <a:endParaRPr lang="en-US" sz="1400" dirty="0"/>
+          </a:p>
+        </p:txBody>
+      </p:sp>
+      <p:sp>
+        <p:nvSpPr>
+          <p:cNvPr id="17" name="Text 15"/>
+          <p:cNvSpPr/>
+          <p:nvPr/>
+        </p:nvSpPr>
+        <p:spPr>
+          <a:xfrm>
+            <a:off x="1234440" y="2560320"/>
+            <a:ext cx="6949440" cy="438912"/>
+          </a:xfrm>
+          <a:prstGeom prst="rect">
+            <a:avLst/>
+          </a:prstGeom>
+          <a:noFill/>
+          <a:ln/>
+        </p:spPr>
+        <p:txBody>
+          <a:bodyPr wrap="square" rtlCol="0" anchor="ctr"/>
+          <a:lstStyle/>
+          <a:p>
+            <a:pPr indent="0" marL="0">
+              <a:buNone/>
+            </a:pPr>
+            <a:r>
+              <a:rPr lang="en-US" sz="1300" dirty="0">
+                <a:solidFill>
+                  <a:srgbClr val="3D3A36"/>
+                </a:solidFill>
+                <a:latin typeface="Calibri" pitchFamily="34" charset="0"/>
+                <a:ea typeface="Calibri" pitchFamily="34" charset="-122"/>
+                <a:cs typeface="Calibri" pitchFamily="34" charset="-120"/>
+              </a:rPr>
+              <a:t>I know what PPE to wear for different activities</a:t>
+            </a:r>
+            <a:endParaRPr lang="en-US" sz="1300" dirty="0"/>
+          </a:p>
+        </p:txBody>
+      </p:sp>
+      <p:sp>
+        <p:nvSpPr>
+          <p:cNvPr id="18" name="Shape 16"/>
+          <p:cNvSpPr/>
+          <p:nvPr/>
+        </p:nvSpPr>
+        <p:spPr>
+          <a:xfrm>
+            <a:off x="731520" y="3063240"/>
+            <a:ext cx="7680960" cy="438912"/>
+          </a:xfrm>
+          <a:prstGeom prst="rect">
+            <a:avLst/>
+          </a:prstGeom>
+          <a:solidFill>
+            <a:srgbClr val="FFFFFF"/>
+          </a:solidFill>
+          <a:ln/>
+        </p:spPr>
+      </p:sp>
+      <p:sp>
+        <p:nvSpPr>
+          <p:cNvPr id="19" name="Text 17"/>
+          <p:cNvSpPr/>
+          <p:nvPr/>
+        </p:nvSpPr>
+        <p:spPr>
+          <a:xfrm>
+            <a:off x="868680" y="3063240"/>
+            <a:ext cx="320040" cy="438912"/>
+          </a:xfrm>
+          <a:prstGeom prst="rect">
+            <a:avLst/>
+          </a:prstGeom>
+          <a:noFill/>
+          <a:ln/>
+        </p:spPr>
+        <p:txBody>
+          <a:bodyPr wrap="square" rtlCol="0" anchor="ctr"/>
+          <a:lstStyle/>
+          <a:p>
+            <a:pPr indent="0" marL="0">
+              <a:buNone/>
+            </a:pPr>
+            <a:r>
+              <a:rPr lang="en-US" sz="1400" dirty="0">
+                <a:solidFill>
+                  <a:srgbClr val="2A9D8F"/>
+                </a:solidFill>
+              </a:rPr>
+              <a:t>☐</a:t>
+            </a:r>
+            <a:endParaRPr lang="en-US" sz="1400" dirty="0"/>
+          </a:p>
+        </p:txBody>
+      </p:sp>
+      <p:sp>
+        <p:nvSpPr>
+          <p:cNvPr id="20" name="Text 18"/>
+          <p:cNvSpPr/>
+          <p:nvPr/>
+        </p:nvSpPr>
+        <p:spPr>
+          <a:xfrm>
+            <a:off x="1234440" y="3063240"/>
+            <a:ext cx="6949440" cy="438912"/>
+          </a:xfrm>
+          <a:prstGeom prst="rect">
+            <a:avLst/>
+          </a:prstGeom>
+          <a:noFill/>
+          <a:ln/>
+        </p:spPr>
+        <p:txBody>
+          <a:bodyPr wrap="square" rtlCol="0" anchor="ctr"/>
+          <a:lstStyle/>
+          <a:p>
+            <a:pPr indent="0" marL="0">
+              <a:buNone/>
+            </a:pPr>
+            <a:r>
+              <a:rPr lang="en-US" sz="1300" dirty="0">
+                <a:solidFill>
+                  <a:srgbClr val="3D3A36"/>
+                </a:solidFill>
+                <a:latin typeface="Calibri" pitchFamily="34" charset="0"/>
+                <a:ea typeface="Calibri" pitchFamily="34" charset="-122"/>
+                <a:cs typeface="Calibri" pitchFamily="34" charset="-120"/>
+              </a:rPr>
+              <a:t>I know what to do in a lab emergency</a:t>
+            </a:r>
+            <a:endParaRPr lang="en-US" sz="1300" dirty="0"/>
+          </a:p>
+        </p:txBody>
+      </p:sp>
+      <p:sp>
+        <p:nvSpPr>
+          <p:cNvPr id="21" name="Shape 19"/>
+          <p:cNvSpPr/>
+          <p:nvPr/>
+        </p:nvSpPr>
+        <p:spPr>
+          <a:xfrm>
+            <a:off x="731520" y="3749040"/>
+            <a:ext cx="7680960" cy="594360"/>
+          </a:xfrm>
+          <a:prstGeom prst="rect">
+            <a:avLst/>
+          </a:prstGeom>
+          <a:solidFill>
+            <a:srgbClr val="E8F5F3"/>
+          </a:solidFill>
+          <a:ln/>
+          <a:effectLst>
+            <a:outerShdw sx="100000" sy="100000" kx="0" ky="0" algn="bl" rotWithShape="0" blurRad="50800" dist="25400" dir="8100000">
+              <a:srgbClr val="000000">
+                <a:alpha val="10000"/>
+              </a:srgbClr>
+            </a:outerShdw>
+          </a:effectLst>
+        </p:spPr>
+      </p:sp>
+      <p:sp>
+        <p:nvSpPr>
+          <p:cNvPr id="22" name="Text 20"/>
+          <p:cNvSpPr/>
+          <p:nvPr/>
+        </p:nvSpPr>
+        <p:spPr>
+          <a:xfrm>
+            <a:off x="914400" y="3749040"/>
+            <a:ext cx="7315200" cy="594360"/>
+          </a:xfrm>
+          <a:prstGeom prst="rect">
+            <a:avLst/>
+          </a:prstGeom>
+          <a:noFill/>
+          <a:ln/>
+        </p:spPr>
+        <p:txBody>
+          <a:bodyPr wrap="square" rtlCol="0" anchor="ctr"/>
+          <a:lstStyle/>
+          <a:p>
+            <a:pPr indent="0" marL="0">
+              <a:buNone/>
+            </a:pPr>
+            <a:r>
+              <a:rPr lang="en-US" sz="1200" b="1" dirty="0">
+                <a:solidFill>
+                  <a:srgbClr val="2A9D8F"/>
+                </a:solidFill>
+                <a:latin typeface="Calibri" pitchFamily="34" charset="0"/>
+                <a:ea typeface="Calibri" pitchFamily="34" charset="-122"/>
+                <a:cs typeface="Calibri" pitchFamily="34" charset="-120"/>
+              </a:rPr>
+              <a:t>Key Idea: </a:t>
+            </a:r>
+            <a:pPr indent="0" marL="0">
+              <a:buNone/>
+            </a:pPr>
+            <a:r>
+              <a:rPr lang="en-US" sz="1200" i="1" dirty="0">
+                <a:solidFill>
+                  <a:srgbClr val="3D3A36"/>
+                </a:solidFill>
+                <a:latin typeface="Calibri" pitchFamily="34" charset="0"/>
+                <a:ea typeface="Calibri" pitchFamily="34" charset="-122"/>
+                <a:cs typeface="Calibri" pitchFamily="34" charset="-120"/>
+              </a:rPr>
+              <a:t>Good scientists are safe scientists. Safety comes before experiments.</a:t>
+            </a:r>
+            <a:endParaRPr lang="en-US" sz="1200" dirty="0"/>
+          </a:p>
+        </p:txBody>
+      </p:sp>
+    </p:spTree>
+  </p:cSld>
+  <p:clrMapOvr>
+    <a:masterClrMapping/>
+  </p:clrMapOvr>
+</p:sld>
+</file>
+
+<file path=ppt/slides/slide9.xml><?xml version="1.0" encoding="utf-8"?>
+<p:sld xmlns:a="http://schemas.openxmlformats.org/drawingml/2006/main" xmlns:r="http://schemas.openxmlformats.org/officeDocument/2006/relationships" xmlns:p="http://schemas.openxmlformats.org/presentationml/2006/main">
+  <p:cSld name="Slide 9">
+    <p:spTree>
+      <p:nvGrpSpPr>
+        <p:cNvPr id="1" name=""/>
+        <p:cNvGrpSpPr/>
+        <p:nvPr/>
+      </p:nvGrpSpPr>
+      <p:grpSpPr>
+        <a:xfrm>
+          <a:off x="0" y="0"/>
+          <a:ext cx="0" cy="0"/>
+          <a:chOff x="0" y="0"/>
+          <a:chExt cx="0" cy="0"/>
+        </a:xfrm>
+      </p:grpSpPr>
+      <p:sp>
+        <p:nvSpPr>
+          <p:cNvPr id="2" name="Shape 0"/>
+          <p:cNvSpPr/>
+          <p:nvPr/>
+        </p:nvSpPr>
+        <p:spPr>
+          <a:xfrm>
+            <a:off x="0" y="0"/>
+            <a:ext cx="9144000" cy="5143500"/>
+          </a:xfrm>
+          <a:prstGeom prst="rect">
+            <a:avLst/>
+          </a:prstGeom>
+          <a:solidFill>
+            <a:srgbClr val="1B2A4A"/>
+          </a:solidFill>
+          <a:ln/>
+        </p:spPr>
+      </p:sp>
+      <p:sp>
+        <p:nvSpPr>
+          <p:cNvPr id="3" name="Shape 1"/>
+          <p:cNvSpPr/>
+          <p:nvPr/>
+        </p:nvSpPr>
+        <p:spPr>
+          <a:xfrm>
+            <a:off x="0" y="4777740"/>
+            <a:ext cx="9144000" cy="365760"/>
+          </a:xfrm>
+          <a:prstGeom prst="rect">
+            <a:avLst/>
+          </a:prstGeom>
+          <a:solidFill>
+            <a:srgbClr val="2A9D8F"/>
+          </a:solidFill>
+          <a:ln/>
+        </p:spPr>
+      </p:sp>
+      <p:sp>
+        <p:nvSpPr>
+          <p:cNvPr id="4" name="Shape 2"/>
+          <p:cNvSpPr/>
+          <p:nvPr/>
+        </p:nvSpPr>
+        <p:spPr>
+          <a:xfrm>
+            <a:off x="-914400" y="-914400"/>
+            <a:ext cx="3657600" cy="3657600"/>
+          </a:xfrm>
+          <a:prstGeom prst="ellipse">
+            <a:avLst/>
+          </a:prstGeom>
+          <a:solidFill>
+            <a:srgbClr val="2A9D8F">
+              <a:alpha val="10000"/>
+            </a:srgbClr>
+          </a:solidFill>
+          <a:ln/>
+        </p:spPr>
+      </p:sp>
+      <p:sp>
+        <p:nvSpPr>
+          <p:cNvPr id="5" name="Text 3"/>
+          <p:cNvSpPr/>
+          <p:nvPr/>
+        </p:nvSpPr>
+        <p:spPr>
+          <a:xfrm>
+            <a:off x="731520" y="1463040"/>
+            <a:ext cx="7680960" cy="822960"/>
+          </a:xfrm>
+          <a:prstGeom prst="rect">
+            <a:avLst/>
+          </a:prstGeom>
+          <a:noFill/>
+          <a:ln/>
+        </p:spPr>
+        <p:txBody>
+          <a:bodyPr wrap="square" rtlCol="0" anchor="ctr"/>
+          <a:lstStyle/>
+          <a:p>
+            <a:pPr algn="ctr" indent="0" marL="0">
+              <a:buNone/>
+            </a:pPr>
+            <a:r>
+              <a:rPr lang="en-US" sz="3400" b="1" dirty="0">
+                <a:solidFill>
+                  <a:srgbClr val="FFFFFF"/>
+                </a:solidFill>
+                <a:latin typeface="Georgia" pitchFamily="34" charset="0"/>
+                <a:ea typeface="Georgia" pitchFamily="34" charset="-122"/>
+                <a:cs typeface="Georgia" pitchFamily="34" charset="-120"/>
+              </a:rPr>
+              <a:t>Review &amp; Practise</a:t>
+            </a:r>
+            <a:endParaRPr lang="en-US" sz="3400" dirty="0"/>
+          </a:p>
+        </p:txBody>
+      </p:sp>
+      <p:sp>
+        <p:nvSpPr>
+          <p:cNvPr id="6" name="Text 4"/>
+          <p:cNvSpPr/>
+          <p:nvPr/>
+        </p:nvSpPr>
+        <p:spPr>
+          <a:xfrm>
+            <a:off x="731520" y="2468880"/>
+            <a:ext cx="7680960" cy="457200"/>
+          </a:xfrm>
+          <a:prstGeom prst="rect">
+            <a:avLst/>
+          </a:prstGeom>
+          <a:noFill/>
+          <a:ln/>
+        </p:spPr>
+        <p:txBody>
+          <a:bodyPr wrap="square" rtlCol="0" anchor="ctr"/>
+          <a:lstStyle/>
+          <a:p>
+            <a:pPr algn="ctr" indent="0" marL="0">
+              <a:buNone/>
+            </a:pPr>
+            <a:r>
+              <a:rPr lang="en-US" sz="1800" dirty="0">
+                <a:solidFill>
+                  <a:srgbClr val="2A9D8F"/>
+                </a:solidFill>
+                <a:latin typeface="Calibri" pitchFamily="34" charset="0"/>
+                <a:ea typeface="Calibri" pitchFamily="34" charset="-122"/>
+                <a:cs typeface="Calibri" pitchFamily="34" charset="-120"/>
+              </a:rPr>
               <a:t>mrzocchi.com</a:t>
             </a:r>
-            <a:endParaRPr lang="en-US" sz="1100" dirty="0"/>
+            <a:endParaRPr lang="en-US" sz="1800" dirty="0"/>
+          </a:p>
+        </p:txBody>
+      </p:sp>
+      <p:sp>
+        <p:nvSpPr>
+          <p:cNvPr id="7" name="Text 5"/>
+          <p:cNvSpPr/>
+          <p:nvPr/>
+        </p:nvSpPr>
+        <p:spPr>
+          <a:xfrm>
+            <a:off x="731520" y="3108960"/>
+            <a:ext cx="7680960" cy="457200"/>
+          </a:xfrm>
+          <a:prstGeom prst="rect">
+            <a:avLst/>
+          </a:prstGeom>
+          <a:noFill/>
+          <a:ln/>
+        </p:spPr>
+        <p:txBody>
+          <a:bodyPr wrap="square" rtlCol="0" anchor="ctr"/>
+          <a:lstStyle/>
+          <a:p>
+            <a:pPr algn="ctr" indent="0" marL="0">
+              <a:buNone/>
+            </a:pPr>
+            <a:r>
+              <a:rPr lang="en-US" sz="1300" dirty="0">
+                <a:solidFill>
+                  <a:srgbClr val="9B9690"/>
+                </a:solidFill>
+                <a:latin typeface="Calibri" pitchFamily="34" charset="0"/>
+                <a:ea typeface="Calibri" pitchFamily="34" charset="-122"/>
+                <a:cs typeface="Calibri" pitchFamily="34" charset="-120"/>
+              </a:rPr>
+              <a:t>Use the Self-Quiz, Review Games, and Practice Builder to test yourself.</a:t>
+            </a:r>
+            <a:endParaRPr lang="en-US" sz="1300" dirty="0"/>
           </a:p>
         </p:txBody>
       </p:sp>
